--- a/ANSELL_BRAZIL_LTDA.pptx
+++ b/ANSELL_BRAZIL_LTDA.pptx
@@ -162,10 +162,10 @@
                 <c:formatCode>General</c:formatCode>
                 <c:ptCount val="2"/>
                 <c:pt idx="0">
-                  <c:v>574</c:v>
+                  <c:v>2</c:v>
                 </c:pt>
                 <c:pt idx="1">
-                  <c:v>578</c:v>
+                  <c:v>535</c:v>
                 </c:pt>
               </c:numCache>
             </c:numRef>
@@ -211,10 +211,10 @@
                 <c:formatCode>General</c:formatCode>
                 <c:ptCount val="2"/>
                 <c:pt idx="0">
-                  <c:v>9</c:v>
+                  <c:v>0</c:v>
                 </c:pt>
                 <c:pt idx="1">
-                  <c:v>15</c:v>
+                  <c:v>10</c:v>
                 </c:pt>
               </c:numCache>
             </c:numRef>
@@ -3688,7 +3688,7 @@
         <p:spPr>
           <a:xfrm>
             <a:off x="1005840" y="2240279"/>
-            <a:ext cx="2377439" cy="891540"/>
+            <a:ext cx="2377440" cy="868680"/>
           </a:xfrm>
           <a:prstGeom prst="rect">
             <a:avLst/>
@@ -3709,7 +3709,7 @@
                 </a:solidFill>
                 <a:latin typeface="Calibri"/>
               </a:rPr>
-              <a:t>593</a:t>
+              <a:t>545</a:t>
             </a:r>
           </a:p>
         </p:txBody>
@@ -3722,8 +3722,8 @@
         </p:nvSpPr>
         <p:spPr>
           <a:xfrm>
-            <a:off x="1005840" y="3058668"/>
-            <a:ext cx="2377439" cy="548640"/>
+            <a:off x="1005840" y="3090672"/>
+            <a:ext cx="2377440" cy="411480"/>
           </a:xfrm>
           <a:prstGeom prst="rect">
             <a:avLst/>
@@ -3803,7 +3803,7 @@
         <p:spPr>
           <a:xfrm>
             <a:off x="3931920" y="2240279"/>
-            <a:ext cx="2377439" cy="891540"/>
+            <a:ext cx="2377440" cy="868680"/>
           </a:xfrm>
           <a:prstGeom prst="rect">
             <a:avLst/>
@@ -3824,7 +3824,7 @@
                 </a:solidFill>
                 <a:latin typeface="Calibri"/>
               </a:rPr>
-              <a:t>578</a:t>
+              <a:t>535</a:t>
             </a:r>
           </a:p>
         </p:txBody>
@@ -3837,8 +3837,8 @@
         </p:nvSpPr>
         <p:spPr>
           <a:xfrm>
-            <a:off x="3931920" y="3058668"/>
-            <a:ext cx="2377439" cy="548640"/>
+            <a:off x="3931920" y="3090672"/>
+            <a:ext cx="2377440" cy="411480"/>
           </a:xfrm>
           <a:prstGeom prst="rect">
             <a:avLst/>
@@ -3918,7 +3918,7 @@
         <p:spPr>
           <a:xfrm>
             <a:off x="6858000" y="2240279"/>
-            <a:ext cx="2377439" cy="891540"/>
+            <a:ext cx="2377440" cy="868680"/>
           </a:xfrm>
           <a:prstGeom prst="rect">
             <a:avLst/>
@@ -3939,7 +3939,7 @@
                 </a:solidFill>
                 <a:latin typeface="Calibri"/>
               </a:rPr>
-              <a:t>15</a:t>
+              <a:t>10</a:t>
             </a:r>
           </a:p>
         </p:txBody>
@@ -3952,8 +3952,8 @@
         </p:nvSpPr>
         <p:spPr>
           <a:xfrm>
-            <a:off x="6858000" y="3058668"/>
-            <a:ext cx="2377439" cy="548640"/>
+            <a:off x="6858000" y="3090672"/>
+            <a:ext cx="2377440" cy="411480"/>
           </a:xfrm>
           <a:prstGeom prst="rect">
             <a:avLst/>
@@ -4033,7 +4033,7 @@
         <p:spPr>
           <a:xfrm>
             <a:off x="9784080" y="2240279"/>
-            <a:ext cx="2377439" cy="891540"/>
+            <a:ext cx="2377440" cy="868680"/>
           </a:xfrm>
           <a:prstGeom prst="rect">
             <a:avLst/>
@@ -4054,7 +4054,7 @@
                 </a:solidFill>
                 <a:latin typeface="Calibri"/>
               </a:rPr>
-              <a:t>97.5%</a:t>
+              <a:t>98.2%</a:t>
             </a:r>
           </a:p>
         </p:txBody>
@@ -4067,8 +4067,8 @@
         </p:nvSpPr>
         <p:spPr>
           <a:xfrm>
-            <a:off x="9784080" y="3058668"/>
-            <a:ext cx="2377439" cy="548640"/>
+            <a:off x="9784080" y="3090672"/>
+            <a:ext cx="2377440" cy="411480"/>
           </a:xfrm>
           <a:prstGeom prst="rect">
             <a:avLst/>
@@ -4121,7 +4121,7 @@
               <a:tr h="475488">
                 <a:tc>
                   <a:txBody>
-                    <a:bodyPr wrap="square"/>
+                    <a:bodyPr/>
                     <a:lstStyle/>
                     <a:p>
                       <a:pPr algn="ctr"/>
@@ -4144,7 +4144,7 @@
                 </a:tc>
                 <a:tc>
                   <a:txBody>
-                    <a:bodyPr wrap="square"/>
+                    <a:bodyPr/>
                     <a:lstStyle/>
                     <a:p>
                       <a:pPr algn="ctr"/>
@@ -4167,7 +4167,7 @@
                 </a:tc>
                 <a:tc>
                   <a:txBody>
-                    <a:bodyPr wrap="square"/>
+                    <a:bodyPr/>
                     <a:lstStyle/>
                     <a:p>
                       <a:pPr algn="ctr"/>
@@ -4190,7 +4190,7 @@
                 </a:tc>
                 <a:tc>
                   <a:txBody>
-                    <a:bodyPr wrap="square"/>
+                    <a:bodyPr/>
                     <a:lstStyle/>
                     <a:p>
                       <a:pPr algn="ctr"/>
@@ -4215,18 +4215,18 @@
               <a:tr h="475488">
                 <a:tc>
                   <a:txBody>
-                    <a:bodyPr wrap="square"/>
-                    <a:lstStyle/>
-                    <a:p>
-                      <a:pPr algn="l"/>
-                      <a:r>
-                        <a:rPr sz="1000" b="0">
-                          <a:solidFill>
-                            <a:srgbClr val="1D1B43"/>
-                          </a:solidFill>
-                          <a:latin typeface="Calibri"/>
-                        </a:rPr>
-                        <a:t>Total Entregas</a:t>
+                    <a:bodyPr/>
+                    <a:lstStyle/>
+                    <a:p>
+                      <a:pPr algn="l"/>
+                      <a:r>
+                        <a:rPr sz="1000" b="0">
+                          <a:solidFill>
+                            <a:srgbClr val="1D1B43"/>
+                          </a:solidFill>
+                          <a:latin typeface="Calibri"/>
+                        </a:rPr>
+                        <a:t>Total</a:t>
                       </a:r>
                     </a:p>
                   </a:txBody>
@@ -4238,18 +4238,18 @@
                 </a:tc>
                 <a:tc>
                   <a:txBody>
-                    <a:bodyPr wrap="square"/>
-                    <a:lstStyle/>
-                    <a:p>
-                      <a:pPr algn="l"/>
-                      <a:r>
-                        <a:rPr sz="1000" b="0">
-                          <a:solidFill>
-                            <a:srgbClr val="1D1B43"/>
-                          </a:solidFill>
-                          <a:latin typeface="Calibri"/>
-                        </a:rPr>
-                        <a:t>583</a:t>
+                    <a:bodyPr/>
+                    <a:lstStyle/>
+                    <a:p>
+                      <a:pPr algn="l"/>
+                      <a:r>
+                        <a:rPr sz="1000" b="0">
+                          <a:solidFill>
+                            <a:srgbClr val="1D1B43"/>
+                          </a:solidFill>
+                          <a:latin typeface="Calibri"/>
+                        </a:rPr>
+                        <a:t>2</a:t>
                       </a:r>
                     </a:p>
                   </a:txBody>
@@ -4261,18 +4261,18 @@
                 </a:tc>
                 <a:tc>
                   <a:txBody>
-                    <a:bodyPr wrap="square"/>
-                    <a:lstStyle/>
-                    <a:p>
-                      <a:pPr algn="l"/>
-                      <a:r>
-                        <a:rPr sz="1000" b="0">
-                          <a:solidFill>
-                            <a:srgbClr val="1D1B43"/>
-                          </a:solidFill>
-                          <a:latin typeface="Calibri"/>
-                        </a:rPr>
-                        <a:t>593</a:t>
+                    <a:bodyPr/>
+                    <a:lstStyle/>
+                    <a:p>
+                      <a:pPr algn="l"/>
+                      <a:r>
+                        <a:rPr sz="1000" b="0">
+                          <a:solidFill>
+                            <a:srgbClr val="1D1B43"/>
+                          </a:solidFill>
+                          <a:latin typeface="Calibri"/>
+                        </a:rPr>
+                        <a:t>545</a:t>
                       </a:r>
                     </a:p>
                   </a:txBody>
@@ -4284,18 +4284,18 @@
                 </a:tc>
                 <a:tc>
                   <a:txBody>
-                    <a:bodyPr wrap="square"/>
-                    <a:lstStyle/>
-                    <a:p>
-                      <a:pPr algn="l"/>
-                      <a:r>
-                        <a:rPr sz="1000" b="0">
-                          <a:solidFill>
-                            <a:srgbClr val="1D1B43"/>
-                          </a:solidFill>
-                          <a:latin typeface="Calibri"/>
-                        </a:rPr>
-                        <a:t>+ 10</a:t>
+                    <a:bodyPr/>
+                    <a:lstStyle/>
+                    <a:p>
+                      <a:pPr algn="l"/>
+                      <a:r>
+                        <a:rPr sz="1000" b="0">
+                          <a:solidFill>
+                            <a:srgbClr val="1D1B43"/>
+                          </a:solidFill>
+                          <a:latin typeface="Calibri"/>
+                        </a:rPr>
+                        <a:t>+ 543</a:t>
                       </a:r>
                     </a:p>
                   </a:txBody>
@@ -4309,7 +4309,7 @@
               <a:tr h="475488">
                 <a:tc>
                   <a:txBody>
-                    <a:bodyPr wrap="square"/>
+                    <a:bodyPr/>
                     <a:lstStyle/>
                     <a:p>
                       <a:pPr algn="l"/>
@@ -4332,18 +4332,18 @@
                 </a:tc>
                 <a:tc>
                   <a:txBody>
-                    <a:bodyPr wrap="square"/>
-                    <a:lstStyle/>
-                    <a:p>
-                      <a:pPr algn="l"/>
-                      <a:r>
-                        <a:rPr sz="1000" b="0">
-                          <a:solidFill>
-                            <a:srgbClr val="1D1B43"/>
-                          </a:solidFill>
-                          <a:latin typeface="Calibri"/>
-                        </a:rPr>
-                        <a:t>574</a:t>
+                    <a:bodyPr/>
+                    <a:lstStyle/>
+                    <a:p>
+                      <a:pPr algn="l"/>
+                      <a:r>
+                        <a:rPr sz="1000" b="0">
+                          <a:solidFill>
+                            <a:srgbClr val="1D1B43"/>
+                          </a:solidFill>
+                          <a:latin typeface="Calibri"/>
+                        </a:rPr>
+                        <a:t>2</a:t>
                       </a:r>
                     </a:p>
                   </a:txBody>
@@ -4355,18 +4355,18 @@
                 </a:tc>
                 <a:tc>
                   <a:txBody>
-                    <a:bodyPr wrap="square"/>
-                    <a:lstStyle/>
-                    <a:p>
-                      <a:pPr algn="l"/>
-                      <a:r>
-                        <a:rPr sz="1000" b="0">
-                          <a:solidFill>
-                            <a:srgbClr val="1D1B43"/>
-                          </a:solidFill>
-                          <a:latin typeface="Calibri"/>
-                        </a:rPr>
-                        <a:t>578</a:t>
+                    <a:bodyPr/>
+                    <a:lstStyle/>
+                    <a:p>
+                      <a:pPr algn="l"/>
+                      <a:r>
+                        <a:rPr sz="1000" b="0">
+                          <a:solidFill>
+                            <a:srgbClr val="1D1B43"/>
+                          </a:solidFill>
+                          <a:latin typeface="Calibri"/>
+                        </a:rPr>
+                        <a:t>535</a:t>
                       </a:r>
                     </a:p>
                   </a:txBody>
@@ -4378,18 +4378,18 @@
                 </a:tc>
                 <a:tc>
                   <a:txBody>
-                    <a:bodyPr wrap="square"/>
-                    <a:lstStyle/>
-                    <a:p>
-                      <a:pPr algn="l"/>
-                      <a:r>
-                        <a:rPr sz="1000" b="0">
-                          <a:solidFill>
-                            <a:srgbClr val="1D1B43"/>
-                          </a:solidFill>
-                          <a:latin typeface="Calibri"/>
-                        </a:rPr>
-                        <a:t>+ 4</a:t>
+                    <a:bodyPr/>
+                    <a:lstStyle/>
+                    <a:p>
+                      <a:pPr algn="l"/>
+                      <a:r>
+                        <a:rPr sz="1000" b="0">
+                          <a:solidFill>
+                            <a:srgbClr val="1D1B43"/>
+                          </a:solidFill>
+                          <a:latin typeface="Calibri"/>
+                        </a:rPr>
+                        <a:t>+ 533</a:t>
                       </a:r>
                     </a:p>
                   </a:txBody>
@@ -4403,18 +4403,18 @@
               <a:tr h="475488">
                 <a:tc>
                   <a:txBody>
-                    <a:bodyPr wrap="square"/>
-                    <a:lstStyle/>
-                    <a:p>
-                      <a:pPr algn="l"/>
-                      <a:r>
-                        <a:rPr sz="1000" b="0">
-                          <a:solidFill>
-                            <a:srgbClr val="1D1B43"/>
-                          </a:solidFill>
-                          <a:latin typeface="Calibri"/>
-                        </a:rPr>
-                        <a:t>Fora do Prazo</a:t>
+                    <a:bodyPr/>
+                    <a:lstStyle/>
+                    <a:p>
+                      <a:pPr algn="l"/>
+                      <a:r>
+                        <a:rPr sz="1000" b="0">
+                          <a:solidFill>
+                            <a:srgbClr val="1D1B43"/>
+                          </a:solidFill>
+                          <a:latin typeface="Calibri"/>
+                        </a:rPr>
+                        <a:t>Fora Prazo</a:t>
                       </a:r>
                     </a:p>
                   </a:txBody>
@@ -4426,18 +4426,18 @@
                 </a:tc>
                 <a:tc>
                   <a:txBody>
-                    <a:bodyPr wrap="square"/>
-                    <a:lstStyle/>
-                    <a:p>
-                      <a:pPr algn="l"/>
-                      <a:r>
-                        <a:rPr sz="1000" b="0">
-                          <a:solidFill>
-                            <a:srgbClr val="1D1B43"/>
-                          </a:solidFill>
-                          <a:latin typeface="Calibri"/>
-                        </a:rPr>
-                        <a:t>9</a:t>
+                    <a:bodyPr/>
+                    <a:lstStyle/>
+                    <a:p>
+                      <a:pPr algn="l"/>
+                      <a:r>
+                        <a:rPr sz="1000" b="0">
+                          <a:solidFill>
+                            <a:srgbClr val="1D1B43"/>
+                          </a:solidFill>
+                          <a:latin typeface="Calibri"/>
+                        </a:rPr>
+                        <a:t>0</a:t>
                       </a:r>
                     </a:p>
                   </a:txBody>
@@ -4449,18 +4449,18 @@
                 </a:tc>
                 <a:tc>
                   <a:txBody>
-                    <a:bodyPr wrap="square"/>
-                    <a:lstStyle/>
-                    <a:p>
-                      <a:pPr algn="l"/>
-                      <a:r>
-                        <a:rPr sz="1000" b="0">
-                          <a:solidFill>
-                            <a:srgbClr val="1D1B43"/>
-                          </a:solidFill>
-                          <a:latin typeface="Calibri"/>
-                        </a:rPr>
-                        <a:t>15</a:t>
+                    <a:bodyPr/>
+                    <a:lstStyle/>
+                    <a:p>
+                      <a:pPr algn="l"/>
+                      <a:r>
+                        <a:rPr sz="1000" b="0">
+                          <a:solidFill>
+                            <a:srgbClr val="1D1B43"/>
+                          </a:solidFill>
+                          <a:latin typeface="Calibri"/>
+                        </a:rPr>
+                        <a:t>10</a:t>
                       </a:r>
                     </a:p>
                   </a:txBody>
@@ -4472,18 +4472,18 @@
                 </a:tc>
                 <a:tc>
                   <a:txBody>
-                    <a:bodyPr wrap="square"/>
-                    <a:lstStyle/>
-                    <a:p>
-                      <a:pPr algn="l"/>
-                      <a:r>
-                        <a:rPr sz="1000" b="0">
-                          <a:solidFill>
-                            <a:srgbClr val="1D1B43"/>
-                          </a:solidFill>
-                          <a:latin typeface="Calibri"/>
-                        </a:rPr>
-                        <a:t>+ 6</a:t>
+                    <a:bodyPr/>
+                    <a:lstStyle/>
+                    <a:p>
+                      <a:pPr algn="l"/>
+                      <a:r>
+                        <a:rPr sz="1000" b="0">
+                          <a:solidFill>
+                            <a:srgbClr val="1D1B43"/>
+                          </a:solidFill>
+                          <a:latin typeface="Calibri"/>
+                        </a:rPr>
+                        <a:t>+ 10</a:t>
                       </a:r>
                     </a:p>
                   </a:txBody>
@@ -4497,7 +4497,7 @@
               <a:tr h="475488">
                 <a:tc>
                   <a:txBody>
-                    <a:bodyPr wrap="square"/>
+                    <a:bodyPr/>
                     <a:lstStyle/>
                     <a:p>
                       <a:pPr algn="l"/>
@@ -4520,18 +4520,18 @@
                 </a:tc>
                 <a:tc>
                   <a:txBody>
-                    <a:bodyPr wrap="square"/>
-                    <a:lstStyle/>
-                    <a:p>
-                      <a:pPr algn="l"/>
-                      <a:r>
-                        <a:rPr sz="1000" b="0">
-                          <a:solidFill>
-                            <a:srgbClr val="1D1B43"/>
-                          </a:solidFill>
-                          <a:latin typeface="Calibri"/>
-                        </a:rPr>
-                        <a:t>98.5%</a:t>
+                    <a:bodyPr/>
+                    <a:lstStyle/>
+                    <a:p>
+                      <a:pPr algn="l"/>
+                      <a:r>
+                        <a:rPr sz="1000" b="0">
+                          <a:solidFill>
+                            <a:srgbClr val="1D1B43"/>
+                          </a:solidFill>
+                          <a:latin typeface="Calibri"/>
+                        </a:rPr>
+                        <a:t>100.0%</a:t>
                       </a:r>
                     </a:p>
                   </a:txBody>
@@ -4543,18 +4543,18 @@
                 </a:tc>
                 <a:tc>
                   <a:txBody>
-                    <a:bodyPr wrap="square"/>
-                    <a:lstStyle/>
-                    <a:p>
-                      <a:pPr algn="l"/>
-                      <a:r>
-                        <a:rPr sz="1000" b="0">
-                          <a:solidFill>
-                            <a:srgbClr val="1D1B43"/>
-                          </a:solidFill>
-                          <a:latin typeface="Calibri"/>
-                        </a:rPr>
-                        <a:t>97.5%</a:t>
+                    <a:bodyPr/>
+                    <a:lstStyle/>
+                    <a:p>
+                      <a:pPr algn="l"/>
+                      <a:r>
+                        <a:rPr sz="1000" b="0">
+                          <a:solidFill>
+                            <a:srgbClr val="1D1B43"/>
+                          </a:solidFill>
+                          <a:latin typeface="Calibri"/>
+                        </a:rPr>
+                        <a:t>98.2%</a:t>
                       </a:r>
                     </a:p>
                   </a:txBody>
@@ -4566,18 +4566,18 @@
                 </a:tc>
                 <a:tc>
                   <a:txBody>
-                    <a:bodyPr wrap="square"/>
-                    <a:lstStyle/>
-                    <a:p>
-                      <a:pPr algn="l"/>
-                      <a:r>
-                        <a:rPr sz="1000" b="0">
-                          <a:solidFill>
-                            <a:srgbClr val="1D1B43"/>
-                          </a:solidFill>
-                          <a:latin typeface="Calibri"/>
-                        </a:rPr>
-                        <a:t>- 1.0pp</a:t>
+                    <a:bodyPr/>
+                    <a:lstStyle/>
+                    <a:p>
+                      <a:pPr algn="l"/>
+                      <a:r>
+                        <a:rPr sz="1000" b="0">
+                          <a:solidFill>
+                            <a:srgbClr val="1D1B43"/>
+                          </a:solidFill>
+                          <a:latin typeface="Calibri"/>
+                        </a:rPr>
+                        <a:t>- 1.8pp</a:t>
                       </a:r>
                     </a:p>
                   </a:txBody>
@@ -4766,7 +4766,7 @@
               <a:tr h="438912">
                 <a:tc>
                   <a:txBody>
-                    <a:bodyPr wrap="square"/>
+                    <a:bodyPr/>
                     <a:lstStyle/>
                     <a:p>
                       <a:pPr algn="ctr"/>
@@ -4789,7 +4789,7 @@
                 </a:tc>
                 <a:tc>
                   <a:txBody>
-                    <a:bodyPr wrap="square"/>
+                    <a:bodyPr/>
                     <a:lstStyle/>
                     <a:p>
                       <a:pPr algn="ctr"/>
@@ -4812,7 +4812,7 @@
                 </a:tc>
                 <a:tc>
                   <a:txBody>
-                    <a:bodyPr wrap="square"/>
+                    <a:bodyPr/>
                     <a:lstStyle/>
                     <a:p>
                       <a:pPr algn="ctr"/>
@@ -4835,7 +4835,7 @@
                 </a:tc>
                 <a:tc>
                   <a:txBody>
-                    <a:bodyPr wrap="square"/>
+                    <a:bodyPr/>
                     <a:lstStyle/>
                     <a:p>
                       <a:pPr algn="ctr"/>
@@ -4858,7 +4858,7 @@
                 </a:tc>
                 <a:tc>
                   <a:txBody>
-                    <a:bodyPr wrap="square"/>
+                    <a:bodyPr/>
                     <a:lstStyle/>
                     <a:p>
                       <a:pPr algn="ctr"/>
@@ -4883,7 +4883,7 @@
               <a:tr h="438912">
                 <a:tc>
                   <a:txBody>
-                    <a:bodyPr wrap="square"/>
+                    <a:bodyPr/>
                     <a:lstStyle/>
                     <a:p>
                       <a:pPr algn="l"/>
@@ -4906,18 +4906,18 @@
                 </a:tc>
                 <a:tc>
                   <a:txBody>
-                    <a:bodyPr wrap="square"/>
-                    <a:lstStyle/>
-                    <a:p>
-                      <a:pPr algn="l"/>
-                      <a:r>
-                        <a:rPr sz="1000" b="0">
-                          <a:solidFill>
-                            <a:srgbClr val="1D1B43"/>
-                          </a:solidFill>
-                          <a:latin typeface="Calibri"/>
-                        </a:rPr>
-                        <a:t>583</a:t>
+                    <a:bodyPr/>
+                    <a:lstStyle/>
+                    <a:p>
+                      <a:pPr algn="l"/>
+                      <a:r>
+                        <a:rPr sz="1000" b="0">
+                          <a:solidFill>
+                            <a:srgbClr val="1D1B43"/>
+                          </a:solidFill>
+                          <a:latin typeface="Calibri"/>
+                        </a:rPr>
+                        <a:t>2</a:t>
                       </a:r>
                     </a:p>
                   </a:txBody>
@@ -4929,18 +4929,18 @@
                 </a:tc>
                 <a:tc>
                   <a:txBody>
-                    <a:bodyPr wrap="square"/>
-                    <a:lstStyle/>
-                    <a:p>
-                      <a:pPr algn="l"/>
-                      <a:r>
-                        <a:rPr sz="1000" b="0">
-                          <a:solidFill>
-                            <a:srgbClr val="1D1B43"/>
-                          </a:solidFill>
-                          <a:latin typeface="Calibri"/>
-                        </a:rPr>
-                        <a:t>574</a:t>
+                    <a:bodyPr/>
+                    <a:lstStyle/>
+                    <a:p>
+                      <a:pPr algn="l"/>
+                      <a:r>
+                        <a:rPr sz="1000" b="0">
+                          <a:solidFill>
+                            <a:srgbClr val="1D1B43"/>
+                          </a:solidFill>
+                          <a:latin typeface="Calibri"/>
+                        </a:rPr>
+                        <a:t>2</a:t>
                       </a:r>
                     </a:p>
                   </a:txBody>
@@ -4952,18 +4952,18 @@
                 </a:tc>
                 <a:tc>
                   <a:txBody>
-                    <a:bodyPr wrap="square"/>
-                    <a:lstStyle/>
-                    <a:p>
-                      <a:pPr algn="l"/>
-                      <a:r>
-                        <a:rPr sz="1000" b="0">
-                          <a:solidFill>
-                            <a:srgbClr val="1D1B43"/>
-                          </a:solidFill>
-                          <a:latin typeface="Calibri"/>
-                        </a:rPr>
-                        <a:t>9</a:t>
+                    <a:bodyPr/>
+                    <a:lstStyle/>
+                    <a:p>
+                      <a:pPr algn="l"/>
+                      <a:r>
+                        <a:rPr sz="1000" b="0">
+                          <a:solidFill>
+                            <a:srgbClr val="1D1B43"/>
+                          </a:solidFill>
+                          <a:latin typeface="Calibri"/>
+                        </a:rPr>
+                        <a:t>0</a:t>
                       </a:r>
                     </a:p>
                   </a:txBody>
@@ -4975,18 +4975,18 @@
                 </a:tc>
                 <a:tc>
                   <a:txBody>
-                    <a:bodyPr wrap="square"/>
-                    <a:lstStyle/>
-                    <a:p>
-                      <a:pPr algn="l"/>
-                      <a:r>
-                        <a:rPr sz="1000" b="0">
-                          <a:solidFill>
-                            <a:srgbClr val="1D1B43"/>
-                          </a:solidFill>
-                          <a:latin typeface="Calibri"/>
-                        </a:rPr>
-                        <a:t>98.5%</a:t>
+                    <a:bodyPr/>
+                    <a:lstStyle/>
+                    <a:p>
+                      <a:pPr algn="l"/>
+                      <a:r>
+                        <a:rPr sz="1000" b="0">
+                          <a:solidFill>
+                            <a:srgbClr val="1D1B43"/>
+                          </a:solidFill>
+                          <a:latin typeface="Calibri"/>
+                        </a:rPr>
+                        <a:t>100.0%</a:t>
                       </a:r>
                     </a:p>
                   </a:txBody>
@@ -5000,7 +5000,7 @@
               <a:tr h="438912">
                 <a:tc>
                   <a:txBody>
-                    <a:bodyPr wrap="square"/>
+                    <a:bodyPr/>
                     <a:lstStyle/>
                     <a:p>
                       <a:pPr algn="l"/>
@@ -5023,18 +5023,18 @@
                 </a:tc>
                 <a:tc>
                   <a:txBody>
-                    <a:bodyPr wrap="square"/>
-                    <a:lstStyle/>
-                    <a:p>
-                      <a:pPr algn="l"/>
-                      <a:r>
-                        <a:rPr sz="1000" b="0">
-                          <a:solidFill>
-                            <a:srgbClr val="1D1B43"/>
-                          </a:solidFill>
-                          <a:latin typeface="Calibri"/>
-                        </a:rPr>
-                        <a:t>593</a:t>
+                    <a:bodyPr/>
+                    <a:lstStyle/>
+                    <a:p>
+                      <a:pPr algn="l"/>
+                      <a:r>
+                        <a:rPr sz="1000" b="0">
+                          <a:solidFill>
+                            <a:srgbClr val="1D1B43"/>
+                          </a:solidFill>
+                          <a:latin typeface="Calibri"/>
+                        </a:rPr>
+                        <a:t>545</a:t>
                       </a:r>
                     </a:p>
                   </a:txBody>
@@ -5046,18 +5046,18 @@
                 </a:tc>
                 <a:tc>
                   <a:txBody>
-                    <a:bodyPr wrap="square"/>
-                    <a:lstStyle/>
-                    <a:p>
-                      <a:pPr algn="l"/>
-                      <a:r>
-                        <a:rPr sz="1000" b="0">
-                          <a:solidFill>
-                            <a:srgbClr val="1D1B43"/>
-                          </a:solidFill>
-                          <a:latin typeface="Calibri"/>
-                        </a:rPr>
-                        <a:t>578</a:t>
+                    <a:bodyPr/>
+                    <a:lstStyle/>
+                    <a:p>
+                      <a:pPr algn="l"/>
+                      <a:r>
+                        <a:rPr sz="1000" b="0">
+                          <a:solidFill>
+                            <a:srgbClr val="1D1B43"/>
+                          </a:solidFill>
+                          <a:latin typeface="Calibri"/>
+                        </a:rPr>
+                        <a:t>535</a:t>
                       </a:r>
                     </a:p>
                   </a:txBody>
@@ -5069,18 +5069,18 @@
                 </a:tc>
                 <a:tc>
                   <a:txBody>
-                    <a:bodyPr wrap="square"/>
-                    <a:lstStyle/>
-                    <a:p>
-                      <a:pPr algn="l"/>
-                      <a:r>
-                        <a:rPr sz="1000" b="0">
-                          <a:solidFill>
-                            <a:srgbClr val="1D1B43"/>
-                          </a:solidFill>
-                          <a:latin typeface="Calibri"/>
-                        </a:rPr>
-                        <a:t>15</a:t>
+                    <a:bodyPr/>
+                    <a:lstStyle/>
+                    <a:p>
+                      <a:pPr algn="l"/>
+                      <a:r>
+                        <a:rPr sz="1000" b="0">
+                          <a:solidFill>
+                            <a:srgbClr val="1D1B43"/>
+                          </a:solidFill>
+                          <a:latin typeface="Calibri"/>
+                        </a:rPr>
+                        <a:t>10</a:t>
                       </a:r>
                     </a:p>
                   </a:txBody>
@@ -5092,18 +5092,18 @@
                 </a:tc>
                 <a:tc>
                   <a:txBody>
-                    <a:bodyPr wrap="square"/>
-                    <a:lstStyle/>
-                    <a:p>
-                      <a:pPr algn="l"/>
-                      <a:r>
-                        <a:rPr sz="1000" b="0">
-                          <a:solidFill>
-                            <a:srgbClr val="1D1B43"/>
-                          </a:solidFill>
-                          <a:latin typeface="Calibri"/>
-                        </a:rPr>
-                        <a:t>97.5%</a:t>
+                    <a:bodyPr/>
+                    <a:lstStyle/>
+                    <a:p>
+                      <a:pPr algn="l"/>
+                      <a:r>
+                        <a:rPr sz="1000" b="0">
+                          <a:solidFill>
+                            <a:srgbClr val="1D1B43"/>
+                          </a:solidFill>
+                          <a:latin typeface="Calibri"/>
+                        </a:rPr>
+                        <a:t>98.2%</a:t>
                       </a:r>
                     </a:p>
                   </a:txBody>
@@ -5191,7 +5191,7 @@
                 </a:solidFill>
                 <a:latin typeface="Calibri"/>
               </a:rPr>
-              <a:t>PERFORMANCE: 97.5% - EXCELENTE</a:t>
+              <a:t>PERFORMANCE: 98.2% - EXCELENTE</a:t>
             </a:r>
           </a:p>
         </p:txBody>
@@ -5276,7 +5276,7 @@
                 </a:solidFill>
                 <a:latin typeface="Calibri"/>
               </a:rPr>
-              <a:t>OCORRENCIAS FORA DO PRAZO (15)</a:t>
+              <a:t>OCORRENCIAS FORA DO PRAZO (10)</a:t>
             </a:r>
           </a:p>
         </p:txBody>
@@ -5334,7 +5334,7 @@
         </p:nvGraphicFramePr>
         <p:xfrm>
           <a:off x="457200" y="1828800"/>
-          <a:ext cx="11429999" cy="4572000"/>
+          <a:ext cx="11429999" cy="4224528"/>
         </p:xfrm>
         <a:graphic>
           <a:graphicData uri="http://schemas.openxmlformats.org/drawingml/2006/table">
@@ -5349,10 +5349,10 @@
                 <a:gridCol w="1554480"/>
                 <a:gridCol w="2743200"/>
               </a:tblGrid>
-              <a:tr h="285750">
-                <a:tc>
-                  <a:txBody>
-                    <a:bodyPr wrap="square"/>
+              <a:tr h="384048">
+                <a:tc>
+                  <a:txBody>
+                    <a:bodyPr/>
                     <a:lstStyle/>
                     <a:p>
                       <a:pPr algn="ctr"/>
@@ -5375,7 +5375,7 @@
                 </a:tc>
                 <a:tc>
                   <a:txBody>
-                    <a:bodyPr wrap="square"/>
+                    <a:bodyPr/>
                     <a:lstStyle/>
                     <a:p>
                       <a:pPr algn="ctr"/>
@@ -5398,7 +5398,7 @@
                 </a:tc>
                 <a:tc>
                   <a:txBody>
-                    <a:bodyPr wrap="square"/>
+                    <a:bodyPr/>
                     <a:lstStyle/>
                     <a:p>
                       <a:pPr algn="ctr"/>
@@ -5421,7 +5421,7 @@
                 </a:tc>
                 <a:tc>
                   <a:txBody>
-                    <a:bodyPr wrap="square"/>
+                    <a:bodyPr/>
                     <a:lstStyle/>
                     <a:p>
                       <a:pPr algn="ctr"/>
@@ -5444,7 +5444,7 @@
                 </a:tc>
                 <a:tc>
                   <a:txBody>
-                    <a:bodyPr wrap="square"/>
+                    <a:bodyPr/>
                     <a:lstStyle/>
                     <a:p>
                       <a:pPr algn="ctr"/>
@@ -5466,10 +5466,10 @@
                   </a:tcPr>
                 </a:tc>
               </a:tr>
-              <a:tr h="285750">
-                <a:tc>
-                  <a:txBody>
-                    <a:bodyPr wrap="square"/>
+              <a:tr h="384048">
+                <a:tc>
+                  <a:txBody>
+                    <a:bodyPr/>
                     <a:lstStyle/>
                     <a:p>
                       <a:pPr algn="l"/>
@@ -5492,7 +5492,7 @@
                 </a:tc>
                 <a:tc>
                   <a:txBody>
-                    <a:bodyPr wrap="square"/>
+                    <a:bodyPr/>
                     <a:lstStyle/>
                     <a:p>
                       <a:pPr algn="l"/>
@@ -5515,7 +5515,7 @@
                 </a:tc>
                 <a:tc>
                   <a:txBody>
-                    <a:bodyPr wrap="square"/>
+                    <a:bodyPr/>
                     <a:lstStyle/>
                     <a:p>
                       <a:pPr algn="l"/>
@@ -5538,7 +5538,7 @@
                 </a:tc>
                 <a:tc>
                   <a:txBody>
-                    <a:bodyPr wrap="square"/>
+                    <a:bodyPr/>
                     <a:lstStyle/>
                     <a:p>
                       <a:pPr algn="l"/>
@@ -5561,7 +5561,7 @@
                 </a:tc>
                 <a:tc>
                   <a:txBody>
-                    <a:bodyPr wrap="square"/>
+                    <a:bodyPr/>
                     <a:lstStyle/>
                     <a:p>
                       <a:pPr algn="l"/>
@@ -5583,10 +5583,10 @@
                   </a:tcPr>
                 </a:tc>
               </a:tr>
-              <a:tr h="285750">
-                <a:tc>
-                  <a:txBody>
-                    <a:bodyPr wrap="square"/>
+              <a:tr h="384048">
+                <a:tc>
+                  <a:txBody>
+                    <a:bodyPr/>
                     <a:lstStyle/>
                     <a:p>
                       <a:pPr algn="l"/>
@@ -5609,7 +5609,7 @@
                 </a:tc>
                 <a:tc>
                   <a:txBody>
-                    <a:bodyPr wrap="square"/>
+                    <a:bodyPr/>
                     <a:lstStyle/>
                     <a:p>
                       <a:pPr algn="l"/>
@@ -5632,7 +5632,7 @@
                 </a:tc>
                 <a:tc>
                   <a:txBody>
-                    <a:bodyPr wrap="square"/>
+                    <a:bodyPr/>
                     <a:lstStyle/>
                     <a:p>
                       <a:pPr algn="l"/>
@@ -5655,7 +5655,7 @@
                 </a:tc>
                 <a:tc>
                   <a:txBody>
-                    <a:bodyPr wrap="square"/>
+                    <a:bodyPr/>
                     <a:lstStyle/>
                     <a:p>
                       <a:pPr algn="l"/>
@@ -5678,7 +5678,7 @@
                 </a:tc>
                 <a:tc>
                   <a:txBody>
-                    <a:bodyPr wrap="square"/>
+                    <a:bodyPr/>
                     <a:lstStyle/>
                     <a:p>
                       <a:pPr algn="l"/>
@@ -5700,10 +5700,10 @@
                   </a:tcPr>
                 </a:tc>
               </a:tr>
-              <a:tr h="285750">
-                <a:tc>
-                  <a:txBody>
-                    <a:bodyPr wrap="square"/>
+              <a:tr h="384048">
+                <a:tc>
+                  <a:txBody>
+                    <a:bodyPr/>
                     <a:lstStyle/>
                     <a:p>
                       <a:pPr algn="l"/>
@@ -5726,7 +5726,7 @@
                 </a:tc>
                 <a:tc>
                   <a:txBody>
-                    <a:bodyPr wrap="square"/>
+                    <a:bodyPr/>
                     <a:lstStyle/>
                     <a:p>
                       <a:pPr algn="l"/>
@@ -5749,7 +5749,7 @@
                 </a:tc>
                 <a:tc>
                   <a:txBody>
-                    <a:bodyPr wrap="square"/>
+                    <a:bodyPr/>
                     <a:lstStyle/>
                     <a:p>
                       <a:pPr algn="l"/>
@@ -5772,7 +5772,7 @@
                 </a:tc>
                 <a:tc>
                   <a:txBody>
-                    <a:bodyPr wrap="square"/>
+                    <a:bodyPr/>
                     <a:lstStyle/>
                     <a:p>
                       <a:pPr algn="l"/>
@@ -5795,7 +5795,7 @@
                 </a:tc>
                 <a:tc>
                   <a:txBody>
-                    <a:bodyPr wrap="square"/>
+                    <a:bodyPr/>
                     <a:lstStyle/>
                     <a:p>
                       <a:pPr algn="l"/>
@@ -5817,10 +5817,10 @@
                   </a:tcPr>
                 </a:tc>
               </a:tr>
-              <a:tr h="285750">
-                <a:tc>
-                  <a:txBody>
-                    <a:bodyPr wrap="square"/>
+              <a:tr h="384048">
+                <a:tc>
+                  <a:txBody>
+                    <a:bodyPr/>
                     <a:lstStyle/>
                     <a:p>
                       <a:pPr algn="l"/>
@@ -5843,7 +5843,7 @@
                 </a:tc>
                 <a:tc>
                   <a:txBody>
-                    <a:bodyPr wrap="square"/>
+                    <a:bodyPr/>
                     <a:lstStyle/>
                     <a:p>
                       <a:pPr algn="l"/>
@@ -5866,7 +5866,7 @@
                 </a:tc>
                 <a:tc>
                   <a:txBody>
-                    <a:bodyPr wrap="square"/>
+                    <a:bodyPr/>
                     <a:lstStyle/>
                     <a:p>
                       <a:pPr algn="l"/>
@@ -5889,7 +5889,7 @@
                 </a:tc>
                 <a:tc>
                   <a:txBody>
-                    <a:bodyPr wrap="square"/>
+                    <a:bodyPr/>
                     <a:lstStyle/>
                     <a:p>
                       <a:pPr algn="l"/>
@@ -5912,7 +5912,7 @@
                 </a:tc>
                 <a:tc>
                   <a:txBody>
-                    <a:bodyPr wrap="square"/>
+                    <a:bodyPr/>
                     <a:lstStyle/>
                     <a:p>
                       <a:pPr algn="l"/>
@@ -5934,10 +5934,10 @@
                   </a:tcPr>
                 </a:tc>
               </a:tr>
-              <a:tr h="285750">
-                <a:tc>
-                  <a:txBody>
-                    <a:bodyPr wrap="square"/>
+              <a:tr h="384048">
+                <a:tc>
+                  <a:txBody>
+                    <a:bodyPr/>
                     <a:lstStyle/>
                     <a:p>
                       <a:pPr algn="l"/>
@@ -5960,7 +5960,7 @@
                 </a:tc>
                 <a:tc>
                   <a:txBody>
-                    <a:bodyPr wrap="square"/>
+                    <a:bodyPr/>
                     <a:lstStyle/>
                     <a:p>
                       <a:pPr algn="l"/>
@@ -5983,7 +5983,7 @@
                 </a:tc>
                 <a:tc>
                   <a:txBody>
-                    <a:bodyPr wrap="square"/>
+                    <a:bodyPr/>
                     <a:lstStyle/>
                     <a:p>
                       <a:pPr algn="l"/>
@@ -6006,7 +6006,7 @@
                 </a:tc>
                 <a:tc>
                   <a:txBody>
-                    <a:bodyPr wrap="square"/>
+                    <a:bodyPr/>
                     <a:lstStyle/>
                     <a:p>
                       <a:pPr algn="l"/>
@@ -6029,7 +6029,7 @@
                 </a:tc>
                 <a:tc>
                   <a:txBody>
-                    <a:bodyPr wrap="square"/>
+                    <a:bodyPr/>
                     <a:lstStyle/>
                     <a:p>
                       <a:pPr algn="l"/>
@@ -6051,21 +6051,21 @@
                   </a:tcPr>
                 </a:tc>
               </a:tr>
-              <a:tr h="285750">
-                <a:tc>
-                  <a:txBody>
-                    <a:bodyPr wrap="square"/>
-                    <a:lstStyle/>
-                    <a:p>
-                      <a:pPr algn="l"/>
-                      <a:r>
-                        <a:rPr sz="1000" b="0">
-                          <a:solidFill>
-                            <a:srgbClr val="1D1B43"/>
-                          </a:solidFill>
-                          <a:latin typeface="Calibri"/>
-                        </a:rPr>
-                        <a:t>278070</a:t>
+              <a:tr h="384048">
+                <a:tc>
+                  <a:txBody>
+                    <a:bodyPr/>
+                    <a:lstStyle/>
+                    <a:p>
+                      <a:pPr algn="l"/>
+                      <a:r>
+                        <a:rPr sz="1000" b="0">
+                          <a:solidFill>
+                            <a:srgbClr val="1D1B43"/>
+                          </a:solidFill>
+                          <a:latin typeface="Calibri"/>
+                        </a:rPr>
+                        <a:t>278728</a:t>
                       </a:r>
                     </a:p>
                   </a:txBody>
@@ -6077,18 +6077,18 @@
                 </a:tc>
                 <a:tc>
                   <a:txBody>
-                    <a:bodyPr wrap="square"/>
-                    <a:lstStyle/>
-                    <a:p>
-                      <a:pPr algn="l"/>
-                      <a:r>
-                        <a:rPr sz="1000" b="0">
-                          <a:solidFill>
-                            <a:srgbClr val="1D1B43"/>
-                          </a:solidFill>
-                          <a:latin typeface="Calibri"/>
-                        </a:rPr>
-                        <a:t>CORSUL COMERCIO E RE - CAXIAS DO SUL / RS</a:t>
+                    <a:bodyPr/>
+                    <a:lstStyle/>
+                    <a:p>
+                      <a:pPr algn="l"/>
+                      <a:r>
+                        <a:rPr sz="1000" b="0">
+                          <a:solidFill>
+                            <a:srgbClr val="1D1B43"/>
+                          </a:solidFill>
+                          <a:latin typeface="Calibri"/>
+                        </a:rPr>
+                        <a:t>EXATA CARGO - GUARULHOS / SP</a:t>
                       </a:r>
                     </a:p>
                   </a:txBody>
@@ -6100,18 +6100,18 @@
                 </a:tc>
                 <a:tc>
                   <a:txBody>
-                    <a:bodyPr wrap="square"/>
-                    <a:lstStyle/>
-                    <a:p>
-                      <a:pPr algn="l"/>
-                      <a:r>
-                        <a:rPr sz="1000" b="0">
-                          <a:solidFill>
-                            <a:srgbClr val="1D1B43"/>
-                          </a:solidFill>
-                          <a:latin typeface="Calibri"/>
-                        </a:rPr>
-                        <a:t>CAXIAS DO SUL/RS</a:t>
+                    <a:bodyPr/>
+                    <a:lstStyle/>
+                    <a:p>
+                      <a:pPr algn="l"/>
+                      <a:r>
+                        <a:rPr sz="1000" b="0">
+                          <a:solidFill>
+                            <a:srgbClr val="1D1B43"/>
+                          </a:solidFill>
+                          <a:latin typeface="Calibri"/>
+                        </a:rPr>
+                        <a:t>GUARULHOS/SP</a:t>
                       </a:r>
                     </a:p>
                   </a:txBody>
@@ -6123,7 +6123,241 @@
                 </a:tc>
                 <a:tc>
                   <a:txBody>
-                    <a:bodyPr wrap="square"/>
+                    <a:bodyPr/>
+                    <a:lstStyle/>
+                    <a:p>
+                      <a:pPr algn="l"/>
+                      <a:r>
+                        <a:rPr sz="1000" b="0">
+                          <a:solidFill>
+                            <a:srgbClr val="1D1B43"/>
+                          </a:solidFill>
+                          <a:latin typeface="Calibri"/>
+                        </a:rPr>
+                        <a:t>14/04/2026</a:t>
+                      </a:r>
+                    </a:p>
+                  </a:txBody>
+                  <a:tcPr>
+                    <a:solidFill>
+                      <a:srgbClr val="F2F2F2"/>
+                    </a:solidFill>
+                  </a:tcPr>
+                </a:tc>
+                <a:tc>
+                  <a:txBody>
+                    <a:bodyPr/>
+                    <a:lstStyle/>
+                    <a:p>
+                      <a:pPr algn="l"/>
+                      <a:r>
+                        <a:rPr sz="1000" b="0">
+                          <a:solidFill>
+                            <a:srgbClr val="1D1B43"/>
+                          </a:solidFill>
+                          <a:latin typeface="Calibri"/>
+                        </a:rPr>
+                        <a:t>ENTREGUE FORA DO PRAZO</a:t>
+                      </a:r>
+                    </a:p>
+                  </a:txBody>
+                  <a:tcPr>
+                    <a:solidFill>
+                      <a:srgbClr val="F2F2F2"/>
+                    </a:solidFill>
+                  </a:tcPr>
+                </a:tc>
+              </a:tr>
+              <a:tr h="384048">
+                <a:tc>
+                  <a:txBody>
+                    <a:bodyPr/>
+                    <a:lstStyle/>
+                    <a:p>
+                      <a:pPr algn="l"/>
+                      <a:r>
+                        <a:rPr sz="1000" b="0">
+                          <a:solidFill>
+                            <a:srgbClr val="1D1B43"/>
+                          </a:solidFill>
+                          <a:latin typeface="Calibri"/>
+                        </a:rPr>
+                        <a:t>279310</a:t>
+                      </a:r>
+                    </a:p>
+                  </a:txBody>
+                  <a:tcPr>
+                    <a:solidFill>
+                      <a:srgbClr val="FFFFFF"/>
+                    </a:solidFill>
+                  </a:tcPr>
+                </a:tc>
+                <a:tc>
+                  <a:txBody>
+                    <a:bodyPr/>
+                    <a:lstStyle/>
+                    <a:p>
+                      <a:pPr algn="l"/>
+                      <a:r>
+                        <a:rPr sz="1000" b="0">
+                          <a:solidFill>
+                            <a:srgbClr val="1D1B43"/>
+                          </a:solidFill>
+                          <a:latin typeface="Calibri"/>
+                        </a:rPr>
+                        <a:t>CORSUL COMERCIO E RE - CRICIUMA / SC</a:t>
+                      </a:r>
+                    </a:p>
+                  </a:txBody>
+                  <a:tcPr>
+                    <a:solidFill>
+                      <a:srgbClr val="FFFFFF"/>
+                    </a:solidFill>
+                  </a:tcPr>
+                </a:tc>
+                <a:tc>
+                  <a:txBody>
+                    <a:bodyPr/>
+                    <a:lstStyle/>
+                    <a:p>
+                      <a:pPr algn="l"/>
+                      <a:r>
+                        <a:rPr sz="1000" b="0">
+                          <a:solidFill>
+                            <a:srgbClr val="1D1B43"/>
+                          </a:solidFill>
+                          <a:latin typeface="Calibri"/>
+                        </a:rPr>
+                        <a:t>CRICIUMA/SC</a:t>
+                      </a:r>
+                    </a:p>
+                  </a:txBody>
+                  <a:tcPr>
+                    <a:solidFill>
+                      <a:srgbClr val="FFFFFF"/>
+                    </a:solidFill>
+                  </a:tcPr>
+                </a:tc>
+                <a:tc>
+                  <a:txBody>
+                    <a:bodyPr/>
+                    <a:lstStyle/>
+                    <a:p>
+                      <a:pPr algn="l"/>
+                      <a:r>
+                        <a:rPr sz="1000" b="0">
+                          <a:solidFill>
+                            <a:srgbClr val="1D1B43"/>
+                          </a:solidFill>
+                          <a:latin typeface="Calibri"/>
+                        </a:rPr>
+                        <a:t>28/04/2026</a:t>
+                      </a:r>
+                    </a:p>
+                  </a:txBody>
+                  <a:tcPr>
+                    <a:solidFill>
+                      <a:srgbClr val="FFFFFF"/>
+                    </a:solidFill>
+                  </a:tcPr>
+                </a:tc>
+                <a:tc>
+                  <a:txBody>
+                    <a:bodyPr/>
+                    <a:lstStyle/>
+                    <a:p>
+                      <a:pPr algn="l"/>
+                      <a:r>
+                        <a:rPr sz="1000" b="0">
+                          <a:solidFill>
+                            <a:srgbClr val="1D1B43"/>
+                          </a:solidFill>
+                          <a:latin typeface="Calibri"/>
+                        </a:rPr>
+                        <a:t>FORA DO PRAZO</a:t>
+                      </a:r>
+                    </a:p>
+                  </a:txBody>
+                  <a:tcPr>
+                    <a:solidFill>
+                      <a:srgbClr val="FFFFFF"/>
+                    </a:solidFill>
+                  </a:tcPr>
+                </a:tc>
+              </a:tr>
+              <a:tr h="384048">
+                <a:tc>
+                  <a:txBody>
+                    <a:bodyPr/>
+                    <a:lstStyle/>
+                    <a:p>
+                      <a:pPr algn="l"/>
+                      <a:r>
+                        <a:rPr sz="1000" b="0">
+                          <a:solidFill>
+                            <a:srgbClr val="1D1B43"/>
+                          </a:solidFill>
+                          <a:latin typeface="Calibri"/>
+                        </a:rPr>
+                        <a:t>280014</a:t>
+                      </a:r>
+                    </a:p>
+                  </a:txBody>
+                  <a:tcPr>
+                    <a:solidFill>
+                      <a:srgbClr val="F2F2F2"/>
+                    </a:solidFill>
+                  </a:tcPr>
+                </a:tc>
+                <a:tc>
+                  <a:txBody>
+                    <a:bodyPr/>
+                    <a:lstStyle/>
+                    <a:p>
+                      <a:pPr algn="l"/>
+                      <a:r>
+                        <a:rPr sz="1000" b="0">
+                          <a:solidFill>
+                            <a:srgbClr val="1D1B43"/>
+                          </a:solidFill>
+                          <a:latin typeface="Calibri"/>
+                        </a:rPr>
+                        <a:t>EXATA CARGO - GUARULHOS / SP</a:t>
+                      </a:r>
+                    </a:p>
+                  </a:txBody>
+                  <a:tcPr>
+                    <a:solidFill>
+                      <a:srgbClr val="F2F2F2"/>
+                    </a:solidFill>
+                  </a:tcPr>
+                </a:tc>
+                <a:tc>
+                  <a:txBody>
+                    <a:bodyPr/>
+                    <a:lstStyle/>
+                    <a:p>
+                      <a:pPr algn="l"/>
+                      <a:r>
+                        <a:rPr sz="1000" b="0">
+                          <a:solidFill>
+                            <a:srgbClr val="1D1B43"/>
+                          </a:solidFill>
+                          <a:latin typeface="Calibri"/>
+                        </a:rPr>
+                        <a:t>GUARULHOS/SP</a:t>
+                      </a:r>
+                    </a:p>
+                  </a:txBody>
+                  <a:tcPr>
+                    <a:solidFill>
+                      <a:srgbClr val="F2F2F2"/>
+                    </a:solidFill>
+                  </a:tcPr>
+                </a:tc>
+                <a:tc>
+                  <a:txBody>
+                    <a:bodyPr/>
                     <a:lstStyle/>
                     <a:p>
                       <a:pPr algn="l"/>
@@ -6146,7 +6380,7 @@
                 </a:tc>
                 <a:tc>
                   <a:txBody>
-                    <a:bodyPr wrap="square"/>
+                    <a:bodyPr/>
                     <a:lstStyle/>
                     <a:p>
                       <a:pPr algn="l"/>
@@ -6168,21 +6402,21 @@
                   </a:tcPr>
                 </a:tc>
               </a:tr>
-              <a:tr h="285750">
-                <a:tc>
-                  <a:txBody>
-                    <a:bodyPr wrap="square"/>
-                    <a:lstStyle/>
-                    <a:p>
-                      <a:pPr algn="l"/>
-                      <a:r>
-                        <a:rPr sz="1000" b="0">
-                          <a:solidFill>
-                            <a:srgbClr val="1D1B43"/>
-                          </a:solidFill>
-                          <a:latin typeface="Calibri"/>
-                        </a:rPr>
-                        <a:t>278073</a:t>
+              <a:tr h="384048">
+                <a:tc>
+                  <a:txBody>
+                    <a:bodyPr/>
+                    <a:lstStyle/>
+                    <a:p>
+                      <a:pPr algn="l"/>
+                      <a:r>
+                        <a:rPr sz="1000" b="0">
+                          <a:solidFill>
+                            <a:srgbClr val="1D1B43"/>
+                          </a:solidFill>
+                          <a:latin typeface="Calibri"/>
+                        </a:rPr>
+                        <a:t>280070</a:t>
                       </a:r>
                     </a:p>
                   </a:txBody>
@@ -6194,18 +6428,18 @@
                 </a:tc>
                 <a:tc>
                   <a:txBody>
-                    <a:bodyPr wrap="square"/>
-                    <a:lstStyle/>
-                    <a:p>
-                      <a:pPr algn="l"/>
-                      <a:r>
-                        <a:rPr sz="1000" b="0">
-                          <a:solidFill>
-                            <a:srgbClr val="1D1B43"/>
-                          </a:solidFill>
-                          <a:latin typeface="Calibri"/>
-                        </a:rPr>
-                        <a:t>CORSUL COMERCIO E RE - CAXIAS DO SUL / RS</a:t>
+                    <a:bodyPr/>
+                    <a:lstStyle/>
+                    <a:p>
+                      <a:pPr algn="l"/>
+                      <a:r>
+                        <a:rPr sz="1000" b="0">
+                          <a:solidFill>
+                            <a:srgbClr val="1D1B43"/>
+                          </a:solidFill>
+                          <a:latin typeface="Calibri"/>
+                        </a:rPr>
+                        <a:t>WILSON SONS LOGISTIC - SANTO ANDRE / SP</a:t>
                       </a:r>
                     </a:p>
                   </a:txBody>
@@ -6217,18 +6451,18 @@
                 </a:tc>
                 <a:tc>
                   <a:txBody>
-                    <a:bodyPr wrap="square"/>
-                    <a:lstStyle/>
-                    <a:p>
-                      <a:pPr algn="l"/>
-                      <a:r>
-                        <a:rPr sz="1000" b="0">
-                          <a:solidFill>
-                            <a:srgbClr val="1D1B43"/>
-                          </a:solidFill>
-                          <a:latin typeface="Calibri"/>
-                        </a:rPr>
-                        <a:t>CAXIAS DO SUL/RS</a:t>
+                    <a:bodyPr/>
+                    <a:lstStyle/>
+                    <a:p>
+                      <a:pPr algn="l"/>
+                      <a:r>
+                        <a:rPr sz="1000" b="0">
+                          <a:solidFill>
+                            <a:srgbClr val="1D1B43"/>
+                          </a:solidFill>
+                          <a:latin typeface="Calibri"/>
+                        </a:rPr>
+                        <a:t>SANTO ANDRE/SP</a:t>
                       </a:r>
                     </a:p>
                   </a:txBody>
@@ -6240,18 +6474,18 @@
                 </a:tc>
                 <a:tc>
                   <a:txBody>
-                    <a:bodyPr wrap="square"/>
-                    <a:lstStyle/>
-                    <a:p>
-                      <a:pPr algn="l"/>
-                      <a:r>
-                        <a:rPr sz="1000" b="0">
-                          <a:solidFill>
-                            <a:srgbClr val="1D1B43"/>
-                          </a:solidFill>
-                          <a:latin typeface="Calibri"/>
-                        </a:rPr>
-                        <a:t>24/04/2026</a:t>
+                    <a:bodyPr/>
+                    <a:lstStyle/>
+                    <a:p>
+                      <a:pPr algn="l"/>
+                      <a:r>
+                        <a:rPr sz="1000" b="0">
+                          <a:solidFill>
+                            <a:srgbClr val="1D1B43"/>
+                          </a:solidFill>
+                          <a:latin typeface="Calibri"/>
+                        </a:rPr>
+                        <a:t>28/04/2026</a:t>
                       </a:r>
                     </a:p>
                   </a:txBody>
@@ -6263,7 +6497,7 @@
                 </a:tc>
                 <a:tc>
                   <a:txBody>
-                    <a:bodyPr wrap="square"/>
+                    <a:bodyPr/>
                     <a:lstStyle/>
                     <a:p>
                       <a:pPr algn="l"/>
@@ -6285,21 +6519,21 @@
                   </a:tcPr>
                 </a:tc>
               </a:tr>
-              <a:tr h="285750">
-                <a:tc>
-                  <a:txBody>
-                    <a:bodyPr wrap="square"/>
-                    <a:lstStyle/>
-                    <a:p>
-                      <a:pPr algn="l"/>
-                      <a:r>
-                        <a:rPr sz="1000" b="0">
-                          <a:solidFill>
-                            <a:srgbClr val="1D1B43"/>
-                          </a:solidFill>
-                          <a:latin typeface="Calibri"/>
-                        </a:rPr>
-                        <a:t>278728</a:t>
+              <a:tr h="384048">
+                <a:tc>
+                  <a:txBody>
+                    <a:bodyPr/>
+                    <a:lstStyle/>
+                    <a:p>
+                      <a:pPr algn="l"/>
+                      <a:r>
+                        <a:rPr sz="1000" b="0">
+                          <a:solidFill>
+                            <a:srgbClr val="1D1B43"/>
+                          </a:solidFill>
+                          <a:latin typeface="Calibri"/>
+                        </a:rPr>
+                        <a:t>280799</a:t>
                       </a:r>
                     </a:p>
                   </a:txBody>
@@ -6311,18 +6545,18 @@
                 </a:tc>
                 <a:tc>
                   <a:txBody>
-                    <a:bodyPr wrap="square"/>
-                    <a:lstStyle/>
-                    <a:p>
-                      <a:pPr algn="l"/>
-                      <a:r>
-                        <a:rPr sz="1000" b="0">
-                          <a:solidFill>
-                            <a:srgbClr val="1D1B43"/>
-                          </a:solidFill>
-                          <a:latin typeface="Calibri"/>
-                        </a:rPr>
-                        <a:t>EXATA CARGO - GUARULHOS / SP</a:t>
+                    <a:bodyPr/>
+                    <a:lstStyle/>
+                    <a:p>
+                      <a:pPr algn="l"/>
+                      <a:r>
+                        <a:rPr sz="1000" b="0">
+                          <a:solidFill>
+                            <a:srgbClr val="1D1B43"/>
+                          </a:solidFill>
+                          <a:latin typeface="Calibri"/>
+                        </a:rPr>
+                        <a:t>ATIVA DISTRIBUICAO E - SAO PAULO / SP</a:t>
                       </a:r>
                     </a:p>
                   </a:txBody>
@@ -6334,18 +6568,18 @@
                 </a:tc>
                 <a:tc>
                   <a:txBody>
-                    <a:bodyPr wrap="square"/>
-                    <a:lstStyle/>
-                    <a:p>
-                      <a:pPr algn="l"/>
-                      <a:r>
-                        <a:rPr sz="1000" b="0">
-                          <a:solidFill>
-                            <a:srgbClr val="1D1B43"/>
-                          </a:solidFill>
-                          <a:latin typeface="Calibri"/>
-                        </a:rPr>
-                        <a:t>GUARULHOS/SP</a:t>
+                    <a:bodyPr/>
+                    <a:lstStyle/>
+                    <a:p>
+                      <a:pPr algn="l"/>
+                      <a:r>
+                        <a:rPr sz="1000" b="0">
+                          <a:solidFill>
+                            <a:srgbClr val="1D1B43"/>
+                          </a:solidFill>
+                          <a:latin typeface="Calibri"/>
+                        </a:rPr>
+                        <a:t>SAO PAULO/SP</a:t>
                       </a:r>
                     </a:p>
                   </a:txBody>
@@ -6357,18 +6591,18 @@
                 </a:tc>
                 <a:tc>
                   <a:txBody>
-                    <a:bodyPr wrap="square"/>
-                    <a:lstStyle/>
-                    <a:p>
-                      <a:pPr algn="l"/>
-                      <a:r>
-                        <a:rPr sz="1000" b="0">
-                          <a:solidFill>
-                            <a:srgbClr val="1D1B43"/>
-                          </a:solidFill>
-                          <a:latin typeface="Calibri"/>
-                        </a:rPr>
-                        <a:t>14/04/2026</a:t>
+                    <a:bodyPr/>
+                    <a:lstStyle/>
+                    <a:p>
+                      <a:pPr algn="l"/>
+                      <a:r>
+                        <a:rPr sz="1000" b="0">
+                          <a:solidFill>
+                            <a:srgbClr val="1D1B43"/>
+                          </a:solidFill>
+                          <a:latin typeface="Calibri"/>
+                        </a:rPr>
+                        <a:t>29/04/2026</a:t>
                       </a:r>
                     </a:p>
                   </a:txBody>
@@ -6380,843 +6614,24 @@
                 </a:tc>
                 <a:tc>
                   <a:txBody>
-                    <a:bodyPr wrap="square"/>
-                    <a:lstStyle/>
-                    <a:p>
-                      <a:pPr algn="l"/>
-                      <a:r>
-                        <a:rPr sz="1000" b="0">
-                          <a:solidFill>
-                            <a:srgbClr val="1D1B43"/>
-                          </a:solidFill>
-                          <a:latin typeface="Calibri"/>
-                        </a:rPr>
-                        <a:t>ENTREGUE FORA DO PRAZO</a:t>
+                    <a:bodyPr/>
+                    <a:lstStyle/>
+                    <a:p>
+                      <a:pPr algn="l"/>
+                      <a:r>
+                        <a:rPr sz="1000" b="0">
+                          <a:solidFill>
+                            <a:srgbClr val="1D1B43"/>
+                          </a:solidFill>
+                          <a:latin typeface="Calibri"/>
+                        </a:rPr>
+                        <a:t>FORA DO PRAZO</a:t>
                       </a:r>
                     </a:p>
                   </a:txBody>
                   <a:tcPr>
                     <a:solidFill>
                       <a:srgbClr val="F2F2F2"/>
-                    </a:solidFill>
-                  </a:tcPr>
-                </a:tc>
-              </a:tr>
-              <a:tr h="285750">
-                <a:tc>
-                  <a:txBody>
-                    <a:bodyPr wrap="square"/>
-                    <a:lstStyle/>
-                    <a:p>
-                      <a:pPr algn="l"/>
-                      <a:r>
-                        <a:rPr sz="1000" b="0">
-                          <a:solidFill>
-                            <a:srgbClr val="1D1B43"/>
-                          </a:solidFill>
-                          <a:latin typeface="Calibri"/>
-                        </a:rPr>
-                        <a:t>279310</a:t>
-                      </a:r>
-                    </a:p>
-                  </a:txBody>
-                  <a:tcPr>
-                    <a:solidFill>
-                      <a:srgbClr val="FFFFFF"/>
-                    </a:solidFill>
-                  </a:tcPr>
-                </a:tc>
-                <a:tc>
-                  <a:txBody>
-                    <a:bodyPr wrap="square"/>
-                    <a:lstStyle/>
-                    <a:p>
-                      <a:pPr algn="l"/>
-                      <a:r>
-                        <a:rPr sz="1000" b="0">
-                          <a:solidFill>
-                            <a:srgbClr val="1D1B43"/>
-                          </a:solidFill>
-                          <a:latin typeface="Calibri"/>
-                        </a:rPr>
-                        <a:t>CORSUL COMERCIO E RE - CRICIUMA / SC</a:t>
-                      </a:r>
-                    </a:p>
-                  </a:txBody>
-                  <a:tcPr>
-                    <a:solidFill>
-                      <a:srgbClr val="FFFFFF"/>
-                    </a:solidFill>
-                  </a:tcPr>
-                </a:tc>
-                <a:tc>
-                  <a:txBody>
-                    <a:bodyPr wrap="square"/>
-                    <a:lstStyle/>
-                    <a:p>
-                      <a:pPr algn="l"/>
-                      <a:r>
-                        <a:rPr sz="1000" b="0">
-                          <a:solidFill>
-                            <a:srgbClr val="1D1B43"/>
-                          </a:solidFill>
-                          <a:latin typeface="Calibri"/>
-                        </a:rPr>
-                        <a:t>CRICIUMA/SC</a:t>
-                      </a:r>
-                    </a:p>
-                  </a:txBody>
-                  <a:tcPr>
-                    <a:solidFill>
-                      <a:srgbClr val="FFFFFF"/>
-                    </a:solidFill>
-                  </a:tcPr>
-                </a:tc>
-                <a:tc>
-                  <a:txBody>
-                    <a:bodyPr wrap="square"/>
-                    <a:lstStyle/>
-                    <a:p>
-                      <a:pPr algn="l"/>
-                      <a:r>
-                        <a:rPr sz="1000" b="0">
-                          <a:solidFill>
-                            <a:srgbClr val="1D1B43"/>
-                          </a:solidFill>
-                          <a:latin typeface="Calibri"/>
-                        </a:rPr>
-                        <a:t>28/04/2026</a:t>
-                      </a:r>
-                    </a:p>
-                  </a:txBody>
-                  <a:tcPr>
-                    <a:solidFill>
-                      <a:srgbClr val="FFFFFF"/>
-                    </a:solidFill>
-                  </a:tcPr>
-                </a:tc>
-                <a:tc>
-                  <a:txBody>
-                    <a:bodyPr wrap="square"/>
-                    <a:lstStyle/>
-                    <a:p>
-                      <a:pPr algn="l"/>
-                      <a:r>
-                        <a:rPr sz="1000" b="0">
-                          <a:solidFill>
-                            <a:srgbClr val="1D1B43"/>
-                          </a:solidFill>
-                          <a:latin typeface="Calibri"/>
-                        </a:rPr>
-                        <a:t>FORA DO PRAZO</a:t>
-                      </a:r>
-                    </a:p>
-                  </a:txBody>
-                  <a:tcPr>
-                    <a:solidFill>
-                      <a:srgbClr val="FFFFFF"/>
-                    </a:solidFill>
-                  </a:tcPr>
-                </a:tc>
-              </a:tr>
-              <a:tr h="285750">
-                <a:tc>
-                  <a:txBody>
-                    <a:bodyPr wrap="square"/>
-                    <a:lstStyle/>
-                    <a:p>
-                      <a:pPr algn="l"/>
-                      <a:r>
-                        <a:rPr sz="1000" b="0">
-                          <a:solidFill>
-                            <a:srgbClr val="1D1B43"/>
-                          </a:solidFill>
-                          <a:latin typeface="Calibri"/>
-                        </a:rPr>
-                        <a:t>280014</a:t>
-                      </a:r>
-                    </a:p>
-                  </a:txBody>
-                  <a:tcPr>
-                    <a:solidFill>
-                      <a:srgbClr val="F2F2F2"/>
-                    </a:solidFill>
-                  </a:tcPr>
-                </a:tc>
-                <a:tc>
-                  <a:txBody>
-                    <a:bodyPr wrap="square"/>
-                    <a:lstStyle/>
-                    <a:p>
-                      <a:pPr algn="l"/>
-                      <a:r>
-                        <a:rPr sz="1000" b="0">
-                          <a:solidFill>
-                            <a:srgbClr val="1D1B43"/>
-                          </a:solidFill>
-                          <a:latin typeface="Calibri"/>
-                        </a:rPr>
-                        <a:t>EXATA CARGO - GUARULHOS / SP</a:t>
-                      </a:r>
-                    </a:p>
-                  </a:txBody>
-                  <a:tcPr>
-                    <a:solidFill>
-                      <a:srgbClr val="F2F2F2"/>
-                    </a:solidFill>
-                  </a:tcPr>
-                </a:tc>
-                <a:tc>
-                  <a:txBody>
-                    <a:bodyPr wrap="square"/>
-                    <a:lstStyle/>
-                    <a:p>
-                      <a:pPr algn="l"/>
-                      <a:r>
-                        <a:rPr sz="1000" b="0">
-                          <a:solidFill>
-                            <a:srgbClr val="1D1B43"/>
-                          </a:solidFill>
-                          <a:latin typeface="Calibri"/>
-                        </a:rPr>
-                        <a:t>GUARULHOS/SP</a:t>
-                      </a:r>
-                    </a:p>
-                  </a:txBody>
-                  <a:tcPr>
-                    <a:solidFill>
-                      <a:srgbClr val="F2F2F2"/>
-                    </a:solidFill>
-                  </a:tcPr>
-                </a:tc>
-                <a:tc>
-                  <a:txBody>
-                    <a:bodyPr wrap="square"/>
-                    <a:lstStyle/>
-                    <a:p>
-                      <a:pPr algn="l"/>
-                      <a:r>
-                        <a:rPr sz="1000" b="0">
-                          <a:solidFill>
-                            <a:srgbClr val="1D1B43"/>
-                          </a:solidFill>
-                          <a:latin typeface="Calibri"/>
-                        </a:rPr>
-                        <a:t>24/04/2026</a:t>
-                      </a:r>
-                    </a:p>
-                  </a:txBody>
-                  <a:tcPr>
-                    <a:solidFill>
-                      <a:srgbClr val="F2F2F2"/>
-                    </a:solidFill>
-                  </a:tcPr>
-                </a:tc>
-                <a:tc>
-                  <a:txBody>
-                    <a:bodyPr wrap="square"/>
-                    <a:lstStyle/>
-                    <a:p>
-                      <a:pPr algn="l"/>
-                      <a:r>
-                        <a:rPr sz="1000" b="0">
-                          <a:solidFill>
-                            <a:srgbClr val="1D1B43"/>
-                          </a:solidFill>
-                          <a:latin typeface="Calibri"/>
-                        </a:rPr>
-                        <a:t>ENTREGUE FORA DO PRAZO</a:t>
-                      </a:r>
-                    </a:p>
-                  </a:txBody>
-                  <a:tcPr>
-                    <a:solidFill>
-                      <a:srgbClr val="F2F2F2"/>
-                    </a:solidFill>
-                  </a:tcPr>
-                </a:tc>
-              </a:tr>
-              <a:tr h="285750">
-                <a:tc>
-                  <a:txBody>
-                    <a:bodyPr wrap="square"/>
-                    <a:lstStyle/>
-                    <a:p>
-                      <a:pPr algn="l"/>
-                      <a:r>
-                        <a:rPr sz="1000" b="0">
-                          <a:solidFill>
-                            <a:srgbClr val="1D1B43"/>
-                          </a:solidFill>
-                          <a:latin typeface="Calibri"/>
-                        </a:rPr>
-                        <a:t>280070</a:t>
-                      </a:r>
-                    </a:p>
-                  </a:txBody>
-                  <a:tcPr>
-                    <a:solidFill>
-                      <a:srgbClr val="FFFFFF"/>
-                    </a:solidFill>
-                  </a:tcPr>
-                </a:tc>
-                <a:tc>
-                  <a:txBody>
-                    <a:bodyPr wrap="square"/>
-                    <a:lstStyle/>
-                    <a:p>
-                      <a:pPr algn="l"/>
-                      <a:r>
-                        <a:rPr sz="1000" b="0">
-                          <a:solidFill>
-                            <a:srgbClr val="1D1B43"/>
-                          </a:solidFill>
-                          <a:latin typeface="Calibri"/>
-                        </a:rPr>
-                        <a:t>WILSON SONS LOGISTIC - SANTO ANDRE / SP</a:t>
-                      </a:r>
-                    </a:p>
-                  </a:txBody>
-                  <a:tcPr>
-                    <a:solidFill>
-                      <a:srgbClr val="FFFFFF"/>
-                    </a:solidFill>
-                  </a:tcPr>
-                </a:tc>
-                <a:tc>
-                  <a:txBody>
-                    <a:bodyPr wrap="square"/>
-                    <a:lstStyle/>
-                    <a:p>
-                      <a:pPr algn="l"/>
-                      <a:r>
-                        <a:rPr sz="1000" b="0">
-                          <a:solidFill>
-                            <a:srgbClr val="1D1B43"/>
-                          </a:solidFill>
-                          <a:latin typeface="Calibri"/>
-                        </a:rPr>
-                        <a:t>SANTO ANDRE/SP</a:t>
-                      </a:r>
-                    </a:p>
-                  </a:txBody>
-                  <a:tcPr>
-                    <a:solidFill>
-                      <a:srgbClr val="FFFFFF"/>
-                    </a:solidFill>
-                  </a:tcPr>
-                </a:tc>
-                <a:tc>
-                  <a:txBody>
-                    <a:bodyPr wrap="square"/>
-                    <a:lstStyle/>
-                    <a:p>
-                      <a:pPr algn="l"/>
-                      <a:r>
-                        <a:rPr sz="1000" b="0">
-                          <a:solidFill>
-                            <a:srgbClr val="1D1B43"/>
-                          </a:solidFill>
-                          <a:latin typeface="Calibri"/>
-                        </a:rPr>
-                        <a:t>28/04/2026</a:t>
-                      </a:r>
-                    </a:p>
-                  </a:txBody>
-                  <a:tcPr>
-                    <a:solidFill>
-                      <a:srgbClr val="FFFFFF"/>
-                    </a:solidFill>
-                  </a:tcPr>
-                </a:tc>
-                <a:tc>
-                  <a:txBody>
-                    <a:bodyPr wrap="square"/>
-                    <a:lstStyle/>
-                    <a:p>
-                      <a:pPr algn="l"/>
-                      <a:r>
-                        <a:rPr sz="1000" b="0">
-                          <a:solidFill>
-                            <a:srgbClr val="1D1B43"/>
-                          </a:solidFill>
-                          <a:latin typeface="Calibri"/>
-                        </a:rPr>
-                        <a:t>ENTREGUE FORA DO PRAZO</a:t>
-                      </a:r>
-                    </a:p>
-                  </a:txBody>
-                  <a:tcPr>
-                    <a:solidFill>
-                      <a:srgbClr val="FFFFFF"/>
-                    </a:solidFill>
-                  </a:tcPr>
-                </a:tc>
-              </a:tr>
-              <a:tr h="285750">
-                <a:tc>
-                  <a:txBody>
-                    <a:bodyPr wrap="square"/>
-                    <a:lstStyle/>
-                    <a:p>
-                      <a:pPr algn="l"/>
-                      <a:r>
-                        <a:rPr sz="1000" b="0">
-                          <a:solidFill>
-                            <a:srgbClr val="1D1B43"/>
-                          </a:solidFill>
-                          <a:latin typeface="Calibri"/>
-                        </a:rPr>
-                        <a:t>280138</a:t>
-                      </a:r>
-                    </a:p>
-                  </a:txBody>
-                  <a:tcPr>
-                    <a:solidFill>
-                      <a:srgbClr val="F2F2F2"/>
-                    </a:solidFill>
-                  </a:tcPr>
-                </a:tc>
-                <a:tc>
-                  <a:txBody>
-                    <a:bodyPr wrap="square"/>
-                    <a:lstStyle/>
-                    <a:p>
-                      <a:pPr algn="l"/>
-                      <a:r>
-                        <a:rPr sz="1000" b="0">
-                          <a:solidFill>
-                            <a:srgbClr val="1D1B43"/>
-                          </a:solidFill>
-                          <a:latin typeface="Calibri"/>
-                        </a:rPr>
-                        <a:t>CORSUL COMERCIO E RE - SAO JOSE DOS PINHAIS / PR</a:t>
-                      </a:r>
-                    </a:p>
-                  </a:txBody>
-                  <a:tcPr>
-                    <a:solidFill>
-                      <a:srgbClr val="F2F2F2"/>
-                    </a:solidFill>
-                  </a:tcPr>
-                </a:tc>
-                <a:tc>
-                  <a:txBody>
-                    <a:bodyPr wrap="square"/>
-                    <a:lstStyle/>
-                    <a:p>
-                      <a:pPr algn="l"/>
-                      <a:r>
-                        <a:rPr sz="1000" b="0">
-                          <a:solidFill>
-                            <a:srgbClr val="1D1B43"/>
-                          </a:solidFill>
-                          <a:latin typeface="Calibri"/>
-                        </a:rPr>
-                        <a:t>SAO JOSE DOS PINHAIS/PR</a:t>
-                      </a:r>
-                    </a:p>
-                  </a:txBody>
-                  <a:tcPr>
-                    <a:solidFill>
-                      <a:srgbClr val="F2F2F2"/>
-                    </a:solidFill>
-                  </a:tcPr>
-                </a:tc>
-                <a:tc>
-                  <a:txBody>
-                    <a:bodyPr wrap="square"/>
-                    <a:lstStyle/>
-                    <a:p>
-                      <a:pPr algn="l"/>
-                      <a:r>
-                        <a:rPr sz="1000" b="0">
-                          <a:solidFill>
-                            <a:srgbClr val="1D1B43"/>
-                          </a:solidFill>
-                          <a:latin typeface="Calibri"/>
-                        </a:rPr>
-                        <a:t>30/04/2026</a:t>
-                      </a:r>
-                    </a:p>
-                  </a:txBody>
-                  <a:tcPr>
-                    <a:solidFill>
-                      <a:srgbClr val="F2F2F2"/>
-                    </a:solidFill>
-                  </a:tcPr>
-                </a:tc>
-                <a:tc>
-                  <a:txBody>
-                    <a:bodyPr wrap="square"/>
-                    <a:lstStyle/>
-                    <a:p>
-                      <a:pPr algn="l"/>
-                      <a:r>
-                        <a:rPr sz="1000" b="0">
-                          <a:solidFill>
-                            <a:srgbClr val="1D1B43"/>
-                          </a:solidFill>
-                          <a:latin typeface="Calibri"/>
-                        </a:rPr>
-                        <a:t>ENTREGUE FORA DO PRAZO</a:t>
-                      </a:r>
-                    </a:p>
-                  </a:txBody>
-                  <a:tcPr>
-                    <a:solidFill>
-                      <a:srgbClr val="F2F2F2"/>
-                    </a:solidFill>
-                  </a:tcPr>
-                </a:tc>
-              </a:tr>
-              <a:tr h="285750">
-                <a:tc>
-                  <a:txBody>
-                    <a:bodyPr wrap="square"/>
-                    <a:lstStyle/>
-                    <a:p>
-                      <a:pPr algn="l"/>
-                      <a:r>
-                        <a:rPr sz="1000" b="0">
-                          <a:solidFill>
-                            <a:srgbClr val="1D1B43"/>
-                          </a:solidFill>
-                          <a:latin typeface="Calibri"/>
-                        </a:rPr>
-                        <a:t>280142</a:t>
-                      </a:r>
-                    </a:p>
-                  </a:txBody>
-                  <a:tcPr>
-                    <a:solidFill>
-                      <a:srgbClr val="FFFFFF"/>
-                    </a:solidFill>
-                  </a:tcPr>
-                </a:tc>
-                <a:tc>
-                  <a:txBody>
-                    <a:bodyPr wrap="square"/>
-                    <a:lstStyle/>
-                    <a:p>
-                      <a:pPr algn="l"/>
-                      <a:r>
-                        <a:rPr sz="1000" b="0">
-                          <a:solidFill>
-                            <a:srgbClr val="1D1B43"/>
-                          </a:solidFill>
-                          <a:latin typeface="Calibri"/>
-                        </a:rPr>
-                        <a:t>CORSUL COMERCIO E RE - SAO JOSE DOS PINHAIS / PR</a:t>
-                      </a:r>
-                    </a:p>
-                  </a:txBody>
-                  <a:tcPr>
-                    <a:solidFill>
-                      <a:srgbClr val="FFFFFF"/>
-                    </a:solidFill>
-                  </a:tcPr>
-                </a:tc>
-                <a:tc>
-                  <a:txBody>
-                    <a:bodyPr wrap="square"/>
-                    <a:lstStyle/>
-                    <a:p>
-                      <a:pPr algn="l"/>
-                      <a:r>
-                        <a:rPr sz="1000" b="0">
-                          <a:solidFill>
-                            <a:srgbClr val="1D1B43"/>
-                          </a:solidFill>
-                          <a:latin typeface="Calibri"/>
-                        </a:rPr>
-                        <a:t>SAO JOSE DOS PINHAIS/PR</a:t>
-                      </a:r>
-                    </a:p>
-                  </a:txBody>
-                  <a:tcPr>
-                    <a:solidFill>
-                      <a:srgbClr val="FFFFFF"/>
-                    </a:solidFill>
-                  </a:tcPr>
-                </a:tc>
-                <a:tc>
-                  <a:txBody>
-                    <a:bodyPr wrap="square"/>
-                    <a:lstStyle/>
-                    <a:p>
-                      <a:pPr algn="l"/>
-                      <a:r>
-                        <a:rPr sz="1000" b="0">
-                          <a:solidFill>
-                            <a:srgbClr val="1D1B43"/>
-                          </a:solidFill>
-                          <a:latin typeface="Calibri"/>
-                        </a:rPr>
-                        <a:t>30/04/2026</a:t>
-                      </a:r>
-                    </a:p>
-                  </a:txBody>
-                  <a:tcPr>
-                    <a:solidFill>
-                      <a:srgbClr val="FFFFFF"/>
-                    </a:solidFill>
-                  </a:tcPr>
-                </a:tc>
-                <a:tc>
-                  <a:txBody>
-                    <a:bodyPr wrap="square"/>
-                    <a:lstStyle/>
-                    <a:p>
-                      <a:pPr algn="l"/>
-                      <a:r>
-                        <a:rPr sz="1000" b="0">
-                          <a:solidFill>
-                            <a:srgbClr val="1D1B43"/>
-                          </a:solidFill>
-                          <a:latin typeface="Calibri"/>
-                        </a:rPr>
-                        <a:t>ENTREGUE FORA DO PRAZO</a:t>
-                      </a:r>
-                    </a:p>
-                  </a:txBody>
-                  <a:tcPr>
-                    <a:solidFill>
-                      <a:srgbClr val="FFFFFF"/>
-                    </a:solidFill>
-                  </a:tcPr>
-                </a:tc>
-              </a:tr>
-              <a:tr h="285750">
-                <a:tc>
-                  <a:txBody>
-                    <a:bodyPr wrap="square"/>
-                    <a:lstStyle/>
-                    <a:p>
-                      <a:pPr algn="l"/>
-                      <a:r>
-                        <a:rPr sz="1000" b="0">
-                          <a:solidFill>
-                            <a:srgbClr val="1D1B43"/>
-                          </a:solidFill>
-                          <a:latin typeface="Calibri"/>
-                        </a:rPr>
-                        <a:t>280156</a:t>
-                      </a:r>
-                    </a:p>
-                  </a:txBody>
-                  <a:tcPr>
-                    <a:solidFill>
-                      <a:srgbClr val="F2F2F2"/>
-                    </a:solidFill>
-                  </a:tcPr>
-                </a:tc>
-                <a:tc>
-                  <a:txBody>
-                    <a:bodyPr wrap="square"/>
-                    <a:lstStyle/>
-                    <a:p>
-                      <a:pPr algn="l"/>
-                      <a:r>
-                        <a:rPr sz="1000" b="0">
-                          <a:solidFill>
-                            <a:srgbClr val="1D1B43"/>
-                          </a:solidFill>
-                          <a:latin typeface="Calibri"/>
-                        </a:rPr>
-                        <a:t>CORSUL COMERCIO E RE - SAO JOSE DOS PINHAIS / PR</a:t>
-                      </a:r>
-                    </a:p>
-                  </a:txBody>
-                  <a:tcPr>
-                    <a:solidFill>
-                      <a:srgbClr val="F2F2F2"/>
-                    </a:solidFill>
-                  </a:tcPr>
-                </a:tc>
-                <a:tc>
-                  <a:txBody>
-                    <a:bodyPr wrap="square"/>
-                    <a:lstStyle/>
-                    <a:p>
-                      <a:pPr algn="l"/>
-                      <a:r>
-                        <a:rPr sz="1000" b="0">
-                          <a:solidFill>
-                            <a:srgbClr val="1D1B43"/>
-                          </a:solidFill>
-                          <a:latin typeface="Calibri"/>
-                        </a:rPr>
-                        <a:t>SAO JOSE DOS PINHAIS/PR</a:t>
-                      </a:r>
-                    </a:p>
-                  </a:txBody>
-                  <a:tcPr>
-                    <a:solidFill>
-                      <a:srgbClr val="F2F2F2"/>
-                    </a:solidFill>
-                  </a:tcPr>
-                </a:tc>
-                <a:tc>
-                  <a:txBody>
-                    <a:bodyPr wrap="square"/>
-                    <a:lstStyle/>
-                    <a:p>
-                      <a:pPr algn="l"/>
-                      <a:r>
-                        <a:rPr sz="1000" b="0">
-                          <a:solidFill>
-                            <a:srgbClr val="1D1B43"/>
-                          </a:solidFill>
-                          <a:latin typeface="Calibri"/>
-                        </a:rPr>
-                        <a:t>30/04/2026</a:t>
-                      </a:r>
-                    </a:p>
-                  </a:txBody>
-                  <a:tcPr>
-                    <a:solidFill>
-                      <a:srgbClr val="F2F2F2"/>
-                    </a:solidFill>
-                  </a:tcPr>
-                </a:tc>
-                <a:tc>
-                  <a:txBody>
-                    <a:bodyPr wrap="square"/>
-                    <a:lstStyle/>
-                    <a:p>
-                      <a:pPr algn="l"/>
-                      <a:r>
-                        <a:rPr sz="1000" b="0">
-                          <a:solidFill>
-                            <a:srgbClr val="1D1B43"/>
-                          </a:solidFill>
-                          <a:latin typeface="Calibri"/>
-                        </a:rPr>
-                        <a:t>ENTREGUE FORA DO PRAZO</a:t>
-                      </a:r>
-                    </a:p>
-                  </a:txBody>
-                  <a:tcPr>
-                    <a:solidFill>
-                      <a:srgbClr val="F2F2F2"/>
-                    </a:solidFill>
-                  </a:tcPr>
-                </a:tc>
-              </a:tr>
-              <a:tr h="285750">
-                <a:tc>
-                  <a:txBody>
-                    <a:bodyPr wrap="square"/>
-                    <a:lstStyle/>
-                    <a:p>
-                      <a:pPr algn="l"/>
-                      <a:r>
-                        <a:rPr sz="1000" b="0">
-                          <a:solidFill>
-                            <a:srgbClr val="1D1B43"/>
-                          </a:solidFill>
-                          <a:latin typeface="Calibri"/>
-                        </a:rPr>
-                        <a:t>280799</a:t>
-                      </a:r>
-                    </a:p>
-                  </a:txBody>
-                  <a:tcPr>
-                    <a:solidFill>
-                      <a:srgbClr val="FFFFFF"/>
-                    </a:solidFill>
-                  </a:tcPr>
-                </a:tc>
-                <a:tc>
-                  <a:txBody>
-                    <a:bodyPr wrap="square"/>
-                    <a:lstStyle/>
-                    <a:p>
-                      <a:pPr algn="l"/>
-                      <a:r>
-                        <a:rPr sz="1000" b="0">
-                          <a:solidFill>
-                            <a:srgbClr val="1D1B43"/>
-                          </a:solidFill>
-                          <a:latin typeface="Calibri"/>
-                        </a:rPr>
-                        <a:t>ATIVA DISTRIBUICAO E - SAO PAULO / SP</a:t>
-                      </a:r>
-                    </a:p>
-                  </a:txBody>
-                  <a:tcPr>
-                    <a:solidFill>
-                      <a:srgbClr val="FFFFFF"/>
-                    </a:solidFill>
-                  </a:tcPr>
-                </a:tc>
-                <a:tc>
-                  <a:txBody>
-                    <a:bodyPr wrap="square"/>
-                    <a:lstStyle/>
-                    <a:p>
-                      <a:pPr algn="l"/>
-                      <a:r>
-                        <a:rPr sz="1000" b="0">
-                          <a:solidFill>
-                            <a:srgbClr val="1D1B43"/>
-                          </a:solidFill>
-                          <a:latin typeface="Calibri"/>
-                        </a:rPr>
-                        <a:t>SAO PAULO/SP</a:t>
-                      </a:r>
-                    </a:p>
-                  </a:txBody>
-                  <a:tcPr>
-                    <a:solidFill>
-                      <a:srgbClr val="FFFFFF"/>
-                    </a:solidFill>
-                  </a:tcPr>
-                </a:tc>
-                <a:tc>
-                  <a:txBody>
-                    <a:bodyPr wrap="square"/>
-                    <a:lstStyle/>
-                    <a:p>
-                      <a:pPr algn="l"/>
-                      <a:r>
-                        <a:rPr sz="1000" b="0">
-                          <a:solidFill>
-                            <a:srgbClr val="1D1B43"/>
-                          </a:solidFill>
-                          <a:latin typeface="Calibri"/>
-                        </a:rPr>
-                        <a:t>29/04/2026</a:t>
-                      </a:r>
-                    </a:p>
-                  </a:txBody>
-                  <a:tcPr>
-                    <a:solidFill>
-                      <a:srgbClr val="FFFFFF"/>
-                    </a:solidFill>
-                  </a:tcPr>
-                </a:tc>
-                <a:tc>
-                  <a:txBody>
-                    <a:bodyPr wrap="square"/>
-                    <a:lstStyle/>
-                    <a:p>
-                      <a:pPr algn="l"/>
-                      <a:r>
-                        <a:rPr sz="1000" b="0">
-                          <a:solidFill>
-                            <a:srgbClr val="1D1B43"/>
-                          </a:solidFill>
-                          <a:latin typeface="Calibri"/>
-                        </a:rPr>
-                        <a:t>FORA DO PRAZO</a:t>
-                      </a:r>
-                    </a:p>
-                  </a:txBody>
-                  <a:tcPr>
-                    <a:solidFill>
-                      <a:srgbClr val="FFFFFF"/>
                     </a:solidFill>
                   </a:tcPr>
                 </a:tc>
@@ -7382,7 +6797,7 @@
               <a:tr h="399010">
                 <a:tc>
                   <a:txBody>
-                    <a:bodyPr wrap="square"/>
+                    <a:bodyPr/>
                     <a:lstStyle/>
                     <a:p>
                       <a:pPr algn="ctr"/>
@@ -7405,7 +6820,7 @@
                 </a:tc>
                 <a:tc>
                   <a:txBody>
-                    <a:bodyPr wrap="square"/>
+                    <a:bodyPr/>
                     <a:lstStyle/>
                     <a:p>
                       <a:pPr algn="ctr"/>
@@ -7428,7 +6843,7 @@
                 </a:tc>
                 <a:tc>
                   <a:txBody>
-                    <a:bodyPr wrap="square"/>
+                    <a:bodyPr/>
                     <a:lstStyle/>
                     <a:p>
                       <a:pPr algn="ctr"/>
@@ -7451,7 +6866,7 @@
                 </a:tc>
                 <a:tc>
                   <a:txBody>
-                    <a:bodyPr wrap="square"/>
+                    <a:bodyPr/>
                     <a:lstStyle/>
                     <a:p>
                       <a:pPr algn="ctr"/>
@@ -7474,7 +6889,7 @@
                 </a:tc>
                 <a:tc>
                   <a:txBody>
-                    <a:bodyPr wrap="square"/>
+                    <a:bodyPr/>
                     <a:lstStyle/>
                     <a:p>
                       <a:pPr algn="ctr"/>
@@ -7497,7 +6912,7 @@
                 </a:tc>
                 <a:tc>
                   <a:txBody>
-                    <a:bodyPr wrap="square"/>
+                    <a:bodyPr/>
                     <a:lstStyle/>
                     <a:p>
                       <a:pPr algn="ctr"/>
@@ -7522,7 +6937,7 @@
               <a:tr h="399010">
                 <a:tc>
                   <a:txBody>
-                    <a:bodyPr wrap="square"/>
+                    <a:bodyPr/>
                     <a:lstStyle/>
                     <a:p>
                       <a:pPr algn="l"/>
@@ -7545,18 +6960,18 @@
                 </a:tc>
                 <a:tc>
                   <a:txBody>
-                    <a:bodyPr wrap="square"/>
-                    <a:lstStyle/>
-                    <a:p>
-                      <a:pPr algn="l"/>
-                      <a:r>
-                        <a:rPr sz="1000" b="0">
-                          <a:solidFill>
-                            <a:srgbClr val="1D1B43"/>
-                          </a:solidFill>
-                          <a:latin typeface="Calibri"/>
-                        </a:rPr>
-                        <a:t>301</a:t>
+                    <a:bodyPr/>
+                    <a:lstStyle/>
+                    <a:p>
+                      <a:pPr algn="l"/>
+                      <a:r>
+                        <a:rPr sz="1000" b="0">
+                          <a:solidFill>
+                            <a:srgbClr val="1D1B43"/>
+                          </a:solidFill>
+                          <a:latin typeface="Calibri"/>
+                        </a:rPr>
+                        <a:t>275</a:t>
                       </a:r>
                     </a:p>
                   </a:txBody>
@@ -7568,18 +6983,18 @@
                 </a:tc>
                 <a:tc>
                   <a:txBody>
-                    <a:bodyPr wrap="square"/>
-                    <a:lstStyle/>
-                    <a:p>
-                      <a:pPr algn="l"/>
-                      <a:r>
-                        <a:rPr sz="1000" b="0">
-                          <a:solidFill>
-                            <a:srgbClr val="1D1B43"/>
-                          </a:solidFill>
-                          <a:latin typeface="Calibri"/>
-                        </a:rPr>
-                        <a:t>294</a:t>
+                    <a:bodyPr/>
+                    <a:lstStyle/>
+                    <a:p>
+                      <a:pPr algn="l"/>
+                      <a:r>
+                        <a:rPr sz="1000" b="0">
+                          <a:solidFill>
+                            <a:srgbClr val="1D1B43"/>
+                          </a:solidFill>
+                          <a:latin typeface="Calibri"/>
+                        </a:rPr>
+                        <a:t>268</a:t>
                       </a:r>
                     </a:p>
                   </a:txBody>
@@ -7591,7 +7006,7 @@
                 </a:tc>
                 <a:tc>
                   <a:txBody>
-                    <a:bodyPr wrap="square"/>
+                    <a:bodyPr/>
                     <a:lstStyle/>
                     <a:p>
                       <a:pPr algn="l"/>
@@ -7614,18 +7029,18 @@
                 </a:tc>
                 <a:tc>
                   <a:txBody>
-                    <a:bodyPr wrap="square"/>
-                    <a:lstStyle/>
-                    <a:p>
-                      <a:pPr algn="l"/>
-                      <a:r>
-                        <a:rPr sz="1000" b="0">
-                          <a:solidFill>
-                            <a:srgbClr val="1D1B43"/>
-                          </a:solidFill>
-                          <a:latin typeface="Calibri"/>
-                        </a:rPr>
-                        <a:t>97.7%</a:t>
+                    <a:bodyPr/>
+                    <a:lstStyle/>
+                    <a:p>
+                      <a:pPr algn="l"/>
+                      <a:r>
+                        <a:rPr sz="1000" b="0">
+                          <a:solidFill>
+                            <a:srgbClr val="1D1B43"/>
+                          </a:solidFill>
+                          <a:latin typeface="Calibri"/>
+                        </a:rPr>
+                        <a:t>97.5%</a:t>
                       </a:r>
                     </a:p>
                   </a:txBody>
@@ -7637,7 +7052,7 @@
                 </a:tc>
                 <a:tc>
                   <a:txBody>
-                    <a:bodyPr wrap="square"/>
+                    <a:bodyPr/>
                     <a:lstStyle/>
                     <a:p>
                       <a:pPr algn="l"/>
@@ -7662,7 +7077,7 @@
               <a:tr h="399010">
                 <a:tc>
                   <a:txBody>
-                    <a:bodyPr wrap="square"/>
+                    <a:bodyPr/>
                     <a:lstStyle/>
                     <a:p>
                       <a:pPr algn="l"/>
@@ -7685,18 +7100,18 @@
                 </a:tc>
                 <a:tc>
                   <a:txBody>
-                    <a:bodyPr wrap="square"/>
-                    <a:lstStyle/>
-                    <a:p>
-                      <a:pPr algn="l"/>
-                      <a:r>
-                        <a:rPr sz="1000" b="0">
-                          <a:solidFill>
-                            <a:srgbClr val="1D1B43"/>
-                          </a:solidFill>
-                          <a:latin typeface="Calibri"/>
-                        </a:rPr>
-                        <a:t>63</a:t>
+                    <a:bodyPr/>
+                    <a:lstStyle/>
+                    <a:p>
+                      <a:pPr algn="l"/>
+                      <a:r>
+                        <a:rPr sz="1000" b="0">
+                          <a:solidFill>
+                            <a:srgbClr val="1D1B43"/>
+                          </a:solidFill>
+                          <a:latin typeface="Calibri"/>
+                        </a:rPr>
+                        <a:t>59</a:t>
                       </a:r>
                     </a:p>
                   </a:txBody>
@@ -7708,18 +7123,18 @@
                 </a:tc>
                 <a:tc>
                   <a:txBody>
-                    <a:bodyPr wrap="square"/>
-                    <a:lstStyle/>
-                    <a:p>
-                      <a:pPr algn="l"/>
-                      <a:r>
-                        <a:rPr sz="1000" b="0">
-                          <a:solidFill>
-                            <a:srgbClr val="1D1B43"/>
-                          </a:solidFill>
-                          <a:latin typeface="Calibri"/>
-                        </a:rPr>
-                        <a:t>59</a:t>
+                    <a:bodyPr/>
+                    <a:lstStyle/>
+                    <a:p>
+                      <a:pPr algn="l"/>
+                      <a:r>
+                        <a:rPr sz="1000" b="0">
+                          <a:solidFill>
+                            <a:srgbClr val="1D1B43"/>
+                          </a:solidFill>
+                          <a:latin typeface="Calibri"/>
+                        </a:rPr>
+                        <a:t>58</a:t>
                       </a:r>
                     </a:p>
                   </a:txBody>
@@ -7731,18 +7146,18 @@
                 </a:tc>
                 <a:tc>
                   <a:txBody>
-                    <a:bodyPr wrap="square"/>
-                    <a:lstStyle/>
-                    <a:p>
-                      <a:pPr algn="l"/>
-                      <a:r>
-                        <a:rPr sz="1000" b="0">
-                          <a:solidFill>
-                            <a:srgbClr val="1D1B43"/>
-                          </a:solidFill>
-                          <a:latin typeface="Calibri"/>
-                        </a:rPr>
-                        <a:t>4</a:t>
+                    <a:bodyPr/>
+                    <a:lstStyle/>
+                    <a:p>
+                      <a:pPr algn="l"/>
+                      <a:r>
+                        <a:rPr sz="1000" b="0">
+                          <a:solidFill>
+                            <a:srgbClr val="1D1B43"/>
+                          </a:solidFill>
+                          <a:latin typeface="Calibri"/>
+                        </a:rPr>
+                        <a:t>1</a:t>
                       </a:r>
                     </a:p>
                   </a:txBody>
@@ -7754,18 +7169,18 @@
                 </a:tc>
                 <a:tc>
                   <a:txBody>
-                    <a:bodyPr wrap="square"/>
-                    <a:lstStyle/>
-                    <a:p>
-                      <a:pPr algn="l"/>
-                      <a:r>
-                        <a:rPr sz="1000" b="0">
-                          <a:solidFill>
-                            <a:srgbClr val="1D1B43"/>
-                          </a:solidFill>
-                          <a:latin typeface="Calibri"/>
-                        </a:rPr>
-                        <a:t>93.7%</a:t>
+                    <a:bodyPr/>
+                    <a:lstStyle/>
+                    <a:p>
+                      <a:pPr algn="l"/>
+                      <a:r>
+                        <a:rPr sz="1000" b="0">
+                          <a:solidFill>
+                            <a:srgbClr val="1D1B43"/>
+                          </a:solidFill>
+                          <a:latin typeface="Calibri"/>
+                        </a:rPr>
+                        <a:t>98.3%</a:t>
                       </a:r>
                     </a:p>
                   </a:txBody>
@@ -7777,18 +7192,18 @@
                 </a:tc>
                 <a:tc>
                   <a:txBody>
-                    <a:bodyPr wrap="square"/>
-                    <a:lstStyle/>
-                    <a:p>
-                      <a:pPr algn="l"/>
-                      <a:r>
-                        <a:rPr sz="1000" b="0">
-                          <a:solidFill>
-                            <a:srgbClr val="1D1B43"/>
-                          </a:solidFill>
-                          <a:latin typeface="Calibri"/>
-                        </a:rPr>
-                        <a:t>Regular</a:t>
+                    <a:bodyPr/>
+                    <a:lstStyle/>
+                    <a:p>
+                      <a:pPr algn="l"/>
+                      <a:r>
+                        <a:rPr sz="1000" b="0">
+                          <a:solidFill>
+                            <a:srgbClr val="1D1B43"/>
+                          </a:solidFill>
+                          <a:latin typeface="Calibri"/>
+                        </a:rPr>
+                        <a:t>Excelente</a:t>
                       </a:r>
                     </a:p>
                   </a:txBody>
@@ -7802,7 +7217,7 @@
               <a:tr h="399010">
                 <a:tc>
                   <a:txBody>
-                    <a:bodyPr wrap="square"/>
+                    <a:bodyPr/>
                     <a:lstStyle/>
                     <a:p>
                       <a:pPr algn="l"/>
@@ -7825,18 +7240,18 @@
                 </a:tc>
                 <a:tc>
                   <a:txBody>
-                    <a:bodyPr wrap="square"/>
-                    <a:lstStyle/>
-                    <a:p>
-                      <a:pPr algn="l"/>
-                      <a:r>
-                        <a:rPr sz="1000" b="0">
-                          <a:solidFill>
-                            <a:srgbClr val="1D1B43"/>
-                          </a:solidFill>
-                          <a:latin typeface="Calibri"/>
-                        </a:rPr>
-                        <a:t>61</a:t>
+                    <a:bodyPr/>
+                    <a:lstStyle/>
+                    <a:p>
+                      <a:pPr algn="l"/>
+                      <a:r>
+                        <a:rPr sz="1000" b="0">
+                          <a:solidFill>
+                            <a:srgbClr val="1D1B43"/>
+                          </a:solidFill>
+                          <a:latin typeface="Calibri"/>
+                        </a:rPr>
+                        <a:t>58</a:t>
                       </a:r>
                     </a:p>
                   </a:txBody>
@@ -7848,18 +7263,18 @@
                 </a:tc>
                 <a:tc>
                   <a:txBody>
-                    <a:bodyPr wrap="square"/>
-                    <a:lstStyle/>
-                    <a:p>
-                      <a:pPr algn="l"/>
-                      <a:r>
-                        <a:rPr sz="1000" b="0">
-                          <a:solidFill>
-                            <a:srgbClr val="1D1B43"/>
-                          </a:solidFill>
-                          <a:latin typeface="Calibri"/>
-                        </a:rPr>
-                        <a:t>60</a:t>
+                    <a:bodyPr/>
+                    <a:lstStyle/>
+                    <a:p>
+                      <a:pPr algn="l"/>
+                      <a:r>
+                        <a:rPr sz="1000" b="0">
+                          <a:solidFill>
+                            <a:srgbClr val="1D1B43"/>
+                          </a:solidFill>
+                          <a:latin typeface="Calibri"/>
+                        </a:rPr>
+                        <a:t>57</a:t>
                       </a:r>
                     </a:p>
                   </a:txBody>
@@ -7871,7 +7286,7 @@
                 </a:tc>
                 <a:tc>
                   <a:txBody>
-                    <a:bodyPr wrap="square"/>
+                    <a:bodyPr/>
                     <a:lstStyle/>
                     <a:p>
                       <a:pPr algn="l"/>
@@ -7894,18 +7309,18 @@
                 </a:tc>
                 <a:tc>
                   <a:txBody>
-                    <a:bodyPr wrap="square"/>
-                    <a:lstStyle/>
-                    <a:p>
-                      <a:pPr algn="l"/>
-                      <a:r>
-                        <a:rPr sz="1000" b="0">
-                          <a:solidFill>
-                            <a:srgbClr val="1D1B43"/>
-                          </a:solidFill>
-                          <a:latin typeface="Calibri"/>
-                        </a:rPr>
-                        <a:t>98.4%</a:t>
+                    <a:bodyPr/>
+                    <a:lstStyle/>
+                    <a:p>
+                      <a:pPr algn="l"/>
+                      <a:r>
+                        <a:rPr sz="1000" b="0">
+                          <a:solidFill>
+                            <a:srgbClr val="1D1B43"/>
+                          </a:solidFill>
+                          <a:latin typeface="Calibri"/>
+                        </a:rPr>
+                        <a:t>98.3%</a:t>
                       </a:r>
                     </a:p>
                   </a:txBody>
@@ -7917,7 +7332,7 @@
                 </a:tc>
                 <a:tc>
                   <a:txBody>
-                    <a:bodyPr wrap="square"/>
+                    <a:bodyPr/>
                     <a:lstStyle/>
                     <a:p>
                       <a:pPr algn="l"/>
@@ -7942,7 +7357,7 @@
               <a:tr h="399010">
                 <a:tc>
                   <a:txBody>
-                    <a:bodyPr wrap="square"/>
+                    <a:bodyPr/>
                     <a:lstStyle/>
                     <a:p>
                       <a:pPr algn="l"/>
@@ -7965,18 +7380,18 @@
                 </a:tc>
                 <a:tc>
                   <a:txBody>
-                    <a:bodyPr wrap="square"/>
-                    <a:lstStyle/>
-                    <a:p>
-                      <a:pPr algn="l"/>
-                      <a:r>
-                        <a:rPr sz="1000" b="0">
-                          <a:solidFill>
-                            <a:srgbClr val="1D1B43"/>
-                          </a:solidFill>
-                          <a:latin typeface="Calibri"/>
-                        </a:rPr>
-                        <a:t>51</a:t>
+                    <a:bodyPr/>
+                    <a:lstStyle/>
+                    <a:p>
+                      <a:pPr algn="l"/>
+                      <a:r>
+                        <a:rPr sz="1000" b="0">
+                          <a:solidFill>
+                            <a:srgbClr val="1D1B43"/>
+                          </a:solidFill>
+                          <a:latin typeface="Calibri"/>
+                        </a:rPr>
+                        <a:t>48</a:t>
                       </a:r>
                     </a:p>
                   </a:txBody>
@@ -7988,18 +7403,18 @@
                 </a:tc>
                 <a:tc>
                   <a:txBody>
-                    <a:bodyPr wrap="square"/>
-                    <a:lstStyle/>
-                    <a:p>
-                      <a:pPr algn="l"/>
-                      <a:r>
-                        <a:rPr sz="1000" b="0">
-                          <a:solidFill>
-                            <a:srgbClr val="1D1B43"/>
-                          </a:solidFill>
-                          <a:latin typeface="Calibri"/>
-                        </a:rPr>
-                        <a:t>51</a:t>
+                    <a:bodyPr/>
+                    <a:lstStyle/>
+                    <a:p>
+                      <a:pPr algn="l"/>
+                      <a:r>
+                        <a:rPr sz="1000" b="0">
+                          <a:solidFill>
+                            <a:srgbClr val="1D1B43"/>
+                          </a:solidFill>
+                          <a:latin typeface="Calibri"/>
+                        </a:rPr>
+                        <a:t>48</a:t>
                       </a:r>
                     </a:p>
                   </a:txBody>
@@ -8011,7 +7426,7 @@
                 </a:tc>
                 <a:tc>
                   <a:txBody>
-                    <a:bodyPr wrap="square"/>
+                    <a:bodyPr/>
                     <a:lstStyle/>
                     <a:p>
                       <a:pPr algn="l"/>
@@ -8034,7 +7449,7 @@
                 </a:tc>
                 <a:tc>
                   <a:txBody>
-                    <a:bodyPr wrap="square"/>
+                    <a:bodyPr/>
                     <a:lstStyle/>
                     <a:p>
                       <a:pPr algn="l"/>
@@ -8057,7 +7472,7 @@
                 </a:tc>
                 <a:tc>
                   <a:txBody>
-                    <a:bodyPr wrap="square"/>
+                    <a:bodyPr/>
                     <a:lstStyle/>
                     <a:p>
                       <a:pPr algn="l"/>
@@ -8082,7 +7497,7 @@
               <a:tr h="399010">
                 <a:tc>
                   <a:txBody>
-                    <a:bodyPr wrap="square"/>
+                    <a:bodyPr/>
                     <a:lstStyle/>
                     <a:p>
                       <a:pPr algn="l"/>
@@ -8105,18 +7520,18 @@
                 </a:tc>
                 <a:tc>
                   <a:txBody>
-                    <a:bodyPr wrap="square"/>
-                    <a:lstStyle/>
-                    <a:p>
-                      <a:pPr algn="l"/>
-                      <a:r>
-                        <a:rPr sz="1000" b="0">
-                          <a:solidFill>
-                            <a:srgbClr val="1D1B43"/>
-                          </a:solidFill>
-                          <a:latin typeface="Calibri"/>
-                        </a:rPr>
-                        <a:t>47</a:t>
+                    <a:bodyPr/>
+                    <a:lstStyle/>
+                    <a:p>
+                      <a:pPr algn="l"/>
+                      <a:r>
+                        <a:rPr sz="1000" b="0">
+                          <a:solidFill>
+                            <a:srgbClr val="1D1B43"/>
+                          </a:solidFill>
+                          <a:latin typeface="Calibri"/>
+                        </a:rPr>
+                        <a:t>43</a:t>
                       </a:r>
                     </a:p>
                   </a:txBody>
@@ -8128,18 +7543,18 @@
                 </a:tc>
                 <a:tc>
                   <a:txBody>
-                    <a:bodyPr wrap="square"/>
-                    <a:lstStyle/>
-                    <a:p>
-                      <a:pPr algn="l"/>
-                      <a:r>
-                        <a:rPr sz="1000" b="0">
-                          <a:solidFill>
-                            <a:srgbClr val="1D1B43"/>
-                          </a:solidFill>
-                          <a:latin typeface="Calibri"/>
-                        </a:rPr>
-                        <a:t>46</a:t>
+                    <a:bodyPr/>
+                    <a:lstStyle/>
+                    <a:p>
+                      <a:pPr algn="l"/>
+                      <a:r>
+                        <a:rPr sz="1000" b="0">
+                          <a:solidFill>
+                            <a:srgbClr val="1D1B43"/>
+                          </a:solidFill>
+                          <a:latin typeface="Calibri"/>
+                        </a:rPr>
+                        <a:t>42</a:t>
                       </a:r>
                     </a:p>
                   </a:txBody>
@@ -8151,7 +7566,7 @@
                 </a:tc>
                 <a:tc>
                   <a:txBody>
-                    <a:bodyPr wrap="square"/>
+                    <a:bodyPr/>
                     <a:lstStyle/>
                     <a:p>
                       <a:pPr algn="l"/>
@@ -8174,18 +7589,18 @@
                 </a:tc>
                 <a:tc>
                   <a:txBody>
-                    <a:bodyPr wrap="square"/>
-                    <a:lstStyle/>
-                    <a:p>
-                      <a:pPr algn="l"/>
-                      <a:r>
-                        <a:rPr sz="1000" b="0">
-                          <a:solidFill>
-                            <a:srgbClr val="1D1B43"/>
-                          </a:solidFill>
-                          <a:latin typeface="Calibri"/>
-                        </a:rPr>
-                        <a:t>97.9%</a:t>
+                    <a:bodyPr/>
+                    <a:lstStyle/>
+                    <a:p>
+                      <a:pPr algn="l"/>
+                      <a:r>
+                        <a:rPr sz="1000" b="0">
+                          <a:solidFill>
+                            <a:srgbClr val="1D1B43"/>
+                          </a:solidFill>
+                          <a:latin typeface="Calibri"/>
+                        </a:rPr>
+                        <a:t>97.7%</a:t>
                       </a:r>
                     </a:p>
                   </a:txBody>
@@ -8197,7 +7612,7 @@
                 </a:tc>
                 <a:tc>
                   <a:txBody>
-                    <a:bodyPr wrap="square"/>
+                    <a:bodyPr/>
                     <a:lstStyle/>
                     <a:p>
                       <a:pPr algn="l"/>
@@ -8222,7 +7637,7 @@
               <a:tr h="399010">
                 <a:tc>
                   <a:txBody>
-                    <a:bodyPr wrap="square"/>
+                    <a:bodyPr/>
                     <a:lstStyle/>
                     <a:p>
                       <a:pPr algn="l"/>
@@ -8245,18 +7660,18 @@
                 </a:tc>
                 <a:tc>
                   <a:txBody>
-                    <a:bodyPr wrap="square"/>
-                    <a:lstStyle/>
-                    <a:p>
-                      <a:pPr algn="l"/>
-                      <a:r>
-                        <a:rPr sz="1000" b="0">
-                          <a:solidFill>
-                            <a:srgbClr val="1D1B43"/>
-                          </a:solidFill>
-                          <a:latin typeface="Calibri"/>
-                        </a:rPr>
-                        <a:t>23</a:t>
+                    <a:bodyPr/>
+                    <a:lstStyle/>
+                    <a:p>
+                      <a:pPr algn="l"/>
+                      <a:r>
+                        <a:rPr sz="1000" b="0">
+                          <a:solidFill>
+                            <a:srgbClr val="1D1B43"/>
+                          </a:solidFill>
+                          <a:latin typeface="Calibri"/>
+                        </a:rPr>
+                        <a:t>20</a:t>
                       </a:r>
                     </a:p>
                   </a:txBody>
@@ -8268,18 +7683,18 @@
                 </a:tc>
                 <a:tc>
                   <a:txBody>
-                    <a:bodyPr wrap="square"/>
-                    <a:lstStyle/>
-                    <a:p>
-                      <a:pPr algn="l"/>
-                      <a:r>
-                        <a:rPr sz="1000" b="0">
-                          <a:solidFill>
-                            <a:srgbClr val="1D1B43"/>
-                          </a:solidFill>
-                          <a:latin typeface="Calibri"/>
-                        </a:rPr>
-                        <a:t>21</a:t>
+                    <a:bodyPr/>
+                    <a:lstStyle/>
+                    <a:p>
+                      <a:pPr algn="l"/>
+                      <a:r>
+                        <a:rPr sz="1000" b="0">
+                          <a:solidFill>
+                            <a:srgbClr val="1D1B43"/>
+                          </a:solidFill>
+                          <a:latin typeface="Calibri"/>
+                        </a:rPr>
+                        <a:t>20</a:t>
                       </a:r>
                     </a:p>
                   </a:txBody>
@@ -8291,18 +7706,18 @@
                 </a:tc>
                 <a:tc>
                   <a:txBody>
-                    <a:bodyPr wrap="square"/>
-                    <a:lstStyle/>
-                    <a:p>
-                      <a:pPr algn="l"/>
-                      <a:r>
-                        <a:rPr sz="1000" b="0">
-                          <a:solidFill>
-                            <a:srgbClr val="1D1B43"/>
-                          </a:solidFill>
-                          <a:latin typeface="Calibri"/>
-                        </a:rPr>
-                        <a:t>2</a:t>
+                    <a:bodyPr/>
+                    <a:lstStyle/>
+                    <a:p>
+                      <a:pPr algn="l"/>
+                      <a:r>
+                        <a:rPr sz="1000" b="0">
+                          <a:solidFill>
+                            <a:srgbClr val="1D1B43"/>
+                          </a:solidFill>
+                          <a:latin typeface="Calibri"/>
+                        </a:rPr>
+                        <a:t>0</a:t>
                       </a:r>
                     </a:p>
                   </a:txBody>
@@ -8314,18 +7729,18 @@
                 </a:tc>
                 <a:tc>
                   <a:txBody>
-                    <a:bodyPr wrap="square"/>
-                    <a:lstStyle/>
-                    <a:p>
-                      <a:pPr algn="l"/>
-                      <a:r>
-                        <a:rPr sz="1000" b="0">
-                          <a:solidFill>
-                            <a:srgbClr val="1D1B43"/>
-                          </a:solidFill>
-                          <a:latin typeface="Calibri"/>
-                        </a:rPr>
-                        <a:t>91.3%</a:t>
+                    <a:bodyPr/>
+                    <a:lstStyle/>
+                    <a:p>
+                      <a:pPr algn="l"/>
+                      <a:r>
+                        <a:rPr sz="1000" b="0">
+                          <a:solidFill>
+                            <a:srgbClr val="1D1B43"/>
+                          </a:solidFill>
+                          <a:latin typeface="Calibri"/>
+                        </a:rPr>
+                        <a:t>100.0%</a:t>
                       </a:r>
                     </a:p>
                   </a:txBody>
@@ -8337,18 +7752,18 @@
                 </a:tc>
                 <a:tc>
                   <a:txBody>
-                    <a:bodyPr wrap="square"/>
-                    <a:lstStyle/>
-                    <a:p>
-                      <a:pPr algn="l"/>
-                      <a:r>
-                        <a:rPr sz="1000" b="0">
-                          <a:solidFill>
-                            <a:srgbClr val="1D1B43"/>
-                          </a:solidFill>
-                          <a:latin typeface="Calibri"/>
-                        </a:rPr>
-                        <a:t>Regular</a:t>
+                    <a:bodyPr/>
+                    <a:lstStyle/>
+                    <a:p>
+                      <a:pPr algn="l"/>
+                      <a:r>
+                        <a:rPr sz="1000" b="0">
+                          <a:solidFill>
+                            <a:srgbClr val="1D1B43"/>
+                          </a:solidFill>
+                          <a:latin typeface="Calibri"/>
+                        </a:rPr>
+                        <a:t>Excelente</a:t>
                       </a:r>
                     </a:p>
                   </a:txBody>
@@ -8362,7 +7777,7 @@
               <a:tr h="399010">
                 <a:tc>
                   <a:txBody>
-                    <a:bodyPr wrap="square"/>
+                    <a:bodyPr/>
                     <a:lstStyle/>
                     <a:p>
                       <a:pPr algn="l"/>
@@ -8385,18 +7800,18 @@
                 </a:tc>
                 <a:tc>
                   <a:txBody>
-                    <a:bodyPr wrap="square"/>
-                    <a:lstStyle/>
-                    <a:p>
-                      <a:pPr algn="l"/>
-                      <a:r>
-                        <a:rPr sz="1000" b="0">
-                          <a:solidFill>
-                            <a:srgbClr val="1D1B43"/>
-                          </a:solidFill>
-                          <a:latin typeface="Calibri"/>
-                        </a:rPr>
-                        <a:t>14</a:t>
+                    <a:bodyPr/>
+                    <a:lstStyle/>
+                    <a:p>
+                      <a:pPr algn="l"/>
+                      <a:r>
+                        <a:rPr sz="1000" b="0">
+                          <a:solidFill>
+                            <a:srgbClr val="1D1B43"/>
+                          </a:solidFill>
+                          <a:latin typeface="Calibri"/>
+                        </a:rPr>
+                        <a:t>11</a:t>
                       </a:r>
                     </a:p>
                   </a:txBody>
@@ -8408,18 +7823,18 @@
                 </a:tc>
                 <a:tc>
                   <a:txBody>
-                    <a:bodyPr wrap="square"/>
-                    <a:lstStyle/>
-                    <a:p>
-                      <a:pPr algn="l"/>
-                      <a:r>
-                        <a:rPr sz="1000" b="0">
-                          <a:solidFill>
-                            <a:srgbClr val="1D1B43"/>
-                          </a:solidFill>
-                          <a:latin typeface="Calibri"/>
-                        </a:rPr>
-                        <a:t>14</a:t>
+                    <a:bodyPr/>
+                    <a:lstStyle/>
+                    <a:p>
+                      <a:pPr algn="l"/>
+                      <a:r>
+                        <a:rPr sz="1000" b="0">
+                          <a:solidFill>
+                            <a:srgbClr val="1D1B43"/>
+                          </a:solidFill>
+                          <a:latin typeface="Calibri"/>
+                        </a:rPr>
+                        <a:t>11</a:t>
                       </a:r>
                     </a:p>
                   </a:txBody>
@@ -8431,7 +7846,7 @@
                 </a:tc>
                 <a:tc>
                   <a:txBody>
-                    <a:bodyPr wrap="square"/>
+                    <a:bodyPr/>
                     <a:lstStyle/>
                     <a:p>
                       <a:pPr algn="l"/>
@@ -8454,7 +7869,7 @@
                 </a:tc>
                 <a:tc>
                   <a:txBody>
-                    <a:bodyPr wrap="square"/>
+                    <a:bodyPr/>
                     <a:lstStyle/>
                     <a:p>
                       <a:pPr algn="l"/>
@@ -8477,7 +7892,7 @@
                 </a:tc>
                 <a:tc>
                   <a:txBody>
-                    <a:bodyPr wrap="square"/>
+                    <a:bodyPr/>
                     <a:lstStyle/>
                     <a:p>
                       <a:pPr algn="l"/>
@@ -8502,7 +7917,7 @@
               <a:tr h="399010">
                 <a:tc>
                   <a:txBody>
-                    <a:bodyPr wrap="square"/>
+                    <a:bodyPr/>
                     <a:lstStyle/>
                     <a:p>
                       <a:pPr algn="l"/>
@@ -8525,7 +7940,7 @@
                 </a:tc>
                 <a:tc>
                   <a:txBody>
-                    <a:bodyPr wrap="square"/>
+                    <a:bodyPr/>
                     <a:lstStyle/>
                     <a:p>
                       <a:pPr algn="l"/>
@@ -8548,7 +7963,7 @@
                 </a:tc>
                 <a:tc>
                   <a:txBody>
-                    <a:bodyPr wrap="square"/>
+                    <a:bodyPr/>
                     <a:lstStyle/>
                     <a:p>
                       <a:pPr algn="l"/>
@@ -8571,7 +7986,7 @@
                 </a:tc>
                 <a:tc>
                   <a:txBody>
-                    <a:bodyPr wrap="square"/>
+                    <a:bodyPr/>
                     <a:lstStyle/>
                     <a:p>
                       <a:pPr algn="l"/>
@@ -8594,7 +8009,7 @@
                 </a:tc>
                 <a:tc>
                   <a:txBody>
-                    <a:bodyPr wrap="square"/>
+                    <a:bodyPr/>
                     <a:lstStyle/>
                     <a:p>
                       <a:pPr algn="l"/>
@@ -8617,7 +8032,7 @@
                 </a:tc>
                 <a:tc>
                   <a:txBody>
-                    <a:bodyPr wrap="square"/>
+                    <a:bodyPr/>
                     <a:lstStyle/>
                     <a:p>
                       <a:pPr algn="l"/>
@@ -8642,7 +8057,7 @@
               <a:tr h="399010">
                 <a:tc>
                   <a:txBody>
-                    <a:bodyPr wrap="square"/>
+                    <a:bodyPr/>
                     <a:lstStyle/>
                     <a:p>
                       <a:pPr algn="l"/>
@@ -8665,18 +8080,18 @@
                 </a:tc>
                 <a:tc>
                   <a:txBody>
-                    <a:bodyPr wrap="square"/>
-                    <a:lstStyle/>
-                    <a:p>
-                      <a:pPr algn="l"/>
-                      <a:r>
-                        <a:rPr sz="1000" b="0">
-                          <a:solidFill>
-                            <a:srgbClr val="1D1B43"/>
-                          </a:solidFill>
-                          <a:latin typeface="Calibri"/>
-                        </a:rPr>
-                        <a:t>7</a:t>
+                    <a:bodyPr/>
+                    <a:lstStyle/>
+                    <a:p>
+                      <a:pPr algn="l"/>
+                      <a:r>
+                        <a:rPr sz="1000" b="0">
+                          <a:solidFill>
+                            <a:srgbClr val="1D1B43"/>
+                          </a:solidFill>
+                          <a:latin typeface="Calibri"/>
+                        </a:rPr>
+                        <a:t>6</a:t>
                       </a:r>
                     </a:p>
                   </a:txBody>
@@ -8688,18 +8103,18 @@
                 </a:tc>
                 <a:tc>
                   <a:txBody>
-                    <a:bodyPr wrap="square"/>
-                    <a:lstStyle/>
-                    <a:p>
-                      <a:pPr algn="l"/>
-                      <a:r>
-                        <a:rPr sz="1000" b="0">
-                          <a:solidFill>
-                            <a:srgbClr val="1D1B43"/>
-                          </a:solidFill>
-                          <a:latin typeface="Calibri"/>
-                        </a:rPr>
-                        <a:t>7</a:t>
+                    <a:bodyPr/>
+                    <a:lstStyle/>
+                    <a:p>
+                      <a:pPr algn="l"/>
+                      <a:r>
+                        <a:rPr sz="1000" b="0">
+                          <a:solidFill>
+                            <a:srgbClr val="1D1B43"/>
+                          </a:solidFill>
+                          <a:latin typeface="Calibri"/>
+                        </a:rPr>
+                        <a:t>6</a:t>
                       </a:r>
                     </a:p>
                   </a:txBody>
@@ -8711,7 +8126,7 @@
                 </a:tc>
                 <a:tc>
                   <a:txBody>
-                    <a:bodyPr wrap="square"/>
+                    <a:bodyPr/>
                     <a:lstStyle/>
                     <a:p>
                       <a:pPr algn="l"/>
@@ -8734,7 +8149,7 @@
                 </a:tc>
                 <a:tc>
                   <a:txBody>
-                    <a:bodyPr wrap="square"/>
+                    <a:bodyPr/>
                     <a:lstStyle/>
                     <a:p>
                       <a:pPr algn="l"/>
@@ -8757,7 +8172,7 @@
                 </a:tc>
                 <a:tc>
                   <a:txBody>
-                    <a:bodyPr wrap="square"/>
+                    <a:bodyPr/>
                     <a:lstStyle/>
                     <a:p>
                       <a:pPr algn="l"/>
@@ -8782,18 +8197,18 @@
               <a:tr h="399010">
                 <a:tc>
                   <a:txBody>
-                    <a:bodyPr wrap="square"/>
-                    <a:lstStyle/>
-                    <a:p>
-                      <a:pPr algn="l"/>
-                      <a:r>
-                        <a:rPr sz="1000" b="0">
-                          <a:solidFill>
-                            <a:srgbClr val="1D1B43"/>
-                          </a:solidFill>
-                          <a:latin typeface="Calibri"/>
-                        </a:rPr>
-                        <a:t>AM</a:t>
+                    <a:bodyPr/>
+                    <a:lstStyle/>
+                    <a:p>
+                      <a:pPr algn="l"/>
+                      <a:r>
+                        <a:rPr sz="1000" b="0">
+                          <a:solidFill>
+                            <a:srgbClr val="1D1B43"/>
+                          </a:solidFill>
+                          <a:latin typeface="Calibri"/>
+                        </a:rPr>
+                        <a:t>MS</a:t>
                       </a:r>
                     </a:p>
                   </a:txBody>
@@ -8805,7 +8220,7 @@
                 </a:tc>
                 <a:tc>
                   <a:txBody>
-                    <a:bodyPr wrap="square"/>
+                    <a:bodyPr/>
                     <a:lstStyle/>
                     <a:p>
                       <a:pPr algn="l"/>
@@ -8828,7 +8243,7 @@
                 </a:tc>
                 <a:tc>
                   <a:txBody>
-                    <a:bodyPr wrap="square"/>
+                    <a:bodyPr/>
                     <a:lstStyle/>
                     <a:p>
                       <a:pPr algn="l"/>
@@ -8851,7 +8266,7 @@
                 </a:tc>
                 <a:tc>
                   <a:txBody>
-                    <a:bodyPr wrap="square"/>
+                    <a:bodyPr/>
                     <a:lstStyle/>
                     <a:p>
                       <a:pPr algn="l"/>
@@ -8874,7 +8289,7 @@
                 </a:tc>
                 <a:tc>
                   <a:txBody>
-                    <a:bodyPr wrap="square"/>
+                    <a:bodyPr/>
                     <a:lstStyle/>
                     <a:p>
                       <a:pPr algn="l"/>
@@ -8897,7 +8312,7 @@
                 </a:tc>
                 <a:tc>
                   <a:txBody>
-                    <a:bodyPr wrap="square"/>
+                    <a:bodyPr/>
                     <a:lstStyle/>
                     <a:p>
                       <a:pPr algn="l"/>
@@ -9003,7 +8418,7 @@
                 </a:solidFill>
                 <a:latin typeface="Calibri"/>
               </a:rPr>
-              <a:t>TOP DESTINATARIOS (85 pontos)</a:t>
+              <a:t>TOP DESTINATARIOS (77 pontos)</a:t>
             </a:r>
           </a:p>
         </p:txBody>
@@ -9081,7 +8496,7 @@
               <a:tr h="292608">
                 <a:tc>
                   <a:txBody>
-                    <a:bodyPr wrap="square"/>
+                    <a:bodyPr/>
                     <a:lstStyle/>
                     <a:p>
                       <a:pPr algn="ctr"/>
@@ -9104,7 +8519,7 @@
                 </a:tc>
                 <a:tc>
                   <a:txBody>
-                    <a:bodyPr wrap="square"/>
+                    <a:bodyPr/>
                     <a:lstStyle/>
                     <a:p>
                       <a:pPr algn="ctr"/>
@@ -9127,7 +8542,7 @@
                 </a:tc>
                 <a:tc>
                   <a:txBody>
-                    <a:bodyPr wrap="square"/>
+                    <a:bodyPr/>
                     <a:lstStyle/>
                     <a:p>
                       <a:pPr algn="ctr"/>
@@ -9150,7 +8565,7 @@
                 </a:tc>
                 <a:tc>
                   <a:txBody>
-                    <a:bodyPr wrap="square"/>
+                    <a:bodyPr/>
                     <a:lstStyle/>
                     <a:p>
                       <a:pPr algn="ctr"/>
@@ -9173,7 +8588,7 @@
                 </a:tc>
                 <a:tc>
                   <a:txBody>
-                    <a:bodyPr wrap="square"/>
+                    <a:bodyPr/>
                     <a:lstStyle/>
                     <a:p>
                       <a:pPr algn="ctr"/>
@@ -9196,7 +8611,7 @@
                 </a:tc>
                 <a:tc>
                   <a:txBody>
-                    <a:bodyPr wrap="square"/>
+                    <a:bodyPr/>
                     <a:lstStyle/>
                     <a:p>
                       <a:pPr algn="ctr"/>
@@ -9219,7 +8634,7 @@
                 </a:tc>
                 <a:tc>
                   <a:txBody>
-                    <a:bodyPr wrap="square"/>
+                    <a:bodyPr/>
                     <a:lstStyle/>
                     <a:p>
                       <a:pPr algn="ctr"/>
@@ -9244,7 +8659,7 @@
               <a:tr h="292608">
                 <a:tc>
                   <a:txBody>
-                    <a:bodyPr wrap="square"/>
+                    <a:bodyPr/>
                     <a:lstStyle/>
                     <a:p>
                       <a:pPr algn="l"/>
@@ -9267,18 +8682,18 @@
                 </a:tc>
                 <a:tc>
                   <a:txBody>
-                    <a:bodyPr wrap="square"/>
-                    <a:lstStyle/>
-                    <a:p>
-                      <a:pPr algn="l"/>
-                      <a:r>
-                        <a:rPr sz="1000" b="0">
-                          <a:solidFill>
-                            <a:srgbClr val="1D1B43"/>
-                          </a:solidFill>
-                          <a:latin typeface="Calibri"/>
-                        </a:rPr>
-                        <a:t>BUNZL EQUIPAMENTOS P - GUARULHOS / SP</a:t>
+                    <a:bodyPr/>
+                    <a:lstStyle/>
+                    <a:p>
+                      <a:pPr algn="l"/>
+                      <a:r>
+                        <a:rPr sz="1000" b="0">
+                          <a:solidFill>
+                            <a:srgbClr val="1D1B43"/>
+                          </a:solidFill>
+                          <a:latin typeface="Calibri"/>
+                        </a:rPr>
+                        <a:t>DIMENSIONAL BRASIL S - GARUVA / SC</a:t>
                       </a:r>
                     </a:p>
                   </a:txBody>
@@ -9290,18 +8705,18 @@
                 </a:tc>
                 <a:tc>
                   <a:txBody>
-                    <a:bodyPr wrap="square"/>
-                    <a:lstStyle/>
-                    <a:p>
-                      <a:pPr algn="l"/>
-                      <a:r>
-                        <a:rPr sz="1000" b="0">
-                          <a:solidFill>
-                            <a:srgbClr val="1D1B43"/>
-                          </a:solidFill>
-                          <a:latin typeface="Calibri"/>
-                        </a:rPr>
-                        <a:t>48</a:t>
+                    <a:bodyPr/>
+                    <a:lstStyle/>
+                    <a:p>
+                      <a:pPr algn="l"/>
+                      <a:r>
+                        <a:rPr sz="1000" b="0">
+                          <a:solidFill>
+                            <a:srgbClr val="1D1B43"/>
+                          </a:solidFill>
+                          <a:latin typeface="Calibri"/>
+                        </a:rPr>
+                        <a:t>33</a:t>
                       </a:r>
                     </a:p>
                   </a:txBody>
@@ -9313,18 +8728,18 @@
                 </a:tc>
                 <a:tc>
                   <a:txBody>
-                    <a:bodyPr wrap="square"/>
-                    <a:lstStyle/>
-                    <a:p>
-                      <a:pPr algn="l"/>
-                      <a:r>
-                        <a:rPr sz="1000" b="0">
-                          <a:solidFill>
-                            <a:srgbClr val="1D1B43"/>
-                          </a:solidFill>
-                          <a:latin typeface="Calibri"/>
-                        </a:rPr>
-                        <a:t>48</a:t>
+                    <a:bodyPr/>
+                    <a:lstStyle/>
+                    <a:p>
+                      <a:pPr algn="l"/>
+                      <a:r>
+                        <a:rPr sz="1000" b="0">
+                          <a:solidFill>
+                            <a:srgbClr val="1D1B43"/>
+                          </a:solidFill>
+                          <a:latin typeface="Calibri"/>
+                        </a:rPr>
+                        <a:t>33</a:t>
                       </a:r>
                     </a:p>
                   </a:txBody>
@@ -9336,7 +8751,7 @@
                 </a:tc>
                 <a:tc>
                   <a:txBody>
-                    <a:bodyPr wrap="square"/>
+                    <a:bodyPr/>
                     <a:lstStyle/>
                     <a:p>
                       <a:pPr algn="l"/>
@@ -9359,7 +8774,7 @@
                 </a:tc>
                 <a:tc>
                   <a:txBody>
-                    <a:bodyPr wrap="square"/>
+                    <a:bodyPr/>
                     <a:lstStyle/>
                     <a:p>
                       <a:pPr algn="l"/>
@@ -9382,7 +8797,7 @@
                 </a:tc>
                 <a:tc>
                   <a:txBody>
-                    <a:bodyPr wrap="square"/>
+                    <a:bodyPr/>
                     <a:lstStyle/>
                     <a:p>
                       <a:pPr algn="l"/>
@@ -9407,7 +8822,7 @@
               <a:tr h="292608">
                 <a:tc>
                   <a:txBody>
-                    <a:bodyPr wrap="square"/>
+                    <a:bodyPr/>
                     <a:lstStyle/>
                     <a:p>
                       <a:pPr algn="l"/>
@@ -9430,18 +8845,18 @@
                 </a:tc>
                 <a:tc>
                   <a:txBody>
-                    <a:bodyPr wrap="square"/>
-                    <a:lstStyle/>
-                    <a:p>
-                      <a:pPr algn="l"/>
-                      <a:r>
-                        <a:rPr sz="1000" b="0">
-                          <a:solidFill>
-                            <a:srgbClr val="1D1B43"/>
-                          </a:solidFill>
-                          <a:latin typeface="Calibri"/>
-                        </a:rPr>
-                        <a:t>DIMENSIONAL BRASIL S - GARUVA / SC</a:t>
+                    <a:bodyPr/>
+                    <a:lstStyle/>
+                    <a:p>
+                      <a:pPr algn="l"/>
+                      <a:r>
+                        <a:rPr sz="1000" b="0">
+                          <a:solidFill>
+                            <a:srgbClr val="1D1B43"/>
+                          </a:solidFill>
+                          <a:latin typeface="Calibri"/>
+                        </a:rPr>
+                        <a:t>BUNZL EQUIPAMENTOS P - GUARULHOS / SP</a:t>
                       </a:r>
                     </a:p>
                   </a:txBody>
@@ -9453,18 +8868,18 @@
                 </a:tc>
                 <a:tc>
                   <a:txBody>
-                    <a:bodyPr wrap="square"/>
-                    <a:lstStyle/>
-                    <a:p>
-                      <a:pPr algn="l"/>
-                      <a:r>
-                        <a:rPr sz="1000" b="0">
-                          <a:solidFill>
-                            <a:srgbClr val="1D1B43"/>
-                          </a:solidFill>
-                          <a:latin typeface="Calibri"/>
-                        </a:rPr>
-                        <a:t>33</a:t>
+                    <a:bodyPr/>
+                    <a:lstStyle/>
+                    <a:p>
+                      <a:pPr algn="l"/>
+                      <a:r>
+                        <a:rPr sz="1000" b="0">
+                          <a:solidFill>
+                            <a:srgbClr val="1D1B43"/>
+                          </a:solidFill>
+                          <a:latin typeface="Calibri"/>
+                        </a:rPr>
+                        <a:t>31</a:t>
                       </a:r>
                     </a:p>
                   </a:txBody>
@@ -9476,18 +8891,18 @@
                 </a:tc>
                 <a:tc>
                   <a:txBody>
-                    <a:bodyPr wrap="square"/>
-                    <a:lstStyle/>
-                    <a:p>
-                      <a:pPr algn="l"/>
-                      <a:r>
-                        <a:rPr sz="1000" b="0">
-                          <a:solidFill>
-                            <a:srgbClr val="1D1B43"/>
-                          </a:solidFill>
-                          <a:latin typeface="Calibri"/>
-                        </a:rPr>
-                        <a:t>33</a:t>
+                    <a:bodyPr/>
+                    <a:lstStyle/>
+                    <a:p>
+                      <a:pPr algn="l"/>
+                      <a:r>
+                        <a:rPr sz="1000" b="0">
+                          <a:solidFill>
+                            <a:srgbClr val="1D1B43"/>
+                          </a:solidFill>
+                          <a:latin typeface="Calibri"/>
+                        </a:rPr>
+                        <a:t>31</a:t>
                       </a:r>
                     </a:p>
                   </a:txBody>
@@ -9499,7 +8914,7 @@
                 </a:tc>
                 <a:tc>
                   <a:txBody>
-                    <a:bodyPr wrap="square"/>
+                    <a:bodyPr/>
                     <a:lstStyle/>
                     <a:p>
                       <a:pPr algn="l"/>
@@ -9522,7 +8937,7 @@
                 </a:tc>
                 <a:tc>
                   <a:txBody>
-                    <a:bodyPr wrap="square"/>
+                    <a:bodyPr/>
                     <a:lstStyle/>
                     <a:p>
                       <a:pPr algn="l"/>
@@ -9545,7 +8960,7 @@
                 </a:tc>
                 <a:tc>
                   <a:txBody>
-                    <a:bodyPr wrap="square"/>
+                    <a:bodyPr/>
                     <a:lstStyle/>
                     <a:p>
                       <a:pPr algn="l"/>
@@ -9570,7 +8985,7 @@
               <a:tr h="292608">
                 <a:tc>
                   <a:txBody>
-                    <a:bodyPr wrap="square"/>
+                    <a:bodyPr/>
                     <a:lstStyle/>
                     <a:p>
                       <a:pPr algn="l"/>
@@ -9593,7 +9008,7 @@
                 </a:tc>
                 <a:tc>
                   <a:txBody>
-                    <a:bodyPr wrap="square"/>
+                    <a:bodyPr/>
                     <a:lstStyle/>
                     <a:p>
                       <a:pPr algn="l"/>
@@ -9616,18 +9031,18 @@
                 </a:tc>
                 <a:tc>
                   <a:txBody>
-                    <a:bodyPr wrap="square"/>
-                    <a:lstStyle/>
-                    <a:p>
-                      <a:pPr algn="l"/>
-                      <a:r>
-                        <a:rPr sz="1000" b="0">
-                          <a:solidFill>
-                            <a:srgbClr val="1D1B43"/>
-                          </a:solidFill>
-                          <a:latin typeface="Calibri"/>
-                        </a:rPr>
-                        <a:t>31</a:t>
+                    <a:bodyPr/>
+                    <a:lstStyle/>
+                    <a:p>
+                      <a:pPr algn="l"/>
+                      <a:r>
+                        <a:rPr sz="1000" b="0">
+                          <a:solidFill>
+                            <a:srgbClr val="1D1B43"/>
+                          </a:solidFill>
+                          <a:latin typeface="Calibri"/>
+                        </a:rPr>
+                        <a:t>30</a:t>
                       </a:r>
                     </a:p>
                   </a:txBody>
@@ -9639,18 +9054,18 @@
                 </a:tc>
                 <a:tc>
                   <a:txBody>
-                    <a:bodyPr wrap="square"/>
-                    <a:lstStyle/>
-                    <a:p>
-                      <a:pPr algn="l"/>
-                      <a:r>
-                        <a:rPr sz="1000" b="0">
-                          <a:solidFill>
-                            <a:srgbClr val="1D1B43"/>
-                          </a:solidFill>
-                          <a:latin typeface="Calibri"/>
-                        </a:rPr>
-                        <a:t>31</a:t>
+                    <a:bodyPr/>
+                    <a:lstStyle/>
+                    <a:p>
+                      <a:pPr algn="l"/>
+                      <a:r>
+                        <a:rPr sz="1000" b="0">
+                          <a:solidFill>
+                            <a:srgbClr val="1D1B43"/>
+                          </a:solidFill>
+                          <a:latin typeface="Calibri"/>
+                        </a:rPr>
+                        <a:t>30</a:t>
                       </a:r>
                     </a:p>
                   </a:txBody>
@@ -9662,7 +9077,7 @@
                 </a:tc>
                 <a:tc>
                   <a:txBody>
-                    <a:bodyPr wrap="square"/>
+                    <a:bodyPr/>
                     <a:lstStyle/>
                     <a:p>
                       <a:pPr algn="l"/>
@@ -9685,7 +9100,7 @@
                 </a:tc>
                 <a:tc>
                   <a:txBody>
-                    <a:bodyPr wrap="square"/>
+                    <a:bodyPr/>
                     <a:lstStyle/>
                     <a:p>
                       <a:pPr algn="l"/>
@@ -9708,7 +9123,7 @@
                 </a:tc>
                 <a:tc>
                   <a:txBody>
-                    <a:bodyPr wrap="square"/>
+                    <a:bodyPr/>
                     <a:lstStyle/>
                     <a:p>
                       <a:pPr algn="l"/>
@@ -9733,7 +9148,7 @@
               <a:tr h="292608">
                 <a:tc>
                   <a:txBody>
-                    <a:bodyPr wrap="square"/>
+                    <a:bodyPr/>
                     <a:lstStyle/>
                     <a:p>
                       <a:pPr algn="l"/>
@@ -9756,7 +9171,7 @@
                 </a:tc>
                 <a:tc>
                   <a:txBody>
-                    <a:bodyPr wrap="square"/>
+                    <a:bodyPr/>
                     <a:lstStyle/>
                     <a:p>
                       <a:pPr algn="l"/>
@@ -9779,7 +9194,7 @@
                 </a:tc>
                 <a:tc>
                   <a:txBody>
-                    <a:bodyPr wrap="square"/>
+                    <a:bodyPr/>
                     <a:lstStyle/>
                     <a:p>
                       <a:pPr algn="l"/>
@@ -9802,7 +9217,7 @@
                 </a:tc>
                 <a:tc>
                   <a:txBody>
-                    <a:bodyPr wrap="square"/>
+                    <a:bodyPr/>
                     <a:lstStyle/>
                     <a:p>
                       <a:pPr algn="l"/>
@@ -9825,7 +9240,7 @@
                 </a:tc>
                 <a:tc>
                   <a:txBody>
-                    <a:bodyPr wrap="square"/>
+                    <a:bodyPr/>
                     <a:lstStyle/>
                     <a:p>
                       <a:pPr algn="l"/>
@@ -9848,7 +9263,7 @@
                 </a:tc>
                 <a:tc>
                   <a:txBody>
-                    <a:bodyPr wrap="square"/>
+                    <a:bodyPr/>
                     <a:lstStyle/>
                     <a:p>
                       <a:pPr algn="l"/>
@@ -9871,7 +9286,7 @@
                 </a:tc>
                 <a:tc>
                   <a:txBody>
-                    <a:bodyPr wrap="square"/>
+                    <a:bodyPr/>
                     <a:lstStyle/>
                     <a:p>
                       <a:pPr algn="l"/>
@@ -9896,7 +9311,7 @@
               <a:tr h="292608">
                 <a:tc>
                   <a:txBody>
-                    <a:bodyPr wrap="square"/>
+                    <a:bodyPr/>
                     <a:lstStyle/>
                     <a:p>
                       <a:pPr algn="l"/>
@@ -9919,7 +9334,7 @@
                 </a:tc>
                 <a:tc>
                   <a:txBody>
-                    <a:bodyPr wrap="square"/>
+                    <a:bodyPr/>
                     <a:lstStyle/>
                     <a:p>
                       <a:pPr algn="l"/>
@@ -9942,7 +9357,7 @@
                 </a:tc>
                 <a:tc>
                   <a:txBody>
-                    <a:bodyPr wrap="square"/>
+                    <a:bodyPr/>
                     <a:lstStyle/>
                     <a:p>
                       <a:pPr algn="l"/>
@@ -9965,7 +9380,7 @@
                 </a:tc>
                 <a:tc>
                   <a:txBody>
-                    <a:bodyPr wrap="square"/>
+                    <a:bodyPr/>
                     <a:lstStyle/>
                     <a:p>
                       <a:pPr algn="l"/>
@@ -9988,7 +9403,7 @@
                 </a:tc>
                 <a:tc>
                   <a:txBody>
-                    <a:bodyPr wrap="square"/>
+                    <a:bodyPr/>
                     <a:lstStyle/>
                     <a:p>
                       <a:pPr algn="l"/>
@@ -10011,7 +9426,7 @@
                 </a:tc>
                 <a:tc>
                   <a:txBody>
-                    <a:bodyPr wrap="square"/>
+                    <a:bodyPr/>
                     <a:lstStyle/>
                     <a:p>
                       <a:pPr algn="l"/>
@@ -10034,7 +9449,7 @@
                 </a:tc>
                 <a:tc>
                   <a:txBody>
-                    <a:bodyPr wrap="square"/>
+                    <a:bodyPr/>
                     <a:lstStyle/>
                     <a:p>
                       <a:pPr algn="l"/>
@@ -10059,7 +9474,7 @@
               <a:tr h="292608">
                 <a:tc>
                   <a:txBody>
-                    <a:bodyPr wrap="square"/>
+                    <a:bodyPr/>
                     <a:lstStyle/>
                     <a:p>
                       <a:pPr algn="l"/>
@@ -10082,7 +9497,7 @@
                 </a:tc>
                 <a:tc>
                   <a:txBody>
-                    <a:bodyPr wrap="square"/>
+                    <a:bodyPr/>
                     <a:lstStyle/>
                     <a:p>
                       <a:pPr algn="l"/>
@@ -10105,18 +9520,18 @@
                 </a:tc>
                 <a:tc>
                   <a:txBody>
-                    <a:bodyPr wrap="square"/>
-                    <a:lstStyle/>
-                    <a:p>
-                      <a:pPr algn="l"/>
-                      <a:r>
-                        <a:rPr sz="1000" b="0">
-                          <a:solidFill>
-                            <a:srgbClr val="1D1B43"/>
-                          </a:solidFill>
-                          <a:latin typeface="Calibri"/>
-                        </a:rPr>
-                        <a:t>27</a:t>
+                    <a:bodyPr/>
+                    <a:lstStyle/>
+                    <a:p>
+                      <a:pPr algn="l"/>
+                      <a:r>
+                        <a:rPr sz="1000" b="0">
+                          <a:solidFill>
+                            <a:srgbClr val="1D1B43"/>
+                          </a:solidFill>
+                          <a:latin typeface="Calibri"/>
+                        </a:rPr>
+                        <a:t>25</a:t>
                       </a:r>
                     </a:p>
                   </a:txBody>
@@ -10128,18 +9543,18 @@
                 </a:tc>
                 <a:tc>
                   <a:txBody>
-                    <a:bodyPr wrap="square"/>
-                    <a:lstStyle/>
-                    <a:p>
-                      <a:pPr algn="l"/>
-                      <a:r>
-                        <a:rPr sz="1000" b="0">
-                          <a:solidFill>
-                            <a:srgbClr val="1D1B43"/>
-                          </a:solidFill>
-                          <a:latin typeface="Calibri"/>
-                        </a:rPr>
-                        <a:t>27</a:t>
+                    <a:bodyPr/>
+                    <a:lstStyle/>
+                    <a:p>
+                      <a:pPr algn="l"/>
+                      <a:r>
+                        <a:rPr sz="1000" b="0">
+                          <a:solidFill>
+                            <a:srgbClr val="1D1B43"/>
+                          </a:solidFill>
+                          <a:latin typeface="Calibri"/>
+                        </a:rPr>
+                        <a:t>25</a:t>
                       </a:r>
                     </a:p>
                   </a:txBody>
@@ -10151,7 +9566,7 @@
                 </a:tc>
                 <a:tc>
                   <a:txBody>
-                    <a:bodyPr wrap="square"/>
+                    <a:bodyPr/>
                     <a:lstStyle/>
                     <a:p>
                       <a:pPr algn="l"/>
@@ -10174,7 +9589,7 @@
                 </a:tc>
                 <a:tc>
                   <a:txBody>
-                    <a:bodyPr wrap="square"/>
+                    <a:bodyPr/>
                     <a:lstStyle/>
                     <a:p>
                       <a:pPr algn="l"/>
@@ -10197,7 +9612,7 @@
                 </a:tc>
                 <a:tc>
                   <a:txBody>
-                    <a:bodyPr wrap="square"/>
+                    <a:bodyPr/>
                     <a:lstStyle/>
                     <a:p>
                       <a:pPr algn="l"/>
@@ -10222,7 +9637,7 @@
               <a:tr h="292608">
                 <a:tc>
                   <a:txBody>
-                    <a:bodyPr wrap="square"/>
+                    <a:bodyPr/>
                     <a:lstStyle/>
                     <a:p>
                       <a:pPr algn="l"/>
@@ -10245,7 +9660,7 @@
                 </a:tc>
                 <a:tc>
                   <a:txBody>
-                    <a:bodyPr wrap="square"/>
+                    <a:bodyPr/>
                     <a:lstStyle/>
                     <a:p>
                       <a:pPr algn="l"/>
@@ -10268,18 +9683,18 @@
                 </a:tc>
                 <a:tc>
                   <a:txBody>
-                    <a:bodyPr wrap="square"/>
-                    <a:lstStyle/>
-                    <a:p>
-                      <a:pPr algn="l"/>
-                      <a:r>
-                        <a:rPr sz="1000" b="0">
-                          <a:solidFill>
-                            <a:srgbClr val="1D1B43"/>
-                          </a:solidFill>
-                          <a:latin typeface="Calibri"/>
-                        </a:rPr>
-                        <a:t>26</a:t>
+                    <a:bodyPr/>
+                    <a:lstStyle/>
+                    <a:p>
+                      <a:pPr algn="l"/>
+                      <a:r>
+                        <a:rPr sz="1000" b="0">
+                          <a:solidFill>
+                            <a:srgbClr val="1D1B43"/>
+                          </a:solidFill>
+                          <a:latin typeface="Calibri"/>
+                        </a:rPr>
+                        <a:t>23</a:t>
                       </a:r>
                     </a:p>
                   </a:txBody>
@@ -10291,18 +9706,18 @@
                 </a:tc>
                 <a:tc>
                   <a:txBody>
-                    <a:bodyPr wrap="square"/>
-                    <a:lstStyle/>
-                    <a:p>
-                      <a:pPr algn="l"/>
-                      <a:r>
-                        <a:rPr sz="1000" b="0">
-                          <a:solidFill>
-                            <a:srgbClr val="1D1B43"/>
-                          </a:solidFill>
-                          <a:latin typeface="Calibri"/>
-                        </a:rPr>
-                        <a:t>26</a:t>
+                    <a:bodyPr/>
+                    <a:lstStyle/>
+                    <a:p>
+                      <a:pPr algn="l"/>
+                      <a:r>
+                        <a:rPr sz="1000" b="0">
+                          <a:solidFill>
+                            <a:srgbClr val="1D1B43"/>
+                          </a:solidFill>
+                          <a:latin typeface="Calibri"/>
+                        </a:rPr>
+                        <a:t>23</a:t>
                       </a:r>
                     </a:p>
                   </a:txBody>
@@ -10314,7 +9729,7 @@
                 </a:tc>
                 <a:tc>
                   <a:txBody>
-                    <a:bodyPr wrap="square"/>
+                    <a:bodyPr/>
                     <a:lstStyle/>
                     <a:p>
                       <a:pPr algn="l"/>
@@ -10337,7 +9752,7 @@
                 </a:tc>
                 <a:tc>
                   <a:txBody>
-                    <a:bodyPr wrap="square"/>
+                    <a:bodyPr/>
                     <a:lstStyle/>
                     <a:p>
                       <a:pPr algn="l"/>
@@ -10360,7 +9775,7 @@
                 </a:tc>
                 <a:tc>
                   <a:txBody>
-                    <a:bodyPr wrap="square"/>
+                    <a:bodyPr/>
                     <a:lstStyle/>
                     <a:p>
                       <a:pPr algn="l"/>
@@ -10385,7 +9800,7 @@
               <a:tr h="292608">
                 <a:tc>
                   <a:txBody>
-                    <a:bodyPr wrap="square"/>
+                    <a:bodyPr/>
                     <a:lstStyle/>
                     <a:p>
                       <a:pPr algn="l"/>
@@ -10408,7 +9823,7 @@
                 </a:tc>
                 <a:tc>
                   <a:txBody>
-                    <a:bodyPr wrap="square"/>
+                    <a:bodyPr/>
                     <a:lstStyle/>
                     <a:p>
                       <a:pPr algn="l"/>
@@ -10431,18 +9846,18 @@
                 </a:tc>
                 <a:tc>
                   <a:txBody>
-                    <a:bodyPr wrap="square"/>
-                    <a:lstStyle/>
-                    <a:p>
-                      <a:pPr algn="l"/>
-                      <a:r>
-                        <a:rPr sz="1000" b="0">
-                          <a:solidFill>
-                            <a:srgbClr val="1D1B43"/>
-                          </a:solidFill>
-                          <a:latin typeface="Calibri"/>
-                        </a:rPr>
-                        <a:t>23</a:t>
+                    <a:bodyPr/>
+                    <a:lstStyle/>
+                    <a:p>
+                      <a:pPr algn="l"/>
+                      <a:r>
+                        <a:rPr sz="1000" b="0">
+                          <a:solidFill>
+                            <a:srgbClr val="1D1B43"/>
+                          </a:solidFill>
+                          <a:latin typeface="Calibri"/>
+                        </a:rPr>
+                        <a:t>22</a:t>
                       </a:r>
                     </a:p>
                   </a:txBody>
@@ -10454,18 +9869,18 @@
                 </a:tc>
                 <a:tc>
                   <a:txBody>
-                    <a:bodyPr wrap="square"/>
-                    <a:lstStyle/>
-                    <a:p>
-                      <a:pPr algn="l"/>
-                      <a:r>
-                        <a:rPr sz="1000" b="0">
-                          <a:solidFill>
-                            <a:srgbClr val="1D1B43"/>
-                          </a:solidFill>
-                          <a:latin typeface="Calibri"/>
-                        </a:rPr>
-                        <a:t>23</a:t>
+                    <a:bodyPr/>
+                    <a:lstStyle/>
+                    <a:p>
+                      <a:pPr algn="l"/>
+                      <a:r>
+                        <a:rPr sz="1000" b="0">
+                          <a:solidFill>
+                            <a:srgbClr val="1D1B43"/>
+                          </a:solidFill>
+                          <a:latin typeface="Calibri"/>
+                        </a:rPr>
+                        <a:t>22</a:t>
                       </a:r>
                     </a:p>
                   </a:txBody>
@@ -10477,7 +9892,7 @@
                 </a:tc>
                 <a:tc>
                   <a:txBody>
-                    <a:bodyPr wrap="square"/>
+                    <a:bodyPr/>
                     <a:lstStyle/>
                     <a:p>
                       <a:pPr algn="l"/>
@@ -10500,7 +9915,7 @@
                 </a:tc>
                 <a:tc>
                   <a:txBody>
-                    <a:bodyPr wrap="square"/>
+                    <a:bodyPr/>
                     <a:lstStyle/>
                     <a:p>
                       <a:pPr algn="l"/>
@@ -10523,7 +9938,7 @@
                 </a:tc>
                 <a:tc>
                   <a:txBody>
-                    <a:bodyPr wrap="square"/>
+                    <a:bodyPr/>
                     <a:lstStyle/>
                     <a:p>
                       <a:pPr algn="l"/>
@@ -10548,7 +9963,7 @@
               <a:tr h="292608">
                 <a:tc>
                   <a:txBody>
-                    <a:bodyPr wrap="square"/>
+                    <a:bodyPr/>
                     <a:lstStyle/>
                     <a:p>
                       <a:pPr algn="l"/>
@@ -10571,7 +9986,7 @@
                 </a:tc>
                 <a:tc>
                   <a:txBody>
-                    <a:bodyPr wrap="square"/>
+                    <a:bodyPr/>
                     <a:lstStyle/>
                     <a:p>
                       <a:pPr algn="l"/>
@@ -10594,18 +10009,18 @@
                 </a:tc>
                 <a:tc>
                   <a:txBody>
-                    <a:bodyPr wrap="square"/>
-                    <a:lstStyle/>
-                    <a:p>
-                      <a:pPr algn="l"/>
-                      <a:r>
-                        <a:rPr sz="1000" b="0">
-                          <a:solidFill>
-                            <a:srgbClr val="1D1B43"/>
-                          </a:solidFill>
-                          <a:latin typeface="Calibri"/>
-                        </a:rPr>
-                        <a:t>22</a:t>
+                    <a:bodyPr/>
+                    <a:lstStyle/>
+                    <a:p>
+                      <a:pPr algn="l"/>
+                      <a:r>
+                        <a:rPr sz="1000" b="0">
+                          <a:solidFill>
+                            <a:srgbClr val="1D1B43"/>
+                          </a:solidFill>
+                          <a:latin typeface="Calibri"/>
+                        </a:rPr>
+                        <a:t>19</a:t>
                       </a:r>
                     </a:p>
                   </a:txBody>
@@ -10617,7 +10032,7 @@
                 </a:tc>
                 <a:tc>
                   <a:txBody>
-                    <a:bodyPr wrap="square"/>
+                    <a:bodyPr/>
                     <a:lstStyle/>
                     <a:p>
                       <a:pPr algn="l"/>
@@ -10640,18 +10055,18 @@
                 </a:tc>
                 <a:tc>
                   <a:txBody>
-                    <a:bodyPr wrap="square"/>
-                    <a:lstStyle/>
-                    <a:p>
-                      <a:pPr algn="l"/>
-                      <a:r>
-                        <a:rPr sz="1000" b="0">
-                          <a:solidFill>
-                            <a:srgbClr val="1D1B43"/>
-                          </a:solidFill>
-                          <a:latin typeface="Calibri"/>
-                        </a:rPr>
-                        <a:t>3</a:t>
+                    <a:bodyPr/>
+                    <a:lstStyle/>
+                    <a:p>
+                      <a:pPr algn="l"/>
+                      <a:r>
+                        <a:rPr sz="1000" b="0">
+                          <a:solidFill>
+                            <a:srgbClr val="1D1B43"/>
+                          </a:solidFill>
+                          <a:latin typeface="Calibri"/>
+                        </a:rPr>
+                        <a:t>0</a:t>
                       </a:r>
                     </a:p>
                   </a:txBody>
@@ -10663,18 +10078,18 @@
                 </a:tc>
                 <a:tc>
                   <a:txBody>
-                    <a:bodyPr wrap="square"/>
-                    <a:lstStyle/>
-                    <a:p>
-                      <a:pPr algn="l"/>
-                      <a:r>
-                        <a:rPr sz="1000" b="0">
-                          <a:solidFill>
-                            <a:srgbClr val="1D1B43"/>
-                          </a:solidFill>
-                          <a:latin typeface="Calibri"/>
-                        </a:rPr>
-                        <a:t>86.4%</a:t>
+                    <a:bodyPr/>
+                    <a:lstStyle/>
+                    <a:p>
+                      <a:pPr algn="l"/>
+                      <a:r>
+                        <a:rPr sz="1000" b="0">
+                          <a:solidFill>
+                            <a:srgbClr val="1D1B43"/>
+                          </a:solidFill>
+                          <a:latin typeface="Calibri"/>
+                        </a:rPr>
+                        <a:t>100.0%</a:t>
                       </a:r>
                     </a:p>
                   </a:txBody>
@@ -10686,18 +10101,18 @@
                 </a:tc>
                 <a:tc>
                   <a:txBody>
-                    <a:bodyPr wrap="square"/>
-                    <a:lstStyle/>
-                    <a:p>
-                      <a:pPr algn="l"/>
-                      <a:r>
-                        <a:rPr sz="1000" b="0">
-                          <a:solidFill>
-                            <a:srgbClr val="1D1B43"/>
-                          </a:solidFill>
-                          <a:latin typeface="Calibri"/>
-                        </a:rPr>
-                        <a:t>Regular</a:t>
+                    <a:bodyPr/>
+                    <a:lstStyle/>
+                    <a:p>
+                      <a:pPr algn="l"/>
+                      <a:r>
+                        <a:rPr sz="1000" b="0">
+                          <a:solidFill>
+                            <a:srgbClr val="1D1B43"/>
+                          </a:solidFill>
+                          <a:latin typeface="Calibri"/>
+                        </a:rPr>
+                        <a:t>Excelente</a:t>
                       </a:r>
                     </a:p>
                   </a:txBody>
@@ -10711,7 +10126,7 @@
               <a:tr h="292608">
                 <a:tc>
                   <a:txBody>
-                    <a:bodyPr wrap="square"/>
+                    <a:bodyPr/>
                     <a:lstStyle/>
                     <a:p>
                       <a:pPr algn="l"/>
@@ -10734,18 +10149,18 @@
                 </a:tc>
                 <a:tc>
                   <a:txBody>
-                    <a:bodyPr wrap="square"/>
-                    <a:lstStyle/>
-                    <a:p>
-                      <a:pPr algn="l"/>
-                      <a:r>
-                        <a:rPr sz="1000" b="0">
-                          <a:solidFill>
-                            <a:srgbClr val="1D1B43"/>
-                          </a:solidFill>
-                          <a:latin typeface="Calibri"/>
-                        </a:rPr>
-                        <a:t>NORTEL SUPRIMENTOS I - SERRA / ES</a:t>
+                    <a:bodyPr/>
+                    <a:lstStyle/>
+                    <a:p>
+                      <a:pPr algn="l"/>
+                      <a:r>
+                        <a:rPr sz="1000" b="0">
+                          <a:solidFill>
+                            <a:srgbClr val="1D1B43"/>
+                          </a:solidFill>
+                          <a:latin typeface="Calibri"/>
+                        </a:rPr>
+                        <a:t>WILSON SONS LOGISTIC - SANTO ANDRE / SP</a:t>
                       </a:r>
                     </a:p>
                   </a:txBody>
@@ -10757,18 +10172,18 @@
                 </a:tc>
                 <a:tc>
                   <a:txBody>
-                    <a:bodyPr wrap="square"/>
-                    <a:lstStyle/>
-                    <a:p>
-                      <a:pPr algn="l"/>
-                      <a:r>
-                        <a:rPr sz="1000" b="0">
-                          <a:solidFill>
-                            <a:srgbClr val="1D1B43"/>
-                          </a:solidFill>
-                          <a:latin typeface="Calibri"/>
-                        </a:rPr>
-                        <a:t>20</a:t>
+                    <a:bodyPr/>
+                    <a:lstStyle/>
+                    <a:p>
+                      <a:pPr algn="l"/>
+                      <a:r>
+                        <a:rPr sz="1000" b="0">
+                          <a:solidFill>
+                            <a:srgbClr val="1D1B43"/>
+                          </a:solidFill>
+                          <a:latin typeface="Calibri"/>
+                        </a:rPr>
+                        <a:t>19</a:t>
                       </a:r>
                     </a:p>
                   </a:txBody>
@@ -10780,18 +10195,18 @@
                 </a:tc>
                 <a:tc>
                   <a:txBody>
-                    <a:bodyPr wrap="square"/>
-                    <a:lstStyle/>
-                    <a:p>
-                      <a:pPr algn="l"/>
-                      <a:r>
-                        <a:rPr sz="1000" b="0">
-                          <a:solidFill>
-                            <a:srgbClr val="1D1B43"/>
-                          </a:solidFill>
-                          <a:latin typeface="Calibri"/>
-                        </a:rPr>
-                        <a:t>20</a:t>
+                    <a:bodyPr/>
+                    <a:lstStyle/>
+                    <a:p>
+                      <a:pPr algn="l"/>
+                      <a:r>
+                        <a:rPr sz="1000" b="0">
+                          <a:solidFill>
+                            <a:srgbClr val="1D1B43"/>
+                          </a:solidFill>
+                          <a:latin typeface="Calibri"/>
+                        </a:rPr>
+                        <a:t>18</a:t>
                       </a:r>
                     </a:p>
                   </a:txBody>
@@ -10803,18 +10218,18 @@
                 </a:tc>
                 <a:tc>
                   <a:txBody>
-                    <a:bodyPr wrap="square"/>
-                    <a:lstStyle/>
-                    <a:p>
-                      <a:pPr algn="l"/>
-                      <a:r>
-                        <a:rPr sz="1000" b="0">
-                          <a:solidFill>
-                            <a:srgbClr val="1D1B43"/>
-                          </a:solidFill>
-                          <a:latin typeface="Calibri"/>
-                        </a:rPr>
-                        <a:t>0</a:t>
+                    <a:bodyPr/>
+                    <a:lstStyle/>
+                    <a:p>
+                      <a:pPr algn="l"/>
+                      <a:r>
+                        <a:rPr sz="1000" b="0">
+                          <a:solidFill>
+                            <a:srgbClr val="1D1B43"/>
+                          </a:solidFill>
+                          <a:latin typeface="Calibri"/>
+                        </a:rPr>
+                        <a:t>1</a:t>
                       </a:r>
                     </a:p>
                   </a:txBody>
@@ -10826,18 +10241,18 @@
                 </a:tc>
                 <a:tc>
                   <a:txBody>
-                    <a:bodyPr wrap="square"/>
-                    <a:lstStyle/>
-                    <a:p>
-                      <a:pPr algn="l"/>
-                      <a:r>
-                        <a:rPr sz="1000" b="0">
-                          <a:solidFill>
-                            <a:srgbClr val="1D1B43"/>
-                          </a:solidFill>
-                          <a:latin typeface="Calibri"/>
-                        </a:rPr>
-                        <a:t>100.0%</a:t>
+                    <a:bodyPr/>
+                    <a:lstStyle/>
+                    <a:p>
+                      <a:pPr algn="l"/>
+                      <a:r>
+                        <a:rPr sz="1000" b="0">
+                          <a:solidFill>
+                            <a:srgbClr val="1D1B43"/>
+                          </a:solidFill>
+                          <a:latin typeface="Calibri"/>
+                        </a:rPr>
+                        <a:t>94.7%</a:t>
                       </a:r>
                     </a:p>
                   </a:txBody>
@@ -10849,18 +10264,18 @@
                 </a:tc>
                 <a:tc>
                   <a:txBody>
-                    <a:bodyPr wrap="square"/>
-                    <a:lstStyle/>
-                    <a:p>
-                      <a:pPr algn="l"/>
-                      <a:r>
-                        <a:rPr sz="1000" b="0">
-                          <a:solidFill>
-                            <a:srgbClr val="1D1B43"/>
-                          </a:solidFill>
-                          <a:latin typeface="Calibri"/>
-                        </a:rPr>
-                        <a:t>Excelente</a:t>
+                    <a:bodyPr/>
+                    <a:lstStyle/>
+                    <a:p>
+                      <a:pPr algn="l"/>
+                      <a:r>
+                        <a:rPr sz="1000" b="0">
+                          <a:solidFill>
+                            <a:srgbClr val="1D1B43"/>
+                          </a:solidFill>
+                          <a:latin typeface="Calibri"/>
+                        </a:rPr>
+                        <a:t>Regular</a:t>
                       </a:r>
                     </a:p>
                   </a:txBody>
@@ -10874,7 +10289,7 @@
               <a:tr h="292608">
                 <a:tc>
                   <a:txBody>
-                    <a:bodyPr wrap="square"/>
+                    <a:bodyPr/>
                     <a:lstStyle/>
                     <a:p>
                       <a:pPr algn="l"/>
@@ -10897,18 +10312,18 @@
                 </a:tc>
                 <a:tc>
                   <a:txBody>
-                    <a:bodyPr wrap="square"/>
-                    <a:lstStyle/>
-                    <a:p>
-                      <a:pPr algn="l"/>
-                      <a:r>
-                        <a:rPr sz="1000" b="0">
-                          <a:solidFill>
-                            <a:srgbClr val="1D1B43"/>
-                          </a:solidFill>
-                          <a:latin typeface="Calibri"/>
-                        </a:rPr>
-                        <a:t>1000 MARCAS SAFETY B - ARACARIGUAMA / SP</a:t>
+                    <a:bodyPr/>
+                    <a:lstStyle/>
+                    <a:p>
+                      <a:pPr algn="l"/>
+                      <a:r>
+                        <a:rPr sz="1000" b="0">
+                          <a:solidFill>
+                            <a:srgbClr val="1D1B43"/>
+                          </a:solidFill>
+                          <a:latin typeface="Calibri"/>
+                        </a:rPr>
+                        <a:t>CORSUL COMERCIO E RE - CASCAVEL / PR</a:t>
                       </a:r>
                     </a:p>
                   </a:txBody>
@@ -10920,18 +10335,18 @@
                 </a:tc>
                 <a:tc>
                   <a:txBody>
-                    <a:bodyPr wrap="square"/>
-                    <a:lstStyle/>
-                    <a:p>
-                      <a:pPr algn="l"/>
-                      <a:r>
-                        <a:rPr sz="1000" b="0">
-                          <a:solidFill>
-                            <a:srgbClr val="1D1B43"/>
-                          </a:solidFill>
-                          <a:latin typeface="Calibri"/>
-                        </a:rPr>
-                        <a:t>19</a:t>
+                    <a:bodyPr/>
+                    <a:lstStyle/>
+                    <a:p>
+                      <a:pPr algn="l"/>
+                      <a:r>
+                        <a:rPr sz="1000" b="0">
+                          <a:solidFill>
+                            <a:srgbClr val="1D1B43"/>
+                          </a:solidFill>
+                          <a:latin typeface="Calibri"/>
+                        </a:rPr>
+                        <a:t>18</a:t>
                       </a:r>
                     </a:p>
                   </a:txBody>
@@ -10943,18 +10358,18 @@
                 </a:tc>
                 <a:tc>
                   <a:txBody>
-                    <a:bodyPr wrap="square"/>
-                    <a:lstStyle/>
-                    <a:p>
-                      <a:pPr algn="l"/>
-                      <a:r>
-                        <a:rPr sz="1000" b="0">
-                          <a:solidFill>
-                            <a:srgbClr val="1D1B43"/>
-                          </a:solidFill>
-                          <a:latin typeface="Calibri"/>
-                        </a:rPr>
-                        <a:t>19</a:t>
+                    <a:bodyPr/>
+                    <a:lstStyle/>
+                    <a:p>
+                      <a:pPr algn="l"/>
+                      <a:r>
+                        <a:rPr sz="1000" b="0">
+                          <a:solidFill>
+                            <a:srgbClr val="1D1B43"/>
+                          </a:solidFill>
+                          <a:latin typeface="Calibri"/>
+                        </a:rPr>
+                        <a:t>17</a:t>
                       </a:r>
                     </a:p>
                   </a:txBody>
@@ -10966,18 +10381,18 @@
                 </a:tc>
                 <a:tc>
                   <a:txBody>
-                    <a:bodyPr wrap="square"/>
-                    <a:lstStyle/>
-                    <a:p>
-                      <a:pPr algn="l"/>
-                      <a:r>
-                        <a:rPr sz="1000" b="0">
-                          <a:solidFill>
-                            <a:srgbClr val="1D1B43"/>
-                          </a:solidFill>
-                          <a:latin typeface="Calibri"/>
-                        </a:rPr>
-                        <a:t>0</a:t>
+                    <a:bodyPr/>
+                    <a:lstStyle/>
+                    <a:p>
+                      <a:pPr algn="l"/>
+                      <a:r>
+                        <a:rPr sz="1000" b="0">
+                          <a:solidFill>
+                            <a:srgbClr val="1D1B43"/>
+                          </a:solidFill>
+                          <a:latin typeface="Calibri"/>
+                        </a:rPr>
+                        <a:t>1</a:t>
                       </a:r>
                     </a:p>
                   </a:txBody>
@@ -10989,18 +10404,18 @@
                 </a:tc>
                 <a:tc>
                   <a:txBody>
-                    <a:bodyPr wrap="square"/>
-                    <a:lstStyle/>
-                    <a:p>
-                      <a:pPr algn="l"/>
-                      <a:r>
-                        <a:rPr sz="1000" b="0">
-                          <a:solidFill>
-                            <a:srgbClr val="1D1B43"/>
-                          </a:solidFill>
-                          <a:latin typeface="Calibri"/>
-                        </a:rPr>
-                        <a:t>100.0%</a:t>
+                    <a:bodyPr/>
+                    <a:lstStyle/>
+                    <a:p>
+                      <a:pPr algn="l"/>
+                      <a:r>
+                        <a:rPr sz="1000" b="0">
+                          <a:solidFill>
+                            <a:srgbClr val="1D1B43"/>
+                          </a:solidFill>
+                          <a:latin typeface="Calibri"/>
+                        </a:rPr>
+                        <a:t>94.4%</a:t>
                       </a:r>
                     </a:p>
                   </a:txBody>
@@ -11012,18 +10427,18 @@
                 </a:tc>
                 <a:tc>
                   <a:txBody>
-                    <a:bodyPr wrap="square"/>
-                    <a:lstStyle/>
-                    <a:p>
-                      <a:pPr algn="l"/>
-                      <a:r>
-                        <a:rPr sz="1000" b="0">
-                          <a:solidFill>
-                            <a:srgbClr val="1D1B43"/>
-                          </a:solidFill>
-                          <a:latin typeface="Calibri"/>
-                        </a:rPr>
-                        <a:t>Excelente</a:t>
+                    <a:bodyPr/>
+                    <a:lstStyle/>
+                    <a:p>
+                      <a:pPr algn="l"/>
+                      <a:r>
+                        <a:rPr sz="1000" b="0">
+                          <a:solidFill>
+                            <a:srgbClr val="1D1B43"/>
+                          </a:solidFill>
+                          <a:latin typeface="Calibri"/>
+                        </a:rPr>
+                        <a:t>Regular</a:t>
                       </a:r>
                     </a:p>
                   </a:txBody>
@@ -11037,7 +10452,7 @@
               <a:tr h="292608">
                 <a:tc>
                   <a:txBody>
-                    <a:bodyPr wrap="square"/>
+                    <a:bodyPr/>
                     <a:lstStyle/>
                     <a:p>
                       <a:pPr algn="l"/>
@@ -11060,18 +10475,18 @@
                 </a:tc>
                 <a:tc>
                   <a:txBody>
-                    <a:bodyPr wrap="square"/>
-                    <a:lstStyle/>
-                    <a:p>
-                      <a:pPr algn="l"/>
-                      <a:r>
-                        <a:rPr sz="1000" b="0">
-                          <a:solidFill>
-                            <a:srgbClr val="1D1B43"/>
-                          </a:solidFill>
-                          <a:latin typeface="Calibri"/>
-                        </a:rPr>
-                        <a:t>WILSON SONS LOGISTIC - SANTO ANDRE / SP</a:t>
+                    <a:bodyPr/>
+                    <a:lstStyle/>
+                    <a:p>
+                      <a:pPr algn="l"/>
+                      <a:r>
+                        <a:rPr sz="1000" b="0">
+                          <a:solidFill>
+                            <a:srgbClr val="1D1B43"/>
+                          </a:solidFill>
+                          <a:latin typeface="Calibri"/>
+                        </a:rPr>
+                        <a:t>1000 MARCAS SAFETY B - ARACARIGUAMA / SP</a:t>
                       </a:r>
                     </a:p>
                   </a:txBody>
@@ -11083,18 +10498,18 @@
                 </a:tc>
                 <a:tc>
                   <a:txBody>
-                    <a:bodyPr wrap="square"/>
-                    <a:lstStyle/>
-                    <a:p>
-                      <a:pPr algn="l"/>
-                      <a:r>
-                        <a:rPr sz="1000" b="0">
-                          <a:solidFill>
-                            <a:srgbClr val="1D1B43"/>
-                          </a:solidFill>
-                          <a:latin typeface="Calibri"/>
-                        </a:rPr>
-                        <a:t>19</a:t>
+                    <a:bodyPr/>
+                    <a:lstStyle/>
+                    <a:p>
+                      <a:pPr algn="l"/>
+                      <a:r>
+                        <a:rPr sz="1000" b="0">
+                          <a:solidFill>
+                            <a:srgbClr val="1D1B43"/>
+                          </a:solidFill>
+                          <a:latin typeface="Calibri"/>
+                        </a:rPr>
+                        <a:t>18</a:t>
                       </a:r>
                     </a:p>
                   </a:txBody>
@@ -11106,7 +10521,7 @@
                 </a:tc>
                 <a:tc>
                   <a:txBody>
-                    <a:bodyPr wrap="square"/>
+                    <a:bodyPr/>
                     <a:lstStyle/>
                     <a:p>
                       <a:pPr algn="l"/>
@@ -11129,18 +10544,18 @@
                 </a:tc>
                 <a:tc>
                   <a:txBody>
-                    <a:bodyPr wrap="square"/>
-                    <a:lstStyle/>
-                    <a:p>
-                      <a:pPr algn="l"/>
-                      <a:r>
-                        <a:rPr sz="1000" b="0">
-                          <a:solidFill>
-                            <a:srgbClr val="1D1B43"/>
-                          </a:solidFill>
-                          <a:latin typeface="Calibri"/>
-                        </a:rPr>
-                        <a:t>1</a:t>
+                    <a:bodyPr/>
+                    <a:lstStyle/>
+                    <a:p>
+                      <a:pPr algn="l"/>
+                      <a:r>
+                        <a:rPr sz="1000" b="0">
+                          <a:solidFill>
+                            <a:srgbClr val="1D1B43"/>
+                          </a:solidFill>
+                          <a:latin typeface="Calibri"/>
+                        </a:rPr>
+                        <a:t>0</a:t>
                       </a:r>
                     </a:p>
                   </a:txBody>
@@ -11152,18 +10567,18 @@
                 </a:tc>
                 <a:tc>
                   <a:txBody>
-                    <a:bodyPr wrap="square"/>
-                    <a:lstStyle/>
-                    <a:p>
-                      <a:pPr algn="l"/>
-                      <a:r>
-                        <a:rPr sz="1000" b="0">
-                          <a:solidFill>
-                            <a:srgbClr val="1D1B43"/>
-                          </a:solidFill>
-                          <a:latin typeface="Calibri"/>
-                        </a:rPr>
-                        <a:t>94.7%</a:t>
+                    <a:bodyPr/>
+                    <a:lstStyle/>
+                    <a:p>
+                      <a:pPr algn="l"/>
+                      <a:r>
+                        <a:rPr sz="1000" b="0">
+                          <a:solidFill>
+                            <a:srgbClr val="1D1B43"/>
+                          </a:solidFill>
+                          <a:latin typeface="Calibri"/>
+                        </a:rPr>
+                        <a:t>100.0%</a:t>
                       </a:r>
                     </a:p>
                   </a:txBody>
@@ -11175,18 +10590,18 @@
                 </a:tc>
                 <a:tc>
                   <a:txBody>
-                    <a:bodyPr wrap="square"/>
-                    <a:lstStyle/>
-                    <a:p>
-                      <a:pPr algn="l"/>
-                      <a:r>
-                        <a:rPr sz="1000" b="0">
-                          <a:solidFill>
-                            <a:srgbClr val="1D1B43"/>
-                          </a:solidFill>
-                          <a:latin typeface="Calibri"/>
-                        </a:rPr>
-                        <a:t>Regular</a:t>
+                    <a:bodyPr/>
+                    <a:lstStyle/>
+                    <a:p>
+                      <a:pPr algn="l"/>
+                      <a:r>
+                        <a:rPr sz="1000" b="0">
+                          <a:solidFill>
+                            <a:srgbClr val="1D1B43"/>
+                          </a:solidFill>
+                          <a:latin typeface="Calibri"/>
+                        </a:rPr>
+                        <a:t>Excelente</a:t>
                       </a:r>
                     </a:p>
                   </a:txBody>
@@ -11200,7 +10615,7 @@
               <a:tr h="292608">
                 <a:tc>
                   <a:txBody>
-                    <a:bodyPr wrap="square"/>
+                    <a:bodyPr/>
                     <a:lstStyle/>
                     <a:p>
                       <a:pPr algn="l"/>
@@ -11223,18 +10638,18 @@
                 </a:tc>
                 <a:tc>
                   <a:txBody>
-                    <a:bodyPr wrap="square"/>
-                    <a:lstStyle/>
-                    <a:p>
-                      <a:pPr algn="l"/>
-                      <a:r>
-                        <a:rPr sz="1000" b="0">
-                          <a:solidFill>
-                            <a:srgbClr val="1D1B43"/>
-                          </a:solidFill>
-                          <a:latin typeface="Calibri"/>
-                        </a:rPr>
-                        <a:t>CORSUL COMERCIO E RE - CASCAVEL / PR</a:t>
+                    <a:bodyPr/>
+                    <a:lstStyle/>
+                    <a:p>
+                      <a:pPr algn="l"/>
+                      <a:r>
+                        <a:rPr sz="1000" b="0">
+                          <a:solidFill>
+                            <a:srgbClr val="1D1B43"/>
+                          </a:solidFill>
+                          <a:latin typeface="Calibri"/>
+                        </a:rPr>
+                        <a:t>NORTEL SUPRIMENTOS I - SERRA / ES</a:t>
                       </a:r>
                     </a:p>
                   </a:txBody>
@@ -11246,7 +10661,7 @@
                 </a:tc>
                 <a:tc>
                   <a:txBody>
-                    <a:bodyPr wrap="square"/>
+                    <a:bodyPr/>
                     <a:lstStyle/>
                     <a:p>
                       <a:pPr algn="l"/>
@@ -11269,18 +10684,18 @@
                 </a:tc>
                 <a:tc>
                   <a:txBody>
-                    <a:bodyPr wrap="square"/>
-                    <a:lstStyle/>
-                    <a:p>
-                      <a:pPr algn="l"/>
-                      <a:r>
-                        <a:rPr sz="1000" b="0">
-                          <a:solidFill>
-                            <a:srgbClr val="1D1B43"/>
-                          </a:solidFill>
-                          <a:latin typeface="Calibri"/>
-                        </a:rPr>
-                        <a:t>17</a:t>
+                    <a:bodyPr/>
+                    <a:lstStyle/>
+                    <a:p>
+                      <a:pPr algn="l"/>
+                      <a:r>
+                        <a:rPr sz="1000" b="0">
+                          <a:solidFill>
+                            <a:srgbClr val="1D1B43"/>
+                          </a:solidFill>
+                          <a:latin typeface="Calibri"/>
+                        </a:rPr>
+                        <a:t>18</a:t>
                       </a:r>
                     </a:p>
                   </a:txBody>
@@ -11292,18 +10707,18 @@
                 </a:tc>
                 <a:tc>
                   <a:txBody>
-                    <a:bodyPr wrap="square"/>
-                    <a:lstStyle/>
-                    <a:p>
-                      <a:pPr algn="l"/>
-                      <a:r>
-                        <a:rPr sz="1000" b="0">
-                          <a:solidFill>
-                            <a:srgbClr val="1D1B43"/>
-                          </a:solidFill>
-                          <a:latin typeface="Calibri"/>
-                        </a:rPr>
-                        <a:t>1</a:t>
+                    <a:bodyPr/>
+                    <a:lstStyle/>
+                    <a:p>
+                      <a:pPr algn="l"/>
+                      <a:r>
+                        <a:rPr sz="1000" b="0">
+                          <a:solidFill>
+                            <a:srgbClr val="1D1B43"/>
+                          </a:solidFill>
+                          <a:latin typeface="Calibri"/>
+                        </a:rPr>
+                        <a:t>0</a:t>
                       </a:r>
                     </a:p>
                   </a:txBody>
@@ -11315,18 +10730,18 @@
                 </a:tc>
                 <a:tc>
                   <a:txBody>
-                    <a:bodyPr wrap="square"/>
-                    <a:lstStyle/>
-                    <a:p>
-                      <a:pPr algn="l"/>
-                      <a:r>
-                        <a:rPr sz="1000" b="0">
-                          <a:solidFill>
-                            <a:srgbClr val="1D1B43"/>
-                          </a:solidFill>
-                          <a:latin typeface="Calibri"/>
-                        </a:rPr>
-                        <a:t>94.4%</a:t>
+                    <a:bodyPr/>
+                    <a:lstStyle/>
+                    <a:p>
+                      <a:pPr algn="l"/>
+                      <a:r>
+                        <a:rPr sz="1000" b="0">
+                          <a:solidFill>
+                            <a:srgbClr val="1D1B43"/>
+                          </a:solidFill>
+                          <a:latin typeface="Calibri"/>
+                        </a:rPr>
+                        <a:t>100.0%</a:t>
                       </a:r>
                     </a:p>
                   </a:txBody>
@@ -11338,18 +10753,18 @@
                 </a:tc>
                 <a:tc>
                   <a:txBody>
-                    <a:bodyPr wrap="square"/>
-                    <a:lstStyle/>
-                    <a:p>
-                      <a:pPr algn="l"/>
-                      <a:r>
-                        <a:rPr sz="1000" b="0">
-                          <a:solidFill>
-                            <a:srgbClr val="1D1B43"/>
-                          </a:solidFill>
-                          <a:latin typeface="Calibri"/>
-                        </a:rPr>
-                        <a:t>Regular</a:t>
+                    <a:bodyPr/>
+                    <a:lstStyle/>
+                    <a:p>
+                      <a:pPr algn="l"/>
+                      <a:r>
+                        <a:rPr sz="1000" b="0">
+                          <a:solidFill>
+                            <a:srgbClr val="1D1B43"/>
+                          </a:solidFill>
+                          <a:latin typeface="Calibri"/>
+                        </a:rPr>
+                        <a:t>Excelente</a:t>
                       </a:r>
                     </a:p>
                   </a:txBody>
@@ -11363,7 +10778,7 @@
               <a:tr h="292608">
                 <a:tc>
                   <a:txBody>
-                    <a:bodyPr wrap="square"/>
+                    <a:bodyPr/>
                     <a:lstStyle/>
                     <a:p>
                       <a:pPr algn="l"/>
@@ -11386,18 +10801,18 @@
                 </a:tc>
                 <a:tc>
                   <a:txBody>
-                    <a:bodyPr wrap="square"/>
-                    <a:lstStyle/>
-                    <a:p>
-                      <a:pPr algn="l"/>
-                      <a:r>
-                        <a:rPr sz="1000" b="0">
-                          <a:solidFill>
-                            <a:srgbClr val="1D1B43"/>
-                          </a:solidFill>
-                          <a:latin typeface="Calibri"/>
-                        </a:rPr>
-                        <a:t>FITASSUL COMERCIO DI - ITAJUBA / MG</a:t>
+                    <a:bodyPr/>
+                    <a:lstStyle/>
+                    <a:p>
+                      <a:pPr algn="l"/>
+                      <a:r>
+                        <a:rPr sz="1000" b="0">
+                          <a:solidFill>
+                            <a:srgbClr val="1D1B43"/>
+                          </a:solidFill>
+                          <a:latin typeface="Calibri"/>
+                        </a:rPr>
+                        <a:t>BALASKA EQUIPE INDUS - GUARULHOS / SP</a:t>
                       </a:r>
                     </a:p>
                   </a:txBody>
@@ -11409,7 +10824,7 @@
                 </a:tc>
                 <a:tc>
                   <a:txBody>
-                    <a:bodyPr wrap="square"/>
+                    <a:bodyPr/>
                     <a:lstStyle/>
                     <a:p>
                       <a:pPr algn="l"/>
@@ -11432,7 +10847,7 @@
                 </a:tc>
                 <a:tc>
                   <a:txBody>
-                    <a:bodyPr wrap="square"/>
+                    <a:bodyPr/>
                     <a:lstStyle/>
                     <a:p>
                       <a:pPr algn="l"/>
@@ -11455,7 +10870,7 @@
                 </a:tc>
                 <a:tc>
                   <a:txBody>
-                    <a:bodyPr wrap="square"/>
+                    <a:bodyPr/>
                     <a:lstStyle/>
                     <a:p>
                       <a:pPr algn="l"/>
@@ -11478,7 +10893,7 @@
                 </a:tc>
                 <a:tc>
                   <a:txBody>
-                    <a:bodyPr wrap="square"/>
+                    <a:bodyPr/>
                     <a:lstStyle/>
                     <a:p>
                       <a:pPr algn="l"/>
@@ -11501,7 +10916,7 @@
                 </a:tc>
                 <a:tc>
                   <a:txBody>
-                    <a:bodyPr wrap="square"/>
+                    <a:bodyPr/>
                     <a:lstStyle/>
                     <a:p>
                       <a:pPr algn="l"/>

--- a/ANSELL_BRAZIL_LTDA.pptx
+++ b/ANSELL_BRAZIL_LTDA.pptx
@@ -147,10 +147,10 @@
               <c:strCache>
                 <c:ptCount val="2"/>
                 <c:pt idx="0">
-                  <c:v>Marco 2026</c:v>
+                  <c:v>Abril 2026</c:v>
                 </c:pt>
                 <c:pt idx="1">
-                  <c:v>Abril 2026</c:v>
+                  <c:v>Maio 2026</c:v>
                 </c:pt>
               </c:strCache>
             </c:strRef>
@@ -162,10 +162,10 @@
                 <c:formatCode>General</c:formatCode>
                 <c:ptCount val="2"/>
                 <c:pt idx="0">
-                  <c:v>2</c:v>
+                  <c:v>540</c:v>
                 </c:pt>
                 <c:pt idx="1">
-                  <c:v>535</c:v>
+                  <c:v>542</c:v>
                 </c:pt>
               </c:numCache>
             </c:numRef>
@@ -196,10 +196,10 @@
               <c:strCache>
                 <c:ptCount val="2"/>
                 <c:pt idx="0">
-                  <c:v>Marco 2026</c:v>
+                  <c:v>Abril 2026</c:v>
                 </c:pt>
                 <c:pt idx="1">
-                  <c:v>Abril 2026</c:v>
+                  <c:v>Maio 2026</c:v>
                 </c:pt>
               </c:strCache>
             </c:strRef>
@@ -211,10 +211,10 @@
                 <c:formatCode>General</c:formatCode>
                 <c:ptCount val="2"/>
                 <c:pt idx="0">
-                  <c:v>0</c:v>
+                  <c:v>2</c:v>
                 </c:pt>
                 <c:pt idx="1">
-                  <c:v>10</c:v>
+                  <c:v>19</c:v>
                 </c:pt>
               </c:numCache>
             </c:numRef>
@@ -3387,7 +3387,7 @@
                 </a:solidFill>
                 <a:latin typeface="Calibri"/>
               </a:rPr>
-              <a:t>INDICADORES ABRIL 2026</a:t>
+              <a:t>INDICADORES MAIO 2026</a:t>
             </a:r>
           </a:p>
         </p:txBody>
@@ -3709,7 +3709,7 @@
                 </a:solidFill>
                 <a:latin typeface="Calibri"/>
               </a:rPr>
-              <a:t>545</a:t>
+              <a:t>561</a:t>
             </a:r>
           </a:p>
         </p:txBody>
@@ -3824,7 +3824,7 @@
                 </a:solidFill>
                 <a:latin typeface="Calibri"/>
               </a:rPr>
-              <a:t>535</a:t>
+              <a:t>542</a:t>
             </a:r>
           </a:p>
         </p:txBody>
@@ -3939,7 +3939,7 @@
                 </a:solidFill>
                 <a:latin typeface="Calibri"/>
               </a:rPr>
-              <a:t>10</a:t>
+              <a:t>19</a:t>
             </a:r>
           </a:p>
         </p:txBody>
@@ -4054,7 +4054,7 @@
                 </a:solidFill>
                 <a:latin typeface="Calibri"/>
               </a:rPr>
-              <a:t>98.2%</a:t>
+              <a:t>96.6%</a:t>
             </a:r>
           </a:p>
         </p:txBody>
@@ -4155,7 +4155,7 @@
                           </a:solidFill>
                           <a:latin typeface="Calibri"/>
                         </a:rPr>
-                        <a:t>Marco 2026</a:t>
+                        <a:t>Abril 2026</a:t>
                       </a:r>
                     </a:p>
                   </a:txBody>
@@ -4178,7 +4178,7 @@
                           </a:solidFill>
                           <a:latin typeface="Calibri"/>
                         </a:rPr>
-                        <a:t>Abril 2026</a:t>
+                        <a:t>Maio 2026</a:t>
                       </a:r>
                     </a:p>
                   </a:txBody>
@@ -4249,53 +4249,53 @@
                           </a:solidFill>
                           <a:latin typeface="Calibri"/>
                         </a:rPr>
-                        <a:t>2</a:t>
-                      </a:r>
-                    </a:p>
-                  </a:txBody>
-                  <a:tcPr>
-                    <a:solidFill>
-                      <a:srgbClr val="FFFFFF"/>
-                    </a:solidFill>
-                  </a:tcPr>
-                </a:tc>
-                <a:tc>
-                  <a:txBody>
-                    <a:bodyPr/>
-                    <a:lstStyle/>
-                    <a:p>
-                      <a:pPr algn="l"/>
-                      <a:r>
-                        <a:rPr sz="1000" b="0">
-                          <a:solidFill>
-                            <a:srgbClr val="1D1B43"/>
-                          </a:solidFill>
-                          <a:latin typeface="Calibri"/>
-                        </a:rPr>
-                        <a:t>545</a:t>
-                      </a:r>
-                    </a:p>
-                  </a:txBody>
-                  <a:tcPr>
-                    <a:solidFill>
-                      <a:srgbClr val="FFFFFF"/>
-                    </a:solidFill>
-                  </a:tcPr>
-                </a:tc>
-                <a:tc>
-                  <a:txBody>
-                    <a:bodyPr/>
-                    <a:lstStyle/>
-                    <a:p>
-                      <a:pPr algn="l"/>
-                      <a:r>
-                        <a:rPr sz="1000" b="0">
-                          <a:solidFill>
-                            <a:srgbClr val="1D1B43"/>
-                          </a:solidFill>
-                          <a:latin typeface="Calibri"/>
-                        </a:rPr>
-                        <a:t>+ 543</a:t>
+                        <a:t>542</a:t>
+                      </a:r>
+                    </a:p>
+                  </a:txBody>
+                  <a:tcPr>
+                    <a:solidFill>
+                      <a:srgbClr val="FFFFFF"/>
+                    </a:solidFill>
+                  </a:tcPr>
+                </a:tc>
+                <a:tc>
+                  <a:txBody>
+                    <a:bodyPr/>
+                    <a:lstStyle/>
+                    <a:p>
+                      <a:pPr algn="l"/>
+                      <a:r>
+                        <a:rPr sz="1000" b="0">
+                          <a:solidFill>
+                            <a:srgbClr val="1D1B43"/>
+                          </a:solidFill>
+                          <a:latin typeface="Calibri"/>
+                        </a:rPr>
+                        <a:t>561</a:t>
+                      </a:r>
+                    </a:p>
+                  </a:txBody>
+                  <a:tcPr>
+                    <a:solidFill>
+                      <a:srgbClr val="FFFFFF"/>
+                    </a:solidFill>
+                  </a:tcPr>
+                </a:tc>
+                <a:tc>
+                  <a:txBody>
+                    <a:bodyPr/>
+                    <a:lstStyle/>
+                    <a:p>
+                      <a:pPr algn="l"/>
+                      <a:r>
+                        <a:rPr sz="1000" b="0">
+                          <a:solidFill>
+                            <a:srgbClr val="1D1B43"/>
+                          </a:solidFill>
+                          <a:latin typeface="Calibri"/>
+                        </a:rPr>
+                        <a:t>+ 19</a:t>
                       </a:r>
                     </a:p>
                   </a:txBody>
@@ -4343,53 +4343,53 @@
                           </a:solidFill>
                           <a:latin typeface="Calibri"/>
                         </a:rPr>
-                        <a:t>2</a:t>
-                      </a:r>
-                    </a:p>
-                  </a:txBody>
-                  <a:tcPr>
-                    <a:solidFill>
-                      <a:srgbClr val="F2F2F2"/>
-                    </a:solidFill>
-                  </a:tcPr>
-                </a:tc>
-                <a:tc>
-                  <a:txBody>
-                    <a:bodyPr/>
-                    <a:lstStyle/>
-                    <a:p>
-                      <a:pPr algn="l"/>
-                      <a:r>
-                        <a:rPr sz="1000" b="0">
-                          <a:solidFill>
-                            <a:srgbClr val="1D1B43"/>
-                          </a:solidFill>
-                          <a:latin typeface="Calibri"/>
-                        </a:rPr>
-                        <a:t>535</a:t>
-                      </a:r>
-                    </a:p>
-                  </a:txBody>
-                  <a:tcPr>
-                    <a:solidFill>
-                      <a:srgbClr val="F2F2F2"/>
-                    </a:solidFill>
-                  </a:tcPr>
-                </a:tc>
-                <a:tc>
-                  <a:txBody>
-                    <a:bodyPr/>
-                    <a:lstStyle/>
-                    <a:p>
-                      <a:pPr algn="l"/>
-                      <a:r>
-                        <a:rPr sz="1000" b="0">
-                          <a:solidFill>
-                            <a:srgbClr val="1D1B43"/>
-                          </a:solidFill>
-                          <a:latin typeface="Calibri"/>
-                        </a:rPr>
-                        <a:t>+ 533</a:t>
+                        <a:t>540</a:t>
+                      </a:r>
+                    </a:p>
+                  </a:txBody>
+                  <a:tcPr>
+                    <a:solidFill>
+                      <a:srgbClr val="F2F2F2"/>
+                    </a:solidFill>
+                  </a:tcPr>
+                </a:tc>
+                <a:tc>
+                  <a:txBody>
+                    <a:bodyPr/>
+                    <a:lstStyle/>
+                    <a:p>
+                      <a:pPr algn="l"/>
+                      <a:r>
+                        <a:rPr sz="1000" b="0">
+                          <a:solidFill>
+                            <a:srgbClr val="1D1B43"/>
+                          </a:solidFill>
+                          <a:latin typeface="Calibri"/>
+                        </a:rPr>
+                        <a:t>542</a:t>
+                      </a:r>
+                    </a:p>
+                  </a:txBody>
+                  <a:tcPr>
+                    <a:solidFill>
+                      <a:srgbClr val="F2F2F2"/>
+                    </a:solidFill>
+                  </a:tcPr>
+                </a:tc>
+                <a:tc>
+                  <a:txBody>
+                    <a:bodyPr/>
+                    <a:lstStyle/>
+                    <a:p>
+                      <a:pPr algn="l"/>
+                      <a:r>
+                        <a:rPr sz="1000" b="0">
+                          <a:solidFill>
+                            <a:srgbClr val="1D1B43"/>
+                          </a:solidFill>
+                          <a:latin typeface="Calibri"/>
+                        </a:rPr>
+                        <a:t>+ 2</a:t>
                       </a:r>
                     </a:p>
                   </a:txBody>
@@ -4437,53 +4437,53 @@
                           </a:solidFill>
                           <a:latin typeface="Calibri"/>
                         </a:rPr>
-                        <a:t>0</a:t>
-                      </a:r>
-                    </a:p>
-                  </a:txBody>
-                  <a:tcPr>
-                    <a:solidFill>
-                      <a:srgbClr val="FFFFFF"/>
-                    </a:solidFill>
-                  </a:tcPr>
-                </a:tc>
-                <a:tc>
-                  <a:txBody>
-                    <a:bodyPr/>
-                    <a:lstStyle/>
-                    <a:p>
-                      <a:pPr algn="l"/>
-                      <a:r>
-                        <a:rPr sz="1000" b="0">
-                          <a:solidFill>
-                            <a:srgbClr val="1D1B43"/>
-                          </a:solidFill>
-                          <a:latin typeface="Calibri"/>
-                        </a:rPr>
-                        <a:t>10</a:t>
-                      </a:r>
-                    </a:p>
-                  </a:txBody>
-                  <a:tcPr>
-                    <a:solidFill>
-                      <a:srgbClr val="FFFFFF"/>
-                    </a:solidFill>
-                  </a:tcPr>
-                </a:tc>
-                <a:tc>
-                  <a:txBody>
-                    <a:bodyPr/>
-                    <a:lstStyle/>
-                    <a:p>
-                      <a:pPr algn="l"/>
-                      <a:r>
-                        <a:rPr sz="1000" b="0">
-                          <a:solidFill>
-                            <a:srgbClr val="1D1B43"/>
-                          </a:solidFill>
-                          <a:latin typeface="Calibri"/>
-                        </a:rPr>
-                        <a:t>+ 10</a:t>
+                        <a:t>2</a:t>
+                      </a:r>
+                    </a:p>
+                  </a:txBody>
+                  <a:tcPr>
+                    <a:solidFill>
+                      <a:srgbClr val="FFFFFF"/>
+                    </a:solidFill>
+                  </a:tcPr>
+                </a:tc>
+                <a:tc>
+                  <a:txBody>
+                    <a:bodyPr/>
+                    <a:lstStyle/>
+                    <a:p>
+                      <a:pPr algn="l"/>
+                      <a:r>
+                        <a:rPr sz="1000" b="0">
+                          <a:solidFill>
+                            <a:srgbClr val="1D1B43"/>
+                          </a:solidFill>
+                          <a:latin typeface="Calibri"/>
+                        </a:rPr>
+                        <a:t>19</a:t>
+                      </a:r>
+                    </a:p>
+                  </a:txBody>
+                  <a:tcPr>
+                    <a:solidFill>
+                      <a:srgbClr val="FFFFFF"/>
+                    </a:solidFill>
+                  </a:tcPr>
+                </a:tc>
+                <a:tc>
+                  <a:txBody>
+                    <a:bodyPr/>
+                    <a:lstStyle/>
+                    <a:p>
+                      <a:pPr algn="l"/>
+                      <a:r>
+                        <a:rPr sz="1000" b="0">
+                          <a:solidFill>
+                            <a:srgbClr val="1D1B43"/>
+                          </a:solidFill>
+                          <a:latin typeface="Calibri"/>
+                        </a:rPr>
+                        <a:t>+ 17</a:t>
                       </a:r>
                     </a:p>
                   </a:txBody>
@@ -4531,53 +4531,53 @@
                           </a:solidFill>
                           <a:latin typeface="Calibri"/>
                         </a:rPr>
-                        <a:t>100.0%</a:t>
-                      </a:r>
-                    </a:p>
-                  </a:txBody>
-                  <a:tcPr>
-                    <a:solidFill>
-                      <a:srgbClr val="F2F2F2"/>
-                    </a:solidFill>
-                  </a:tcPr>
-                </a:tc>
-                <a:tc>
-                  <a:txBody>
-                    <a:bodyPr/>
-                    <a:lstStyle/>
-                    <a:p>
-                      <a:pPr algn="l"/>
-                      <a:r>
-                        <a:rPr sz="1000" b="0">
-                          <a:solidFill>
-                            <a:srgbClr val="1D1B43"/>
-                          </a:solidFill>
-                          <a:latin typeface="Calibri"/>
-                        </a:rPr>
-                        <a:t>98.2%</a:t>
-                      </a:r>
-                    </a:p>
-                  </a:txBody>
-                  <a:tcPr>
-                    <a:solidFill>
-                      <a:srgbClr val="F2F2F2"/>
-                    </a:solidFill>
-                  </a:tcPr>
-                </a:tc>
-                <a:tc>
-                  <a:txBody>
-                    <a:bodyPr/>
-                    <a:lstStyle/>
-                    <a:p>
-                      <a:pPr algn="l"/>
-                      <a:r>
-                        <a:rPr sz="1000" b="0">
-                          <a:solidFill>
-                            <a:srgbClr val="1D1B43"/>
-                          </a:solidFill>
-                          <a:latin typeface="Calibri"/>
-                        </a:rPr>
-                        <a:t>- 1.8pp</a:t>
+                        <a:t>99.6%</a:t>
+                      </a:r>
+                    </a:p>
+                  </a:txBody>
+                  <a:tcPr>
+                    <a:solidFill>
+                      <a:srgbClr val="F2F2F2"/>
+                    </a:solidFill>
+                  </a:tcPr>
+                </a:tc>
+                <a:tc>
+                  <a:txBody>
+                    <a:bodyPr/>
+                    <a:lstStyle/>
+                    <a:p>
+                      <a:pPr algn="l"/>
+                      <a:r>
+                        <a:rPr sz="1000" b="0">
+                          <a:solidFill>
+                            <a:srgbClr val="1D1B43"/>
+                          </a:solidFill>
+                          <a:latin typeface="Calibri"/>
+                        </a:rPr>
+                        <a:t>96.6%</a:t>
+                      </a:r>
+                    </a:p>
+                  </a:txBody>
+                  <a:tcPr>
+                    <a:solidFill>
+                      <a:srgbClr val="F2F2F2"/>
+                    </a:solidFill>
+                  </a:tcPr>
+                </a:tc>
+                <a:tc>
+                  <a:txBody>
+                    <a:bodyPr/>
+                    <a:lstStyle/>
+                    <a:p>
+                      <a:pPr algn="l"/>
+                      <a:r>
+                        <a:rPr sz="1000" b="0">
+                          <a:solidFill>
+                            <a:srgbClr val="1D1B43"/>
+                          </a:solidFill>
+                          <a:latin typeface="Calibri"/>
+                        </a:rPr>
+                        <a:t>- 3.0pp</a:t>
                       </a:r>
                     </a:p>
                   </a:txBody>
@@ -4894,7 +4894,53 @@
                           </a:solidFill>
                           <a:latin typeface="Calibri"/>
                         </a:rPr>
-                        <a:t>Marco 2026</a:t>
+                        <a:t>Abril 2026</a:t>
+                      </a:r>
+                    </a:p>
+                  </a:txBody>
+                  <a:tcPr>
+                    <a:solidFill>
+                      <a:srgbClr val="FFFFFF"/>
+                    </a:solidFill>
+                  </a:tcPr>
+                </a:tc>
+                <a:tc>
+                  <a:txBody>
+                    <a:bodyPr/>
+                    <a:lstStyle/>
+                    <a:p>
+                      <a:pPr algn="l"/>
+                      <a:r>
+                        <a:rPr sz="1000" b="0">
+                          <a:solidFill>
+                            <a:srgbClr val="1D1B43"/>
+                          </a:solidFill>
+                          <a:latin typeface="Calibri"/>
+                        </a:rPr>
+                        <a:t>542</a:t>
+                      </a:r>
+                    </a:p>
+                  </a:txBody>
+                  <a:tcPr>
+                    <a:solidFill>
+                      <a:srgbClr val="FFFFFF"/>
+                    </a:solidFill>
+                  </a:tcPr>
+                </a:tc>
+                <a:tc>
+                  <a:txBody>
+                    <a:bodyPr/>
+                    <a:lstStyle/>
+                    <a:p>
+                      <a:pPr algn="l"/>
+                      <a:r>
+                        <a:rPr sz="1000" b="0">
+                          <a:solidFill>
+                            <a:srgbClr val="1D1B43"/>
+                          </a:solidFill>
+                          <a:latin typeface="Calibri"/>
+                        </a:rPr>
+                        <a:t>540</a:t>
                       </a:r>
                     </a:p>
                   </a:txBody>
@@ -4940,53 +4986,7 @@
                           </a:solidFill>
                           <a:latin typeface="Calibri"/>
                         </a:rPr>
-                        <a:t>2</a:t>
-                      </a:r>
-                    </a:p>
-                  </a:txBody>
-                  <a:tcPr>
-                    <a:solidFill>
-                      <a:srgbClr val="FFFFFF"/>
-                    </a:solidFill>
-                  </a:tcPr>
-                </a:tc>
-                <a:tc>
-                  <a:txBody>
-                    <a:bodyPr/>
-                    <a:lstStyle/>
-                    <a:p>
-                      <a:pPr algn="l"/>
-                      <a:r>
-                        <a:rPr sz="1000" b="0">
-                          <a:solidFill>
-                            <a:srgbClr val="1D1B43"/>
-                          </a:solidFill>
-                          <a:latin typeface="Calibri"/>
-                        </a:rPr>
-                        <a:t>0</a:t>
-                      </a:r>
-                    </a:p>
-                  </a:txBody>
-                  <a:tcPr>
-                    <a:solidFill>
-                      <a:srgbClr val="FFFFFF"/>
-                    </a:solidFill>
-                  </a:tcPr>
-                </a:tc>
-                <a:tc>
-                  <a:txBody>
-                    <a:bodyPr/>
-                    <a:lstStyle/>
-                    <a:p>
-                      <a:pPr algn="l"/>
-                      <a:r>
-                        <a:rPr sz="1000" b="0">
-                          <a:solidFill>
-                            <a:srgbClr val="1D1B43"/>
-                          </a:solidFill>
-                          <a:latin typeface="Calibri"/>
-                        </a:rPr>
-                        <a:t>100.0%</a:t>
+                        <a:t>99.6%</a:t>
                       </a:r>
                     </a:p>
                   </a:txBody>
@@ -5011,99 +5011,99 @@
                           </a:solidFill>
                           <a:latin typeface="Calibri"/>
                         </a:rPr>
-                        <a:t>Abril 2026</a:t>
-                      </a:r>
-                    </a:p>
-                  </a:txBody>
-                  <a:tcPr>
-                    <a:solidFill>
-                      <a:srgbClr val="F2F2F2"/>
-                    </a:solidFill>
-                  </a:tcPr>
-                </a:tc>
-                <a:tc>
-                  <a:txBody>
-                    <a:bodyPr/>
-                    <a:lstStyle/>
-                    <a:p>
-                      <a:pPr algn="l"/>
-                      <a:r>
-                        <a:rPr sz="1000" b="0">
-                          <a:solidFill>
-                            <a:srgbClr val="1D1B43"/>
-                          </a:solidFill>
-                          <a:latin typeface="Calibri"/>
-                        </a:rPr>
-                        <a:t>545</a:t>
-                      </a:r>
-                    </a:p>
-                  </a:txBody>
-                  <a:tcPr>
-                    <a:solidFill>
-                      <a:srgbClr val="F2F2F2"/>
-                    </a:solidFill>
-                  </a:tcPr>
-                </a:tc>
-                <a:tc>
-                  <a:txBody>
-                    <a:bodyPr/>
-                    <a:lstStyle/>
-                    <a:p>
-                      <a:pPr algn="l"/>
-                      <a:r>
-                        <a:rPr sz="1000" b="0">
-                          <a:solidFill>
-                            <a:srgbClr val="1D1B43"/>
-                          </a:solidFill>
-                          <a:latin typeface="Calibri"/>
-                        </a:rPr>
-                        <a:t>535</a:t>
-                      </a:r>
-                    </a:p>
-                  </a:txBody>
-                  <a:tcPr>
-                    <a:solidFill>
-                      <a:srgbClr val="F2F2F2"/>
-                    </a:solidFill>
-                  </a:tcPr>
-                </a:tc>
-                <a:tc>
-                  <a:txBody>
-                    <a:bodyPr/>
-                    <a:lstStyle/>
-                    <a:p>
-                      <a:pPr algn="l"/>
-                      <a:r>
-                        <a:rPr sz="1000" b="0">
-                          <a:solidFill>
-                            <a:srgbClr val="1D1B43"/>
-                          </a:solidFill>
-                          <a:latin typeface="Calibri"/>
-                        </a:rPr>
-                        <a:t>10</a:t>
-                      </a:r>
-                    </a:p>
-                  </a:txBody>
-                  <a:tcPr>
-                    <a:solidFill>
-                      <a:srgbClr val="F2F2F2"/>
-                    </a:solidFill>
-                  </a:tcPr>
-                </a:tc>
-                <a:tc>
-                  <a:txBody>
-                    <a:bodyPr/>
-                    <a:lstStyle/>
-                    <a:p>
-                      <a:pPr algn="l"/>
-                      <a:r>
-                        <a:rPr sz="1000" b="0">
-                          <a:solidFill>
-                            <a:srgbClr val="1D1B43"/>
-                          </a:solidFill>
-                          <a:latin typeface="Calibri"/>
-                        </a:rPr>
-                        <a:t>98.2%</a:t>
+                        <a:t>Maio 2026</a:t>
+                      </a:r>
+                    </a:p>
+                  </a:txBody>
+                  <a:tcPr>
+                    <a:solidFill>
+                      <a:srgbClr val="F2F2F2"/>
+                    </a:solidFill>
+                  </a:tcPr>
+                </a:tc>
+                <a:tc>
+                  <a:txBody>
+                    <a:bodyPr/>
+                    <a:lstStyle/>
+                    <a:p>
+                      <a:pPr algn="l"/>
+                      <a:r>
+                        <a:rPr sz="1000" b="0">
+                          <a:solidFill>
+                            <a:srgbClr val="1D1B43"/>
+                          </a:solidFill>
+                          <a:latin typeface="Calibri"/>
+                        </a:rPr>
+                        <a:t>561</a:t>
+                      </a:r>
+                    </a:p>
+                  </a:txBody>
+                  <a:tcPr>
+                    <a:solidFill>
+                      <a:srgbClr val="F2F2F2"/>
+                    </a:solidFill>
+                  </a:tcPr>
+                </a:tc>
+                <a:tc>
+                  <a:txBody>
+                    <a:bodyPr/>
+                    <a:lstStyle/>
+                    <a:p>
+                      <a:pPr algn="l"/>
+                      <a:r>
+                        <a:rPr sz="1000" b="0">
+                          <a:solidFill>
+                            <a:srgbClr val="1D1B43"/>
+                          </a:solidFill>
+                          <a:latin typeface="Calibri"/>
+                        </a:rPr>
+                        <a:t>542</a:t>
+                      </a:r>
+                    </a:p>
+                  </a:txBody>
+                  <a:tcPr>
+                    <a:solidFill>
+                      <a:srgbClr val="F2F2F2"/>
+                    </a:solidFill>
+                  </a:tcPr>
+                </a:tc>
+                <a:tc>
+                  <a:txBody>
+                    <a:bodyPr/>
+                    <a:lstStyle/>
+                    <a:p>
+                      <a:pPr algn="l"/>
+                      <a:r>
+                        <a:rPr sz="1000" b="0">
+                          <a:solidFill>
+                            <a:srgbClr val="1D1B43"/>
+                          </a:solidFill>
+                          <a:latin typeface="Calibri"/>
+                        </a:rPr>
+                        <a:t>19</a:t>
+                      </a:r>
+                    </a:p>
+                  </a:txBody>
+                  <a:tcPr>
+                    <a:solidFill>
+                      <a:srgbClr val="F2F2F2"/>
+                    </a:solidFill>
+                  </a:tcPr>
+                </a:tc>
+                <a:tc>
+                  <a:txBody>
+                    <a:bodyPr/>
+                    <a:lstStyle/>
+                    <a:p>
+                      <a:pPr algn="l"/>
+                      <a:r>
+                        <a:rPr sz="1000" b="0">
+                          <a:solidFill>
+                            <a:srgbClr val="1D1B43"/>
+                          </a:solidFill>
+                          <a:latin typeface="Calibri"/>
+                        </a:rPr>
+                        <a:t>96.6%</a:t>
                       </a:r>
                     </a:p>
                   </a:txBody>
@@ -5191,7 +5191,7 @@
                 </a:solidFill>
                 <a:latin typeface="Calibri"/>
               </a:rPr>
-              <a:t>PERFORMANCE: 98.2% - EXCELENTE</a:t>
+              <a:t>PERFORMANCE: 96.6% - EXCELENTE</a:t>
             </a:r>
           </a:p>
         </p:txBody>
@@ -5276,7 +5276,7 @@
                 </a:solidFill>
                 <a:latin typeface="Calibri"/>
               </a:rPr>
-              <a:t>OCORRENCIAS FORA DO PRAZO (10)</a:t>
+              <a:t>OCORRENCIAS FORA DO PRAZO (19)</a:t>
             </a:r>
           </a:p>
         </p:txBody>
@@ -5334,7 +5334,7 @@
         </p:nvGraphicFramePr>
         <p:xfrm>
           <a:off x="457200" y="1828800"/>
-          <a:ext cx="11429999" cy="4224528"/>
+          <a:ext cx="11429999" cy="4572000"/>
         </p:xfrm>
         <a:graphic>
           <a:graphicData uri="http://schemas.openxmlformats.org/drawingml/2006/table">
@@ -5349,7 +5349,7 @@
                 <a:gridCol w="1554480"/>
                 <a:gridCol w="2743200"/>
               </a:tblGrid>
-              <a:tr h="384048">
+              <a:tr h="228600">
                 <a:tc>
                   <a:txBody>
                     <a:bodyPr/>
@@ -5466,96 +5466,213 @@
                   </a:tcPr>
                 </a:tc>
               </a:tr>
-              <a:tr h="384048">
-                <a:tc>
-                  <a:txBody>
-                    <a:bodyPr/>
-                    <a:lstStyle/>
-                    <a:p>
-                      <a:pPr algn="l"/>
-                      <a:r>
-                        <a:rPr sz="1000" b="0">
-                          <a:solidFill>
-                            <a:srgbClr val="1D1B43"/>
-                          </a:solidFill>
-                          <a:latin typeface="Calibri"/>
-                        </a:rPr>
-                        <a:t>276428</a:t>
-                      </a:r>
-                    </a:p>
-                  </a:txBody>
-                  <a:tcPr>
-                    <a:solidFill>
-                      <a:srgbClr val="FFFFFF"/>
-                    </a:solidFill>
-                  </a:tcPr>
-                </a:tc>
-                <a:tc>
-                  <a:txBody>
-                    <a:bodyPr/>
-                    <a:lstStyle/>
-                    <a:p>
-                      <a:pPr algn="l"/>
-                      <a:r>
-                        <a:rPr sz="1000" b="0">
-                          <a:solidFill>
-                            <a:srgbClr val="1D1B43"/>
-                          </a:solidFill>
-                          <a:latin typeface="Calibri"/>
-                        </a:rPr>
-                        <a:t>ANSELL BRAZIL LTDA. - SANTO ANDRE / SP</a:t>
-                      </a:r>
-                    </a:p>
-                  </a:txBody>
-                  <a:tcPr>
-                    <a:solidFill>
-                      <a:srgbClr val="FFFFFF"/>
-                    </a:solidFill>
-                  </a:tcPr>
-                </a:tc>
-                <a:tc>
-                  <a:txBody>
-                    <a:bodyPr/>
-                    <a:lstStyle/>
-                    <a:p>
-                      <a:pPr algn="l"/>
-                      <a:r>
-                        <a:rPr sz="1000" b="0">
-                          <a:solidFill>
-                            <a:srgbClr val="1D1B43"/>
-                          </a:solidFill>
-                          <a:latin typeface="Calibri"/>
-                        </a:rPr>
-                        <a:t>SANTO ANDRE/SP</a:t>
-                      </a:r>
-                    </a:p>
-                  </a:txBody>
-                  <a:tcPr>
-                    <a:solidFill>
-                      <a:srgbClr val="FFFFFF"/>
-                    </a:solidFill>
-                  </a:tcPr>
-                </a:tc>
-                <a:tc>
-                  <a:txBody>
-                    <a:bodyPr/>
-                    <a:lstStyle/>
-                    <a:p>
-                      <a:pPr algn="l"/>
-                      <a:r>
-                        <a:rPr sz="1000" b="0">
-                          <a:solidFill>
-                            <a:srgbClr val="1D1B43"/>
-                          </a:solidFill>
-                          <a:latin typeface="Calibri"/>
-                        </a:rPr>
-                        <a:t>10/04/2026</a:t>
-                      </a:r>
-                    </a:p>
-                  </a:txBody>
-                  <a:tcPr>
-                    <a:solidFill>
-                      <a:srgbClr val="FFFFFF"/>
+              <a:tr h="228600">
+                <a:tc>
+                  <a:txBody>
+                    <a:bodyPr/>
+                    <a:lstStyle/>
+                    <a:p>
+                      <a:pPr algn="l"/>
+                      <a:r>
+                        <a:rPr sz="1000" b="0">
+                          <a:solidFill>
+                            <a:srgbClr val="1D1B43"/>
+                          </a:solidFill>
+                          <a:latin typeface="Calibri"/>
+                        </a:rPr>
+                        <a:t>278593</a:t>
+                      </a:r>
+                    </a:p>
+                  </a:txBody>
+                  <a:tcPr>
+                    <a:solidFill>
+                      <a:srgbClr val="FFFFFF"/>
+                    </a:solidFill>
+                  </a:tcPr>
+                </a:tc>
+                <a:tc>
+                  <a:txBody>
+                    <a:bodyPr/>
+                    <a:lstStyle/>
+                    <a:p>
+                      <a:pPr algn="l"/>
+                      <a:r>
+                        <a:rPr sz="1000" b="0">
+                          <a:solidFill>
+                            <a:srgbClr val="1D1B43"/>
+                          </a:solidFill>
+                          <a:latin typeface="Calibri"/>
+                        </a:rPr>
+                        <a:t>YAZAKI DO BRASIL LTD - BONITO / PE</a:t>
+                      </a:r>
+                    </a:p>
+                  </a:txBody>
+                  <a:tcPr>
+                    <a:solidFill>
+                      <a:srgbClr val="FFFFFF"/>
+                    </a:solidFill>
+                  </a:tcPr>
+                </a:tc>
+                <a:tc>
+                  <a:txBody>
+                    <a:bodyPr/>
+                    <a:lstStyle/>
+                    <a:p>
+                      <a:pPr algn="l"/>
+                      <a:r>
+                        <a:rPr sz="1000" b="0">
+                          <a:solidFill>
+                            <a:srgbClr val="1D1B43"/>
+                          </a:solidFill>
+                          <a:latin typeface="Calibri"/>
+                        </a:rPr>
+                        <a:t>BONITO/PE</a:t>
+                      </a:r>
+                    </a:p>
+                  </a:txBody>
+                  <a:tcPr>
+                    <a:solidFill>
+                      <a:srgbClr val="FFFFFF"/>
+                    </a:solidFill>
+                  </a:tcPr>
+                </a:tc>
+                <a:tc>
+                  <a:txBody>
+                    <a:bodyPr/>
+                    <a:lstStyle/>
+                    <a:p>
+                      <a:pPr algn="l"/>
+                      <a:r>
+                        <a:rPr sz="1000" b="0">
+                          <a:solidFill>
+                            <a:srgbClr val="1D1B43"/>
+                          </a:solidFill>
+                          <a:latin typeface="Calibri"/>
+                        </a:rPr>
+                        <a:t>04/05/2026</a:t>
+                      </a:r>
+                    </a:p>
+                  </a:txBody>
+                  <a:tcPr>
+                    <a:solidFill>
+                      <a:srgbClr val="FFFFFF"/>
+                    </a:solidFill>
+                  </a:tcPr>
+                </a:tc>
+                <a:tc>
+                  <a:txBody>
+                    <a:bodyPr/>
+                    <a:lstStyle/>
+                    <a:p>
+                      <a:pPr algn="l"/>
+                      <a:r>
+                        <a:rPr sz="1000" b="0">
+                          <a:solidFill>
+                            <a:srgbClr val="1D1B43"/>
+                          </a:solidFill>
+                          <a:latin typeface="Calibri"/>
+                        </a:rPr>
+                        <a:t>FORA DO PRAZO</a:t>
+                      </a:r>
+                    </a:p>
+                  </a:txBody>
+                  <a:tcPr>
+                    <a:solidFill>
+                      <a:srgbClr val="FFFFFF"/>
+                    </a:solidFill>
+                  </a:tcPr>
+                </a:tc>
+              </a:tr>
+              <a:tr h="228600">
+                <a:tc>
+                  <a:txBody>
+                    <a:bodyPr/>
+                    <a:lstStyle/>
+                    <a:p>
+                      <a:pPr algn="l"/>
+                      <a:r>
+                        <a:rPr sz="1000" b="0">
+                          <a:solidFill>
+                            <a:srgbClr val="1D1B43"/>
+                          </a:solidFill>
+                          <a:latin typeface="Calibri"/>
+                        </a:rPr>
+                        <a:t>279536</a:t>
+                      </a:r>
+                    </a:p>
+                  </a:txBody>
+                  <a:tcPr>
+                    <a:solidFill>
+                      <a:srgbClr val="F2F2F2"/>
+                    </a:solidFill>
+                  </a:tcPr>
+                </a:tc>
+                <a:tc>
+                  <a:txBody>
+                    <a:bodyPr/>
+                    <a:lstStyle/>
+                    <a:p>
+                      <a:pPr algn="l"/>
+                      <a:r>
+                        <a:rPr sz="1000" b="0">
+                          <a:solidFill>
+                            <a:srgbClr val="1D1B43"/>
+                          </a:solidFill>
+                          <a:latin typeface="Calibri"/>
+                        </a:rPr>
+                        <a:t>ELETRONOR - DISTRIBU - CAXIAS DO SUL / RS</a:t>
+                      </a:r>
+                    </a:p>
+                  </a:txBody>
+                  <a:tcPr>
+                    <a:solidFill>
+                      <a:srgbClr val="F2F2F2"/>
+                    </a:solidFill>
+                  </a:tcPr>
+                </a:tc>
+                <a:tc>
+                  <a:txBody>
+                    <a:bodyPr/>
+                    <a:lstStyle/>
+                    <a:p>
+                      <a:pPr algn="l"/>
+                      <a:r>
+                        <a:rPr sz="1000" b="0">
+                          <a:solidFill>
+                            <a:srgbClr val="1D1B43"/>
+                          </a:solidFill>
+                          <a:latin typeface="Calibri"/>
+                        </a:rPr>
+                        <a:t>CAXIAS DO SUL/RS</a:t>
+                      </a:r>
+                    </a:p>
+                  </a:txBody>
+                  <a:tcPr>
+                    <a:solidFill>
+                      <a:srgbClr val="F2F2F2"/>
+                    </a:solidFill>
+                  </a:tcPr>
+                </a:tc>
+                <a:tc>
+                  <a:txBody>
+                    <a:bodyPr/>
+                    <a:lstStyle/>
+                    <a:p>
+                      <a:pPr algn="l"/>
+                      <a:r>
+                        <a:rPr sz="1000" b="0">
+                          <a:solidFill>
+                            <a:srgbClr val="1D1B43"/>
+                          </a:solidFill>
+                          <a:latin typeface="Calibri"/>
+                        </a:rPr>
+                        <a:t>04/05/2026</a:t>
+                      </a:r>
+                    </a:p>
+                  </a:txBody>
+                  <a:tcPr>
+                    <a:solidFill>
+                      <a:srgbClr val="F2F2F2"/>
                     </a:solidFill>
                   </a:tcPr>
                 </a:tc>
@@ -5578,26 +5695,1079 @@
                   </a:txBody>
                   <a:tcPr>
                     <a:solidFill>
-                      <a:srgbClr val="FFFFFF"/>
+                      <a:srgbClr val="F2F2F2"/>
                     </a:solidFill>
                   </a:tcPr>
                 </a:tc>
               </a:tr>
-              <a:tr h="384048">
-                <a:tc>
-                  <a:txBody>
-                    <a:bodyPr/>
-                    <a:lstStyle/>
-                    <a:p>
-                      <a:pPr algn="l"/>
-                      <a:r>
-                        <a:rPr sz="1000" b="0">
-                          <a:solidFill>
-                            <a:srgbClr val="1D1B43"/>
-                          </a:solidFill>
-                          <a:latin typeface="Calibri"/>
-                        </a:rPr>
-                        <a:t>276943</a:t>
+              <a:tr h="228600">
+                <a:tc>
+                  <a:txBody>
+                    <a:bodyPr/>
+                    <a:lstStyle/>
+                    <a:p>
+                      <a:pPr algn="l"/>
+                      <a:r>
+                        <a:rPr sz="1000" b="0">
+                          <a:solidFill>
+                            <a:srgbClr val="1D1B43"/>
+                          </a:solidFill>
+                          <a:latin typeface="Calibri"/>
+                        </a:rPr>
+                        <a:t>281128</a:t>
+                      </a:r>
+                    </a:p>
+                  </a:txBody>
+                  <a:tcPr>
+                    <a:solidFill>
+                      <a:srgbClr val="FFFFFF"/>
+                    </a:solidFill>
+                  </a:tcPr>
+                </a:tc>
+                <a:tc>
+                  <a:txBody>
+                    <a:bodyPr/>
+                    <a:lstStyle/>
+                    <a:p>
+                      <a:pPr algn="l"/>
+                      <a:r>
+                        <a:rPr sz="1000" b="0">
+                          <a:solidFill>
+                            <a:srgbClr val="1D1B43"/>
+                          </a:solidFill>
+                          <a:latin typeface="Calibri"/>
+                        </a:rPr>
+                        <a:t>CORSUL COMERCIO E RE - SAO JOSE DOS PINHAIS / PR</a:t>
+                      </a:r>
+                    </a:p>
+                  </a:txBody>
+                  <a:tcPr>
+                    <a:solidFill>
+                      <a:srgbClr val="FFFFFF"/>
+                    </a:solidFill>
+                  </a:tcPr>
+                </a:tc>
+                <a:tc>
+                  <a:txBody>
+                    <a:bodyPr/>
+                    <a:lstStyle/>
+                    <a:p>
+                      <a:pPr algn="l"/>
+                      <a:r>
+                        <a:rPr sz="1000" b="0">
+                          <a:solidFill>
+                            <a:srgbClr val="1D1B43"/>
+                          </a:solidFill>
+                          <a:latin typeface="Calibri"/>
+                        </a:rPr>
+                        <a:t>SAO JOSE DOS PINHAIS/PR</a:t>
+                      </a:r>
+                    </a:p>
+                  </a:txBody>
+                  <a:tcPr>
+                    <a:solidFill>
+                      <a:srgbClr val="FFFFFF"/>
+                    </a:solidFill>
+                  </a:tcPr>
+                </a:tc>
+                <a:tc>
+                  <a:txBody>
+                    <a:bodyPr/>
+                    <a:lstStyle/>
+                    <a:p>
+                      <a:pPr algn="l"/>
+                      <a:r>
+                        <a:rPr sz="1000" b="0">
+                          <a:solidFill>
+                            <a:srgbClr val="1D1B43"/>
+                          </a:solidFill>
+                          <a:latin typeface="Calibri"/>
+                        </a:rPr>
+                        <a:t>08/05/2026</a:t>
+                      </a:r>
+                    </a:p>
+                  </a:txBody>
+                  <a:tcPr>
+                    <a:solidFill>
+                      <a:srgbClr val="FFFFFF"/>
+                    </a:solidFill>
+                  </a:tcPr>
+                </a:tc>
+                <a:tc>
+                  <a:txBody>
+                    <a:bodyPr/>
+                    <a:lstStyle/>
+                    <a:p>
+                      <a:pPr algn="l"/>
+                      <a:r>
+                        <a:rPr sz="1000" b="0">
+                          <a:solidFill>
+                            <a:srgbClr val="1D1B43"/>
+                          </a:solidFill>
+                          <a:latin typeface="Calibri"/>
+                        </a:rPr>
+                        <a:t>ENTREGUE FORA DO PRAZO</a:t>
+                      </a:r>
+                    </a:p>
+                  </a:txBody>
+                  <a:tcPr>
+                    <a:solidFill>
+                      <a:srgbClr val="FFFFFF"/>
+                    </a:solidFill>
+                  </a:tcPr>
+                </a:tc>
+              </a:tr>
+              <a:tr h="228600">
+                <a:tc>
+                  <a:txBody>
+                    <a:bodyPr/>
+                    <a:lstStyle/>
+                    <a:p>
+                      <a:pPr algn="l"/>
+                      <a:r>
+                        <a:rPr sz="1000" b="0">
+                          <a:solidFill>
+                            <a:srgbClr val="1D1B43"/>
+                          </a:solidFill>
+                          <a:latin typeface="Calibri"/>
+                        </a:rPr>
+                        <a:t>281135</a:t>
+                      </a:r>
+                    </a:p>
+                  </a:txBody>
+                  <a:tcPr>
+                    <a:solidFill>
+                      <a:srgbClr val="F2F2F2"/>
+                    </a:solidFill>
+                  </a:tcPr>
+                </a:tc>
+                <a:tc>
+                  <a:txBody>
+                    <a:bodyPr/>
+                    <a:lstStyle/>
+                    <a:p>
+                      <a:pPr algn="l"/>
+                      <a:r>
+                        <a:rPr sz="1000" b="0">
+                          <a:solidFill>
+                            <a:srgbClr val="1D1B43"/>
+                          </a:solidFill>
+                          <a:latin typeface="Calibri"/>
+                        </a:rPr>
+                        <a:t>CORSUL COMERCIO E RE - SAO JOSE DOS PINHAIS / PR</a:t>
+                      </a:r>
+                    </a:p>
+                  </a:txBody>
+                  <a:tcPr>
+                    <a:solidFill>
+                      <a:srgbClr val="F2F2F2"/>
+                    </a:solidFill>
+                  </a:tcPr>
+                </a:tc>
+                <a:tc>
+                  <a:txBody>
+                    <a:bodyPr/>
+                    <a:lstStyle/>
+                    <a:p>
+                      <a:pPr algn="l"/>
+                      <a:r>
+                        <a:rPr sz="1000" b="0">
+                          <a:solidFill>
+                            <a:srgbClr val="1D1B43"/>
+                          </a:solidFill>
+                          <a:latin typeface="Calibri"/>
+                        </a:rPr>
+                        <a:t>SAO JOSE DOS PINHAIS/PR</a:t>
+                      </a:r>
+                    </a:p>
+                  </a:txBody>
+                  <a:tcPr>
+                    <a:solidFill>
+                      <a:srgbClr val="F2F2F2"/>
+                    </a:solidFill>
+                  </a:tcPr>
+                </a:tc>
+                <a:tc>
+                  <a:txBody>
+                    <a:bodyPr/>
+                    <a:lstStyle/>
+                    <a:p>
+                      <a:pPr algn="l"/>
+                      <a:r>
+                        <a:rPr sz="1000" b="0">
+                          <a:solidFill>
+                            <a:srgbClr val="1D1B43"/>
+                          </a:solidFill>
+                          <a:latin typeface="Calibri"/>
+                        </a:rPr>
+                        <a:t>08/05/2026</a:t>
+                      </a:r>
+                    </a:p>
+                  </a:txBody>
+                  <a:tcPr>
+                    <a:solidFill>
+                      <a:srgbClr val="F2F2F2"/>
+                    </a:solidFill>
+                  </a:tcPr>
+                </a:tc>
+                <a:tc>
+                  <a:txBody>
+                    <a:bodyPr/>
+                    <a:lstStyle/>
+                    <a:p>
+                      <a:pPr algn="l"/>
+                      <a:r>
+                        <a:rPr sz="1000" b="0">
+                          <a:solidFill>
+                            <a:srgbClr val="1D1B43"/>
+                          </a:solidFill>
+                          <a:latin typeface="Calibri"/>
+                        </a:rPr>
+                        <a:t>ENTREGUE FORA DO PRAZO</a:t>
+                      </a:r>
+                    </a:p>
+                  </a:txBody>
+                  <a:tcPr>
+                    <a:solidFill>
+                      <a:srgbClr val="F2F2F2"/>
+                    </a:solidFill>
+                  </a:tcPr>
+                </a:tc>
+              </a:tr>
+              <a:tr h="228600">
+                <a:tc>
+                  <a:txBody>
+                    <a:bodyPr/>
+                    <a:lstStyle/>
+                    <a:p>
+                      <a:pPr algn="l"/>
+                      <a:r>
+                        <a:rPr sz="1000" b="0">
+                          <a:solidFill>
+                            <a:srgbClr val="1D1B43"/>
+                          </a:solidFill>
+                          <a:latin typeface="Calibri"/>
+                        </a:rPr>
+                        <a:t>281137</a:t>
+                      </a:r>
+                    </a:p>
+                  </a:txBody>
+                  <a:tcPr>
+                    <a:solidFill>
+                      <a:srgbClr val="FFFFFF"/>
+                    </a:solidFill>
+                  </a:tcPr>
+                </a:tc>
+                <a:tc>
+                  <a:txBody>
+                    <a:bodyPr/>
+                    <a:lstStyle/>
+                    <a:p>
+                      <a:pPr algn="l"/>
+                      <a:r>
+                        <a:rPr sz="1000" b="0">
+                          <a:solidFill>
+                            <a:srgbClr val="1D1B43"/>
+                          </a:solidFill>
+                          <a:latin typeface="Calibri"/>
+                        </a:rPr>
+                        <a:t>CORSUL COMERCIO E RE - SAO JOSE DOS PINHAIS / PR</a:t>
+                      </a:r>
+                    </a:p>
+                  </a:txBody>
+                  <a:tcPr>
+                    <a:solidFill>
+                      <a:srgbClr val="FFFFFF"/>
+                    </a:solidFill>
+                  </a:tcPr>
+                </a:tc>
+                <a:tc>
+                  <a:txBody>
+                    <a:bodyPr/>
+                    <a:lstStyle/>
+                    <a:p>
+                      <a:pPr algn="l"/>
+                      <a:r>
+                        <a:rPr sz="1000" b="0">
+                          <a:solidFill>
+                            <a:srgbClr val="1D1B43"/>
+                          </a:solidFill>
+                          <a:latin typeface="Calibri"/>
+                        </a:rPr>
+                        <a:t>SAO JOSE DOS PINHAIS/PR</a:t>
+                      </a:r>
+                    </a:p>
+                  </a:txBody>
+                  <a:tcPr>
+                    <a:solidFill>
+                      <a:srgbClr val="FFFFFF"/>
+                    </a:solidFill>
+                  </a:tcPr>
+                </a:tc>
+                <a:tc>
+                  <a:txBody>
+                    <a:bodyPr/>
+                    <a:lstStyle/>
+                    <a:p>
+                      <a:pPr algn="l"/>
+                      <a:r>
+                        <a:rPr sz="1000" b="0">
+                          <a:solidFill>
+                            <a:srgbClr val="1D1B43"/>
+                          </a:solidFill>
+                          <a:latin typeface="Calibri"/>
+                        </a:rPr>
+                        <a:t>08/05/2026</a:t>
+                      </a:r>
+                    </a:p>
+                  </a:txBody>
+                  <a:tcPr>
+                    <a:solidFill>
+                      <a:srgbClr val="FFFFFF"/>
+                    </a:solidFill>
+                  </a:tcPr>
+                </a:tc>
+                <a:tc>
+                  <a:txBody>
+                    <a:bodyPr/>
+                    <a:lstStyle/>
+                    <a:p>
+                      <a:pPr algn="l"/>
+                      <a:r>
+                        <a:rPr sz="1000" b="0">
+                          <a:solidFill>
+                            <a:srgbClr val="1D1B43"/>
+                          </a:solidFill>
+                          <a:latin typeface="Calibri"/>
+                        </a:rPr>
+                        <a:t>ENTREGUE FORA DO PRAZO</a:t>
+                      </a:r>
+                    </a:p>
+                  </a:txBody>
+                  <a:tcPr>
+                    <a:solidFill>
+                      <a:srgbClr val="FFFFFF"/>
+                    </a:solidFill>
+                  </a:tcPr>
+                </a:tc>
+              </a:tr>
+              <a:tr h="228600">
+                <a:tc>
+                  <a:txBody>
+                    <a:bodyPr/>
+                    <a:lstStyle/>
+                    <a:p>
+                      <a:pPr algn="l"/>
+                      <a:r>
+                        <a:rPr sz="1000" b="0">
+                          <a:solidFill>
+                            <a:srgbClr val="1D1B43"/>
+                          </a:solidFill>
+                          <a:latin typeface="Calibri"/>
+                        </a:rPr>
+                        <a:t>281177</a:t>
+                      </a:r>
+                    </a:p>
+                  </a:txBody>
+                  <a:tcPr>
+                    <a:solidFill>
+                      <a:srgbClr val="F2F2F2"/>
+                    </a:solidFill>
+                  </a:tcPr>
+                </a:tc>
+                <a:tc>
+                  <a:txBody>
+                    <a:bodyPr/>
+                    <a:lstStyle/>
+                    <a:p>
+                      <a:pPr algn="l"/>
+                      <a:r>
+                        <a:rPr sz="1000" b="0">
+                          <a:solidFill>
+                            <a:srgbClr val="1D1B43"/>
+                          </a:solidFill>
+                          <a:latin typeface="Calibri"/>
+                        </a:rPr>
+                        <a:t>STELLANTIS AUTOMOVEI - BETIM / MG</a:t>
+                      </a:r>
+                    </a:p>
+                  </a:txBody>
+                  <a:tcPr>
+                    <a:solidFill>
+                      <a:srgbClr val="F2F2F2"/>
+                    </a:solidFill>
+                  </a:tcPr>
+                </a:tc>
+                <a:tc>
+                  <a:txBody>
+                    <a:bodyPr/>
+                    <a:lstStyle/>
+                    <a:p>
+                      <a:pPr algn="l"/>
+                      <a:r>
+                        <a:rPr sz="1000" b="0">
+                          <a:solidFill>
+                            <a:srgbClr val="1D1B43"/>
+                          </a:solidFill>
+                          <a:latin typeface="Calibri"/>
+                        </a:rPr>
+                        <a:t>BETIM/MG</a:t>
+                      </a:r>
+                    </a:p>
+                  </a:txBody>
+                  <a:tcPr>
+                    <a:solidFill>
+                      <a:srgbClr val="F2F2F2"/>
+                    </a:solidFill>
+                  </a:tcPr>
+                </a:tc>
+                <a:tc>
+                  <a:txBody>
+                    <a:bodyPr/>
+                    <a:lstStyle/>
+                    <a:p>
+                      <a:pPr algn="l"/>
+                      <a:r>
+                        <a:rPr sz="1000" b="0">
+                          <a:solidFill>
+                            <a:srgbClr val="1D1B43"/>
+                          </a:solidFill>
+                          <a:latin typeface="Calibri"/>
+                        </a:rPr>
+                        <a:t>12/05/2026</a:t>
+                      </a:r>
+                    </a:p>
+                  </a:txBody>
+                  <a:tcPr>
+                    <a:solidFill>
+                      <a:srgbClr val="F2F2F2"/>
+                    </a:solidFill>
+                  </a:tcPr>
+                </a:tc>
+                <a:tc>
+                  <a:txBody>
+                    <a:bodyPr/>
+                    <a:lstStyle/>
+                    <a:p>
+                      <a:pPr algn="l"/>
+                      <a:r>
+                        <a:rPr sz="1000" b="0">
+                          <a:solidFill>
+                            <a:srgbClr val="1D1B43"/>
+                          </a:solidFill>
+                          <a:latin typeface="Calibri"/>
+                        </a:rPr>
+                        <a:t>ENTREGUE FORA DO PRAZO</a:t>
+                      </a:r>
+                    </a:p>
+                  </a:txBody>
+                  <a:tcPr>
+                    <a:solidFill>
+                      <a:srgbClr val="F2F2F2"/>
+                    </a:solidFill>
+                  </a:tcPr>
+                </a:tc>
+              </a:tr>
+              <a:tr h="228600">
+                <a:tc>
+                  <a:txBody>
+                    <a:bodyPr/>
+                    <a:lstStyle/>
+                    <a:p>
+                      <a:pPr algn="l"/>
+                      <a:r>
+                        <a:rPr sz="1000" b="0">
+                          <a:solidFill>
+                            <a:srgbClr val="1D1B43"/>
+                          </a:solidFill>
+                          <a:latin typeface="Calibri"/>
+                        </a:rPr>
+                        <a:t>281243</a:t>
+                      </a:r>
+                    </a:p>
+                  </a:txBody>
+                  <a:tcPr>
+                    <a:solidFill>
+                      <a:srgbClr val="FFFFFF"/>
+                    </a:solidFill>
+                  </a:tcPr>
+                </a:tc>
+                <a:tc>
+                  <a:txBody>
+                    <a:bodyPr/>
+                    <a:lstStyle/>
+                    <a:p>
+                      <a:pPr algn="l"/>
+                      <a:r>
+                        <a:rPr sz="1000" b="0">
+                          <a:solidFill>
+                            <a:srgbClr val="1D1B43"/>
+                          </a:solidFill>
+                          <a:latin typeface="Calibri"/>
+                        </a:rPr>
+                        <a:t>CORSUL COMERCIO E RE - SAO JOSE DOS PINHAIS / PR</a:t>
+                      </a:r>
+                    </a:p>
+                  </a:txBody>
+                  <a:tcPr>
+                    <a:solidFill>
+                      <a:srgbClr val="FFFFFF"/>
+                    </a:solidFill>
+                  </a:tcPr>
+                </a:tc>
+                <a:tc>
+                  <a:txBody>
+                    <a:bodyPr/>
+                    <a:lstStyle/>
+                    <a:p>
+                      <a:pPr algn="l"/>
+                      <a:r>
+                        <a:rPr sz="1000" b="0">
+                          <a:solidFill>
+                            <a:srgbClr val="1D1B43"/>
+                          </a:solidFill>
+                          <a:latin typeface="Calibri"/>
+                        </a:rPr>
+                        <a:t>SAO JOSE DOS PINHAIS/PR</a:t>
+                      </a:r>
+                    </a:p>
+                  </a:txBody>
+                  <a:tcPr>
+                    <a:solidFill>
+                      <a:srgbClr val="FFFFFF"/>
+                    </a:solidFill>
+                  </a:tcPr>
+                </a:tc>
+                <a:tc>
+                  <a:txBody>
+                    <a:bodyPr/>
+                    <a:lstStyle/>
+                    <a:p>
+                      <a:pPr algn="l"/>
+                      <a:r>
+                        <a:rPr sz="1000" b="0">
+                          <a:solidFill>
+                            <a:srgbClr val="1D1B43"/>
+                          </a:solidFill>
+                          <a:latin typeface="Calibri"/>
+                        </a:rPr>
+                        <a:t>08/05/2026</a:t>
+                      </a:r>
+                    </a:p>
+                  </a:txBody>
+                  <a:tcPr>
+                    <a:solidFill>
+                      <a:srgbClr val="FFFFFF"/>
+                    </a:solidFill>
+                  </a:tcPr>
+                </a:tc>
+                <a:tc>
+                  <a:txBody>
+                    <a:bodyPr/>
+                    <a:lstStyle/>
+                    <a:p>
+                      <a:pPr algn="l"/>
+                      <a:r>
+                        <a:rPr sz="1000" b="0">
+                          <a:solidFill>
+                            <a:srgbClr val="1D1B43"/>
+                          </a:solidFill>
+                          <a:latin typeface="Calibri"/>
+                        </a:rPr>
+                        <a:t>ENTREGUE FORA DO PRAZO</a:t>
+                      </a:r>
+                    </a:p>
+                  </a:txBody>
+                  <a:tcPr>
+                    <a:solidFill>
+                      <a:srgbClr val="FFFFFF"/>
+                    </a:solidFill>
+                  </a:tcPr>
+                </a:tc>
+              </a:tr>
+              <a:tr h="228600">
+                <a:tc>
+                  <a:txBody>
+                    <a:bodyPr/>
+                    <a:lstStyle/>
+                    <a:p>
+                      <a:pPr algn="l"/>
+                      <a:r>
+                        <a:rPr sz="1000" b="0">
+                          <a:solidFill>
+                            <a:srgbClr val="1D1B43"/>
+                          </a:solidFill>
+                          <a:latin typeface="Calibri"/>
+                        </a:rPr>
+                        <a:t>281248</a:t>
+                      </a:r>
+                    </a:p>
+                  </a:txBody>
+                  <a:tcPr>
+                    <a:solidFill>
+                      <a:srgbClr val="F2F2F2"/>
+                    </a:solidFill>
+                  </a:tcPr>
+                </a:tc>
+                <a:tc>
+                  <a:txBody>
+                    <a:bodyPr/>
+                    <a:lstStyle/>
+                    <a:p>
+                      <a:pPr algn="l"/>
+                      <a:r>
+                        <a:rPr sz="1000" b="0">
+                          <a:solidFill>
+                            <a:srgbClr val="1D1B43"/>
+                          </a:solidFill>
+                          <a:latin typeface="Calibri"/>
+                        </a:rPr>
+                        <a:t>CORSUL COMERCIO E RE - SAO JOSE DOS PINHAIS / PR</a:t>
+                      </a:r>
+                    </a:p>
+                  </a:txBody>
+                  <a:tcPr>
+                    <a:solidFill>
+                      <a:srgbClr val="F2F2F2"/>
+                    </a:solidFill>
+                  </a:tcPr>
+                </a:tc>
+                <a:tc>
+                  <a:txBody>
+                    <a:bodyPr/>
+                    <a:lstStyle/>
+                    <a:p>
+                      <a:pPr algn="l"/>
+                      <a:r>
+                        <a:rPr sz="1000" b="0">
+                          <a:solidFill>
+                            <a:srgbClr val="1D1B43"/>
+                          </a:solidFill>
+                          <a:latin typeface="Calibri"/>
+                        </a:rPr>
+                        <a:t>SAO JOSE DOS PINHAIS/PR</a:t>
+                      </a:r>
+                    </a:p>
+                  </a:txBody>
+                  <a:tcPr>
+                    <a:solidFill>
+                      <a:srgbClr val="F2F2F2"/>
+                    </a:solidFill>
+                  </a:tcPr>
+                </a:tc>
+                <a:tc>
+                  <a:txBody>
+                    <a:bodyPr/>
+                    <a:lstStyle/>
+                    <a:p>
+                      <a:pPr algn="l"/>
+                      <a:r>
+                        <a:rPr sz="1000" b="0">
+                          <a:solidFill>
+                            <a:srgbClr val="1D1B43"/>
+                          </a:solidFill>
+                          <a:latin typeface="Calibri"/>
+                        </a:rPr>
+                        <a:t>08/05/2026</a:t>
+                      </a:r>
+                    </a:p>
+                  </a:txBody>
+                  <a:tcPr>
+                    <a:solidFill>
+                      <a:srgbClr val="F2F2F2"/>
+                    </a:solidFill>
+                  </a:tcPr>
+                </a:tc>
+                <a:tc>
+                  <a:txBody>
+                    <a:bodyPr/>
+                    <a:lstStyle/>
+                    <a:p>
+                      <a:pPr algn="l"/>
+                      <a:r>
+                        <a:rPr sz="1000" b="0">
+                          <a:solidFill>
+                            <a:srgbClr val="1D1B43"/>
+                          </a:solidFill>
+                          <a:latin typeface="Calibri"/>
+                        </a:rPr>
+                        <a:t>ENTREGUE FORA DO PRAZO</a:t>
+                      </a:r>
+                    </a:p>
+                  </a:txBody>
+                  <a:tcPr>
+                    <a:solidFill>
+                      <a:srgbClr val="F2F2F2"/>
+                    </a:solidFill>
+                  </a:tcPr>
+                </a:tc>
+              </a:tr>
+              <a:tr h="228600">
+                <a:tc>
+                  <a:txBody>
+                    <a:bodyPr/>
+                    <a:lstStyle/>
+                    <a:p>
+                      <a:pPr algn="l"/>
+                      <a:r>
+                        <a:rPr sz="1000" b="0">
+                          <a:solidFill>
+                            <a:srgbClr val="1D1B43"/>
+                          </a:solidFill>
+                          <a:latin typeface="Calibri"/>
+                        </a:rPr>
+                        <a:t>281296</a:t>
+                      </a:r>
+                    </a:p>
+                  </a:txBody>
+                  <a:tcPr>
+                    <a:solidFill>
+                      <a:srgbClr val="FFFFFF"/>
+                    </a:solidFill>
+                  </a:tcPr>
+                </a:tc>
+                <a:tc>
+                  <a:txBody>
+                    <a:bodyPr/>
+                    <a:lstStyle/>
+                    <a:p>
+                      <a:pPr algn="l"/>
+                      <a:r>
+                        <a:rPr sz="1000" b="0">
+                          <a:solidFill>
+                            <a:srgbClr val="1D1B43"/>
+                          </a:solidFill>
+                          <a:latin typeface="Calibri"/>
+                        </a:rPr>
+                        <a:t>CORSUL COMERCIO E RE - SAO JOSE DOS PINHAIS / PR</a:t>
+                      </a:r>
+                    </a:p>
+                  </a:txBody>
+                  <a:tcPr>
+                    <a:solidFill>
+                      <a:srgbClr val="FFFFFF"/>
+                    </a:solidFill>
+                  </a:tcPr>
+                </a:tc>
+                <a:tc>
+                  <a:txBody>
+                    <a:bodyPr/>
+                    <a:lstStyle/>
+                    <a:p>
+                      <a:pPr algn="l"/>
+                      <a:r>
+                        <a:rPr sz="1000" b="0">
+                          <a:solidFill>
+                            <a:srgbClr val="1D1B43"/>
+                          </a:solidFill>
+                          <a:latin typeface="Calibri"/>
+                        </a:rPr>
+                        <a:t>SAO JOSE DOS PINHAIS/PR</a:t>
+                      </a:r>
+                    </a:p>
+                  </a:txBody>
+                  <a:tcPr>
+                    <a:solidFill>
+                      <a:srgbClr val="FFFFFF"/>
+                    </a:solidFill>
+                  </a:tcPr>
+                </a:tc>
+                <a:tc>
+                  <a:txBody>
+                    <a:bodyPr/>
+                    <a:lstStyle/>
+                    <a:p>
+                      <a:pPr algn="l"/>
+                      <a:r>
+                        <a:rPr sz="1000" b="0">
+                          <a:solidFill>
+                            <a:srgbClr val="1D1B43"/>
+                          </a:solidFill>
+                          <a:latin typeface="Calibri"/>
+                        </a:rPr>
+                        <a:t>08/05/2026</a:t>
+                      </a:r>
+                    </a:p>
+                  </a:txBody>
+                  <a:tcPr>
+                    <a:solidFill>
+                      <a:srgbClr val="FFFFFF"/>
+                    </a:solidFill>
+                  </a:tcPr>
+                </a:tc>
+                <a:tc>
+                  <a:txBody>
+                    <a:bodyPr/>
+                    <a:lstStyle/>
+                    <a:p>
+                      <a:pPr algn="l"/>
+                      <a:r>
+                        <a:rPr sz="1000" b="0">
+                          <a:solidFill>
+                            <a:srgbClr val="1D1B43"/>
+                          </a:solidFill>
+                          <a:latin typeface="Calibri"/>
+                        </a:rPr>
+                        <a:t>ENTREGUE FORA DO PRAZO</a:t>
+                      </a:r>
+                    </a:p>
+                  </a:txBody>
+                  <a:tcPr>
+                    <a:solidFill>
+                      <a:srgbClr val="FFFFFF"/>
+                    </a:solidFill>
+                  </a:tcPr>
+                </a:tc>
+              </a:tr>
+              <a:tr h="228600">
+                <a:tc>
+                  <a:txBody>
+                    <a:bodyPr/>
+                    <a:lstStyle/>
+                    <a:p>
+                      <a:pPr algn="l"/>
+                      <a:r>
+                        <a:rPr sz="1000" b="0">
+                          <a:solidFill>
+                            <a:srgbClr val="1D1B43"/>
+                          </a:solidFill>
+                          <a:latin typeface="Calibri"/>
+                        </a:rPr>
+                        <a:t>281297</a:t>
+                      </a:r>
+                    </a:p>
+                  </a:txBody>
+                  <a:tcPr>
+                    <a:solidFill>
+                      <a:srgbClr val="F2F2F2"/>
+                    </a:solidFill>
+                  </a:tcPr>
+                </a:tc>
+                <a:tc>
+                  <a:txBody>
+                    <a:bodyPr/>
+                    <a:lstStyle/>
+                    <a:p>
+                      <a:pPr algn="l"/>
+                      <a:r>
+                        <a:rPr sz="1000" b="0">
+                          <a:solidFill>
+                            <a:srgbClr val="1D1B43"/>
+                          </a:solidFill>
+                          <a:latin typeface="Calibri"/>
+                        </a:rPr>
+                        <a:t>CORSUL COMERCIO E RE - SAO JOSE DOS PINHAIS / PR</a:t>
+                      </a:r>
+                    </a:p>
+                  </a:txBody>
+                  <a:tcPr>
+                    <a:solidFill>
+                      <a:srgbClr val="F2F2F2"/>
+                    </a:solidFill>
+                  </a:tcPr>
+                </a:tc>
+                <a:tc>
+                  <a:txBody>
+                    <a:bodyPr/>
+                    <a:lstStyle/>
+                    <a:p>
+                      <a:pPr algn="l"/>
+                      <a:r>
+                        <a:rPr sz="1000" b="0">
+                          <a:solidFill>
+                            <a:srgbClr val="1D1B43"/>
+                          </a:solidFill>
+                          <a:latin typeface="Calibri"/>
+                        </a:rPr>
+                        <a:t>SAO JOSE DOS PINHAIS/PR</a:t>
+                      </a:r>
+                    </a:p>
+                  </a:txBody>
+                  <a:tcPr>
+                    <a:solidFill>
+                      <a:srgbClr val="F2F2F2"/>
+                    </a:solidFill>
+                  </a:tcPr>
+                </a:tc>
+                <a:tc>
+                  <a:txBody>
+                    <a:bodyPr/>
+                    <a:lstStyle/>
+                    <a:p>
+                      <a:pPr algn="l"/>
+                      <a:r>
+                        <a:rPr sz="1000" b="0">
+                          <a:solidFill>
+                            <a:srgbClr val="1D1B43"/>
+                          </a:solidFill>
+                          <a:latin typeface="Calibri"/>
+                        </a:rPr>
+                        <a:t>08/05/2026</a:t>
+                      </a:r>
+                    </a:p>
+                  </a:txBody>
+                  <a:tcPr>
+                    <a:solidFill>
+                      <a:srgbClr val="F2F2F2"/>
+                    </a:solidFill>
+                  </a:tcPr>
+                </a:tc>
+                <a:tc>
+                  <a:txBody>
+                    <a:bodyPr/>
+                    <a:lstStyle/>
+                    <a:p>
+                      <a:pPr algn="l"/>
+                      <a:r>
+                        <a:rPr sz="1000" b="0">
+                          <a:solidFill>
+                            <a:srgbClr val="1D1B43"/>
+                          </a:solidFill>
+                          <a:latin typeface="Calibri"/>
+                        </a:rPr>
+                        <a:t>ENTREGUE FORA DO PRAZO</a:t>
+                      </a:r>
+                    </a:p>
+                  </a:txBody>
+                  <a:tcPr>
+                    <a:solidFill>
+                      <a:srgbClr val="F2F2F2"/>
+                    </a:solidFill>
+                  </a:tcPr>
+                </a:tc>
+              </a:tr>
+              <a:tr h="228600">
+                <a:tc>
+                  <a:txBody>
+                    <a:bodyPr/>
+                    <a:lstStyle/>
+                    <a:p>
+                      <a:pPr algn="l"/>
+                      <a:r>
+                        <a:rPr sz="1000" b="0">
+                          <a:solidFill>
+                            <a:srgbClr val="1D1B43"/>
+                          </a:solidFill>
+                          <a:latin typeface="Calibri"/>
+                        </a:rPr>
+                        <a:t>281299</a:t>
+                      </a:r>
+                    </a:p>
+                  </a:txBody>
+                  <a:tcPr>
+                    <a:solidFill>
+                      <a:srgbClr val="FFFFFF"/>
+                    </a:solidFill>
+                  </a:tcPr>
+                </a:tc>
+                <a:tc>
+                  <a:txBody>
+                    <a:bodyPr/>
+                    <a:lstStyle/>
+                    <a:p>
+                      <a:pPr algn="l"/>
+                      <a:r>
+                        <a:rPr sz="1000" b="0">
+                          <a:solidFill>
+                            <a:srgbClr val="1D1B43"/>
+                          </a:solidFill>
+                          <a:latin typeface="Calibri"/>
+                        </a:rPr>
+                        <a:t>CORSUL COMERCIO E RE - SAO JOSE DOS PINHAIS / PR</a:t>
+                      </a:r>
+                    </a:p>
+                  </a:txBody>
+                  <a:tcPr>
+                    <a:solidFill>
+                      <a:srgbClr val="FFFFFF"/>
+                    </a:solidFill>
+                  </a:tcPr>
+                </a:tc>
+                <a:tc>
+                  <a:txBody>
+                    <a:bodyPr/>
+                    <a:lstStyle/>
+                    <a:p>
+                      <a:pPr algn="l"/>
+                      <a:r>
+                        <a:rPr sz="1000" b="0">
+                          <a:solidFill>
+                            <a:srgbClr val="1D1B43"/>
+                          </a:solidFill>
+                          <a:latin typeface="Calibri"/>
+                        </a:rPr>
+                        <a:t>SAO JOSE DOS PINHAIS/PR</a:t>
+                      </a:r>
+                    </a:p>
+                  </a:txBody>
+                  <a:tcPr>
+                    <a:solidFill>
+                      <a:srgbClr val="FFFFFF"/>
+                    </a:solidFill>
+                  </a:tcPr>
+                </a:tc>
+                <a:tc>
+                  <a:txBody>
+                    <a:bodyPr/>
+                    <a:lstStyle/>
+                    <a:p>
+                      <a:pPr algn="l"/>
+                      <a:r>
+                        <a:rPr sz="1000" b="0">
+                          <a:solidFill>
+                            <a:srgbClr val="1D1B43"/>
+                          </a:solidFill>
+                          <a:latin typeface="Calibri"/>
+                        </a:rPr>
+                        <a:t>08/05/2026</a:t>
+                      </a:r>
+                    </a:p>
+                  </a:txBody>
+                  <a:tcPr>
+                    <a:solidFill>
+                      <a:srgbClr val="FFFFFF"/>
+                    </a:solidFill>
+                  </a:tcPr>
+                </a:tc>
+                <a:tc>
+                  <a:txBody>
+                    <a:bodyPr/>
+                    <a:lstStyle/>
+                    <a:p>
+                      <a:pPr algn="l"/>
+                      <a:r>
+                        <a:rPr sz="1000" b="0">
+                          <a:solidFill>
+                            <a:srgbClr val="1D1B43"/>
+                          </a:solidFill>
+                          <a:latin typeface="Calibri"/>
+                        </a:rPr>
+                        <a:t>ENTREGUE FORA DO PRAZO</a:t>
+                      </a:r>
+                    </a:p>
+                  </a:txBody>
+                  <a:tcPr>
+                    <a:solidFill>
+                      <a:srgbClr val="FFFFFF"/>
+                    </a:solidFill>
+                  </a:tcPr>
+                </a:tc>
+              </a:tr>
+              <a:tr h="228600">
+                <a:tc>
+                  <a:txBody>
+                    <a:bodyPr/>
+                    <a:lstStyle/>
+                    <a:p>
+                      <a:pPr algn="l"/>
+                      <a:r>
+                        <a:rPr sz="1000" b="0">
+                          <a:solidFill>
+                            <a:srgbClr val="1D1B43"/>
+                          </a:solidFill>
+                          <a:latin typeface="Calibri"/>
+                        </a:rPr>
+                        <a:t>281313</a:t>
                       </a:r>
                     </a:p>
                   </a:txBody>
@@ -5666,7 +6836,7 @@
                           </a:solidFill>
                           <a:latin typeface="Calibri"/>
                         </a:rPr>
-                        <a:t>01/04/2026</a:t>
+                        <a:t>06/05/2026</a:t>
                       </a:r>
                     </a:p>
                   </a:txBody>
@@ -5700,27 +6870,144 @@
                   </a:tcPr>
                 </a:tc>
               </a:tr>
-              <a:tr h="384048">
-                <a:tc>
-                  <a:txBody>
-                    <a:bodyPr/>
-                    <a:lstStyle/>
-                    <a:p>
-                      <a:pPr algn="l"/>
-                      <a:r>
-                        <a:rPr sz="1000" b="0">
-                          <a:solidFill>
-                            <a:srgbClr val="1D1B43"/>
-                          </a:solidFill>
-                          <a:latin typeface="Calibri"/>
-                        </a:rPr>
-                        <a:t>277339</a:t>
-                      </a:r>
-                    </a:p>
-                  </a:txBody>
-                  <a:tcPr>
-                    <a:solidFill>
-                      <a:srgbClr val="FFFFFF"/>
+              <a:tr h="228600">
+                <a:tc>
+                  <a:txBody>
+                    <a:bodyPr/>
+                    <a:lstStyle/>
+                    <a:p>
+                      <a:pPr algn="l"/>
+                      <a:r>
+                        <a:rPr sz="1000" b="0">
+                          <a:solidFill>
+                            <a:srgbClr val="1D1B43"/>
+                          </a:solidFill>
+                          <a:latin typeface="Calibri"/>
+                        </a:rPr>
+                        <a:t>281576</a:t>
+                      </a:r>
+                    </a:p>
+                  </a:txBody>
+                  <a:tcPr>
+                    <a:solidFill>
+                      <a:srgbClr val="FFFFFF"/>
+                    </a:solidFill>
+                  </a:tcPr>
+                </a:tc>
+                <a:tc>
+                  <a:txBody>
+                    <a:bodyPr/>
+                    <a:lstStyle/>
+                    <a:p>
+                      <a:pPr algn="l"/>
+                      <a:r>
+                        <a:rPr sz="1000" b="0">
+                          <a:solidFill>
+                            <a:srgbClr val="1D1B43"/>
+                          </a:solidFill>
+                          <a:latin typeface="Calibri"/>
+                        </a:rPr>
+                        <a:t>FRISA FRIGORIFICO RI - NANUQUE / MG</a:t>
+                      </a:r>
+                    </a:p>
+                  </a:txBody>
+                  <a:tcPr>
+                    <a:solidFill>
+                      <a:srgbClr val="FFFFFF"/>
+                    </a:solidFill>
+                  </a:tcPr>
+                </a:tc>
+                <a:tc>
+                  <a:txBody>
+                    <a:bodyPr/>
+                    <a:lstStyle/>
+                    <a:p>
+                      <a:pPr algn="l"/>
+                      <a:r>
+                        <a:rPr sz="1000" b="0">
+                          <a:solidFill>
+                            <a:srgbClr val="1D1B43"/>
+                          </a:solidFill>
+                          <a:latin typeface="Calibri"/>
+                        </a:rPr>
+                        <a:t>NANUQUE/MG</a:t>
+                      </a:r>
+                    </a:p>
+                  </a:txBody>
+                  <a:tcPr>
+                    <a:solidFill>
+                      <a:srgbClr val="FFFFFF"/>
+                    </a:solidFill>
+                  </a:tcPr>
+                </a:tc>
+                <a:tc>
+                  <a:txBody>
+                    <a:bodyPr/>
+                    <a:lstStyle/>
+                    <a:p>
+                      <a:pPr algn="l"/>
+                      <a:r>
+                        <a:rPr sz="1000" b="0">
+                          <a:solidFill>
+                            <a:srgbClr val="1D1B43"/>
+                          </a:solidFill>
+                          <a:latin typeface="Calibri"/>
+                        </a:rPr>
+                        <a:t>14/05/2026</a:t>
+                      </a:r>
+                    </a:p>
+                  </a:txBody>
+                  <a:tcPr>
+                    <a:solidFill>
+                      <a:srgbClr val="FFFFFF"/>
+                    </a:solidFill>
+                  </a:tcPr>
+                </a:tc>
+                <a:tc>
+                  <a:txBody>
+                    <a:bodyPr/>
+                    <a:lstStyle/>
+                    <a:p>
+                      <a:pPr algn="l"/>
+                      <a:r>
+                        <a:rPr sz="1000" b="0">
+                          <a:solidFill>
+                            <a:srgbClr val="1D1B43"/>
+                          </a:solidFill>
+                          <a:latin typeface="Calibri"/>
+                        </a:rPr>
+                        <a:t>ENTREGUE FORA DO PRAZO</a:t>
+                      </a:r>
+                    </a:p>
+                  </a:txBody>
+                  <a:tcPr>
+                    <a:solidFill>
+                      <a:srgbClr val="FFFFFF"/>
+                    </a:solidFill>
+                  </a:tcPr>
+                </a:tc>
+              </a:tr>
+              <a:tr h="228600">
+                <a:tc>
+                  <a:txBody>
+                    <a:bodyPr/>
+                    <a:lstStyle/>
+                    <a:p>
+                      <a:pPr algn="l"/>
+                      <a:r>
+                        <a:rPr sz="1000" b="0">
+                          <a:solidFill>
+                            <a:srgbClr val="1D1B43"/>
+                          </a:solidFill>
+                          <a:latin typeface="Calibri"/>
+                        </a:rPr>
+                        <a:t>281712</a:t>
+                      </a:r>
+                    </a:p>
+                  </a:txBody>
+                  <a:tcPr>
+                    <a:solidFill>
+                      <a:srgbClr val="F2F2F2"/>
                     </a:solidFill>
                   </a:tcPr>
                 </a:tc>
@@ -5743,7 +7030,7 @@
                   </a:txBody>
                   <a:tcPr>
                     <a:solidFill>
-                      <a:srgbClr val="FFFFFF"/>
+                      <a:srgbClr val="F2F2F2"/>
                     </a:solidFill>
                   </a:tcPr>
                 </a:tc>
@@ -5766,30 +7053,30 @@
                   </a:txBody>
                   <a:tcPr>
                     <a:solidFill>
-                      <a:srgbClr val="FFFFFF"/>
-                    </a:solidFill>
-                  </a:tcPr>
-                </a:tc>
-                <a:tc>
-                  <a:txBody>
-                    <a:bodyPr/>
-                    <a:lstStyle/>
-                    <a:p>
-                      <a:pPr algn="l"/>
-                      <a:r>
-                        <a:rPr sz="1000" b="0">
-                          <a:solidFill>
-                            <a:srgbClr val="1D1B43"/>
-                          </a:solidFill>
-                          <a:latin typeface="Calibri"/>
-                        </a:rPr>
-                        <a:t>08/04/2026</a:t>
-                      </a:r>
-                    </a:p>
-                  </a:txBody>
-                  <a:tcPr>
-                    <a:solidFill>
-                      <a:srgbClr val="FFFFFF"/>
+                      <a:srgbClr val="F2F2F2"/>
+                    </a:solidFill>
+                  </a:tcPr>
+                </a:tc>
+                <a:tc>
+                  <a:txBody>
+                    <a:bodyPr/>
+                    <a:lstStyle/>
+                    <a:p>
+                      <a:pPr algn="l"/>
+                      <a:r>
+                        <a:rPr sz="1000" b="0">
+                          <a:solidFill>
+                            <a:srgbClr val="1D1B43"/>
+                          </a:solidFill>
+                          <a:latin typeface="Calibri"/>
+                        </a:rPr>
+                        <a:t>12/05/2026</a:t>
+                      </a:r>
+                    </a:p>
+                  </a:txBody>
+                  <a:tcPr>
+                    <a:solidFill>
+                      <a:srgbClr val="F2F2F2"/>
                     </a:solidFill>
                   </a:tcPr>
                 </a:tc>
@@ -5812,101 +7099,101 @@
                   </a:txBody>
                   <a:tcPr>
                     <a:solidFill>
-                      <a:srgbClr val="FFFFFF"/>
+                      <a:srgbClr val="F2F2F2"/>
                     </a:solidFill>
                   </a:tcPr>
                 </a:tc>
               </a:tr>
-              <a:tr h="384048">
-                <a:tc>
-                  <a:txBody>
-                    <a:bodyPr/>
-                    <a:lstStyle/>
-                    <a:p>
-                      <a:pPr algn="l"/>
-                      <a:r>
-                        <a:rPr sz="1000" b="0">
-                          <a:solidFill>
-                            <a:srgbClr val="1D1B43"/>
-                          </a:solidFill>
-                          <a:latin typeface="Calibri"/>
-                        </a:rPr>
-                        <a:t>277822</a:t>
-                      </a:r>
-                    </a:p>
-                  </a:txBody>
-                  <a:tcPr>
-                    <a:solidFill>
-                      <a:srgbClr val="F2F2F2"/>
-                    </a:solidFill>
-                  </a:tcPr>
-                </a:tc>
-                <a:tc>
-                  <a:txBody>
-                    <a:bodyPr/>
-                    <a:lstStyle/>
-                    <a:p>
-                      <a:pPr algn="l"/>
-                      <a:r>
-                        <a:rPr sz="1000" b="0">
-                          <a:solidFill>
-                            <a:srgbClr val="1D1B43"/>
-                          </a:solidFill>
-                          <a:latin typeface="Calibri"/>
-                        </a:rPr>
-                        <a:t>SOVAN EQUIPAMENTOS D - SOROCABA / SP</a:t>
-                      </a:r>
-                    </a:p>
-                  </a:txBody>
-                  <a:tcPr>
-                    <a:solidFill>
-                      <a:srgbClr val="F2F2F2"/>
-                    </a:solidFill>
-                  </a:tcPr>
-                </a:tc>
-                <a:tc>
-                  <a:txBody>
-                    <a:bodyPr/>
-                    <a:lstStyle/>
-                    <a:p>
-                      <a:pPr algn="l"/>
-                      <a:r>
-                        <a:rPr sz="1000" b="0">
-                          <a:solidFill>
-                            <a:srgbClr val="1D1B43"/>
-                          </a:solidFill>
-                          <a:latin typeface="Calibri"/>
-                        </a:rPr>
-                        <a:t>SOROCABA/SP</a:t>
-                      </a:r>
-                    </a:p>
-                  </a:txBody>
-                  <a:tcPr>
-                    <a:solidFill>
-                      <a:srgbClr val="F2F2F2"/>
-                    </a:solidFill>
-                  </a:tcPr>
-                </a:tc>
-                <a:tc>
-                  <a:txBody>
-                    <a:bodyPr/>
-                    <a:lstStyle/>
-                    <a:p>
-                      <a:pPr algn="l"/>
-                      <a:r>
-                        <a:rPr sz="1000" b="0">
-                          <a:solidFill>
-                            <a:srgbClr val="1D1B43"/>
-                          </a:solidFill>
-                          <a:latin typeface="Calibri"/>
-                        </a:rPr>
-                        <a:t>13/04/2026</a:t>
-                      </a:r>
-                    </a:p>
-                  </a:txBody>
-                  <a:tcPr>
-                    <a:solidFill>
-                      <a:srgbClr val="F2F2F2"/>
+              <a:tr h="228600">
+                <a:tc>
+                  <a:txBody>
+                    <a:bodyPr/>
+                    <a:lstStyle/>
+                    <a:p>
+                      <a:pPr algn="l"/>
+                      <a:r>
+                        <a:rPr sz="1000" b="0">
+                          <a:solidFill>
+                            <a:srgbClr val="1D1B43"/>
+                          </a:solidFill>
+                          <a:latin typeface="Calibri"/>
+                        </a:rPr>
+                        <a:t>281713</a:t>
+                      </a:r>
+                    </a:p>
+                  </a:txBody>
+                  <a:tcPr>
+                    <a:solidFill>
+                      <a:srgbClr val="FFFFFF"/>
+                    </a:solidFill>
+                  </a:tcPr>
+                </a:tc>
+                <a:tc>
+                  <a:txBody>
+                    <a:bodyPr/>
+                    <a:lstStyle/>
+                    <a:p>
+                      <a:pPr algn="l"/>
+                      <a:r>
+                        <a:rPr sz="1000" b="0">
+                          <a:solidFill>
+                            <a:srgbClr val="1D1B43"/>
+                          </a:solidFill>
+                          <a:latin typeface="Calibri"/>
+                        </a:rPr>
+                        <a:t>CORSUL COMERCIO E RE - CASCAVEL / PR</a:t>
+                      </a:r>
+                    </a:p>
+                  </a:txBody>
+                  <a:tcPr>
+                    <a:solidFill>
+                      <a:srgbClr val="FFFFFF"/>
+                    </a:solidFill>
+                  </a:tcPr>
+                </a:tc>
+                <a:tc>
+                  <a:txBody>
+                    <a:bodyPr/>
+                    <a:lstStyle/>
+                    <a:p>
+                      <a:pPr algn="l"/>
+                      <a:r>
+                        <a:rPr sz="1000" b="0">
+                          <a:solidFill>
+                            <a:srgbClr val="1D1B43"/>
+                          </a:solidFill>
+                          <a:latin typeface="Calibri"/>
+                        </a:rPr>
+                        <a:t>CASCAVEL/PR</a:t>
+                      </a:r>
+                    </a:p>
+                  </a:txBody>
+                  <a:tcPr>
+                    <a:solidFill>
+                      <a:srgbClr val="FFFFFF"/>
+                    </a:solidFill>
+                  </a:tcPr>
+                </a:tc>
+                <a:tc>
+                  <a:txBody>
+                    <a:bodyPr/>
+                    <a:lstStyle/>
+                    <a:p>
+                      <a:pPr algn="l"/>
+                      <a:r>
+                        <a:rPr sz="1000" b="0">
+                          <a:solidFill>
+                            <a:srgbClr val="1D1B43"/>
+                          </a:solidFill>
+                          <a:latin typeface="Calibri"/>
+                        </a:rPr>
+                        <a:t>12/05/2026</a:t>
+                      </a:r>
+                    </a:p>
+                  </a:txBody>
+                  <a:tcPr>
+                    <a:solidFill>
+                      <a:srgbClr val="FFFFFF"/>
                     </a:solidFill>
                   </a:tcPr>
                 </a:tc>
@@ -5929,101 +7216,101 @@
                   </a:txBody>
                   <a:tcPr>
                     <a:solidFill>
-                      <a:srgbClr val="F2F2F2"/>
+                      <a:srgbClr val="FFFFFF"/>
                     </a:solidFill>
                   </a:tcPr>
                 </a:tc>
               </a:tr>
-              <a:tr h="384048">
-                <a:tc>
-                  <a:txBody>
-                    <a:bodyPr/>
-                    <a:lstStyle/>
-                    <a:p>
-                      <a:pPr algn="l"/>
-                      <a:r>
-                        <a:rPr sz="1000" b="0">
-                          <a:solidFill>
-                            <a:srgbClr val="1D1B43"/>
-                          </a:solidFill>
-                          <a:latin typeface="Calibri"/>
-                        </a:rPr>
-                        <a:t>277823</a:t>
-                      </a:r>
-                    </a:p>
-                  </a:txBody>
-                  <a:tcPr>
-                    <a:solidFill>
-                      <a:srgbClr val="FFFFFF"/>
-                    </a:solidFill>
-                  </a:tcPr>
-                </a:tc>
-                <a:tc>
-                  <a:txBody>
-                    <a:bodyPr/>
-                    <a:lstStyle/>
-                    <a:p>
-                      <a:pPr algn="l"/>
-                      <a:r>
-                        <a:rPr sz="1000" b="0">
-                          <a:solidFill>
-                            <a:srgbClr val="1D1B43"/>
-                          </a:solidFill>
-                          <a:latin typeface="Calibri"/>
-                        </a:rPr>
-                        <a:t>SOVAN EQUIPAMENTOS D - SOROCABA / SP</a:t>
-                      </a:r>
-                    </a:p>
-                  </a:txBody>
-                  <a:tcPr>
-                    <a:solidFill>
-                      <a:srgbClr val="FFFFFF"/>
-                    </a:solidFill>
-                  </a:tcPr>
-                </a:tc>
-                <a:tc>
-                  <a:txBody>
-                    <a:bodyPr/>
-                    <a:lstStyle/>
-                    <a:p>
-                      <a:pPr algn="l"/>
-                      <a:r>
-                        <a:rPr sz="1000" b="0">
-                          <a:solidFill>
-                            <a:srgbClr val="1D1B43"/>
-                          </a:solidFill>
-                          <a:latin typeface="Calibri"/>
-                        </a:rPr>
-                        <a:t>SOROCABA/SP</a:t>
-                      </a:r>
-                    </a:p>
-                  </a:txBody>
-                  <a:tcPr>
-                    <a:solidFill>
-                      <a:srgbClr val="FFFFFF"/>
-                    </a:solidFill>
-                  </a:tcPr>
-                </a:tc>
-                <a:tc>
-                  <a:txBody>
-                    <a:bodyPr/>
-                    <a:lstStyle/>
-                    <a:p>
-                      <a:pPr algn="l"/>
-                      <a:r>
-                        <a:rPr sz="1000" b="0">
-                          <a:solidFill>
-                            <a:srgbClr val="1D1B43"/>
-                          </a:solidFill>
-                          <a:latin typeface="Calibri"/>
-                        </a:rPr>
-                        <a:t>13/04/2026</a:t>
-                      </a:r>
-                    </a:p>
-                  </a:txBody>
-                  <a:tcPr>
-                    <a:solidFill>
-                      <a:srgbClr val="FFFFFF"/>
+              <a:tr h="228600">
+                <a:tc>
+                  <a:txBody>
+                    <a:bodyPr/>
+                    <a:lstStyle/>
+                    <a:p>
+                      <a:pPr algn="l"/>
+                      <a:r>
+                        <a:rPr sz="1000" b="0">
+                          <a:solidFill>
+                            <a:srgbClr val="1D1B43"/>
+                          </a:solidFill>
+                          <a:latin typeface="Calibri"/>
+                        </a:rPr>
+                        <a:t>281714</a:t>
+                      </a:r>
+                    </a:p>
+                  </a:txBody>
+                  <a:tcPr>
+                    <a:solidFill>
+                      <a:srgbClr val="F2F2F2"/>
+                    </a:solidFill>
+                  </a:tcPr>
+                </a:tc>
+                <a:tc>
+                  <a:txBody>
+                    <a:bodyPr/>
+                    <a:lstStyle/>
+                    <a:p>
+                      <a:pPr algn="l"/>
+                      <a:r>
+                        <a:rPr sz="1000" b="0">
+                          <a:solidFill>
+                            <a:srgbClr val="1D1B43"/>
+                          </a:solidFill>
+                          <a:latin typeface="Calibri"/>
+                        </a:rPr>
+                        <a:t>CORSUL COMERCIO E RE - CASCAVEL / PR</a:t>
+                      </a:r>
+                    </a:p>
+                  </a:txBody>
+                  <a:tcPr>
+                    <a:solidFill>
+                      <a:srgbClr val="F2F2F2"/>
+                    </a:solidFill>
+                  </a:tcPr>
+                </a:tc>
+                <a:tc>
+                  <a:txBody>
+                    <a:bodyPr/>
+                    <a:lstStyle/>
+                    <a:p>
+                      <a:pPr algn="l"/>
+                      <a:r>
+                        <a:rPr sz="1000" b="0">
+                          <a:solidFill>
+                            <a:srgbClr val="1D1B43"/>
+                          </a:solidFill>
+                          <a:latin typeface="Calibri"/>
+                        </a:rPr>
+                        <a:t>CASCAVEL/PR</a:t>
+                      </a:r>
+                    </a:p>
+                  </a:txBody>
+                  <a:tcPr>
+                    <a:solidFill>
+                      <a:srgbClr val="F2F2F2"/>
+                    </a:solidFill>
+                  </a:tcPr>
+                </a:tc>
+                <a:tc>
+                  <a:txBody>
+                    <a:bodyPr/>
+                    <a:lstStyle/>
+                    <a:p>
+                      <a:pPr algn="l"/>
+                      <a:r>
+                        <a:rPr sz="1000" b="0">
+                          <a:solidFill>
+                            <a:srgbClr val="1D1B43"/>
+                          </a:solidFill>
+                          <a:latin typeface="Calibri"/>
+                        </a:rPr>
+                        <a:t>12/05/2026</a:t>
+                      </a:r>
+                    </a:p>
+                  </a:txBody>
+                  <a:tcPr>
+                    <a:solidFill>
+                      <a:srgbClr val="F2F2F2"/>
                     </a:solidFill>
                   </a:tcPr>
                 </a:tc>
@@ -6046,55 +7333,289 @@
                   </a:txBody>
                   <a:tcPr>
                     <a:solidFill>
-                      <a:srgbClr val="FFFFFF"/>
+                      <a:srgbClr val="F2F2F2"/>
                     </a:solidFill>
                   </a:tcPr>
                 </a:tc>
               </a:tr>
-              <a:tr h="384048">
-                <a:tc>
-                  <a:txBody>
-                    <a:bodyPr/>
-                    <a:lstStyle/>
-                    <a:p>
-                      <a:pPr algn="l"/>
-                      <a:r>
-                        <a:rPr sz="1000" b="0">
-                          <a:solidFill>
-                            <a:srgbClr val="1D1B43"/>
-                          </a:solidFill>
-                          <a:latin typeface="Calibri"/>
-                        </a:rPr>
-                        <a:t>278728</a:t>
-                      </a:r>
-                    </a:p>
-                  </a:txBody>
-                  <a:tcPr>
-                    <a:solidFill>
-                      <a:srgbClr val="F2F2F2"/>
-                    </a:solidFill>
-                  </a:tcPr>
-                </a:tc>
-                <a:tc>
-                  <a:txBody>
-                    <a:bodyPr/>
-                    <a:lstStyle/>
-                    <a:p>
-                      <a:pPr algn="l"/>
-                      <a:r>
-                        <a:rPr sz="1000" b="0">
-                          <a:solidFill>
-                            <a:srgbClr val="1D1B43"/>
-                          </a:solidFill>
-                          <a:latin typeface="Calibri"/>
-                        </a:rPr>
-                        <a:t>EXATA CARGO - GUARULHOS / SP</a:t>
-                      </a:r>
-                    </a:p>
-                  </a:txBody>
-                  <a:tcPr>
-                    <a:solidFill>
-                      <a:srgbClr val="F2F2F2"/>
+              <a:tr h="228600">
+                <a:tc>
+                  <a:txBody>
+                    <a:bodyPr/>
+                    <a:lstStyle/>
+                    <a:p>
+                      <a:pPr algn="l"/>
+                      <a:r>
+                        <a:rPr sz="1000" b="0">
+                          <a:solidFill>
+                            <a:srgbClr val="1D1B43"/>
+                          </a:solidFill>
+                          <a:latin typeface="Calibri"/>
+                        </a:rPr>
+                        <a:t>281715</a:t>
+                      </a:r>
+                    </a:p>
+                  </a:txBody>
+                  <a:tcPr>
+                    <a:solidFill>
+                      <a:srgbClr val="FFFFFF"/>
+                    </a:solidFill>
+                  </a:tcPr>
+                </a:tc>
+                <a:tc>
+                  <a:txBody>
+                    <a:bodyPr/>
+                    <a:lstStyle/>
+                    <a:p>
+                      <a:pPr algn="l"/>
+                      <a:r>
+                        <a:rPr sz="1000" b="0">
+                          <a:solidFill>
+                            <a:srgbClr val="1D1B43"/>
+                          </a:solidFill>
+                          <a:latin typeface="Calibri"/>
+                        </a:rPr>
+                        <a:t>CORSUL COMERCIO E RE - CASCAVEL / PR</a:t>
+                      </a:r>
+                    </a:p>
+                  </a:txBody>
+                  <a:tcPr>
+                    <a:solidFill>
+                      <a:srgbClr val="FFFFFF"/>
+                    </a:solidFill>
+                  </a:tcPr>
+                </a:tc>
+                <a:tc>
+                  <a:txBody>
+                    <a:bodyPr/>
+                    <a:lstStyle/>
+                    <a:p>
+                      <a:pPr algn="l"/>
+                      <a:r>
+                        <a:rPr sz="1000" b="0">
+                          <a:solidFill>
+                            <a:srgbClr val="1D1B43"/>
+                          </a:solidFill>
+                          <a:latin typeface="Calibri"/>
+                        </a:rPr>
+                        <a:t>CASCAVEL/PR</a:t>
+                      </a:r>
+                    </a:p>
+                  </a:txBody>
+                  <a:tcPr>
+                    <a:solidFill>
+                      <a:srgbClr val="FFFFFF"/>
+                    </a:solidFill>
+                  </a:tcPr>
+                </a:tc>
+                <a:tc>
+                  <a:txBody>
+                    <a:bodyPr/>
+                    <a:lstStyle/>
+                    <a:p>
+                      <a:pPr algn="l"/>
+                      <a:r>
+                        <a:rPr sz="1000" b="0">
+                          <a:solidFill>
+                            <a:srgbClr val="1D1B43"/>
+                          </a:solidFill>
+                          <a:latin typeface="Calibri"/>
+                        </a:rPr>
+                        <a:t>12/05/2026</a:t>
+                      </a:r>
+                    </a:p>
+                  </a:txBody>
+                  <a:tcPr>
+                    <a:solidFill>
+                      <a:srgbClr val="FFFFFF"/>
+                    </a:solidFill>
+                  </a:tcPr>
+                </a:tc>
+                <a:tc>
+                  <a:txBody>
+                    <a:bodyPr/>
+                    <a:lstStyle/>
+                    <a:p>
+                      <a:pPr algn="l"/>
+                      <a:r>
+                        <a:rPr sz="1000" b="0">
+                          <a:solidFill>
+                            <a:srgbClr val="1D1B43"/>
+                          </a:solidFill>
+                          <a:latin typeface="Calibri"/>
+                        </a:rPr>
+                        <a:t>ENTREGUE FORA DO PRAZO</a:t>
+                      </a:r>
+                    </a:p>
+                  </a:txBody>
+                  <a:tcPr>
+                    <a:solidFill>
+                      <a:srgbClr val="FFFFFF"/>
+                    </a:solidFill>
+                  </a:tcPr>
+                </a:tc>
+              </a:tr>
+              <a:tr h="228600">
+                <a:tc>
+                  <a:txBody>
+                    <a:bodyPr/>
+                    <a:lstStyle/>
+                    <a:p>
+                      <a:pPr algn="l"/>
+                      <a:r>
+                        <a:rPr sz="1000" b="0">
+                          <a:solidFill>
+                            <a:srgbClr val="1D1B43"/>
+                          </a:solidFill>
+                          <a:latin typeface="Calibri"/>
+                        </a:rPr>
+                        <a:t>281825</a:t>
+                      </a:r>
+                    </a:p>
+                  </a:txBody>
+                  <a:tcPr>
+                    <a:solidFill>
+                      <a:srgbClr val="F2F2F2"/>
+                    </a:solidFill>
+                  </a:tcPr>
+                </a:tc>
+                <a:tc>
+                  <a:txBody>
+                    <a:bodyPr/>
+                    <a:lstStyle/>
+                    <a:p>
+                      <a:pPr algn="l"/>
+                      <a:r>
+                        <a:rPr sz="1000" b="0">
+                          <a:solidFill>
+                            <a:srgbClr val="1D1B43"/>
+                          </a:solidFill>
+                          <a:latin typeface="Calibri"/>
+                        </a:rPr>
+                        <a:t>CORSUL COMERCIO E RE - SAO JOSE DOS PINHAIS / PR</a:t>
+                      </a:r>
+                    </a:p>
+                  </a:txBody>
+                  <a:tcPr>
+                    <a:solidFill>
+                      <a:srgbClr val="F2F2F2"/>
+                    </a:solidFill>
+                  </a:tcPr>
+                </a:tc>
+                <a:tc>
+                  <a:txBody>
+                    <a:bodyPr/>
+                    <a:lstStyle/>
+                    <a:p>
+                      <a:pPr algn="l"/>
+                      <a:r>
+                        <a:rPr sz="1000" b="0">
+                          <a:solidFill>
+                            <a:srgbClr val="1D1B43"/>
+                          </a:solidFill>
+                          <a:latin typeface="Calibri"/>
+                        </a:rPr>
+                        <a:t>SAO JOSE DOS PINHAIS/PR</a:t>
+                      </a:r>
+                    </a:p>
+                  </a:txBody>
+                  <a:tcPr>
+                    <a:solidFill>
+                      <a:srgbClr val="F2F2F2"/>
+                    </a:solidFill>
+                  </a:tcPr>
+                </a:tc>
+                <a:tc>
+                  <a:txBody>
+                    <a:bodyPr/>
+                    <a:lstStyle/>
+                    <a:p>
+                      <a:pPr algn="l"/>
+                      <a:r>
+                        <a:rPr sz="1000" b="0">
+                          <a:solidFill>
+                            <a:srgbClr val="1D1B43"/>
+                          </a:solidFill>
+                          <a:latin typeface="Calibri"/>
+                        </a:rPr>
+                        <a:t>08/05/2026</a:t>
+                      </a:r>
+                    </a:p>
+                  </a:txBody>
+                  <a:tcPr>
+                    <a:solidFill>
+                      <a:srgbClr val="F2F2F2"/>
+                    </a:solidFill>
+                  </a:tcPr>
+                </a:tc>
+                <a:tc>
+                  <a:txBody>
+                    <a:bodyPr/>
+                    <a:lstStyle/>
+                    <a:p>
+                      <a:pPr algn="l"/>
+                      <a:r>
+                        <a:rPr sz="1000" b="0">
+                          <a:solidFill>
+                            <a:srgbClr val="1D1B43"/>
+                          </a:solidFill>
+                          <a:latin typeface="Calibri"/>
+                        </a:rPr>
+                        <a:t>ENTREGUE FORA DO PRAZO</a:t>
+                      </a:r>
+                    </a:p>
+                  </a:txBody>
+                  <a:tcPr>
+                    <a:solidFill>
+                      <a:srgbClr val="F2F2F2"/>
+                    </a:solidFill>
+                  </a:tcPr>
+                </a:tc>
+              </a:tr>
+              <a:tr h="228600">
+                <a:tc>
+                  <a:txBody>
+                    <a:bodyPr/>
+                    <a:lstStyle/>
+                    <a:p>
+                      <a:pPr algn="l"/>
+                      <a:r>
+                        <a:rPr sz="1000" b="0">
+                          <a:solidFill>
+                            <a:srgbClr val="1D1B43"/>
+                          </a:solidFill>
+                          <a:latin typeface="Calibri"/>
+                        </a:rPr>
+                        <a:t>282745</a:t>
+                      </a:r>
+                    </a:p>
+                  </a:txBody>
+                  <a:tcPr>
+                    <a:solidFill>
+                      <a:srgbClr val="FFFFFF"/>
+                    </a:solidFill>
+                  </a:tcPr>
+                </a:tc>
+                <a:tc>
+                  <a:txBody>
+                    <a:bodyPr/>
+                    <a:lstStyle/>
+                    <a:p>
+                      <a:pPr algn="l"/>
+                      <a:r>
+                        <a:rPr sz="1000" b="0">
+                          <a:solidFill>
+                            <a:srgbClr val="1D1B43"/>
+                          </a:solidFill>
+                          <a:latin typeface="Calibri"/>
+                        </a:rPr>
+                        <a:t>SP EQUIPAMENTOS DE P - GUARULHOS / SP</a:t>
+                      </a:r>
+                    </a:p>
+                  </a:txBody>
+                  <a:tcPr>
+                    <a:solidFill>
+                      <a:srgbClr val="FFFFFF"/>
                     </a:solidFill>
                   </a:tcPr>
                 </a:tc>
@@ -6117,141 +7638,24 @@
                   </a:txBody>
                   <a:tcPr>
                     <a:solidFill>
-                      <a:srgbClr val="F2F2F2"/>
-                    </a:solidFill>
-                  </a:tcPr>
-                </a:tc>
-                <a:tc>
-                  <a:txBody>
-                    <a:bodyPr/>
-                    <a:lstStyle/>
-                    <a:p>
-                      <a:pPr algn="l"/>
-                      <a:r>
-                        <a:rPr sz="1000" b="0">
-                          <a:solidFill>
-                            <a:srgbClr val="1D1B43"/>
-                          </a:solidFill>
-                          <a:latin typeface="Calibri"/>
-                        </a:rPr>
-                        <a:t>14/04/2026</a:t>
-                      </a:r>
-                    </a:p>
-                  </a:txBody>
-                  <a:tcPr>
-                    <a:solidFill>
-                      <a:srgbClr val="F2F2F2"/>
-                    </a:solidFill>
-                  </a:tcPr>
-                </a:tc>
-                <a:tc>
-                  <a:txBody>
-                    <a:bodyPr/>
-                    <a:lstStyle/>
-                    <a:p>
-                      <a:pPr algn="l"/>
-                      <a:r>
-                        <a:rPr sz="1000" b="0">
-                          <a:solidFill>
-                            <a:srgbClr val="1D1B43"/>
-                          </a:solidFill>
-                          <a:latin typeface="Calibri"/>
-                        </a:rPr>
-                        <a:t>ENTREGUE FORA DO PRAZO</a:t>
-                      </a:r>
-                    </a:p>
-                  </a:txBody>
-                  <a:tcPr>
-                    <a:solidFill>
-                      <a:srgbClr val="F2F2F2"/>
-                    </a:solidFill>
-                  </a:tcPr>
-                </a:tc>
-              </a:tr>
-              <a:tr h="384048">
-                <a:tc>
-                  <a:txBody>
-                    <a:bodyPr/>
-                    <a:lstStyle/>
-                    <a:p>
-                      <a:pPr algn="l"/>
-                      <a:r>
-                        <a:rPr sz="1000" b="0">
-                          <a:solidFill>
-                            <a:srgbClr val="1D1B43"/>
-                          </a:solidFill>
-                          <a:latin typeface="Calibri"/>
-                        </a:rPr>
-                        <a:t>279310</a:t>
-                      </a:r>
-                    </a:p>
-                  </a:txBody>
-                  <a:tcPr>
-                    <a:solidFill>
-                      <a:srgbClr val="FFFFFF"/>
-                    </a:solidFill>
-                  </a:tcPr>
-                </a:tc>
-                <a:tc>
-                  <a:txBody>
-                    <a:bodyPr/>
-                    <a:lstStyle/>
-                    <a:p>
-                      <a:pPr algn="l"/>
-                      <a:r>
-                        <a:rPr sz="1000" b="0">
-                          <a:solidFill>
-                            <a:srgbClr val="1D1B43"/>
-                          </a:solidFill>
-                          <a:latin typeface="Calibri"/>
-                        </a:rPr>
-                        <a:t>CORSUL COMERCIO E RE - CRICIUMA / SC</a:t>
-                      </a:r>
-                    </a:p>
-                  </a:txBody>
-                  <a:tcPr>
-                    <a:solidFill>
-                      <a:srgbClr val="FFFFFF"/>
-                    </a:solidFill>
-                  </a:tcPr>
-                </a:tc>
-                <a:tc>
-                  <a:txBody>
-                    <a:bodyPr/>
-                    <a:lstStyle/>
-                    <a:p>
-                      <a:pPr algn="l"/>
-                      <a:r>
-                        <a:rPr sz="1000" b="0">
-                          <a:solidFill>
-                            <a:srgbClr val="1D1B43"/>
-                          </a:solidFill>
-                          <a:latin typeface="Calibri"/>
-                        </a:rPr>
-                        <a:t>CRICIUMA/SC</a:t>
-                      </a:r>
-                    </a:p>
-                  </a:txBody>
-                  <a:tcPr>
-                    <a:solidFill>
-                      <a:srgbClr val="FFFFFF"/>
-                    </a:solidFill>
-                  </a:tcPr>
-                </a:tc>
-                <a:tc>
-                  <a:txBody>
-                    <a:bodyPr/>
-                    <a:lstStyle/>
-                    <a:p>
-                      <a:pPr algn="l"/>
-                      <a:r>
-                        <a:rPr sz="1000" b="0">
-                          <a:solidFill>
-                            <a:srgbClr val="1D1B43"/>
-                          </a:solidFill>
-                          <a:latin typeface="Calibri"/>
-                        </a:rPr>
-                        <a:t>28/04/2026</a:t>
+                      <a:srgbClr val="FFFFFF"/>
+                    </a:solidFill>
+                  </a:tcPr>
+                </a:tc>
+                <a:tc>
+                  <a:txBody>
+                    <a:bodyPr/>
+                    <a:lstStyle/>
+                    <a:p>
+                      <a:pPr algn="l"/>
+                      <a:r>
+                        <a:rPr sz="1000" b="0">
+                          <a:solidFill>
+                            <a:srgbClr val="1D1B43"/>
+                          </a:solidFill>
+                          <a:latin typeface="Calibri"/>
+                        </a:rPr>
+                        <a:t>14/05/2026</a:t>
                       </a:r>
                     </a:p>
                   </a:txBody>
@@ -6281,357 +7685,6 @@
                   <a:tcPr>
                     <a:solidFill>
                       <a:srgbClr val="FFFFFF"/>
-                    </a:solidFill>
-                  </a:tcPr>
-                </a:tc>
-              </a:tr>
-              <a:tr h="384048">
-                <a:tc>
-                  <a:txBody>
-                    <a:bodyPr/>
-                    <a:lstStyle/>
-                    <a:p>
-                      <a:pPr algn="l"/>
-                      <a:r>
-                        <a:rPr sz="1000" b="0">
-                          <a:solidFill>
-                            <a:srgbClr val="1D1B43"/>
-                          </a:solidFill>
-                          <a:latin typeface="Calibri"/>
-                        </a:rPr>
-                        <a:t>280014</a:t>
-                      </a:r>
-                    </a:p>
-                  </a:txBody>
-                  <a:tcPr>
-                    <a:solidFill>
-                      <a:srgbClr val="F2F2F2"/>
-                    </a:solidFill>
-                  </a:tcPr>
-                </a:tc>
-                <a:tc>
-                  <a:txBody>
-                    <a:bodyPr/>
-                    <a:lstStyle/>
-                    <a:p>
-                      <a:pPr algn="l"/>
-                      <a:r>
-                        <a:rPr sz="1000" b="0">
-                          <a:solidFill>
-                            <a:srgbClr val="1D1B43"/>
-                          </a:solidFill>
-                          <a:latin typeface="Calibri"/>
-                        </a:rPr>
-                        <a:t>EXATA CARGO - GUARULHOS / SP</a:t>
-                      </a:r>
-                    </a:p>
-                  </a:txBody>
-                  <a:tcPr>
-                    <a:solidFill>
-                      <a:srgbClr val="F2F2F2"/>
-                    </a:solidFill>
-                  </a:tcPr>
-                </a:tc>
-                <a:tc>
-                  <a:txBody>
-                    <a:bodyPr/>
-                    <a:lstStyle/>
-                    <a:p>
-                      <a:pPr algn="l"/>
-                      <a:r>
-                        <a:rPr sz="1000" b="0">
-                          <a:solidFill>
-                            <a:srgbClr val="1D1B43"/>
-                          </a:solidFill>
-                          <a:latin typeface="Calibri"/>
-                        </a:rPr>
-                        <a:t>GUARULHOS/SP</a:t>
-                      </a:r>
-                    </a:p>
-                  </a:txBody>
-                  <a:tcPr>
-                    <a:solidFill>
-                      <a:srgbClr val="F2F2F2"/>
-                    </a:solidFill>
-                  </a:tcPr>
-                </a:tc>
-                <a:tc>
-                  <a:txBody>
-                    <a:bodyPr/>
-                    <a:lstStyle/>
-                    <a:p>
-                      <a:pPr algn="l"/>
-                      <a:r>
-                        <a:rPr sz="1000" b="0">
-                          <a:solidFill>
-                            <a:srgbClr val="1D1B43"/>
-                          </a:solidFill>
-                          <a:latin typeface="Calibri"/>
-                        </a:rPr>
-                        <a:t>24/04/2026</a:t>
-                      </a:r>
-                    </a:p>
-                  </a:txBody>
-                  <a:tcPr>
-                    <a:solidFill>
-                      <a:srgbClr val="F2F2F2"/>
-                    </a:solidFill>
-                  </a:tcPr>
-                </a:tc>
-                <a:tc>
-                  <a:txBody>
-                    <a:bodyPr/>
-                    <a:lstStyle/>
-                    <a:p>
-                      <a:pPr algn="l"/>
-                      <a:r>
-                        <a:rPr sz="1000" b="0">
-                          <a:solidFill>
-                            <a:srgbClr val="1D1B43"/>
-                          </a:solidFill>
-                          <a:latin typeface="Calibri"/>
-                        </a:rPr>
-                        <a:t>ENTREGUE FORA DO PRAZO</a:t>
-                      </a:r>
-                    </a:p>
-                  </a:txBody>
-                  <a:tcPr>
-                    <a:solidFill>
-                      <a:srgbClr val="F2F2F2"/>
-                    </a:solidFill>
-                  </a:tcPr>
-                </a:tc>
-              </a:tr>
-              <a:tr h="384048">
-                <a:tc>
-                  <a:txBody>
-                    <a:bodyPr/>
-                    <a:lstStyle/>
-                    <a:p>
-                      <a:pPr algn="l"/>
-                      <a:r>
-                        <a:rPr sz="1000" b="0">
-                          <a:solidFill>
-                            <a:srgbClr val="1D1B43"/>
-                          </a:solidFill>
-                          <a:latin typeface="Calibri"/>
-                        </a:rPr>
-                        <a:t>280070</a:t>
-                      </a:r>
-                    </a:p>
-                  </a:txBody>
-                  <a:tcPr>
-                    <a:solidFill>
-                      <a:srgbClr val="FFFFFF"/>
-                    </a:solidFill>
-                  </a:tcPr>
-                </a:tc>
-                <a:tc>
-                  <a:txBody>
-                    <a:bodyPr/>
-                    <a:lstStyle/>
-                    <a:p>
-                      <a:pPr algn="l"/>
-                      <a:r>
-                        <a:rPr sz="1000" b="0">
-                          <a:solidFill>
-                            <a:srgbClr val="1D1B43"/>
-                          </a:solidFill>
-                          <a:latin typeface="Calibri"/>
-                        </a:rPr>
-                        <a:t>WILSON SONS LOGISTIC - SANTO ANDRE / SP</a:t>
-                      </a:r>
-                    </a:p>
-                  </a:txBody>
-                  <a:tcPr>
-                    <a:solidFill>
-                      <a:srgbClr val="FFFFFF"/>
-                    </a:solidFill>
-                  </a:tcPr>
-                </a:tc>
-                <a:tc>
-                  <a:txBody>
-                    <a:bodyPr/>
-                    <a:lstStyle/>
-                    <a:p>
-                      <a:pPr algn="l"/>
-                      <a:r>
-                        <a:rPr sz="1000" b="0">
-                          <a:solidFill>
-                            <a:srgbClr val="1D1B43"/>
-                          </a:solidFill>
-                          <a:latin typeface="Calibri"/>
-                        </a:rPr>
-                        <a:t>SANTO ANDRE/SP</a:t>
-                      </a:r>
-                    </a:p>
-                  </a:txBody>
-                  <a:tcPr>
-                    <a:solidFill>
-                      <a:srgbClr val="FFFFFF"/>
-                    </a:solidFill>
-                  </a:tcPr>
-                </a:tc>
-                <a:tc>
-                  <a:txBody>
-                    <a:bodyPr/>
-                    <a:lstStyle/>
-                    <a:p>
-                      <a:pPr algn="l"/>
-                      <a:r>
-                        <a:rPr sz="1000" b="0">
-                          <a:solidFill>
-                            <a:srgbClr val="1D1B43"/>
-                          </a:solidFill>
-                          <a:latin typeface="Calibri"/>
-                        </a:rPr>
-                        <a:t>28/04/2026</a:t>
-                      </a:r>
-                    </a:p>
-                  </a:txBody>
-                  <a:tcPr>
-                    <a:solidFill>
-                      <a:srgbClr val="FFFFFF"/>
-                    </a:solidFill>
-                  </a:tcPr>
-                </a:tc>
-                <a:tc>
-                  <a:txBody>
-                    <a:bodyPr/>
-                    <a:lstStyle/>
-                    <a:p>
-                      <a:pPr algn="l"/>
-                      <a:r>
-                        <a:rPr sz="1000" b="0">
-                          <a:solidFill>
-                            <a:srgbClr val="1D1B43"/>
-                          </a:solidFill>
-                          <a:latin typeface="Calibri"/>
-                        </a:rPr>
-                        <a:t>ENTREGUE FORA DO PRAZO</a:t>
-                      </a:r>
-                    </a:p>
-                  </a:txBody>
-                  <a:tcPr>
-                    <a:solidFill>
-                      <a:srgbClr val="FFFFFF"/>
-                    </a:solidFill>
-                  </a:tcPr>
-                </a:tc>
-              </a:tr>
-              <a:tr h="384048">
-                <a:tc>
-                  <a:txBody>
-                    <a:bodyPr/>
-                    <a:lstStyle/>
-                    <a:p>
-                      <a:pPr algn="l"/>
-                      <a:r>
-                        <a:rPr sz="1000" b="0">
-                          <a:solidFill>
-                            <a:srgbClr val="1D1B43"/>
-                          </a:solidFill>
-                          <a:latin typeface="Calibri"/>
-                        </a:rPr>
-                        <a:t>280799</a:t>
-                      </a:r>
-                    </a:p>
-                  </a:txBody>
-                  <a:tcPr>
-                    <a:solidFill>
-                      <a:srgbClr val="F2F2F2"/>
-                    </a:solidFill>
-                  </a:tcPr>
-                </a:tc>
-                <a:tc>
-                  <a:txBody>
-                    <a:bodyPr/>
-                    <a:lstStyle/>
-                    <a:p>
-                      <a:pPr algn="l"/>
-                      <a:r>
-                        <a:rPr sz="1000" b="0">
-                          <a:solidFill>
-                            <a:srgbClr val="1D1B43"/>
-                          </a:solidFill>
-                          <a:latin typeface="Calibri"/>
-                        </a:rPr>
-                        <a:t>ATIVA DISTRIBUICAO E - SAO PAULO / SP</a:t>
-                      </a:r>
-                    </a:p>
-                  </a:txBody>
-                  <a:tcPr>
-                    <a:solidFill>
-                      <a:srgbClr val="F2F2F2"/>
-                    </a:solidFill>
-                  </a:tcPr>
-                </a:tc>
-                <a:tc>
-                  <a:txBody>
-                    <a:bodyPr/>
-                    <a:lstStyle/>
-                    <a:p>
-                      <a:pPr algn="l"/>
-                      <a:r>
-                        <a:rPr sz="1000" b="0">
-                          <a:solidFill>
-                            <a:srgbClr val="1D1B43"/>
-                          </a:solidFill>
-                          <a:latin typeface="Calibri"/>
-                        </a:rPr>
-                        <a:t>SAO PAULO/SP</a:t>
-                      </a:r>
-                    </a:p>
-                  </a:txBody>
-                  <a:tcPr>
-                    <a:solidFill>
-                      <a:srgbClr val="F2F2F2"/>
-                    </a:solidFill>
-                  </a:tcPr>
-                </a:tc>
-                <a:tc>
-                  <a:txBody>
-                    <a:bodyPr/>
-                    <a:lstStyle/>
-                    <a:p>
-                      <a:pPr algn="l"/>
-                      <a:r>
-                        <a:rPr sz="1000" b="0">
-                          <a:solidFill>
-                            <a:srgbClr val="1D1B43"/>
-                          </a:solidFill>
-                          <a:latin typeface="Calibri"/>
-                        </a:rPr>
-                        <a:t>29/04/2026</a:t>
-                      </a:r>
-                    </a:p>
-                  </a:txBody>
-                  <a:tcPr>
-                    <a:solidFill>
-                      <a:srgbClr val="F2F2F2"/>
-                    </a:solidFill>
-                  </a:tcPr>
-                </a:tc>
-                <a:tc>
-                  <a:txBody>
-                    <a:bodyPr/>
-                    <a:lstStyle/>
-                    <a:p>
-                      <a:pPr algn="l"/>
-                      <a:r>
-                        <a:rPr sz="1000" b="0">
-                          <a:solidFill>
-                            <a:srgbClr val="1D1B43"/>
-                          </a:solidFill>
-                          <a:latin typeface="Calibri"/>
-                        </a:rPr>
-                        <a:t>FORA DO PRAZO</a:t>
-                      </a:r>
-                    </a:p>
-                  </a:txBody>
-                  <a:tcPr>
-                    <a:solidFill>
-                      <a:srgbClr val="F2F2F2"/>
                     </a:solidFill>
                   </a:tcPr>
                 </a:tc>
@@ -6971,76 +8024,76 @@
                           </a:solidFill>
                           <a:latin typeface="Calibri"/>
                         </a:rPr>
-                        <a:t>275</a:t>
-                      </a:r>
-                    </a:p>
-                  </a:txBody>
-                  <a:tcPr>
-                    <a:solidFill>
-                      <a:srgbClr val="FFFFFF"/>
-                    </a:solidFill>
-                  </a:tcPr>
-                </a:tc>
-                <a:tc>
-                  <a:txBody>
-                    <a:bodyPr/>
-                    <a:lstStyle/>
-                    <a:p>
-                      <a:pPr algn="l"/>
-                      <a:r>
-                        <a:rPr sz="1000" b="0">
-                          <a:solidFill>
-                            <a:srgbClr val="1D1B43"/>
-                          </a:solidFill>
-                          <a:latin typeface="Calibri"/>
-                        </a:rPr>
-                        <a:t>268</a:t>
-                      </a:r>
-                    </a:p>
-                  </a:txBody>
-                  <a:tcPr>
-                    <a:solidFill>
-                      <a:srgbClr val="FFFFFF"/>
-                    </a:solidFill>
-                  </a:tcPr>
-                </a:tc>
-                <a:tc>
-                  <a:txBody>
-                    <a:bodyPr/>
-                    <a:lstStyle/>
-                    <a:p>
-                      <a:pPr algn="l"/>
-                      <a:r>
-                        <a:rPr sz="1000" b="0">
-                          <a:solidFill>
-                            <a:srgbClr val="1D1B43"/>
-                          </a:solidFill>
-                          <a:latin typeface="Calibri"/>
-                        </a:rPr>
-                        <a:t>7</a:t>
-                      </a:r>
-                    </a:p>
-                  </a:txBody>
-                  <a:tcPr>
-                    <a:solidFill>
-                      <a:srgbClr val="FFFFFF"/>
-                    </a:solidFill>
-                  </a:tcPr>
-                </a:tc>
-                <a:tc>
-                  <a:txBody>
-                    <a:bodyPr/>
-                    <a:lstStyle/>
-                    <a:p>
-                      <a:pPr algn="l"/>
-                      <a:r>
-                        <a:rPr sz="1000" b="0">
-                          <a:solidFill>
-                            <a:srgbClr val="1D1B43"/>
-                          </a:solidFill>
-                          <a:latin typeface="Calibri"/>
-                        </a:rPr>
-                        <a:t>97.5%</a:t>
+                        <a:t>171</a:t>
+                      </a:r>
+                    </a:p>
+                  </a:txBody>
+                  <a:tcPr>
+                    <a:solidFill>
+                      <a:srgbClr val="FFFFFF"/>
+                    </a:solidFill>
+                  </a:tcPr>
+                </a:tc>
+                <a:tc>
+                  <a:txBody>
+                    <a:bodyPr/>
+                    <a:lstStyle/>
+                    <a:p>
+                      <a:pPr algn="l"/>
+                      <a:r>
+                        <a:rPr sz="1000" b="0">
+                          <a:solidFill>
+                            <a:srgbClr val="1D1B43"/>
+                          </a:solidFill>
+                          <a:latin typeface="Calibri"/>
+                        </a:rPr>
+                        <a:t>170</a:t>
+                      </a:r>
+                    </a:p>
+                  </a:txBody>
+                  <a:tcPr>
+                    <a:solidFill>
+                      <a:srgbClr val="FFFFFF"/>
+                    </a:solidFill>
+                  </a:tcPr>
+                </a:tc>
+                <a:tc>
+                  <a:txBody>
+                    <a:bodyPr/>
+                    <a:lstStyle/>
+                    <a:p>
+                      <a:pPr algn="l"/>
+                      <a:r>
+                        <a:rPr sz="1000" b="0">
+                          <a:solidFill>
+                            <a:srgbClr val="1D1B43"/>
+                          </a:solidFill>
+                          <a:latin typeface="Calibri"/>
+                        </a:rPr>
+                        <a:t>1</a:t>
+                      </a:r>
+                    </a:p>
+                  </a:txBody>
+                  <a:tcPr>
+                    <a:solidFill>
+                      <a:srgbClr val="FFFFFF"/>
+                    </a:solidFill>
+                  </a:tcPr>
+                </a:tc>
+                <a:tc>
+                  <a:txBody>
+                    <a:bodyPr/>
+                    <a:lstStyle/>
+                    <a:p>
+                      <a:pPr algn="l"/>
+                      <a:r>
+                        <a:rPr sz="1000" b="0">
+                          <a:solidFill>
+                            <a:srgbClr val="1D1B43"/>
+                          </a:solidFill>
+                          <a:latin typeface="Calibri"/>
+                        </a:rPr>
+                        <a:t>99.4%</a:t>
                       </a:r>
                     </a:p>
                   </a:txBody>
@@ -7088,99 +8141,99 @@
                           </a:solidFill>
                           <a:latin typeface="Calibri"/>
                         </a:rPr>
-                        <a:t>PR</a:t>
-                      </a:r>
-                    </a:p>
-                  </a:txBody>
-                  <a:tcPr>
-                    <a:solidFill>
-                      <a:srgbClr val="F2F2F2"/>
-                    </a:solidFill>
-                  </a:tcPr>
-                </a:tc>
-                <a:tc>
-                  <a:txBody>
-                    <a:bodyPr/>
-                    <a:lstStyle/>
-                    <a:p>
-                      <a:pPr algn="l"/>
-                      <a:r>
-                        <a:rPr sz="1000" b="0">
-                          <a:solidFill>
-                            <a:srgbClr val="1D1B43"/>
-                          </a:solidFill>
-                          <a:latin typeface="Calibri"/>
-                        </a:rPr>
-                        <a:t>59</a:t>
-                      </a:r>
-                    </a:p>
-                  </a:txBody>
-                  <a:tcPr>
-                    <a:solidFill>
-                      <a:srgbClr val="F2F2F2"/>
-                    </a:solidFill>
-                  </a:tcPr>
-                </a:tc>
-                <a:tc>
-                  <a:txBody>
-                    <a:bodyPr/>
-                    <a:lstStyle/>
-                    <a:p>
-                      <a:pPr algn="l"/>
-                      <a:r>
-                        <a:rPr sz="1000" b="0">
-                          <a:solidFill>
-                            <a:srgbClr val="1D1B43"/>
-                          </a:solidFill>
-                          <a:latin typeface="Calibri"/>
-                        </a:rPr>
-                        <a:t>58</a:t>
-                      </a:r>
-                    </a:p>
-                  </a:txBody>
-                  <a:tcPr>
-                    <a:solidFill>
-                      <a:srgbClr val="F2F2F2"/>
-                    </a:solidFill>
-                  </a:tcPr>
-                </a:tc>
-                <a:tc>
-                  <a:txBody>
-                    <a:bodyPr/>
-                    <a:lstStyle/>
-                    <a:p>
-                      <a:pPr algn="l"/>
-                      <a:r>
-                        <a:rPr sz="1000" b="0">
-                          <a:solidFill>
-                            <a:srgbClr val="1D1B43"/>
-                          </a:solidFill>
-                          <a:latin typeface="Calibri"/>
-                        </a:rPr>
-                        <a:t>1</a:t>
-                      </a:r>
-                    </a:p>
-                  </a:txBody>
-                  <a:tcPr>
-                    <a:solidFill>
-                      <a:srgbClr val="F2F2F2"/>
-                    </a:solidFill>
-                  </a:tcPr>
-                </a:tc>
-                <a:tc>
-                  <a:txBody>
-                    <a:bodyPr/>
-                    <a:lstStyle/>
-                    <a:p>
-                      <a:pPr algn="l"/>
-                      <a:r>
-                        <a:rPr sz="1000" b="0">
-                          <a:solidFill>
-                            <a:srgbClr val="1D1B43"/>
-                          </a:solidFill>
-                          <a:latin typeface="Calibri"/>
-                        </a:rPr>
-                        <a:t>98.3%</a:t>
+                        <a:t>SC</a:t>
+                      </a:r>
+                    </a:p>
+                  </a:txBody>
+                  <a:tcPr>
+                    <a:solidFill>
+                      <a:srgbClr val="F2F2F2"/>
+                    </a:solidFill>
+                  </a:tcPr>
+                </a:tc>
+                <a:tc>
+                  <a:txBody>
+                    <a:bodyPr/>
+                    <a:lstStyle/>
+                    <a:p>
+                      <a:pPr algn="l"/>
+                      <a:r>
+                        <a:rPr sz="1000" b="0">
+                          <a:solidFill>
+                            <a:srgbClr val="1D1B43"/>
+                          </a:solidFill>
+                          <a:latin typeface="Calibri"/>
+                        </a:rPr>
+                        <a:t>118</a:t>
+                      </a:r>
+                    </a:p>
+                  </a:txBody>
+                  <a:tcPr>
+                    <a:solidFill>
+                      <a:srgbClr val="F2F2F2"/>
+                    </a:solidFill>
+                  </a:tcPr>
+                </a:tc>
+                <a:tc>
+                  <a:txBody>
+                    <a:bodyPr/>
+                    <a:lstStyle/>
+                    <a:p>
+                      <a:pPr algn="l"/>
+                      <a:r>
+                        <a:rPr sz="1000" b="0">
+                          <a:solidFill>
+                            <a:srgbClr val="1D1B43"/>
+                          </a:solidFill>
+                          <a:latin typeface="Calibri"/>
+                        </a:rPr>
+                        <a:t>118</a:t>
+                      </a:r>
+                    </a:p>
+                  </a:txBody>
+                  <a:tcPr>
+                    <a:solidFill>
+                      <a:srgbClr val="F2F2F2"/>
+                    </a:solidFill>
+                  </a:tcPr>
+                </a:tc>
+                <a:tc>
+                  <a:txBody>
+                    <a:bodyPr/>
+                    <a:lstStyle/>
+                    <a:p>
+                      <a:pPr algn="l"/>
+                      <a:r>
+                        <a:rPr sz="1000" b="0">
+                          <a:solidFill>
+                            <a:srgbClr val="1D1B43"/>
+                          </a:solidFill>
+                          <a:latin typeface="Calibri"/>
+                        </a:rPr>
+                        <a:t>0</a:t>
+                      </a:r>
+                    </a:p>
+                  </a:txBody>
+                  <a:tcPr>
+                    <a:solidFill>
+                      <a:srgbClr val="F2F2F2"/>
+                    </a:solidFill>
+                  </a:tcPr>
+                </a:tc>
+                <a:tc>
+                  <a:txBody>
+                    <a:bodyPr/>
+                    <a:lstStyle/>
+                    <a:p>
+                      <a:pPr algn="l"/>
+                      <a:r>
+                        <a:rPr sz="1000" b="0">
+                          <a:solidFill>
+                            <a:srgbClr val="1D1B43"/>
+                          </a:solidFill>
+                          <a:latin typeface="Calibri"/>
+                        </a:rPr>
+                        <a:t>100.0%</a:t>
                       </a:r>
                     </a:p>
                   </a:txBody>
@@ -7228,122 +8281,122 @@
                           </a:solidFill>
                           <a:latin typeface="Calibri"/>
                         </a:rPr>
-                        <a:t>SC</a:t>
-                      </a:r>
-                    </a:p>
-                  </a:txBody>
-                  <a:tcPr>
-                    <a:solidFill>
-                      <a:srgbClr val="FFFFFF"/>
-                    </a:solidFill>
-                  </a:tcPr>
-                </a:tc>
-                <a:tc>
-                  <a:txBody>
-                    <a:bodyPr/>
-                    <a:lstStyle/>
-                    <a:p>
-                      <a:pPr algn="l"/>
-                      <a:r>
-                        <a:rPr sz="1000" b="0">
-                          <a:solidFill>
-                            <a:srgbClr val="1D1B43"/>
-                          </a:solidFill>
-                          <a:latin typeface="Calibri"/>
-                        </a:rPr>
-                        <a:t>58</a:t>
-                      </a:r>
-                    </a:p>
-                  </a:txBody>
-                  <a:tcPr>
-                    <a:solidFill>
-                      <a:srgbClr val="FFFFFF"/>
-                    </a:solidFill>
-                  </a:tcPr>
-                </a:tc>
-                <a:tc>
-                  <a:txBody>
-                    <a:bodyPr/>
-                    <a:lstStyle/>
-                    <a:p>
-                      <a:pPr algn="l"/>
-                      <a:r>
-                        <a:rPr sz="1000" b="0">
-                          <a:solidFill>
-                            <a:srgbClr val="1D1B43"/>
-                          </a:solidFill>
-                          <a:latin typeface="Calibri"/>
-                        </a:rPr>
-                        <a:t>57</a:t>
-                      </a:r>
-                    </a:p>
-                  </a:txBody>
-                  <a:tcPr>
-                    <a:solidFill>
-                      <a:srgbClr val="FFFFFF"/>
-                    </a:solidFill>
-                  </a:tcPr>
-                </a:tc>
-                <a:tc>
-                  <a:txBody>
-                    <a:bodyPr/>
-                    <a:lstStyle/>
-                    <a:p>
-                      <a:pPr algn="l"/>
-                      <a:r>
-                        <a:rPr sz="1000" b="0">
-                          <a:solidFill>
-                            <a:srgbClr val="1D1B43"/>
-                          </a:solidFill>
-                          <a:latin typeface="Calibri"/>
-                        </a:rPr>
-                        <a:t>1</a:t>
-                      </a:r>
-                    </a:p>
-                  </a:txBody>
-                  <a:tcPr>
-                    <a:solidFill>
-                      <a:srgbClr val="FFFFFF"/>
-                    </a:solidFill>
-                  </a:tcPr>
-                </a:tc>
-                <a:tc>
-                  <a:txBody>
-                    <a:bodyPr/>
-                    <a:lstStyle/>
-                    <a:p>
-                      <a:pPr algn="l"/>
-                      <a:r>
-                        <a:rPr sz="1000" b="0">
-                          <a:solidFill>
-                            <a:srgbClr val="1D1B43"/>
-                          </a:solidFill>
-                          <a:latin typeface="Calibri"/>
-                        </a:rPr>
-                        <a:t>98.3%</a:t>
-                      </a:r>
-                    </a:p>
-                  </a:txBody>
-                  <a:tcPr>
-                    <a:solidFill>
-                      <a:srgbClr val="FFFFFF"/>
-                    </a:solidFill>
-                  </a:tcPr>
-                </a:tc>
-                <a:tc>
-                  <a:txBody>
-                    <a:bodyPr/>
-                    <a:lstStyle/>
-                    <a:p>
-                      <a:pPr algn="l"/>
-                      <a:r>
-                        <a:rPr sz="1000" b="0">
-                          <a:solidFill>
-                            <a:srgbClr val="1D1B43"/>
-                          </a:solidFill>
-                          <a:latin typeface="Calibri"/>
-                        </a:rPr>
-                        <a:t>Excelente</a:t>
+                        <a:t>PR</a:t>
+                      </a:r>
+                    </a:p>
+                  </a:txBody>
+                  <a:tcPr>
+                    <a:solidFill>
+                      <a:srgbClr val="FFFFFF"/>
+                    </a:solidFill>
+                  </a:tcPr>
+                </a:tc>
+                <a:tc>
+                  <a:txBody>
+                    <a:bodyPr/>
+                    <a:lstStyle/>
+                    <a:p>
+                      <a:pPr algn="l"/>
+                      <a:r>
+                        <a:rPr sz="1000" b="0">
+                          <a:solidFill>
+                            <a:srgbClr val="1D1B43"/>
+                          </a:solidFill>
+                          <a:latin typeface="Calibri"/>
+                        </a:rPr>
+                        <a:t>93</a:t>
+                      </a:r>
+                    </a:p>
+                  </a:txBody>
+                  <a:tcPr>
+                    <a:solidFill>
+                      <a:srgbClr val="FFFFFF"/>
+                    </a:solidFill>
+                  </a:tcPr>
+                </a:tc>
+                <a:tc>
+                  <a:txBody>
+                    <a:bodyPr/>
+                    <a:lstStyle/>
+                    <a:p>
+                      <a:pPr algn="l"/>
+                      <a:r>
+                        <a:rPr sz="1000" b="0">
+                          <a:solidFill>
+                            <a:srgbClr val="1D1B43"/>
+                          </a:solidFill>
+                          <a:latin typeface="Calibri"/>
+                        </a:rPr>
+                        <a:t>80</a:t>
+                      </a:r>
+                    </a:p>
+                  </a:txBody>
+                  <a:tcPr>
+                    <a:solidFill>
+                      <a:srgbClr val="FFFFFF"/>
+                    </a:solidFill>
+                  </a:tcPr>
+                </a:tc>
+                <a:tc>
+                  <a:txBody>
+                    <a:bodyPr/>
+                    <a:lstStyle/>
+                    <a:p>
+                      <a:pPr algn="l"/>
+                      <a:r>
+                        <a:rPr sz="1000" b="0">
+                          <a:solidFill>
+                            <a:srgbClr val="1D1B43"/>
+                          </a:solidFill>
+                          <a:latin typeface="Calibri"/>
+                        </a:rPr>
+                        <a:t>13</a:t>
+                      </a:r>
+                    </a:p>
+                  </a:txBody>
+                  <a:tcPr>
+                    <a:solidFill>
+                      <a:srgbClr val="FFFFFF"/>
+                    </a:solidFill>
+                  </a:tcPr>
+                </a:tc>
+                <a:tc>
+                  <a:txBody>
+                    <a:bodyPr/>
+                    <a:lstStyle/>
+                    <a:p>
+                      <a:pPr algn="l"/>
+                      <a:r>
+                        <a:rPr sz="1000" b="0">
+                          <a:solidFill>
+                            <a:srgbClr val="1D1B43"/>
+                          </a:solidFill>
+                          <a:latin typeface="Calibri"/>
+                        </a:rPr>
+                        <a:t>86.0%</a:t>
+                      </a:r>
+                    </a:p>
+                  </a:txBody>
+                  <a:tcPr>
+                    <a:solidFill>
+                      <a:srgbClr val="FFFFFF"/>
+                    </a:solidFill>
+                  </a:tcPr>
+                </a:tc>
+                <a:tc>
+                  <a:txBody>
+                    <a:bodyPr/>
+                    <a:lstStyle/>
+                    <a:p>
+                      <a:pPr algn="l"/>
+                      <a:r>
+                        <a:rPr sz="1000" b="0">
+                          <a:solidFill>
+                            <a:srgbClr val="1D1B43"/>
+                          </a:solidFill>
+                          <a:latin typeface="Calibri"/>
+                        </a:rPr>
+                        <a:t>Regular</a:t>
                       </a:r>
                     </a:p>
                   </a:txBody>
@@ -7391,30 +8444,30 @@
                           </a:solidFill>
                           <a:latin typeface="Calibri"/>
                         </a:rPr>
-                        <a:t>48</a:t>
-                      </a:r>
-                    </a:p>
-                  </a:txBody>
-                  <a:tcPr>
-                    <a:solidFill>
-                      <a:srgbClr val="F2F2F2"/>
-                    </a:solidFill>
-                  </a:tcPr>
-                </a:tc>
-                <a:tc>
-                  <a:txBody>
-                    <a:bodyPr/>
-                    <a:lstStyle/>
-                    <a:p>
-                      <a:pPr algn="l"/>
-                      <a:r>
-                        <a:rPr sz="1000" b="0">
-                          <a:solidFill>
-                            <a:srgbClr val="1D1B43"/>
-                          </a:solidFill>
-                          <a:latin typeface="Calibri"/>
-                        </a:rPr>
-                        <a:t>48</a:t>
+                        <a:t>59</a:t>
+                      </a:r>
+                    </a:p>
+                  </a:txBody>
+                  <a:tcPr>
+                    <a:solidFill>
+                      <a:srgbClr val="F2F2F2"/>
+                    </a:solidFill>
+                  </a:tcPr>
+                </a:tc>
+                <a:tc>
+                  <a:txBody>
+                    <a:bodyPr/>
+                    <a:lstStyle/>
+                    <a:p>
+                      <a:pPr algn="l"/>
+                      <a:r>
+                        <a:rPr sz="1000" b="0">
+                          <a:solidFill>
+                            <a:srgbClr val="1D1B43"/>
+                          </a:solidFill>
+                          <a:latin typeface="Calibri"/>
+                        </a:rPr>
+                        <a:t>59</a:t>
                       </a:r>
                     </a:p>
                   </a:txBody>
@@ -7508,7 +8561,7 @@
                           </a:solidFill>
                           <a:latin typeface="Calibri"/>
                         </a:rPr>
-                        <a:t>MG</a:t>
+                        <a:t>RS</a:t>
                       </a:r>
                     </a:p>
                   </a:txBody>
@@ -7648,122 +8701,122 @@
                           </a:solidFill>
                           <a:latin typeface="Calibri"/>
                         </a:rPr>
-                        <a:t>RS</a:t>
-                      </a:r>
-                    </a:p>
-                  </a:txBody>
-                  <a:tcPr>
-                    <a:solidFill>
-                      <a:srgbClr val="F2F2F2"/>
-                    </a:solidFill>
-                  </a:tcPr>
-                </a:tc>
-                <a:tc>
-                  <a:txBody>
-                    <a:bodyPr/>
-                    <a:lstStyle/>
-                    <a:p>
-                      <a:pPr algn="l"/>
-                      <a:r>
-                        <a:rPr sz="1000" b="0">
-                          <a:solidFill>
-                            <a:srgbClr val="1D1B43"/>
-                          </a:solidFill>
-                          <a:latin typeface="Calibri"/>
-                        </a:rPr>
-                        <a:t>20</a:t>
-                      </a:r>
-                    </a:p>
-                  </a:txBody>
-                  <a:tcPr>
-                    <a:solidFill>
-                      <a:srgbClr val="F2F2F2"/>
-                    </a:solidFill>
-                  </a:tcPr>
-                </a:tc>
-                <a:tc>
-                  <a:txBody>
-                    <a:bodyPr/>
-                    <a:lstStyle/>
-                    <a:p>
-                      <a:pPr algn="l"/>
-                      <a:r>
-                        <a:rPr sz="1000" b="0">
-                          <a:solidFill>
-                            <a:srgbClr val="1D1B43"/>
-                          </a:solidFill>
-                          <a:latin typeface="Calibri"/>
-                        </a:rPr>
-                        <a:t>20</a:t>
-                      </a:r>
-                    </a:p>
-                  </a:txBody>
-                  <a:tcPr>
-                    <a:solidFill>
-                      <a:srgbClr val="F2F2F2"/>
-                    </a:solidFill>
-                  </a:tcPr>
-                </a:tc>
-                <a:tc>
-                  <a:txBody>
-                    <a:bodyPr/>
-                    <a:lstStyle/>
-                    <a:p>
-                      <a:pPr algn="l"/>
-                      <a:r>
-                        <a:rPr sz="1000" b="0">
-                          <a:solidFill>
-                            <a:srgbClr val="1D1B43"/>
-                          </a:solidFill>
-                          <a:latin typeface="Calibri"/>
-                        </a:rPr>
-                        <a:t>0</a:t>
-                      </a:r>
-                    </a:p>
-                  </a:txBody>
-                  <a:tcPr>
-                    <a:solidFill>
-                      <a:srgbClr val="F2F2F2"/>
-                    </a:solidFill>
-                  </a:tcPr>
-                </a:tc>
-                <a:tc>
-                  <a:txBody>
-                    <a:bodyPr/>
-                    <a:lstStyle/>
-                    <a:p>
-                      <a:pPr algn="l"/>
-                      <a:r>
-                        <a:rPr sz="1000" b="0">
-                          <a:solidFill>
-                            <a:srgbClr val="1D1B43"/>
-                          </a:solidFill>
-                          <a:latin typeface="Calibri"/>
-                        </a:rPr>
-                        <a:t>100.0%</a:t>
-                      </a:r>
-                    </a:p>
-                  </a:txBody>
-                  <a:tcPr>
-                    <a:solidFill>
-                      <a:srgbClr val="F2F2F2"/>
-                    </a:solidFill>
-                  </a:tcPr>
-                </a:tc>
-                <a:tc>
-                  <a:txBody>
-                    <a:bodyPr/>
-                    <a:lstStyle/>
-                    <a:p>
-                      <a:pPr algn="l"/>
-                      <a:r>
-                        <a:rPr sz="1000" b="0">
-                          <a:solidFill>
-                            <a:srgbClr val="1D1B43"/>
-                          </a:solidFill>
-                          <a:latin typeface="Calibri"/>
-                        </a:rPr>
-                        <a:t>Excelente</a:t>
+                        <a:t>MG</a:t>
+                      </a:r>
+                    </a:p>
+                  </a:txBody>
+                  <a:tcPr>
+                    <a:solidFill>
+                      <a:srgbClr val="F2F2F2"/>
+                    </a:solidFill>
+                  </a:tcPr>
+                </a:tc>
+                <a:tc>
+                  <a:txBody>
+                    <a:bodyPr/>
+                    <a:lstStyle/>
+                    <a:p>
+                      <a:pPr algn="l"/>
+                      <a:r>
+                        <a:rPr sz="1000" b="0">
+                          <a:solidFill>
+                            <a:srgbClr val="1D1B43"/>
+                          </a:solidFill>
+                          <a:latin typeface="Calibri"/>
+                        </a:rPr>
+                        <a:t>36</a:t>
+                      </a:r>
+                    </a:p>
+                  </a:txBody>
+                  <a:tcPr>
+                    <a:solidFill>
+                      <a:srgbClr val="F2F2F2"/>
+                    </a:solidFill>
+                  </a:tcPr>
+                </a:tc>
+                <a:tc>
+                  <a:txBody>
+                    <a:bodyPr/>
+                    <a:lstStyle/>
+                    <a:p>
+                      <a:pPr algn="l"/>
+                      <a:r>
+                        <a:rPr sz="1000" b="0">
+                          <a:solidFill>
+                            <a:srgbClr val="1D1B43"/>
+                          </a:solidFill>
+                          <a:latin typeface="Calibri"/>
+                        </a:rPr>
+                        <a:t>33</a:t>
+                      </a:r>
+                    </a:p>
+                  </a:txBody>
+                  <a:tcPr>
+                    <a:solidFill>
+                      <a:srgbClr val="F2F2F2"/>
+                    </a:solidFill>
+                  </a:tcPr>
+                </a:tc>
+                <a:tc>
+                  <a:txBody>
+                    <a:bodyPr/>
+                    <a:lstStyle/>
+                    <a:p>
+                      <a:pPr algn="l"/>
+                      <a:r>
+                        <a:rPr sz="1000" b="0">
+                          <a:solidFill>
+                            <a:srgbClr val="1D1B43"/>
+                          </a:solidFill>
+                          <a:latin typeface="Calibri"/>
+                        </a:rPr>
+                        <a:t>3</a:t>
+                      </a:r>
+                    </a:p>
+                  </a:txBody>
+                  <a:tcPr>
+                    <a:solidFill>
+                      <a:srgbClr val="F2F2F2"/>
+                    </a:solidFill>
+                  </a:tcPr>
+                </a:tc>
+                <a:tc>
+                  <a:txBody>
+                    <a:bodyPr/>
+                    <a:lstStyle/>
+                    <a:p>
+                      <a:pPr algn="l"/>
+                      <a:r>
+                        <a:rPr sz="1000" b="0">
+                          <a:solidFill>
+                            <a:srgbClr val="1D1B43"/>
+                          </a:solidFill>
+                          <a:latin typeface="Calibri"/>
+                        </a:rPr>
+                        <a:t>91.7%</a:t>
+                      </a:r>
+                    </a:p>
+                  </a:txBody>
+                  <a:tcPr>
+                    <a:solidFill>
+                      <a:srgbClr val="F2F2F2"/>
+                    </a:solidFill>
+                  </a:tcPr>
+                </a:tc>
+                <a:tc>
+                  <a:txBody>
+                    <a:bodyPr/>
+                    <a:lstStyle/>
+                    <a:p>
+                      <a:pPr algn="l"/>
+                      <a:r>
+                        <a:rPr sz="1000" b="0">
+                          <a:solidFill>
+                            <a:srgbClr val="1D1B43"/>
+                          </a:solidFill>
+                          <a:latin typeface="Calibri"/>
+                        </a:rPr>
+                        <a:t>Regular</a:t>
                       </a:r>
                     </a:p>
                   </a:txBody>
@@ -7788,53 +8841,53 @@
                           </a:solidFill>
                           <a:latin typeface="Calibri"/>
                         </a:rPr>
-                        <a:t>BA</a:t>
-                      </a:r>
-                    </a:p>
-                  </a:txBody>
-                  <a:tcPr>
-                    <a:solidFill>
-                      <a:srgbClr val="FFFFFF"/>
-                    </a:solidFill>
-                  </a:tcPr>
-                </a:tc>
-                <a:tc>
-                  <a:txBody>
-                    <a:bodyPr/>
-                    <a:lstStyle/>
-                    <a:p>
-                      <a:pPr algn="l"/>
-                      <a:r>
-                        <a:rPr sz="1000" b="0">
-                          <a:solidFill>
-                            <a:srgbClr val="1D1B43"/>
-                          </a:solidFill>
-                          <a:latin typeface="Calibri"/>
-                        </a:rPr>
-                        <a:t>11</a:t>
-                      </a:r>
-                    </a:p>
-                  </a:txBody>
-                  <a:tcPr>
-                    <a:solidFill>
-                      <a:srgbClr val="FFFFFF"/>
-                    </a:solidFill>
-                  </a:tcPr>
-                </a:tc>
-                <a:tc>
-                  <a:txBody>
-                    <a:bodyPr/>
-                    <a:lstStyle/>
-                    <a:p>
-                      <a:pPr algn="l"/>
-                      <a:r>
-                        <a:rPr sz="1000" b="0">
-                          <a:solidFill>
-                            <a:srgbClr val="1D1B43"/>
-                          </a:solidFill>
-                          <a:latin typeface="Calibri"/>
-                        </a:rPr>
-                        <a:t>11</a:t>
+                        <a:t>GO</a:t>
+                      </a:r>
+                    </a:p>
+                  </a:txBody>
+                  <a:tcPr>
+                    <a:solidFill>
+                      <a:srgbClr val="FFFFFF"/>
+                    </a:solidFill>
+                  </a:tcPr>
+                </a:tc>
+                <a:tc>
+                  <a:txBody>
+                    <a:bodyPr/>
+                    <a:lstStyle/>
+                    <a:p>
+                      <a:pPr algn="l"/>
+                      <a:r>
+                        <a:rPr sz="1000" b="0">
+                          <a:solidFill>
+                            <a:srgbClr val="1D1B43"/>
+                          </a:solidFill>
+                          <a:latin typeface="Calibri"/>
+                        </a:rPr>
+                        <a:t>20</a:t>
+                      </a:r>
+                    </a:p>
+                  </a:txBody>
+                  <a:tcPr>
+                    <a:solidFill>
+                      <a:srgbClr val="FFFFFF"/>
+                    </a:solidFill>
+                  </a:tcPr>
+                </a:tc>
+                <a:tc>
+                  <a:txBody>
+                    <a:bodyPr/>
+                    <a:lstStyle/>
+                    <a:p>
+                      <a:pPr algn="l"/>
+                      <a:r>
+                        <a:rPr sz="1000" b="0">
+                          <a:solidFill>
+                            <a:srgbClr val="1D1B43"/>
+                          </a:solidFill>
+                          <a:latin typeface="Calibri"/>
+                        </a:rPr>
+                        <a:t>20</a:t>
                       </a:r>
                     </a:p>
                   </a:txBody>
@@ -7928,53 +8981,53 @@
                           </a:solidFill>
                           <a:latin typeface="Calibri"/>
                         </a:rPr>
-                        <a:t>GO</a:t>
-                      </a:r>
-                    </a:p>
-                  </a:txBody>
-                  <a:tcPr>
-                    <a:solidFill>
-                      <a:srgbClr val="F2F2F2"/>
-                    </a:solidFill>
-                  </a:tcPr>
-                </a:tc>
-                <a:tc>
-                  <a:txBody>
-                    <a:bodyPr/>
-                    <a:lstStyle/>
-                    <a:p>
-                      <a:pPr algn="l"/>
-                      <a:r>
-                        <a:rPr sz="1000" b="0">
-                          <a:solidFill>
-                            <a:srgbClr val="1D1B43"/>
-                          </a:solidFill>
-                          <a:latin typeface="Calibri"/>
-                        </a:rPr>
-                        <a:t>10</a:t>
-                      </a:r>
-                    </a:p>
-                  </a:txBody>
-                  <a:tcPr>
-                    <a:solidFill>
-                      <a:srgbClr val="F2F2F2"/>
-                    </a:solidFill>
-                  </a:tcPr>
-                </a:tc>
-                <a:tc>
-                  <a:txBody>
-                    <a:bodyPr/>
-                    <a:lstStyle/>
-                    <a:p>
-                      <a:pPr algn="l"/>
-                      <a:r>
-                        <a:rPr sz="1000" b="0">
-                          <a:solidFill>
-                            <a:srgbClr val="1D1B43"/>
-                          </a:solidFill>
-                          <a:latin typeface="Calibri"/>
-                        </a:rPr>
-                        <a:t>10</a:t>
+                        <a:t>BA</a:t>
+                      </a:r>
+                    </a:p>
+                  </a:txBody>
+                  <a:tcPr>
+                    <a:solidFill>
+                      <a:srgbClr val="F2F2F2"/>
+                    </a:solidFill>
+                  </a:tcPr>
+                </a:tc>
+                <a:tc>
+                  <a:txBody>
+                    <a:bodyPr/>
+                    <a:lstStyle/>
+                    <a:p>
+                      <a:pPr algn="l"/>
+                      <a:r>
+                        <a:rPr sz="1000" b="0">
+                          <a:solidFill>
+                            <a:srgbClr val="1D1B43"/>
+                          </a:solidFill>
+                          <a:latin typeface="Calibri"/>
+                        </a:rPr>
+                        <a:t>6</a:t>
+                      </a:r>
+                    </a:p>
+                  </a:txBody>
+                  <a:tcPr>
+                    <a:solidFill>
+                      <a:srgbClr val="F2F2F2"/>
+                    </a:solidFill>
+                  </a:tcPr>
+                </a:tc>
+                <a:tc>
+                  <a:txBody>
+                    <a:bodyPr/>
+                    <a:lstStyle/>
+                    <a:p>
+                      <a:pPr algn="l"/>
+                      <a:r>
+                        <a:rPr sz="1000" b="0">
+                          <a:solidFill>
+                            <a:srgbClr val="1D1B43"/>
+                          </a:solidFill>
+                          <a:latin typeface="Calibri"/>
+                        </a:rPr>
+                        <a:t>6</a:t>
                       </a:r>
                     </a:p>
                   </a:txBody>
@@ -8068,122 +9121,122 @@
                           </a:solidFill>
                           <a:latin typeface="Calibri"/>
                         </a:rPr>
-                        <a:t>PA</a:t>
-                      </a:r>
-                    </a:p>
-                  </a:txBody>
-                  <a:tcPr>
-                    <a:solidFill>
-                      <a:srgbClr val="FFFFFF"/>
-                    </a:solidFill>
-                  </a:tcPr>
-                </a:tc>
-                <a:tc>
-                  <a:txBody>
-                    <a:bodyPr/>
-                    <a:lstStyle/>
-                    <a:p>
-                      <a:pPr algn="l"/>
-                      <a:r>
-                        <a:rPr sz="1000" b="0">
-                          <a:solidFill>
-                            <a:srgbClr val="1D1B43"/>
-                          </a:solidFill>
-                          <a:latin typeface="Calibri"/>
-                        </a:rPr>
-                        <a:t>6</a:t>
-                      </a:r>
-                    </a:p>
-                  </a:txBody>
-                  <a:tcPr>
-                    <a:solidFill>
-                      <a:srgbClr val="FFFFFF"/>
-                    </a:solidFill>
-                  </a:tcPr>
-                </a:tc>
-                <a:tc>
-                  <a:txBody>
-                    <a:bodyPr/>
-                    <a:lstStyle/>
-                    <a:p>
-                      <a:pPr algn="l"/>
-                      <a:r>
-                        <a:rPr sz="1000" b="0">
-                          <a:solidFill>
-                            <a:srgbClr val="1D1B43"/>
-                          </a:solidFill>
-                          <a:latin typeface="Calibri"/>
-                        </a:rPr>
-                        <a:t>6</a:t>
-                      </a:r>
-                    </a:p>
-                  </a:txBody>
-                  <a:tcPr>
-                    <a:solidFill>
-                      <a:srgbClr val="FFFFFF"/>
-                    </a:solidFill>
-                  </a:tcPr>
-                </a:tc>
-                <a:tc>
-                  <a:txBody>
-                    <a:bodyPr/>
-                    <a:lstStyle/>
-                    <a:p>
-                      <a:pPr algn="l"/>
-                      <a:r>
-                        <a:rPr sz="1000" b="0">
-                          <a:solidFill>
-                            <a:srgbClr val="1D1B43"/>
-                          </a:solidFill>
-                          <a:latin typeface="Calibri"/>
-                        </a:rPr>
-                        <a:t>0</a:t>
-                      </a:r>
-                    </a:p>
-                  </a:txBody>
-                  <a:tcPr>
-                    <a:solidFill>
-                      <a:srgbClr val="FFFFFF"/>
-                    </a:solidFill>
-                  </a:tcPr>
-                </a:tc>
-                <a:tc>
-                  <a:txBody>
-                    <a:bodyPr/>
-                    <a:lstStyle/>
-                    <a:p>
-                      <a:pPr algn="l"/>
-                      <a:r>
-                        <a:rPr sz="1000" b="0">
-                          <a:solidFill>
-                            <a:srgbClr val="1D1B43"/>
-                          </a:solidFill>
-                          <a:latin typeface="Calibri"/>
-                        </a:rPr>
-                        <a:t>100.0%</a:t>
-                      </a:r>
-                    </a:p>
-                  </a:txBody>
-                  <a:tcPr>
-                    <a:solidFill>
-                      <a:srgbClr val="FFFFFF"/>
-                    </a:solidFill>
-                  </a:tcPr>
-                </a:tc>
-                <a:tc>
-                  <a:txBody>
-                    <a:bodyPr/>
-                    <a:lstStyle/>
-                    <a:p>
-                      <a:pPr algn="l"/>
-                      <a:r>
-                        <a:rPr sz="1000" b="0">
-                          <a:solidFill>
-                            <a:srgbClr val="1D1B43"/>
-                          </a:solidFill>
-                          <a:latin typeface="Calibri"/>
-                        </a:rPr>
-                        <a:t>Excelente</a:t>
+                        <a:t>PE</a:t>
+                      </a:r>
+                    </a:p>
+                  </a:txBody>
+                  <a:tcPr>
+                    <a:solidFill>
+                      <a:srgbClr val="FFFFFF"/>
+                    </a:solidFill>
+                  </a:tcPr>
+                </a:tc>
+                <a:tc>
+                  <a:txBody>
+                    <a:bodyPr/>
+                    <a:lstStyle/>
+                    <a:p>
+                      <a:pPr algn="l"/>
+                      <a:r>
+                        <a:rPr sz="1000" b="0">
+                          <a:solidFill>
+                            <a:srgbClr val="1D1B43"/>
+                          </a:solidFill>
+                          <a:latin typeface="Calibri"/>
+                        </a:rPr>
+                        <a:t>5</a:t>
+                      </a:r>
+                    </a:p>
+                  </a:txBody>
+                  <a:tcPr>
+                    <a:solidFill>
+                      <a:srgbClr val="FFFFFF"/>
+                    </a:solidFill>
+                  </a:tcPr>
+                </a:tc>
+                <a:tc>
+                  <a:txBody>
+                    <a:bodyPr/>
+                    <a:lstStyle/>
+                    <a:p>
+                      <a:pPr algn="l"/>
+                      <a:r>
+                        <a:rPr sz="1000" b="0">
+                          <a:solidFill>
+                            <a:srgbClr val="1D1B43"/>
+                          </a:solidFill>
+                          <a:latin typeface="Calibri"/>
+                        </a:rPr>
+                        <a:t>4</a:t>
+                      </a:r>
+                    </a:p>
+                  </a:txBody>
+                  <a:tcPr>
+                    <a:solidFill>
+                      <a:srgbClr val="FFFFFF"/>
+                    </a:solidFill>
+                  </a:tcPr>
+                </a:tc>
+                <a:tc>
+                  <a:txBody>
+                    <a:bodyPr/>
+                    <a:lstStyle/>
+                    <a:p>
+                      <a:pPr algn="l"/>
+                      <a:r>
+                        <a:rPr sz="1000" b="0">
+                          <a:solidFill>
+                            <a:srgbClr val="1D1B43"/>
+                          </a:solidFill>
+                          <a:latin typeface="Calibri"/>
+                        </a:rPr>
+                        <a:t>1</a:t>
+                      </a:r>
+                    </a:p>
+                  </a:txBody>
+                  <a:tcPr>
+                    <a:solidFill>
+                      <a:srgbClr val="FFFFFF"/>
+                    </a:solidFill>
+                  </a:tcPr>
+                </a:tc>
+                <a:tc>
+                  <a:txBody>
+                    <a:bodyPr/>
+                    <a:lstStyle/>
+                    <a:p>
+                      <a:pPr algn="l"/>
+                      <a:r>
+                        <a:rPr sz="1000" b="0">
+                          <a:solidFill>
+                            <a:srgbClr val="1D1B43"/>
+                          </a:solidFill>
+                          <a:latin typeface="Calibri"/>
+                        </a:rPr>
+                        <a:t>80.0%</a:t>
+                      </a:r>
+                    </a:p>
+                  </a:txBody>
+                  <a:tcPr>
+                    <a:solidFill>
+                      <a:srgbClr val="FFFFFF"/>
+                    </a:solidFill>
+                  </a:tcPr>
+                </a:tc>
+                <a:tc>
+                  <a:txBody>
+                    <a:bodyPr/>
+                    <a:lstStyle/>
+                    <a:p>
+                      <a:pPr algn="l"/>
+                      <a:r>
+                        <a:rPr sz="1000" b="0">
+                          <a:solidFill>
+                            <a:srgbClr val="1D1B43"/>
+                          </a:solidFill>
+                          <a:latin typeface="Calibri"/>
+                        </a:rPr>
+                        <a:t>Atencao</a:t>
                       </a:r>
                     </a:p>
                   </a:txBody>
@@ -8208,7 +9261,7 @@
                           </a:solidFill>
                           <a:latin typeface="Calibri"/>
                         </a:rPr>
-                        <a:t>MS</a:t>
+                        <a:t>PA</a:t>
                       </a:r>
                     </a:p>
                   </a:txBody>
@@ -8418,7 +9471,7 @@
                 </a:solidFill>
                 <a:latin typeface="Calibri"/>
               </a:rPr>
-              <a:t>TOP DESTINATARIOS (77 pontos)</a:t>
+              <a:t>TOP DESTINATARIOS (75 pontos)</a:t>
             </a:r>
           </a:p>
         </p:txBody>
@@ -8716,30 +9769,30 @@
                           </a:solidFill>
                           <a:latin typeface="Calibri"/>
                         </a:rPr>
-                        <a:t>33</a:t>
-                      </a:r>
-                    </a:p>
-                  </a:txBody>
-                  <a:tcPr>
-                    <a:solidFill>
-                      <a:srgbClr val="FFFFFF"/>
-                    </a:solidFill>
-                  </a:tcPr>
-                </a:tc>
-                <a:tc>
-                  <a:txBody>
-                    <a:bodyPr/>
-                    <a:lstStyle/>
-                    <a:p>
-                      <a:pPr algn="l"/>
-                      <a:r>
-                        <a:rPr sz="1000" b="0">
-                          <a:solidFill>
-                            <a:srgbClr val="1D1B43"/>
-                          </a:solidFill>
-                          <a:latin typeface="Calibri"/>
-                        </a:rPr>
-                        <a:t>33</a:t>
+                        <a:t>63</a:t>
+                      </a:r>
+                    </a:p>
+                  </a:txBody>
+                  <a:tcPr>
+                    <a:solidFill>
+                      <a:srgbClr val="FFFFFF"/>
+                    </a:solidFill>
+                  </a:tcPr>
+                </a:tc>
+                <a:tc>
+                  <a:txBody>
+                    <a:bodyPr/>
+                    <a:lstStyle/>
+                    <a:p>
+                      <a:pPr algn="l"/>
+                      <a:r>
+                        <a:rPr sz="1000" b="0">
+                          <a:solidFill>
+                            <a:srgbClr val="1D1B43"/>
+                          </a:solidFill>
+                          <a:latin typeface="Calibri"/>
+                        </a:rPr>
+                        <a:t>63</a:t>
                       </a:r>
                     </a:p>
                   </a:txBody>
@@ -8856,122 +9909,122 @@
                           </a:solidFill>
                           <a:latin typeface="Calibri"/>
                         </a:rPr>
-                        <a:t>BUNZL EQUIPAMENTOS P - GUARULHOS / SP</a:t>
-                      </a:r>
-                    </a:p>
-                  </a:txBody>
-                  <a:tcPr>
-                    <a:solidFill>
-                      <a:srgbClr val="F2F2F2"/>
-                    </a:solidFill>
-                  </a:tcPr>
-                </a:tc>
-                <a:tc>
-                  <a:txBody>
-                    <a:bodyPr/>
-                    <a:lstStyle/>
-                    <a:p>
-                      <a:pPr algn="l"/>
-                      <a:r>
-                        <a:rPr sz="1000" b="0">
-                          <a:solidFill>
-                            <a:srgbClr val="1D1B43"/>
-                          </a:solidFill>
-                          <a:latin typeface="Calibri"/>
-                        </a:rPr>
-                        <a:t>31</a:t>
-                      </a:r>
-                    </a:p>
-                  </a:txBody>
-                  <a:tcPr>
-                    <a:solidFill>
-                      <a:srgbClr val="F2F2F2"/>
-                    </a:solidFill>
-                  </a:tcPr>
-                </a:tc>
-                <a:tc>
-                  <a:txBody>
-                    <a:bodyPr/>
-                    <a:lstStyle/>
-                    <a:p>
-                      <a:pPr algn="l"/>
-                      <a:r>
-                        <a:rPr sz="1000" b="0">
-                          <a:solidFill>
-                            <a:srgbClr val="1D1B43"/>
-                          </a:solidFill>
-                          <a:latin typeface="Calibri"/>
-                        </a:rPr>
-                        <a:t>31</a:t>
-                      </a:r>
-                    </a:p>
-                  </a:txBody>
-                  <a:tcPr>
-                    <a:solidFill>
-                      <a:srgbClr val="F2F2F2"/>
-                    </a:solidFill>
-                  </a:tcPr>
-                </a:tc>
-                <a:tc>
-                  <a:txBody>
-                    <a:bodyPr/>
-                    <a:lstStyle/>
-                    <a:p>
-                      <a:pPr algn="l"/>
-                      <a:r>
-                        <a:rPr sz="1000" b="0">
-                          <a:solidFill>
-                            <a:srgbClr val="1D1B43"/>
-                          </a:solidFill>
-                          <a:latin typeface="Calibri"/>
-                        </a:rPr>
-                        <a:t>0</a:t>
-                      </a:r>
-                    </a:p>
-                  </a:txBody>
-                  <a:tcPr>
-                    <a:solidFill>
-                      <a:srgbClr val="F2F2F2"/>
-                    </a:solidFill>
-                  </a:tcPr>
-                </a:tc>
-                <a:tc>
-                  <a:txBody>
-                    <a:bodyPr/>
-                    <a:lstStyle/>
-                    <a:p>
-                      <a:pPr algn="l"/>
-                      <a:r>
-                        <a:rPr sz="1000" b="0">
-                          <a:solidFill>
-                            <a:srgbClr val="1D1B43"/>
-                          </a:solidFill>
-                          <a:latin typeface="Calibri"/>
-                        </a:rPr>
-                        <a:t>100.0%</a:t>
-                      </a:r>
-                    </a:p>
-                  </a:txBody>
-                  <a:tcPr>
-                    <a:solidFill>
-                      <a:srgbClr val="F2F2F2"/>
-                    </a:solidFill>
-                  </a:tcPr>
-                </a:tc>
-                <a:tc>
-                  <a:txBody>
-                    <a:bodyPr/>
-                    <a:lstStyle/>
-                    <a:p>
-                      <a:pPr algn="l"/>
-                      <a:r>
-                        <a:rPr sz="1000" b="0">
-                          <a:solidFill>
-                            <a:srgbClr val="1D1B43"/>
-                          </a:solidFill>
-                          <a:latin typeface="Calibri"/>
-                        </a:rPr>
-                        <a:t>Excelente</a:t>
+                        <a:t>CORSUL COMERCIO E RE - SAO JOSE DOS PINHAIS / PR</a:t>
+                      </a:r>
+                    </a:p>
+                  </a:txBody>
+                  <a:tcPr>
+                    <a:solidFill>
+                      <a:srgbClr val="F2F2F2"/>
+                    </a:solidFill>
+                  </a:tcPr>
+                </a:tc>
+                <a:tc>
+                  <a:txBody>
+                    <a:bodyPr/>
+                    <a:lstStyle/>
+                    <a:p>
+                      <a:pPr algn="l"/>
+                      <a:r>
+                        <a:rPr sz="1000" b="0">
+                          <a:solidFill>
+                            <a:srgbClr val="1D1B43"/>
+                          </a:solidFill>
+                          <a:latin typeface="Calibri"/>
+                        </a:rPr>
+                        <a:t>47</a:t>
+                      </a:r>
+                    </a:p>
+                  </a:txBody>
+                  <a:tcPr>
+                    <a:solidFill>
+                      <a:srgbClr val="F2F2F2"/>
+                    </a:solidFill>
+                  </a:tcPr>
+                </a:tc>
+                <a:tc>
+                  <a:txBody>
+                    <a:bodyPr/>
+                    <a:lstStyle/>
+                    <a:p>
+                      <a:pPr algn="l"/>
+                      <a:r>
+                        <a:rPr sz="1000" b="0">
+                          <a:solidFill>
+                            <a:srgbClr val="1D1B43"/>
+                          </a:solidFill>
+                          <a:latin typeface="Calibri"/>
+                        </a:rPr>
+                        <a:t>38</a:t>
+                      </a:r>
+                    </a:p>
+                  </a:txBody>
+                  <a:tcPr>
+                    <a:solidFill>
+                      <a:srgbClr val="F2F2F2"/>
+                    </a:solidFill>
+                  </a:tcPr>
+                </a:tc>
+                <a:tc>
+                  <a:txBody>
+                    <a:bodyPr/>
+                    <a:lstStyle/>
+                    <a:p>
+                      <a:pPr algn="l"/>
+                      <a:r>
+                        <a:rPr sz="1000" b="0">
+                          <a:solidFill>
+                            <a:srgbClr val="1D1B43"/>
+                          </a:solidFill>
+                          <a:latin typeface="Calibri"/>
+                        </a:rPr>
+                        <a:t>9</a:t>
+                      </a:r>
+                    </a:p>
+                  </a:txBody>
+                  <a:tcPr>
+                    <a:solidFill>
+                      <a:srgbClr val="F2F2F2"/>
+                    </a:solidFill>
+                  </a:tcPr>
+                </a:tc>
+                <a:tc>
+                  <a:txBody>
+                    <a:bodyPr/>
+                    <a:lstStyle/>
+                    <a:p>
+                      <a:pPr algn="l"/>
+                      <a:r>
+                        <a:rPr sz="1000" b="0">
+                          <a:solidFill>
+                            <a:srgbClr val="1D1B43"/>
+                          </a:solidFill>
+                          <a:latin typeface="Calibri"/>
+                        </a:rPr>
+                        <a:t>80.9%</a:t>
+                      </a:r>
+                    </a:p>
+                  </a:txBody>
+                  <a:tcPr>
+                    <a:solidFill>
+                      <a:srgbClr val="F2F2F2"/>
+                    </a:solidFill>
+                  </a:tcPr>
+                </a:tc>
+                <a:tc>
+                  <a:txBody>
+                    <a:bodyPr/>
+                    <a:lstStyle/>
+                    <a:p>
+                      <a:pPr algn="l"/>
+                      <a:r>
+                        <a:rPr sz="1000" b="0">
+                          <a:solidFill>
+                            <a:srgbClr val="1D1B43"/>
+                          </a:solidFill>
+                          <a:latin typeface="Calibri"/>
+                        </a:rPr>
+                        <a:t>Atencao</a:t>
                       </a:r>
                     </a:p>
                   </a:txBody>
@@ -9019,53 +10072,53 @@
                           </a:solidFill>
                           <a:latin typeface="Calibri"/>
                         </a:rPr>
-                        <a:t>DIMENSIONAL BRASIL S - SERRA / ES</a:t>
-                      </a:r>
-                    </a:p>
-                  </a:txBody>
-                  <a:tcPr>
-                    <a:solidFill>
-                      <a:srgbClr val="FFFFFF"/>
-                    </a:solidFill>
-                  </a:tcPr>
-                </a:tc>
-                <a:tc>
-                  <a:txBody>
-                    <a:bodyPr/>
-                    <a:lstStyle/>
-                    <a:p>
-                      <a:pPr algn="l"/>
-                      <a:r>
-                        <a:rPr sz="1000" b="0">
-                          <a:solidFill>
-                            <a:srgbClr val="1D1B43"/>
-                          </a:solidFill>
-                          <a:latin typeface="Calibri"/>
-                        </a:rPr>
-                        <a:t>30</a:t>
-                      </a:r>
-                    </a:p>
-                  </a:txBody>
-                  <a:tcPr>
-                    <a:solidFill>
-                      <a:srgbClr val="FFFFFF"/>
-                    </a:solidFill>
-                  </a:tcPr>
-                </a:tc>
-                <a:tc>
-                  <a:txBody>
-                    <a:bodyPr/>
-                    <a:lstStyle/>
-                    <a:p>
-                      <a:pPr algn="l"/>
-                      <a:r>
-                        <a:rPr sz="1000" b="0">
-                          <a:solidFill>
-                            <a:srgbClr val="1D1B43"/>
-                          </a:solidFill>
-                          <a:latin typeface="Calibri"/>
-                        </a:rPr>
-                        <a:t>30</a:t>
+                        <a:t>BUNZL EQUIPAMENTOS P - GUARULHOS / SP</a:t>
+                      </a:r>
+                    </a:p>
+                  </a:txBody>
+                  <a:tcPr>
+                    <a:solidFill>
+                      <a:srgbClr val="FFFFFF"/>
+                    </a:solidFill>
+                  </a:tcPr>
+                </a:tc>
+                <a:tc>
+                  <a:txBody>
+                    <a:bodyPr/>
+                    <a:lstStyle/>
+                    <a:p>
+                      <a:pPr algn="l"/>
+                      <a:r>
+                        <a:rPr sz="1000" b="0">
+                          <a:solidFill>
+                            <a:srgbClr val="1D1B43"/>
+                          </a:solidFill>
+                          <a:latin typeface="Calibri"/>
+                        </a:rPr>
+                        <a:t>41</a:t>
+                      </a:r>
+                    </a:p>
+                  </a:txBody>
+                  <a:tcPr>
+                    <a:solidFill>
+                      <a:srgbClr val="FFFFFF"/>
+                    </a:solidFill>
+                  </a:tcPr>
+                </a:tc>
+                <a:tc>
+                  <a:txBody>
+                    <a:bodyPr/>
+                    <a:lstStyle/>
+                    <a:p>
+                      <a:pPr algn="l"/>
+                      <a:r>
+                        <a:rPr sz="1000" b="0">
+                          <a:solidFill>
+                            <a:srgbClr val="1D1B43"/>
+                          </a:solidFill>
+                          <a:latin typeface="Calibri"/>
+                        </a:rPr>
+                        <a:t>41</a:t>
                       </a:r>
                     </a:p>
                   </a:txBody>
@@ -9182,122 +10235,122 @@
                           </a:solidFill>
                           <a:latin typeface="Calibri"/>
                         </a:rPr>
-                        <a:t>EXATA CARGO - GUARULHOS / SP</a:t>
-                      </a:r>
-                    </a:p>
-                  </a:txBody>
-                  <a:tcPr>
-                    <a:solidFill>
-                      <a:srgbClr val="F2F2F2"/>
-                    </a:solidFill>
-                  </a:tcPr>
-                </a:tc>
-                <a:tc>
-                  <a:txBody>
-                    <a:bodyPr/>
-                    <a:lstStyle/>
-                    <a:p>
-                      <a:pPr algn="l"/>
-                      <a:r>
-                        <a:rPr sz="1000" b="0">
-                          <a:solidFill>
-                            <a:srgbClr val="1D1B43"/>
-                          </a:solidFill>
-                          <a:latin typeface="Calibri"/>
-                        </a:rPr>
-                        <a:t>27</a:t>
-                      </a:r>
-                    </a:p>
-                  </a:txBody>
-                  <a:tcPr>
-                    <a:solidFill>
-                      <a:srgbClr val="F2F2F2"/>
-                    </a:solidFill>
-                  </a:tcPr>
-                </a:tc>
-                <a:tc>
-                  <a:txBody>
-                    <a:bodyPr/>
-                    <a:lstStyle/>
-                    <a:p>
-                      <a:pPr algn="l"/>
-                      <a:r>
-                        <a:rPr sz="1000" b="0">
-                          <a:solidFill>
-                            <a:srgbClr val="1D1B43"/>
-                          </a:solidFill>
-                          <a:latin typeface="Calibri"/>
-                        </a:rPr>
-                        <a:t>25</a:t>
-                      </a:r>
-                    </a:p>
-                  </a:txBody>
-                  <a:tcPr>
-                    <a:solidFill>
-                      <a:srgbClr val="F2F2F2"/>
-                    </a:solidFill>
-                  </a:tcPr>
-                </a:tc>
-                <a:tc>
-                  <a:txBody>
-                    <a:bodyPr/>
-                    <a:lstStyle/>
-                    <a:p>
-                      <a:pPr algn="l"/>
-                      <a:r>
-                        <a:rPr sz="1000" b="0">
-                          <a:solidFill>
-                            <a:srgbClr val="1D1B43"/>
-                          </a:solidFill>
-                          <a:latin typeface="Calibri"/>
-                        </a:rPr>
-                        <a:t>2</a:t>
-                      </a:r>
-                    </a:p>
-                  </a:txBody>
-                  <a:tcPr>
-                    <a:solidFill>
-                      <a:srgbClr val="F2F2F2"/>
-                    </a:solidFill>
-                  </a:tcPr>
-                </a:tc>
-                <a:tc>
-                  <a:txBody>
-                    <a:bodyPr/>
-                    <a:lstStyle/>
-                    <a:p>
-                      <a:pPr algn="l"/>
-                      <a:r>
-                        <a:rPr sz="1000" b="0">
-                          <a:solidFill>
-                            <a:srgbClr val="1D1B43"/>
-                          </a:solidFill>
-                          <a:latin typeface="Calibri"/>
-                        </a:rPr>
-                        <a:t>92.6%</a:t>
-                      </a:r>
-                    </a:p>
-                  </a:txBody>
-                  <a:tcPr>
-                    <a:solidFill>
-                      <a:srgbClr val="F2F2F2"/>
-                    </a:solidFill>
-                  </a:tcPr>
-                </a:tc>
-                <a:tc>
-                  <a:txBody>
-                    <a:bodyPr/>
-                    <a:lstStyle/>
-                    <a:p>
-                      <a:pPr algn="l"/>
-                      <a:r>
-                        <a:rPr sz="1000" b="0">
-                          <a:solidFill>
-                            <a:srgbClr val="1D1B43"/>
-                          </a:solidFill>
-                          <a:latin typeface="Calibri"/>
-                        </a:rPr>
-                        <a:t>Regular</a:t>
+                        <a:t>DIMENSIONAL BRASIL S - SERRA / ES</a:t>
+                      </a:r>
+                    </a:p>
+                  </a:txBody>
+                  <a:tcPr>
+                    <a:solidFill>
+                      <a:srgbClr val="F2F2F2"/>
+                    </a:solidFill>
+                  </a:tcPr>
+                </a:tc>
+                <a:tc>
+                  <a:txBody>
+                    <a:bodyPr/>
+                    <a:lstStyle/>
+                    <a:p>
+                      <a:pPr algn="l"/>
+                      <a:r>
+                        <a:rPr sz="1000" b="0">
+                          <a:solidFill>
+                            <a:srgbClr val="1D1B43"/>
+                          </a:solidFill>
+                          <a:latin typeface="Calibri"/>
+                        </a:rPr>
+                        <a:t>34</a:t>
+                      </a:r>
+                    </a:p>
+                  </a:txBody>
+                  <a:tcPr>
+                    <a:solidFill>
+                      <a:srgbClr val="F2F2F2"/>
+                    </a:solidFill>
+                  </a:tcPr>
+                </a:tc>
+                <a:tc>
+                  <a:txBody>
+                    <a:bodyPr/>
+                    <a:lstStyle/>
+                    <a:p>
+                      <a:pPr algn="l"/>
+                      <a:r>
+                        <a:rPr sz="1000" b="0">
+                          <a:solidFill>
+                            <a:srgbClr val="1D1B43"/>
+                          </a:solidFill>
+                          <a:latin typeface="Calibri"/>
+                        </a:rPr>
+                        <a:t>34</a:t>
+                      </a:r>
+                    </a:p>
+                  </a:txBody>
+                  <a:tcPr>
+                    <a:solidFill>
+                      <a:srgbClr val="F2F2F2"/>
+                    </a:solidFill>
+                  </a:tcPr>
+                </a:tc>
+                <a:tc>
+                  <a:txBody>
+                    <a:bodyPr/>
+                    <a:lstStyle/>
+                    <a:p>
+                      <a:pPr algn="l"/>
+                      <a:r>
+                        <a:rPr sz="1000" b="0">
+                          <a:solidFill>
+                            <a:srgbClr val="1D1B43"/>
+                          </a:solidFill>
+                          <a:latin typeface="Calibri"/>
+                        </a:rPr>
+                        <a:t>0</a:t>
+                      </a:r>
+                    </a:p>
+                  </a:txBody>
+                  <a:tcPr>
+                    <a:solidFill>
+                      <a:srgbClr val="F2F2F2"/>
+                    </a:solidFill>
+                  </a:tcPr>
+                </a:tc>
+                <a:tc>
+                  <a:txBody>
+                    <a:bodyPr/>
+                    <a:lstStyle/>
+                    <a:p>
+                      <a:pPr algn="l"/>
+                      <a:r>
+                        <a:rPr sz="1000" b="0">
+                          <a:solidFill>
+                            <a:srgbClr val="1D1B43"/>
+                          </a:solidFill>
+                          <a:latin typeface="Calibri"/>
+                        </a:rPr>
+                        <a:t>100.0%</a:t>
+                      </a:r>
+                    </a:p>
+                  </a:txBody>
+                  <a:tcPr>
+                    <a:solidFill>
+                      <a:srgbClr val="F2F2F2"/>
+                    </a:solidFill>
+                  </a:tcPr>
+                </a:tc>
+                <a:tc>
+                  <a:txBody>
+                    <a:bodyPr/>
+                    <a:lstStyle/>
+                    <a:p>
+                      <a:pPr algn="l"/>
+                      <a:r>
+                        <a:rPr sz="1000" b="0">
+                          <a:solidFill>
+                            <a:srgbClr val="1D1B43"/>
+                          </a:solidFill>
+                          <a:latin typeface="Calibri"/>
+                        </a:rPr>
+                        <a:t>Excelente</a:t>
                       </a:r>
                     </a:p>
                   </a:txBody>
@@ -9345,53 +10398,53 @@
                           </a:solidFill>
                           <a:latin typeface="Calibri"/>
                         </a:rPr>
-                        <a:t>FASTENAL BRASIL IMPO - SOROCABA / SP</a:t>
-                      </a:r>
-                    </a:p>
-                  </a:txBody>
-                  <a:tcPr>
-                    <a:solidFill>
-                      <a:srgbClr val="FFFFFF"/>
-                    </a:solidFill>
-                  </a:tcPr>
-                </a:tc>
-                <a:tc>
-                  <a:txBody>
-                    <a:bodyPr/>
-                    <a:lstStyle/>
-                    <a:p>
-                      <a:pPr algn="l"/>
-                      <a:r>
-                        <a:rPr sz="1000" b="0">
-                          <a:solidFill>
-                            <a:srgbClr val="1D1B43"/>
-                          </a:solidFill>
-                          <a:latin typeface="Calibri"/>
-                        </a:rPr>
-                        <a:t>27</a:t>
-                      </a:r>
-                    </a:p>
-                  </a:txBody>
-                  <a:tcPr>
-                    <a:solidFill>
-                      <a:srgbClr val="FFFFFF"/>
-                    </a:solidFill>
-                  </a:tcPr>
-                </a:tc>
-                <a:tc>
-                  <a:txBody>
-                    <a:bodyPr/>
-                    <a:lstStyle/>
-                    <a:p>
-                      <a:pPr algn="l"/>
-                      <a:r>
-                        <a:rPr sz="1000" b="0">
-                          <a:solidFill>
-                            <a:srgbClr val="1D1B43"/>
-                          </a:solidFill>
-                          <a:latin typeface="Calibri"/>
-                        </a:rPr>
-                        <a:t>27</a:t>
+                        <a:t>NORTEL SUPRIMENTOS I - SERRA / ES</a:t>
+                      </a:r>
+                    </a:p>
+                  </a:txBody>
+                  <a:tcPr>
+                    <a:solidFill>
+                      <a:srgbClr val="FFFFFF"/>
+                    </a:solidFill>
+                  </a:tcPr>
+                </a:tc>
+                <a:tc>
+                  <a:txBody>
+                    <a:bodyPr/>
+                    <a:lstStyle/>
+                    <a:p>
+                      <a:pPr algn="l"/>
+                      <a:r>
+                        <a:rPr sz="1000" b="0">
+                          <a:solidFill>
+                            <a:srgbClr val="1D1B43"/>
+                          </a:solidFill>
+                          <a:latin typeface="Calibri"/>
+                        </a:rPr>
+                        <a:t>24</a:t>
+                      </a:r>
+                    </a:p>
+                  </a:txBody>
+                  <a:tcPr>
+                    <a:solidFill>
+                      <a:srgbClr val="FFFFFF"/>
+                    </a:solidFill>
+                  </a:tcPr>
+                </a:tc>
+                <a:tc>
+                  <a:txBody>
+                    <a:bodyPr/>
+                    <a:lstStyle/>
+                    <a:p>
+                      <a:pPr algn="l"/>
+                      <a:r>
+                        <a:rPr sz="1000" b="0">
+                          <a:solidFill>
+                            <a:srgbClr val="1D1B43"/>
+                          </a:solidFill>
+                          <a:latin typeface="Calibri"/>
+                        </a:rPr>
+                        <a:t>24</a:t>
                       </a:r>
                     </a:p>
                   </a:txBody>
@@ -9508,53 +10561,53 @@
                           </a:solidFill>
                           <a:latin typeface="Calibri"/>
                         </a:rPr>
-                        <a:t>SP EQUIPAMENTOS DE P - GUARULHOS / SP</a:t>
-                      </a:r>
-                    </a:p>
-                  </a:txBody>
-                  <a:tcPr>
-                    <a:solidFill>
-                      <a:srgbClr val="F2F2F2"/>
-                    </a:solidFill>
-                  </a:tcPr>
-                </a:tc>
-                <a:tc>
-                  <a:txBody>
-                    <a:bodyPr/>
-                    <a:lstStyle/>
-                    <a:p>
-                      <a:pPr algn="l"/>
-                      <a:r>
-                        <a:rPr sz="1000" b="0">
-                          <a:solidFill>
-                            <a:srgbClr val="1D1B43"/>
-                          </a:solidFill>
-                          <a:latin typeface="Calibri"/>
-                        </a:rPr>
-                        <a:t>25</a:t>
-                      </a:r>
-                    </a:p>
-                  </a:txBody>
-                  <a:tcPr>
-                    <a:solidFill>
-                      <a:srgbClr val="F2F2F2"/>
-                    </a:solidFill>
-                  </a:tcPr>
-                </a:tc>
-                <a:tc>
-                  <a:txBody>
-                    <a:bodyPr/>
-                    <a:lstStyle/>
-                    <a:p>
-                      <a:pPr algn="l"/>
-                      <a:r>
-                        <a:rPr sz="1000" b="0">
-                          <a:solidFill>
-                            <a:srgbClr val="1D1B43"/>
-                          </a:solidFill>
-                          <a:latin typeface="Calibri"/>
-                        </a:rPr>
-                        <a:t>25</a:t>
+                        <a:t>NORTEL SUPRIMENTOS I - CAMPINAS / SP</a:t>
+                      </a:r>
+                    </a:p>
+                  </a:txBody>
+                  <a:tcPr>
+                    <a:solidFill>
+                      <a:srgbClr val="F2F2F2"/>
+                    </a:solidFill>
+                  </a:tcPr>
+                </a:tc>
+                <a:tc>
+                  <a:txBody>
+                    <a:bodyPr/>
+                    <a:lstStyle/>
+                    <a:p>
+                      <a:pPr algn="l"/>
+                      <a:r>
+                        <a:rPr sz="1000" b="0">
+                          <a:solidFill>
+                            <a:srgbClr val="1D1B43"/>
+                          </a:solidFill>
+                          <a:latin typeface="Calibri"/>
+                        </a:rPr>
+                        <a:t>23</a:t>
+                      </a:r>
+                    </a:p>
+                  </a:txBody>
+                  <a:tcPr>
+                    <a:solidFill>
+                      <a:srgbClr val="F2F2F2"/>
+                    </a:solidFill>
+                  </a:tcPr>
+                </a:tc>
+                <a:tc>
+                  <a:txBody>
+                    <a:bodyPr/>
+                    <a:lstStyle/>
+                    <a:p>
+                      <a:pPr algn="l"/>
+                      <a:r>
+                        <a:rPr sz="1000" b="0">
+                          <a:solidFill>
+                            <a:srgbClr val="1D1B43"/>
+                          </a:solidFill>
+                          <a:latin typeface="Calibri"/>
+                        </a:rPr>
+                        <a:t>23</a:t>
                       </a:r>
                     </a:p>
                   </a:txBody>
@@ -9671,53 +10724,53 @@
                           </a:solidFill>
                           <a:latin typeface="Calibri"/>
                         </a:rPr>
-                        <a:t>NORTEL SUPRIMENTOS I - CAMPINAS / SP</a:t>
-                      </a:r>
-                    </a:p>
-                  </a:txBody>
-                  <a:tcPr>
-                    <a:solidFill>
-                      <a:srgbClr val="FFFFFF"/>
-                    </a:solidFill>
-                  </a:tcPr>
-                </a:tc>
-                <a:tc>
-                  <a:txBody>
-                    <a:bodyPr/>
-                    <a:lstStyle/>
-                    <a:p>
-                      <a:pPr algn="l"/>
-                      <a:r>
-                        <a:rPr sz="1000" b="0">
-                          <a:solidFill>
-                            <a:srgbClr val="1D1B43"/>
-                          </a:solidFill>
-                          <a:latin typeface="Calibri"/>
-                        </a:rPr>
-                        <a:t>23</a:t>
-                      </a:r>
-                    </a:p>
-                  </a:txBody>
-                  <a:tcPr>
-                    <a:solidFill>
-                      <a:srgbClr val="FFFFFF"/>
-                    </a:solidFill>
-                  </a:tcPr>
-                </a:tc>
-                <a:tc>
-                  <a:txBody>
-                    <a:bodyPr/>
-                    <a:lstStyle/>
-                    <a:p>
-                      <a:pPr algn="l"/>
-                      <a:r>
-                        <a:rPr sz="1000" b="0">
-                          <a:solidFill>
-                            <a:srgbClr val="1D1B43"/>
-                          </a:solidFill>
-                          <a:latin typeface="Calibri"/>
-                        </a:rPr>
-                        <a:t>23</a:t>
+                        <a:t>CORSUL COMERCIO E RE - CAXIAS DO SUL / RS</a:t>
+                      </a:r>
+                    </a:p>
+                  </a:txBody>
+                  <a:tcPr>
+                    <a:solidFill>
+                      <a:srgbClr val="FFFFFF"/>
+                    </a:solidFill>
+                  </a:tcPr>
+                </a:tc>
+                <a:tc>
+                  <a:txBody>
+                    <a:bodyPr/>
+                    <a:lstStyle/>
+                    <a:p>
+                      <a:pPr algn="l"/>
+                      <a:r>
+                        <a:rPr sz="1000" b="0">
+                          <a:solidFill>
+                            <a:srgbClr val="1D1B43"/>
+                          </a:solidFill>
+                          <a:latin typeface="Calibri"/>
+                        </a:rPr>
+                        <a:t>20</a:t>
+                      </a:r>
+                    </a:p>
+                  </a:txBody>
+                  <a:tcPr>
+                    <a:solidFill>
+                      <a:srgbClr val="FFFFFF"/>
+                    </a:solidFill>
+                  </a:tcPr>
+                </a:tc>
+                <a:tc>
+                  <a:txBody>
+                    <a:bodyPr/>
+                    <a:lstStyle/>
+                    <a:p>
+                      <a:pPr algn="l"/>
+                      <a:r>
+                        <a:rPr sz="1000" b="0">
+                          <a:solidFill>
+                            <a:srgbClr val="1D1B43"/>
+                          </a:solidFill>
+                          <a:latin typeface="Calibri"/>
+                        </a:rPr>
+                        <a:t>20</a:t>
                       </a:r>
                     </a:p>
                   </a:txBody>
@@ -9834,53 +10887,53 @@
                           </a:solidFill>
                           <a:latin typeface="Calibri"/>
                         </a:rPr>
-                        <a:t>BUNZL EQUIPAMENTOS P - CONTAGEM / MG</a:t>
-                      </a:r>
-                    </a:p>
-                  </a:txBody>
-                  <a:tcPr>
-                    <a:solidFill>
-                      <a:srgbClr val="F2F2F2"/>
-                    </a:solidFill>
-                  </a:tcPr>
-                </a:tc>
-                <a:tc>
-                  <a:txBody>
-                    <a:bodyPr/>
-                    <a:lstStyle/>
-                    <a:p>
-                      <a:pPr algn="l"/>
-                      <a:r>
-                        <a:rPr sz="1000" b="0">
-                          <a:solidFill>
-                            <a:srgbClr val="1D1B43"/>
-                          </a:solidFill>
-                          <a:latin typeface="Calibri"/>
-                        </a:rPr>
-                        <a:t>22</a:t>
-                      </a:r>
-                    </a:p>
-                  </a:txBody>
-                  <a:tcPr>
-                    <a:solidFill>
-                      <a:srgbClr val="F2F2F2"/>
-                    </a:solidFill>
-                  </a:tcPr>
-                </a:tc>
-                <a:tc>
-                  <a:txBody>
-                    <a:bodyPr/>
-                    <a:lstStyle/>
-                    <a:p>
-                      <a:pPr algn="l"/>
-                      <a:r>
-                        <a:rPr sz="1000" b="0">
-                          <a:solidFill>
-                            <a:srgbClr val="1D1B43"/>
-                          </a:solidFill>
-                          <a:latin typeface="Calibri"/>
-                        </a:rPr>
-                        <a:t>22</a:t>
+                        <a:t>NORTEL SUPRIMENTOS I - GOIANIA / GO</a:t>
+                      </a:r>
+                    </a:p>
+                  </a:txBody>
+                  <a:tcPr>
+                    <a:solidFill>
+                      <a:srgbClr val="F2F2F2"/>
+                    </a:solidFill>
+                  </a:tcPr>
+                </a:tc>
+                <a:tc>
+                  <a:txBody>
+                    <a:bodyPr/>
+                    <a:lstStyle/>
+                    <a:p>
+                      <a:pPr algn="l"/>
+                      <a:r>
+                        <a:rPr sz="1000" b="0">
+                          <a:solidFill>
+                            <a:srgbClr val="1D1B43"/>
+                          </a:solidFill>
+                          <a:latin typeface="Calibri"/>
+                        </a:rPr>
+                        <a:t>19</a:t>
+                      </a:r>
+                    </a:p>
+                  </a:txBody>
+                  <a:tcPr>
+                    <a:solidFill>
+                      <a:srgbClr val="F2F2F2"/>
+                    </a:solidFill>
+                  </a:tcPr>
+                </a:tc>
+                <a:tc>
+                  <a:txBody>
+                    <a:bodyPr/>
+                    <a:lstStyle/>
+                    <a:p>
+                      <a:pPr algn="l"/>
+                      <a:r>
+                        <a:rPr sz="1000" b="0">
+                          <a:solidFill>
+                            <a:srgbClr val="1D1B43"/>
+                          </a:solidFill>
+                          <a:latin typeface="Calibri"/>
+                        </a:rPr>
+                        <a:t>19</a:t>
                       </a:r>
                     </a:p>
                   </a:txBody>
@@ -9997,53 +11050,53 @@
                           </a:solidFill>
                           <a:latin typeface="Calibri"/>
                         </a:rPr>
-                        <a:t>CORSUL COMERCIO E RE - SAO JOSE DOS PINHAIS / PR</a:t>
-                      </a:r>
-                    </a:p>
-                  </a:txBody>
-                  <a:tcPr>
-                    <a:solidFill>
-                      <a:srgbClr val="FFFFFF"/>
-                    </a:solidFill>
-                  </a:tcPr>
-                </a:tc>
-                <a:tc>
-                  <a:txBody>
-                    <a:bodyPr/>
-                    <a:lstStyle/>
-                    <a:p>
-                      <a:pPr algn="l"/>
-                      <a:r>
-                        <a:rPr sz="1000" b="0">
-                          <a:solidFill>
-                            <a:srgbClr val="1D1B43"/>
-                          </a:solidFill>
-                          <a:latin typeface="Calibri"/>
-                        </a:rPr>
-                        <a:t>19</a:t>
-                      </a:r>
-                    </a:p>
-                  </a:txBody>
-                  <a:tcPr>
-                    <a:solidFill>
-                      <a:srgbClr val="FFFFFF"/>
-                    </a:solidFill>
-                  </a:tcPr>
-                </a:tc>
-                <a:tc>
-                  <a:txBody>
-                    <a:bodyPr/>
-                    <a:lstStyle/>
-                    <a:p>
-                      <a:pPr algn="l"/>
-                      <a:r>
-                        <a:rPr sz="1000" b="0">
-                          <a:solidFill>
-                            <a:srgbClr val="1D1B43"/>
-                          </a:solidFill>
-                          <a:latin typeface="Calibri"/>
-                        </a:rPr>
-                        <a:t>19</a:t>
+                        <a:t>CORSUL COMERCIO E RE - CRICIUMA / SC</a:t>
+                      </a:r>
+                    </a:p>
+                  </a:txBody>
+                  <a:tcPr>
+                    <a:solidFill>
+                      <a:srgbClr val="FFFFFF"/>
+                    </a:solidFill>
+                  </a:tcPr>
+                </a:tc>
+                <a:tc>
+                  <a:txBody>
+                    <a:bodyPr/>
+                    <a:lstStyle/>
+                    <a:p>
+                      <a:pPr algn="l"/>
+                      <a:r>
+                        <a:rPr sz="1000" b="0">
+                          <a:solidFill>
+                            <a:srgbClr val="1D1B43"/>
+                          </a:solidFill>
+                          <a:latin typeface="Calibri"/>
+                        </a:rPr>
+                        <a:t>16</a:t>
+                      </a:r>
+                    </a:p>
+                  </a:txBody>
+                  <a:tcPr>
+                    <a:solidFill>
+                      <a:srgbClr val="FFFFFF"/>
+                    </a:solidFill>
+                  </a:tcPr>
+                </a:tc>
+                <a:tc>
+                  <a:txBody>
+                    <a:bodyPr/>
+                    <a:lstStyle/>
+                    <a:p>
+                      <a:pPr algn="l"/>
+                      <a:r>
+                        <a:rPr sz="1000" b="0">
+                          <a:solidFill>
+                            <a:srgbClr val="1D1B43"/>
+                          </a:solidFill>
+                          <a:latin typeface="Calibri"/>
+                        </a:rPr>
+                        <a:t>16</a:t>
                       </a:r>
                     </a:p>
                   </a:txBody>
@@ -10160,122 +11213,122 @@
                           </a:solidFill>
                           <a:latin typeface="Calibri"/>
                         </a:rPr>
-                        <a:t>WILSON SONS LOGISTIC - SANTO ANDRE / SP</a:t>
-                      </a:r>
-                    </a:p>
-                  </a:txBody>
-                  <a:tcPr>
-                    <a:solidFill>
-                      <a:srgbClr val="F2F2F2"/>
-                    </a:solidFill>
-                  </a:tcPr>
-                </a:tc>
-                <a:tc>
-                  <a:txBody>
-                    <a:bodyPr/>
-                    <a:lstStyle/>
-                    <a:p>
-                      <a:pPr algn="l"/>
-                      <a:r>
-                        <a:rPr sz="1000" b="0">
-                          <a:solidFill>
-                            <a:srgbClr val="1D1B43"/>
-                          </a:solidFill>
-                          <a:latin typeface="Calibri"/>
-                        </a:rPr>
-                        <a:t>19</a:t>
-                      </a:r>
-                    </a:p>
-                  </a:txBody>
-                  <a:tcPr>
-                    <a:solidFill>
-                      <a:srgbClr val="F2F2F2"/>
-                    </a:solidFill>
-                  </a:tcPr>
-                </a:tc>
-                <a:tc>
-                  <a:txBody>
-                    <a:bodyPr/>
-                    <a:lstStyle/>
-                    <a:p>
-                      <a:pPr algn="l"/>
-                      <a:r>
-                        <a:rPr sz="1000" b="0">
-                          <a:solidFill>
-                            <a:srgbClr val="1D1B43"/>
-                          </a:solidFill>
-                          <a:latin typeface="Calibri"/>
-                        </a:rPr>
-                        <a:t>18</a:t>
-                      </a:r>
-                    </a:p>
-                  </a:txBody>
-                  <a:tcPr>
-                    <a:solidFill>
-                      <a:srgbClr val="F2F2F2"/>
-                    </a:solidFill>
-                  </a:tcPr>
-                </a:tc>
-                <a:tc>
-                  <a:txBody>
-                    <a:bodyPr/>
-                    <a:lstStyle/>
-                    <a:p>
-                      <a:pPr algn="l"/>
-                      <a:r>
-                        <a:rPr sz="1000" b="0">
-                          <a:solidFill>
-                            <a:srgbClr val="1D1B43"/>
-                          </a:solidFill>
-                          <a:latin typeface="Calibri"/>
-                        </a:rPr>
-                        <a:t>1</a:t>
-                      </a:r>
-                    </a:p>
-                  </a:txBody>
-                  <a:tcPr>
-                    <a:solidFill>
-                      <a:srgbClr val="F2F2F2"/>
-                    </a:solidFill>
-                  </a:tcPr>
-                </a:tc>
-                <a:tc>
-                  <a:txBody>
-                    <a:bodyPr/>
-                    <a:lstStyle/>
-                    <a:p>
-                      <a:pPr algn="l"/>
-                      <a:r>
-                        <a:rPr sz="1000" b="0">
-                          <a:solidFill>
-                            <a:srgbClr val="1D1B43"/>
-                          </a:solidFill>
-                          <a:latin typeface="Calibri"/>
-                        </a:rPr>
-                        <a:t>94.7%</a:t>
-                      </a:r>
-                    </a:p>
-                  </a:txBody>
-                  <a:tcPr>
-                    <a:solidFill>
-                      <a:srgbClr val="F2F2F2"/>
-                    </a:solidFill>
-                  </a:tcPr>
-                </a:tc>
-                <a:tc>
-                  <a:txBody>
-                    <a:bodyPr/>
-                    <a:lstStyle/>
-                    <a:p>
-                      <a:pPr algn="l"/>
-                      <a:r>
-                        <a:rPr sz="1000" b="0">
-                          <a:solidFill>
-                            <a:srgbClr val="1D1B43"/>
-                          </a:solidFill>
-                          <a:latin typeface="Calibri"/>
-                        </a:rPr>
-                        <a:t>Regular</a:t>
+                        <a:t>BUNZL EQUIPAMENTOS P - CONTAGEM / MG</a:t>
+                      </a:r>
+                    </a:p>
+                  </a:txBody>
+                  <a:tcPr>
+                    <a:solidFill>
+                      <a:srgbClr val="F2F2F2"/>
+                    </a:solidFill>
+                  </a:tcPr>
+                </a:tc>
+                <a:tc>
+                  <a:txBody>
+                    <a:bodyPr/>
+                    <a:lstStyle/>
+                    <a:p>
+                      <a:pPr algn="l"/>
+                      <a:r>
+                        <a:rPr sz="1000" b="0">
+                          <a:solidFill>
+                            <a:srgbClr val="1D1B43"/>
+                          </a:solidFill>
+                          <a:latin typeface="Calibri"/>
+                        </a:rPr>
+                        <a:t>16</a:t>
+                      </a:r>
+                    </a:p>
+                  </a:txBody>
+                  <a:tcPr>
+                    <a:solidFill>
+                      <a:srgbClr val="F2F2F2"/>
+                    </a:solidFill>
+                  </a:tcPr>
+                </a:tc>
+                <a:tc>
+                  <a:txBody>
+                    <a:bodyPr/>
+                    <a:lstStyle/>
+                    <a:p>
+                      <a:pPr algn="l"/>
+                      <a:r>
+                        <a:rPr sz="1000" b="0">
+                          <a:solidFill>
+                            <a:srgbClr val="1D1B43"/>
+                          </a:solidFill>
+                          <a:latin typeface="Calibri"/>
+                        </a:rPr>
+                        <a:t>16</a:t>
+                      </a:r>
+                    </a:p>
+                  </a:txBody>
+                  <a:tcPr>
+                    <a:solidFill>
+                      <a:srgbClr val="F2F2F2"/>
+                    </a:solidFill>
+                  </a:tcPr>
+                </a:tc>
+                <a:tc>
+                  <a:txBody>
+                    <a:bodyPr/>
+                    <a:lstStyle/>
+                    <a:p>
+                      <a:pPr algn="l"/>
+                      <a:r>
+                        <a:rPr sz="1000" b="0">
+                          <a:solidFill>
+                            <a:srgbClr val="1D1B43"/>
+                          </a:solidFill>
+                          <a:latin typeface="Calibri"/>
+                        </a:rPr>
+                        <a:t>0</a:t>
+                      </a:r>
+                    </a:p>
+                  </a:txBody>
+                  <a:tcPr>
+                    <a:solidFill>
+                      <a:srgbClr val="F2F2F2"/>
+                    </a:solidFill>
+                  </a:tcPr>
+                </a:tc>
+                <a:tc>
+                  <a:txBody>
+                    <a:bodyPr/>
+                    <a:lstStyle/>
+                    <a:p>
+                      <a:pPr algn="l"/>
+                      <a:r>
+                        <a:rPr sz="1000" b="0">
+                          <a:solidFill>
+                            <a:srgbClr val="1D1B43"/>
+                          </a:solidFill>
+                          <a:latin typeface="Calibri"/>
+                        </a:rPr>
+                        <a:t>100.0%</a:t>
+                      </a:r>
+                    </a:p>
+                  </a:txBody>
+                  <a:tcPr>
+                    <a:solidFill>
+                      <a:srgbClr val="F2F2F2"/>
+                    </a:solidFill>
+                  </a:tcPr>
+                </a:tc>
+                <a:tc>
+                  <a:txBody>
+                    <a:bodyPr/>
+                    <a:lstStyle/>
+                    <a:p>
+                      <a:pPr algn="l"/>
+                      <a:r>
+                        <a:rPr sz="1000" b="0">
+                          <a:solidFill>
+                            <a:srgbClr val="1D1B43"/>
+                          </a:solidFill>
+                          <a:latin typeface="Calibri"/>
+                        </a:rPr>
+                        <a:t>Excelente</a:t>
                       </a:r>
                     </a:p>
                   </a:txBody>
@@ -10323,53 +11376,53 @@
                           </a:solidFill>
                           <a:latin typeface="Calibri"/>
                         </a:rPr>
-                        <a:t>CORSUL COMERCIO E RE - CASCAVEL / PR</a:t>
-                      </a:r>
-                    </a:p>
-                  </a:txBody>
-                  <a:tcPr>
-                    <a:solidFill>
-                      <a:srgbClr val="FFFFFF"/>
-                    </a:solidFill>
-                  </a:tcPr>
-                </a:tc>
-                <a:tc>
-                  <a:txBody>
-                    <a:bodyPr/>
-                    <a:lstStyle/>
-                    <a:p>
-                      <a:pPr algn="l"/>
-                      <a:r>
-                        <a:rPr sz="1000" b="0">
-                          <a:solidFill>
-                            <a:srgbClr val="1D1B43"/>
-                          </a:solidFill>
-                          <a:latin typeface="Calibri"/>
-                        </a:rPr>
-                        <a:t>18</a:t>
-                      </a:r>
-                    </a:p>
-                  </a:txBody>
-                  <a:tcPr>
-                    <a:solidFill>
-                      <a:srgbClr val="FFFFFF"/>
-                    </a:solidFill>
-                  </a:tcPr>
-                </a:tc>
-                <a:tc>
-                  <a:txBody>
-                    <a:bodyPr/>
-                    <a:lstStyle/>
-                    <a:p>
-                      <a:pPr algn="l"/>
-                      <a:r>
-                        <a:rPr sz="1000" b="0">
-                          <a:solidFill>
-                            <a:srgbClr val="1D1B43"/>
-                          </a:solidFill>
-                          <a:latin typeface="Calibri"/>
-                        </a:rPr>
-                        <a:t>17</a:t>
+                        <a:t>ELETRONOR - DISTRIBU - CAXIAS DO SUL / RS</a:t>
+                      </a:r>
+                    </a:p>
+                  </a:txBody>
+                  <a:tcPr>
+                    <a:solidFill>
+                      <a:srgbClr val="FFFFFF"/>
+                    </a:solidFill>
+                  </a:tcPr>
+                </a:tc>
+                <a:tc>
+                  <a:txBody>
+                    <a:bodyPr/>
+                    <a:lstStyle/>
+                    <a:p>
+                      <a:pPr algn="l"/>
+                      <a:r>
+                        <a:rPr sz="1000" b="0">
+                          <a:solidFill>
+                            <a:srgbClr val="1D1B43"/>
+                          </a:solidFill>
+                          <a:latin typeface="Calibri"/>
+                        </a:rPr>
+                        <a:t>16</a:t>
+                      </a:r>
+                    </a:p>
+                  </a:txBody>
+                  <a:tcPr>
+                    <a:solidFill>
+                      <a:srgbClr val="FFFFFF"/>
+                    </a:solidFill>
+                  </a:tcPr>
+                </a:tc>
+                <a:tc>
+                  <a:txBody>
+                    <a:bodyPr/>
+                    <a:lstStyle/>
+                    <a:p>
+                      <a:pPr algn="l"/>
+                      <a:r>
+                        <a:rPr sz="1000" b="0">
+                          <a:solidFill>
+                            <a:srgbClr val="1D1B43"/>
+                          </a:solidFill>
+                          <a:latin typeface="Calibri"/>
+                        </a:rPr>
+                        <a:t>15</a:t>
                       </a:r>
                     </a:p>
                   </a:txBody>
@@ -10415,7 +11468,7 @@
                           </a:solidFill>
                           <a:latin typeface="Calibri"/>
                         </a:rPr>
-                        <a:t>94.4%</a:t>
+                        <a:t>93.8%</a:t>
                       </a:r>
                     </a:p>
                   </a:txBody>
@@ -10486,122 +11539,122 @@
                           </a:solidFill>
                           <a:latin typeface="Calibri"/>
                         </a:rPr>
-                        <a:t>1000 MARCAS SAFETY B - ARACARIGUAMA / SP</a:t>
-                      </a:r>
-                    </a:p>
-                  </a:txBody>
-                  <a:tcPr>
-                    <a:solidFill>
-                      <a:srgbClr val="F2F2F2"/>
-                    </a:solidFill>
-                  </a:tcPr>
-                </a:tc>
-                <a:tc>
-                  <a:txBody>
-                    <a:bodyPr/>
-                    <a:lstStyle/>
-                    <a:p>
-                      <a:pPr algn="l"/>
-                      <a:r>
-                        <a:rPr sz="1000" b="0">
-                          <a:solidFill>
-                            <a:srgbClr val="1D1B43"/>
-                          </a:solidFill>
-                          <a:latin typeface="Calibri"/>
-                        </a:rPr>
-                        <a:t>18</a:t>
-                      </a:r>
-                    </a:p>
-                  </a:txBody>
-                  <a:tcPr>
-                    <a:solidFill>
-                      <a:srgbClr val="F2F2F2"/>
-                    </a:solidFill>
-                  </a:tcPr>
-                </a:tc>
-                <a:tc>
-                  <a:txBody>
-                    <a:bodyPr/>
-                    <a:lstStyle/>
-                    <a:p>
-                      <a:pPr algn="l"/>
-                      <a:r>
-                        <a:rPr sz="1000" b="0">
-                          <a:solidFill>
-                            <a:srgbClr val="1D1B43"/>
-                          </a:solidFill>
-                          <a:latin typeface="Calibri"/>
-                        </a:rPr>
-                        <a:t>18</a:t>
-                      </a:r>
-                    </a:p>
-                  </a:txBody>
-                  <a:tcPr>
-                    <a:solidFill>
-                      <a:srgbClr val="F2F2F2"/>
-                    </a:solidFill>
-                  </a:tcPr>
-                </a:tc>
-                <a:tc>
-                  <a:txBody>
-                    <a:bodyPr/>
-                    <a:lstStyle/>
-                    <a:p>
-                      <a:pPr algn="l"/>
-                      <a:r>
-                        <a:rPr sz="1000" b="0">
-                          <a:solidFill>
-                            <a:srgbClr val="1D1B43"/>
-                          </a:solidFill>
-                          <a:latin typeface="Calibri"/>
-                        </a:rPr>
-                        <a:t>0</a:t>
-                      </a:r>
-                    </a:p>
-                  </a:txBody>
-                  <a:tcPr>
-                    <a:solidFill>
-                      <a:srgbClr val="F2F2F2"/>
-                    </a:solidFill>
-                  </a:tcPr>
-                </a:tc>
-                <a:tc>
-                  <a:txBody>
-                    <a:bodyPr/>
-                    <a:lstStyle/>
-                    <a:p>
-                      <a:pPr algn="l"/>
-                      <a:r>
-                        <a:rPr sz="1000" b="0">
-                          <a:solidFill>
-                            <a:srgbClr val="1D1B43"/>
-                          </a:solidFill>
-                          <a:latin typeface="Calibri"/>
-                        </a:rPr>
-                        <a:t>100.0%</a:t>
-                      </a:r>
-                    </a:p>
-                  </a:txBody>
-                  <a:tcPr>
-                    <a:solidFill>
-                      <a:srgbClr val="F2F2F2"/>
-                    </a:solidFill>
-                  </a:tcPr>
-                </a:tc>
-                <a:tc>
-                  <a:txBody>
-                    <a:bodyPr/>
-                    <a:lstStyle/>
-                    <a:p>
-                      <a:pPr algn="l"/>
-                      <a:r>
-                        <a:rPr sz="1000" b="0">
-                          <a:solidFill>
-                            <a:srgbClr val="1D1B43"/>
-                          </a:solidFill>
-                          <a:latin typeface="Calibri"/>
-                        </a:rPr>
-                        <a:t>Excelente</a:t>
+                        <a:t>CORSUL COMERCIO E RE - CASCAVEL / PR</a:t>
+                      </a:r>
+                    </a:p>
+                  </a:txBody>
+                  <a:tcPr>
+                    <a:solidFill>
+                      <a:srgbClr val="F2F2F2"/>
+                    </a:solidFill>
+                  </a:tcPr>
+                </a:tc>
+                <a:tc>
+                  <a:txBody>
+                    <a:bodyPr/>
+                    <a:lstStyle/>
+                    <a:p>
+                      <a:pPr algn="l"/>
+                      <a:r>
+                        <a:rPr sz="1000" b="0">
+                          <a:solidFill>
+                            <a:srgbClr val="1D1B43"/>
+                          </a:solidFill>
+                          <a:latin typeface="Calibri"/>
+                        </a:rPr>
+                        <a:t>16</a:t>
+                      </a:r>
+                    </a:p>
+                  </a:txBody>
+                  <a:tcPr>
+                    <a:solidFill>
+                      <a:srgbClr val="F2F2F2"/>
+                    </a:solidFill>
+                  </a:tcPr>
+                </a:tc>
+                <a:tc>
+                  <a:txBody>
+                    <a:bodyPr/>
+                    <a:lstStyle/>
+                    <a:p>
+                      <a:pPr algn="l"/>
+                      <a:r>
+                        <a:rPr sz="1000" b="0">
+                          <a:solidFill>
+                            <a:srgbClr val="1D1B43"/>
+                          </a:solidFill>
+                          <a:latin typeface="Calibri"/>
+                        </a:rPr>
+                        <a:t>12</a:t>
+                      </a:r>
+                    </a:p>
+                  </a:txBody>
+                  <a:tcPr>
+                    <a:solidFill>
+                      <a:srgbClr val="F2F2F2"/>
+                    </a:solidFill>
+                  </a:tcPr>
+                </a:tc>
+                <a:tc>
+                  <a:txBody>
+                    <a:bodyPr/>
+                    <a:lstStyle/>
+                    <a:p>
+                      <a:pPr algn="l"/>
+                      <a:r>
+                        <a:rPr sz="1000" b="0">
+                          <a:solidFill>
+                            <a:srgbClr val="1D1B43"/>
+                          </a:solidFill>
+                          <a:latin typeface="Calibri"/>
+                        </a:rPr>
+                        <a:t>4</a:t>
+                      </a:r>
+                    </a:p>
+                  </a:txBody>
+                  <a:tcPr>
+                    <a:solidFill>
+                      <a:srgbClr val="F2F2F2"/>
+                    </a:solidFill>
+                  </a:tcPr>
+                </a:tc>
+                <a:tc>
+                  <a:txBody>
+                    <a:bodyPr/>
+                    <a:lstStyle/>
+                    <a:p>
+                      <a:pPr algn="l"/>
+                      <a:r>
+                        <a:rPr sz="1000" b="0">
+                          <a:solidFill>
+                            <a:srgbClr val="1D1B43"/>
+                          </a:solidFill>
+                          <a:latin typeface="Calibri"/>
+                        </a:rPr>
+                        <a:t>75.0%</a:t>
+                      </a:r>
+                    </a:p>
+                  </a:txBody>
+                  <a:tcPr>
+                    <a:solidFill>
+                      <a:srgbClr val="F2F2F2"/>
+                    </a:solidFill>
+                  </a:tcPr>
+                </a:tc>
+                <a:tc>
+                  <a:txBody>
+                    <a:bodyPr/>
+                    <a:lstStyle/>
+                    <a:p>
+                      <a:pPr algn="l"/>
+                      <a:r>
+                        <a:rPr sz="1000" b="0">
+                          <a:solidFill>
+                            <a:srgbClr val="1D1B43"/>
+                          </a:solidFill>
+                          <a:latin typeface="Calibri"/>
+                        </a:rPr>
+                        <a:t>Atencao</a:t>
                       </a:r>
                     </a:p>
                   </a:txBody>
@@ -10649,53 +11702,53 @@
                           </a:solidFill>
                           <a:latin typeface="Calibri"/>
                         </a:rPr>
-                        <a:t>NORTEL SUPRIMENTOS I - SERRA / ES</a:t>
-                      </a:r>
-                    </a:p>
-                  </a:txBody>
-                  <a:tcPr>
-                    <a:solidFill>
-                      <a:srgbClr val="FFFFFF"/>
-                    </a:solidFill>
-                  </a:tcPr>
-                </a:tc>
-                <a:tc>
-                  <a:txBody>
-                    <a:bodyPr/>
-                    <a:lstStyle/>
-                    <a:p>
-                      <a:pPr algn="l"/>
-                      <a:r>
-                        <a:rPr sz="1000" b="0">
-                          <a:solidFill>
-                            <a:srgbClr val="1D1B43"/>
-                          </a:solidFill>
-                          <a:latin typeface="Calibri"/>
-                        </a:rPr>
-                        <a:t>18</a:t>
-                      </a:r>
-                    </a:p>
-                  </a:txBody>
-                  <a:tcPr>
-                    <a:solidFill>
-                      <a:srgbClr val="FFFFFF"/>
-                    </a:solidFill>
-                  </a:tcPr>
-                </a:tc>
-                <a:tc>
-                  <a:txBody>
-                    <a:bodyPr/>
-                    <a:lstStyle/>
-                    <a:p>
-                      <a:pPr algn="l"/>
-                      <a:r>
-                        <a:rPr sz="1000" b="0">
-                          <a:solidFill>
-                            <a:srgbClr val="1D1B43"/>
-                          </a:solidFill>
-                          <a:latin typeface="Calibri"/>
-                        </a:rPr>
-                        <a:t>18</a:t>
+                        <a:t>BALASKA EQUIPE INDUS - GUARULHOS / SP</a:t>
+                      </a:r>
+                    </a:p>
+                  </a:txBody>
+                  <a:tcPr>
+                    <a:solidFill>
+                      <a:srgbClr val="FFFFFF"/>
+                    </a:solidFill>
+                  </a:tcPr>
+                </a:tc>
+                <a:tc>
+                  <a:txBody>
+                    <a:bodyPr/>
+                    <a:lstStyle/>
+                    <a:p>
+                      <a:pPr algn="l"/>
+                      <a:r>
+                        <a:rPr sz="1000" b="0">
+                          <a:solidFill>
+                            <a:srgbClr val="1D1B43"/>
+                          </a:solidFill>
+                          <a:latin typeface="Calibri"/>
+                        </a:rPr>
+                        <a:t>14</a:t>
+                      </a:r>
+                    </a:p>
+                  </a:txBody>
+                  <a:tcPr>
+                    <a:solidFill>
+                      <a:srgbClr val="FFFFFF"/>
+                    </a:solidFill>
+                  </a:tcPr>
+                </a:tc>
+                <a:tc>
+                  <a:txBody>
+                    <a:bodyPr/>
+                    <a:lstStyle/>
+                    <a:p>
+                      <a:pPr algn="l"/>
+                      <a:r>
+                        <a:rPr sz="1000" b="0">
+                          <a:solidFill>
+                            <a:srgbClr val="1D1B43"/>
+                          </a:solidFill>
+                          <a:latin typeface="Calibri"/>
+                        </a:rPr>
+                        <a:t>14</a:t>
                       </a:r>
                     </a:p>
                   </a:txBody>
@@ -10812,53 +11865,53 @@
                           </a:solidFill>
                           <a:latin typeface="Calibri"/>
                         </a:rPr>
-                        <a:t>BALASKA EQUIPE INDUS - GUARULHOS / SP</a:t>
-                      </a:r>
-                    </a:p>
-                  </a:txBody>
-                  <a:tcPr>
-                    <a:solidFill>
-                      <a:srgbClr val="F2F2F2"/>
-                    </a:solidFill>
-                  </a:tcPr>
-                </a:tc>
-                <a:tc>
-                  <a:txBody>
-                    <a:bodyPr/>
-                    <a:lstStyle/>
-                    <a:p>
-                      <a:pPr algn="l"/>
-                      <a:r>
-                        <a:rPr sz="1000" b="0">
-                          <a:solidFill>
-                            <a:srgbClr val="1D1B43"/>
-                          </a:solidFill>
-                          <a:latin typeface="Calibri"/>
-                        </a:rPr>
-                        <a:t>17</a:t>
-                      </a:r>
-                    </a:p>
-                  </a:txBody>
-                  <a:tcPr>
-                    <a:solidFill>
-                      <a:srgbClr val="F2F2F2"/>
-                    </a:solidFill>
-                  </a:tcPr>
-                </a:tc>
-                <a:tc>
-                  <a:txBody>
-                    <a:bodyPr/>
-                    <a:lstStyle/>
-                    <a:p>
-                      <a:pPr algn="l"/>
-                      <a:r>
-                        <a:rPr sz="1000" b="0">
-                          <a:solidFill>
-                            <a:srgbClr val="1D1B43"/>
-                          </a:solidFill>
-                          <a:latin typeface="Calibri"/>
-                        </a:rPr>
-                        <a:t>17</a:t>
+                        <a:t>CORSUL COMERCIO E RE - MARINGA / PR</a:t>
+                      </a:r>
+                    </a:p>
+                  </a:txBody>
+                  <a:tcPr>
+                    <a:solidFill>
+                      <a:srgbClr val="F2F2F2"/>
+                    </a:solidFill>
+                  </a:tcPr>
+                </a:tc>
+                <a:tc>
+                  <a:txBody>
+                    <a:bodyPr/>
+                    <a:lstStyle/>
+                    <a:p>
+                      <a:pPr algn="l"/>
+                      <a:r>
+                        <a:rPr sz="1000" b="0">
+                          <a:solidFill>
+                            <a:srgbClr val="1D1B43"/>
+                          </a:solidFill>
+                          <a:latin typeface="Calibri"/>
+                        </a:rPr>
+                        <a:t>14</a:t>
+                      </a:r>
+                    </a:p>
+                  </a:txBody>
+                  <a:tcPr>
+                    <a:solidFill>
+                      <a:srgbClr val="F2F2F2"/>
+                    </a:solidFill>
+                  </a:tcPr>
+                </a:tc>
+                <a:tc>
+                  <a:txBody>
+                    <a:bodyPr/>
+                    <a:lstStyle/>
+                    <a:p>
+                      <a:pPr algn="l"/>
+                      <a:r>
+                        <a:rPr sz="1000" b="0">
+                          <a:solidFill>
+                            <a:srgbClr val="1D1B43"/>
+                          </a:solidFill>
+                          <a:latin typeface="Calibri"/>
+                        </a:rPr>
+                        <a:t>14</a:t>
                       </a:r>
                     </a:p>
                   </a:txBody>

--- a/ANSELL_BRAZIL_LTDA.pptx
+++ b/ANSELL_BRAZIL_LTDA.pptx
@@ -143,29 +143,23 @@
           </c:spPr>
           <c:cat>
             <c:strRef>
-              <c:f>Sheet1!$A$2:$A$3</c:f>
+              <c:f>Sheet1!$A$2:$A$2</c:f>
               <c:strCache>
-                <c:ptCount val="2"/>
+                <c:ptCount val="1"/>
                 <c:pt idx="0">
                   <c:v>Abril 2026</c:v>
-                </c:pt>
-                <c:pt idx="1">
-                  <c:v>Maio 2026</c:v>
                 </c:pt>
               </c:strCache>
             </c:strRef>
           </c:cat>
           <c:val>
             <c:numRef>
-              <c:f>Sheet1!$B$2:$B$3</c:f>
+              <c:f>Sheet1!$B$2:$B$2</c:f>
               <c:numCache>
                 <c:formatCode>General</c:formatCode>
-                <c:ptCount val="2"/>
+                <c:ptCount val="1"/>
                 <c:pt idx="0">
-                  <c:v>540</c:v>
-                </c:pt>
-                <c:pt idx="1">
-                  <c:v>542</c:v>
+                  <c:v>575</c:v>
                 </c:pt>
               </c:numCache>
             </c:numRef>
@@ -192,29 +186,23 @@
           </c:spPr>
           <c:cat>
             <c:strRef>
-              <c:f>Sheet1!$A$2:$A$3</c:f>
+              <c:f>Sheet1!$A$2:$A$2</c:f>
               <c:strCache>
-                <c:ptCount val="2"/>
+                <c:ptCount val="1"/>
                 <c:pt idx="0">
                   <c:v>Abril 2026</c:v>
-                </c:pt>
-                <c:pt idx="1">
-                  <c:v>Maio 2026</c:v>
                 </c:pt>
               </c:strCache>
             </c:strRef>
           </c:cat>
           <c:val>
             <c:numRef>
-              <c:f>Sheet1!$C$2:$C$3</c:f>
+              <c:f>Sheet1!$C$2:$C$2</c:f>
               <c:numCache>
                 <c:formatCode>General</c:formatCode>
-                <c:ptCount val="2"/>
+                <c:ptCount val="1"/>
                 <c:pt idx="0">
                   <c:v>2</c:v>
-                </c:pt>
-                <c:pt idx="1">
-                  <c:v>19</c:v>
                 </c:pt>
               </c:numCache>
             </c:numRef>
@@ -3387,7 +3375,7 @@
                 </a:solidFill>
                 <a:latin typeface="Calibri"/>
               </a:rPr>
-              <a:t>INDICADORES MAIO 2026</a:t>
+              <a:t>INDICADORES ABRIL 2026</a:t>
             </a:r>
           </a:p>
         </p:txBody>
@@ -3494,14 +3482,13 @@
           <a:p>
             <a:pPr algn="ctr"/>
             <a:r>
-              <a:rPr sz="1600" b="1">
+              <a:rPr sz="1400" b="1">
                 <a:solidFill>
                   <a:srgbClr val="FFFFFF"/>
                 </a:solidFill>
                 <a:latin typeface="Calibri"/>
               </a:rPr>
-              <a:t>Nossa rota e ir alem das
-entregas!</a:t>
+              <a:t>Nossa rota e ir alem das entregas!</a:t>
             </a:r>
           </a:p>
         </p:txBody>
@@ -3709,7 +3696,7 @@
                 </a:solidFill>
                 <a:latin typeface="Calibri"/>
               </a:rPr>
-              <a:t>561</a:t>
+              <a:t>577</a:t>
             </a:r>
           </a:p>
         </p:txBody>
@@ -3824,7 +3811,7 @@
                 </a:solidFill>
                 <a:latin typeface="Calibri"/>
               </a:rPr>
-              <a:t>542</a:t>
+              <a:t>575</a:t>
             </a:r>
           </a:p>
         </p:txBody>
@@ -3939,7 +3926,7 @@
                 </a:solidFill>
                 <a:latin typeface="Calibri"/>
               </a:rPr>
-              <a:t>19</a:t>
+              <a:t>2</a:t>
             </a:r>
           </a:p>
         </p:txBody>
@@ -4054,7 +4041,7 @@
                 </a:solidFill>
                 <a:latin typeface="Calibri"/>
               </a:rPr>
-              <a:t>96.6%</a:t>
+              <a:t>99.7%</a:t>
             </a:r>
           </a:p>
         </p:txBody>
@@ -4155,30 +4142,30 @@
                           </a:solidFill>
                           <a:latin typeface="Calibri"/>
                         </a:rPr>
+                        <a:t>Marco 2026</a:t>
+                      </a:r>
+                    </a:p>
+                  </a:txBody>
+                  <a:tcPr>
+                    <a:solidFill>
+                      <a:srgbClr val="1D1B43"/>
+                    </a:solidFill>
+                  </a:tcPr>
+                </a:tc>
+                <a:tc>
+                  <a:txBody>
+                    <a:bodyPr/>
+                    <a:lstStyle/>
+                    <a:p>
+                      <a:pPr algn="ctr"/>
+                      <a:r>
+                        <a:rPr sz="1100" b="1">
+                          <a:solidFill>
+                            <a:srgbClr val="FFFFFF"/>
+                          </a:solidFill>
+                          <a:latin typeface="Calibri"/>
+                        </a:rPr>
                         <a:t>Abril 2026</a:t>
-                      </a:r>
-                    </a:p>
-                  </a:txBody>
-                  <a:tcPr>
-                    <a:solidFill>
-                      <a:srgbClr val="1D1B43"/>
-                    </a:solidFill>
-                  </a:tcPr>
-                </a:tc>
-                <a:tc>
-                  <a:txBody>
-                    <a:bodyPr/>
-                    <a:lstStyle/>
-                    <a:p>
-                      <a:pPr algn="ctr"/>
-                      <a:r>
-                        <a:rPr sz="1100" b="1">
-                          <a:solidFill>
-                            <a:srgbClr val="FFFFFF"/>
-                          </a:solidFill>
-                          <a:latin typeface="Calibri"/>
-                        </a:rPr>
-                        <a:t>Maio 2026</a:t>
                       </a:r>
                     </a:p>
                   </a:txBody>
@@ -4249,7 +4236,7 @@
                           </a:solidFill>
                           <a:latin typeface="Calibri"/>
                         </a:rPr>
-                        <a:t>542</a:t>
+                        <a:t>-</a:t>
                       </a:r>
                     </a:p>
                   </a:txBody>
@@ -4272,7 +4259,7 @@
                           </a:solidFill>
                           <a:latin typeface="Calibri"/>
                         </a:rPr>
-                        <a:t>561</a:t>
+                        <a:t>577</a:t>
                       </a:r>
                     </a:p>
                   </a:txBody>
@@ -4295,7 +4282,7 @@
                           </a:solidFill>
                           <a:latin typeface="Calibri"/>
                         </a:rPr>
-                        <a:t>+ 19</a:t>
+                        <a:t>-</a:t>
                       </a:r>
                     </a:p>
                   </a:txBody>
@@ -4343,7 +4330,7 @@
                           </a:solidFill>
                           <a:latin typeface="Calibri"/>
                         </a:rPr>
-                        <a:t>540</a:t>
+                        <a:t>-</a:t>
                       </a:r>
                     </a:p>
                   </a:txBody>
@@ -4366,7 +4353,7 @@
                           </a:solidFill>
                           <a:latin typeface="Calibri"/>
                         </a:rPr>
-                        <a:t>542</a:t>
+                        <a:t>575</a:t>
                       </a:r>
                     </a:p>
                   </a:txBody>
@@ -4389,7 +4376,7 @@
                           </a:solidFill>
                           <a:latin typeface="Calibri"/>
                         </a:rPr>
-                        <a:t>+ 2</a:t>
+                        <a:t>-</a:t>
                       </a:r>
                     </a:p>
                   </a:txBody>
@@ -4437,6 +4424,29 @@
                           </a:solidFill>
                           <a:latin typeface="Calibri"/>
                         </a:rPr>
+                        <a:t>-</a:t>
+                      </a:r>
+                    </a:p>
+                  </a:txBody>
+                  <a:tcPr>
+                    <a:solidFill>
+                      <a:srgbClr val="FFFFFF"/>
+                    </a:solidFill>
+                  </a:tcPr>
+                </a:tc>
+                <a:tc>
+                  <a:txBody>
+                    <a:bodyPr/>
+                    <a:lstStyle/>
+                    <a:p>
+                      <a:pPr algn="l"/>
+                      <a:r>
+                        <a:rPr sz="1000" b="0">
+                          <a:solidFill>
+                            <a:srgbClr val="1D1B43"/>
+                          </a:solidFill>
+                          <a:latin typeface="Calibri"/>
+                        </a:rPr>
                         <a:t>2</a:t>
                       </a:r>
                     </a:p>
@@ -4460,30 +4470,7 @@
                           </a:solidFill>
                           <a:latin typeface="Calibri"/>
                         </a:rPr>
-                        <a:t>19</a:t>
-                      </a:r>
-                    </a:p>
-                  </a:txBody>
-                  <a:tcPr>
-                    <a:solidFill>
-                      <a:srgbClr val="FFFFFF"/>
-                    </a:solidFill>
-                  </a:tcPr>
-                </a:tc>
-                <a:tc>
-                  <a:txBody>
-                    <a:bodyPr/>
-                    <a:lstStyle/>
-                    <a:p>
-                      <a:pPr algn="l"/>
-                      <a:r>
-                        <a:rPr sz="1000" b="0">
-                          <a:solidFill>
-                            <a:srgbClr val="1D1B43"/>
-                          </a:solidFill>
-                          <a:latin typeface="Calibri"/>
-                        </a:rPr>
-                        <a:t>+ 17</a:t>
+                        <a:t>-</a:t>
                       </a:r>
                     </a:p>
                   </a:txBody>
@@ -4531,7 +4518,7 @@
                           </a:solidFill>
                           <a:latin typeface="Calibri"/>
                         </a:rPr>
-                        <a:t>99.6%</a:t>
+                        <a:t>-</a:t>
                       </a:r>
                     </a:p>
                   </a:txBody>
@@ -4554,7 +4541,7 @@
                           </a:solidFill>
                           <a:latin typeface="Calibri"/>
                         </a:rPr>
-                        <a:t>96.6%</a:t>
+                        <a:t>99.7%</a:t>
                       </a:r>
                     </a:p>
                   </a:txBody>
@@ -4577,7 +4564,7 @@
                           </a:solidFill>
                           <a:latin typeface="Calibri"/>
                         </a:rPr>
-                        <a:t>- 3.0pp</a:t>
+                        <a:t>-</a:t>
                       </a:r>
                     </a:p>
                   </a:txBody>
@@ -4748,7 +4735,7 @@
         </p:nvGraphicFramePr>
         <p:xfrm>
           <a:off x="7955279" y="2286000"/>
-          <a:ext cx="4480560" cy="1316736"/>
+          <a:ext cx="4480560" cy="877824"/>
         </p:xfrm>
         <a:graphic>
           <a:graphicData uri="http://schemas.openxmlformats.org/drawingml/2006/table">
@@ -4917,7 +4904,7 @@
                           </a:solidFill>
                           <a:latin typeface="Calibri"/>
                         </a:rPr>
-                        <a:t>542</a:t>
+                        <a:t>577</a:t>
                       </a:r>
                     </a:p>
                   </a:txBody>
@@ -4940,7 +4927,7 @@
                           </a:solidFill>
                           <a:latin typeface="Calibri"/>
                         </a:rPr>
-                        <a:t>540</a:t>
+                        <a:t>575</a:t>
                       </a:r>
                     </a:p>
                   </a:txBody>
@@ -4986,130 +4973,13 @@
                           </a:solidFill>
                           <a:latin typeface="Calibri"/>
                         </a:rPr>
-                        <a:t>99.6%</a:t>
+                        <a:t>99.7%</a:t>
                       </a:r>
                     </a:p>
                   </a:txBody>
                   <a:tcPr>
                     <a:solidFill>
                       <a:srgbClr val="FFFFFF"/>
-                    </a:solidFill>
-                  </a:tcPr>
-                </a:tc>
-              </a:tr>
-              <a:tr h="438912">
-                <a:tc>
-                  <a:txBody>
-                    <a:bodyPr/>
-                    <a:lstStyle/>
-                    <a:p>
-                      <a:pPr algn="l"/>
-                      <a:r>
-                        <a:rPr sz="1000" b="0">
-                          <a:solidFill>
-                            <a:srgbClr val="1D1B43"/>
-                          </a:solidFill>
-                          <a:latin typeface="Calibri"/>
-                        </a:rPr>
-                        <a:t>Maio 2026</a:t>
-                      </a:r>
-                    </a:p>
-                  </a:txBody>
-                  <a:tcPr>
-                    <a:solidFill>
-                      <a:srgbClr val="F2F2F2"/>
-                    </a:solidFill>
-                  </a:tcPr>
-                </a:tc>
-                <a:tc>
-                  <a:txBody>
-                    <a:bodyPr/>
-                    <a:lstStyle/>
-                    <a:p>
-                      <a:pPr algn="l"/>
-                      <a:r>
-                        <a:rPr sz="1000" b="0">
-                          <a:solidFill>
-                            <a:srgbClr val="1D1B43"/>
-                          </a:solidFill>
-                          <a:latin typeface="Calibri"/>
-                        </a:rPr>
-                        <a:t>561</a:t>
-                      </a:r>
-                    </a:p>
-                  </a:txBody>
-                  <a:tcPr>
-                    <a:solidFill>
-                      <a:srgbClr val="F2F2F2"/>
-                    </a:solidFill>
-                  </a:tcPr>
-                </a:tc>
-                <a:tc>
-                  <a:txBody>
-                    <a:bodyPr/>
-                    <a:lstStyle/>
-                    <a:p>
-                      <a:pPr algn="l"/>
-                      <a:r>
-                        <a:rPr sz="1000" b="0">
-                          <a:solidFill>
-                            <a:srgbClr val="1D1B43"/>
-                          </a:solidFill>
-                          <a:latin typeface="Calibri"/>
-                        </a:rPr>
-                        <a:t>542</a:t>
-                      </a:r>
-                    </a:p>
-                  </a:txBody>
-                  <a:tcPr>
-                    <a:solidFill>
-                      <a:srgbClr val="F2F2F2"/>
-                    </a:solidFill>
-                  </a:tcPr>
-                </a:tc>
-                <a:tc>
-                  <a:txBody>
-                    <a:bodyPr/>
-                    <a:lstStyle/>
-                    <a:p>
-                      <a:pPr algn="l"/>
-                      <a:r>
-                        <a:rPr sz="1000" b="0">
-                          <a:solidFill>
-                            <a:srgbClr val="1D1B43"/>
-                          </a:solidFill>
-                          <a:latin typeface="Calibri"/>
-                        </a:rPr>
-                        <a:t>19</a:t>
-                      </a:r>
-                    </a:p>
-                  </a:txBody>
-                  <a:tcPr>
-                    <a:solidFill>
-                      <a:srgbClr val="F2F2F2"/>
-                    </a:solidFill>
-                  </a:tcPr>
-                </a:tc>
-                <a:tc>
-                  <a:txBody>
-                    <a:bodyPr/>
-                    <a:lstStyle/>
-                    <a:p>
-                      <a:pPr algn="l"/>
-                      <a:r>
-                        <a:rPr sz="1000" b="0">
-                          <a:solidFill>
-                            <a:srgbClr val="1D1B43"/>
-                          </a:solidFill>
-                          <a:latin typeface="Calibri"/>
-                        </a:rPr>
-                        <a:t>96.6%</a:t>
-                      </a:r>
-                    </a:p>
-                  </a:txBody>
-                  <a:tcPr>
-                    <a:solidFill>
-                      <a:srgbClr val="F2F2F2"/>
                     </a:solidFill>
                   </a:tcPr>
                 </a:tc>
@@ -5191,7 +5061,7 @@
                 </a:solidFill>
                 <a:latin typeface="Calibri"/>
               </a:rPr>
-              <a:t>PERFORMANCE: 96.6% - EXCELENTE</a:t>
+              <a:t>PERFORMANCE: 99.7% - EXCELENTE</a:t>
             </a:r>
           </a:p>
         </p:txBody>
@@ -5276,7 +5146,7 @@
                 </a:solidFill>
                 <a:latin typeface="Calibri"/>
               </a:rPr>
-              <a:t>OCORRENCIAS FORA DO PRAZO (19)</a:t>
+              <a:t>OCORRENCIAS FORA DO PRAZO (2)</a:t>
             </a:r>
           </a:p>
         </p:txBody>
@@ -5334,7 +5204,7 @@
         </p:nvGraphicFramePr>
         <p:xfrm>
           <a:off x="457200" y="1828800"/>
-          <a:ext cx="11429999" cy="4572000"/>
+          <a:ext cx="11429999" cy="1152144"/>
         </p:xfrm>
         <a:graphic>
           <a:graphicData uri="http://schemas.openxmlformats.org/drawingml/2006/table">
@@ -5349,7 +5219,7 @@
                 <a:gridCol w="1554480"/>
                 <a:gridCol w="2743200"/>
               </a:tblGrid>
-              <a:tr h="228600">
+              <a:tr h="384048">
                 <a:tc>
                   <a:txBody>
                     <a:bodyPr/>
@@ -5466,21 +5336,21 @@
                   </a:tcPr>
                 </a:tc>
               </a:tr>
-              <a:tr h="228600">
-                <a:tc>
-                  <a:txBody>
-                    <a:bodyPr/>
-                    <a:lstStyle/>
-                    <a:p>
-                      <a:pPr algn="l"/>
-                      <a:r>
-                        <a:rPr sz="1000" b="0">
-                          <a:solidFill>
-                            <a:srgbClr val="1D1B43"/>
-                          </a:solidFill>
-                          <a:latin typeface="Calibri"/>
-                        </a:rPr>
-                        <a:t>278593</a:t>
+              <a:tr h="384048">
+                <a:tc>
+                  <a:txBody>
+                    <a:bodyPr/>
+                    <a:lstStyle/>
+                    <a:p>
+                      <a:pPr algn="l"/>
+                      <a:r>
+                        <a:rPr sz="1000" b="0">
+                          <a:solidFill>
+                            <a:srgbClr val="1D1B43"/>
+                          </a:solidFill>
+                          <a:latin typeface="Calibri"/>
+                        </a:rPr>
+                        <a:t>276428</a:t>
                       </a:r>
                     </a:p>
                   </a:txBody>
@@ -5503,7 +5373,7 @@
                           </a:solidFill>
                           <a:latin typeface="Calibri"/>
                         </a:rPr>
-                        <a:t>YAZAKI DO BRASIL LTD - BONITO / PE</a:t>
+                        <a:t>ANSELL BRAZIL LTDA. - SANTO ANDRE / SP</a:t>
                       </a:r>
                     </a:p>
                   </a:txBody>
@@ -5526,7 +5396,7 @@
                           </a:solidFill>
                           <a:latin typeface="Calibri"/>
                         </a:rPr>
-                        <a:t>BONITO/PE</a:t>
+                        <a:t>SANTO ANDRE/SP</a:t>
                       </a:r>
                     </a:p>
                   </a:txBody>
@@ -5549,7 +5419,7 @@
                           </a:solidFill>
                           <a:latin typeface="Calibri"/>
                         </a:rPr>
-                        <a:t>04/05/2026</a:t>
+                        <a:t>10/04/2026</a:t>
                       </a:r>
                     </a:p>
                   </a:txBody>
@@ -5572,7 +5442,7 @@
                           </a:solidFill>
                           <a:latin typeface="Calibri"/>
                         </a:rPr>
-                        <a:t>FORA DO PRAZO</a:t>
+                        <a:t>ENTREGUE FORA DO PRAZO</a:t>
                       </a:r>
                     </a:p>
                   </a:txBody>
@@ -5583,21 +5453,21 @@
                   </a:tcPr>
                 </a:tc>
               </a:tr>
-              <a:tr h="228600">
-                <a:tc>
-                  <a:txBody>
-                    <a:bodyPr/>
-                    <a:lstStyle/>
-                    <a:p>
-                      <a:pPr algn="l"/>
-                      <a:r>
-                        <a:rPr sz="1000" b="0">
-                          <a:solidFill>
-                            <a:srgbClr val="1D1B43"/>
-                          </a:solidFill>
-                          <a:latin typeface="Calibri"/>
-                        </a:rPr>
-                        <a:t>279536</a:t>
+              <a:tr h="384048">
+                <a:tc>
+                  <a:txBody>
+                    <a:bodyPr/>
+                    <a:lstStyle/>
+                    <a:p>
+                      <a:pPr algn="l"/>
+                      <a:r>
+                        <a:rPr sz="1000" b="0">
+                          <a:solidFill>
+                            <a:srgbClr val="1D1B43"/>
+                          </a:solidFill>
+                          <a:latin typeface="Calibri"/>
+                        </a:rPr>
+                        <a:t>276943</a:t>
                       </a:r>
                     </a:p>
                   </a:txBody>
@@ -5620,7 +5490,7 @@
                           </a:solidFill>
                           <a:latin typeface="Calibri"/>
                         </a:rPr>
-                        <a:t>ELETRONOR - DISTRIBU - CAXIAS DO SUL / RS</a:t>
+                        <a:t>ST JUDE MEDICAL BRAS - BELO HORIZONTE / MG</a:t>
                       </a:r>
                     </a:p>
                   </a:txBody>
@@ -5643,7 +5513,7 @@
                           </a:solidFill>
                           <a:latin typeface="Calibri"/>
                         </a:rPr>
-                        <a:t>CAXIAS DO SUL/RS</a:t>
+                        <a:t>BELO HORIZONTE/MG</a:t>
                       </a:r>
                     </a:p>
                   </a:txBody>
@@ -5666,7 +5536,7 @@
                           </a:solidFill>
                           <a:latin typeface="Calibri"/>
                         </a:rPr>
-                        <a:t>04/05/2026</a:t>
+                        <a:t>01/04/2026</a:t>
                       </a:r>
                     </a:p>
                   </a:txBody>
@@ -5696,1995 +5566,6 @@
                   <a:tcPr>
                     <a:solidFill>
                       <a:srgbClr val="F2F2F2"/>
-                    </a:solidFill>
-                  </a:tcPr>
-                </a:tc>
-              </a:tr>
-              <a:tr h="228600">
-                <a:tc>
-                  <a:txBody>
-                    <a:bodyPr/>
-                    <a:lstStyle/>
-                    <a:p>
-                      <a:pPr algn="l"/>
-                      <a:r>
-                        <a:rPr sz="1000" b="0">
-                          <a:solidFill>
-                            <a:srgbClr val="1D1B43"/>
-                          </a:solidFill>
-                          <a:latin typeface="Calibri"/>
-                        </a:rPr>
-                        <a:t>281128</a:t>
-                      </a:r>
-                    </a:p>
-                  </a:txBody>
-                  <a:tcPr>
-                    <a:solidFill>
-                      <a:srgbClr val="FFFFFF"/>
-                    </a:solidFill>
-                  </a:tcPr>
-                </a:tc>
-                <a:tc>
-                  <a:txBody>
-                    <a:bodyPr/>
-                    <a:lstStyle/>
-                    <a:p>
-                      <a:pPr algn="l"/>
-                      <a:r>
-                        <a:rPr sz="1000" b="0">
-                          <a:solidFill>
-                            <a:srgbClr val="1D1B43"/>
-                          </a:solidFill>
-                          <a:latin typeface="Calibri"/>
-                        </a:rPr>
-                        <a:t>CORSUL COMERCIO E RE - SAO JOSE DOS PINHAIS / PR</a:t>
-                      </a:r>
-                    </a:p>
-                  </a:txBody>
-                  <a:tcPr>
-                    <a:solidFill>
-                      <a:srgbClr val="FFFFFF"/>
-                    </a:solidFill>
-                  </a:tcPr>
-                </a:tc>
-                <a:tc>
-                  <a:txBody>
-                    <a:bodyPr/>
-                    <a:lstStyle/>
-                    <a:p>
-                      <a:pPr algn="l"/>
-                      <a:r>
-                        <a:rPr sz="1000" b="0">
-                          <a:solidFill>
-                            <a:srgbClr val="1D1B43"/>
-                          </a:solidFill>
-                          <a:latin typeface="Calibri"/>
-                        </a:rPr>
-                        <a:t>SAO JOSE DOS PINHAIS/PR</a:t>
-                      </a:r>
-                    </a:p>
-                  </a:txBody>
-                  <a:tcPr>
-                    <a:solidFill>
-                      <a:srgbClr val="FFFFFF"/>
-                    </a:solidFill>
-                  </a:tcPr>
-                </a:tc>
-                <a:tc>
-                  <a:txBody>
-                    <a:bodyPr/>
-                    <a:lstStyle/>
-                    <a:p>
-                      <a:pPr algn="l"/>
-                      <a:r>
-                        <a:rPr sz="1000" b="0">
-                          <a:solidFill>
-                            <a:srgbClr val="1D1B43"/>
-                          </a:solidFill>
-                          <a:latin typeface="Calibri"/>
-                        </a:rPr>
-                        <a:t>08/05/2026</a:t>
-                      </a:r>
-                    </a:p>
-                  </a:txBody>
-                  <a:tcPr>
-                    <a:solidFill>
-                      <a:srgbClr val="FFFFFF"/>
-                    </a:solidFill>
-                  </a:tcPr>
-                </a:tc>
-                <a:tc>
-                  <a:txBody>
-                    <a:bodyPr/>
-                    <a:lstStyle/>
-                    <a:p>
-                      <a:pPr algn="l"/>
-                      <a:r>
-                        <a:rPr sz="1000" b="0">
-                          <a:solidFill>
-                            <a:srgbClr val="1D1B43"/>
-                          </a:solidFill>
-                          <a:latin typeface="Calibri"/>
-                        </a:rPr>
-                        <a:t>ENTREGUE FORA DO PRAZO</a:t>
-                      </a:r>
-                    </a:p>
-                  </a:txBody>
-                  <a:tcPr>
-                    <a:solidFill>
-                      <a:srgbClr val="FFFFFF"/>
-                    </a:solidFill>
-                  </a:tcPr>
-                </a:tc>
-              </a:tr>
-              <a:tr h="228600">
-                <a:tc>
-                  <a:txBody>
-                    <a:bodyPr/>
-                    <a:lstStyle/>
-                    <a:p>
-                      <a:pPr algn="l"/>
-                      <a:r>
-                        <a:rPr sz="1000" b="0">
-                          <a:solidFill>
-                            <a:srgbClr val="1D1B43"/>
-                          </a:solidFill>
-                          <a:latin typeface="Calibri"/>
-                        </a:rPr>
-                        <a:t>281135</a:t>
-                      </a:r>
-                    </a:p>
-                  </a:txBody>
-                  <a:tcPr>
-                    <a:solidFill>
-                      <a:srgbClr val="F2F2F2"/>
-                    </a:solidFill>
-                  </a:tcPr>
-                </a:tc>
-                <a:tc>
-                  <a:txBody>
-                    <a:bodyPr/>
-                    <a:lstStyle/>
-                    <a:p>
-                      <a:pPr algn="l"/>
-                      <a:r>
-                        <a:rPr sz="1000" b="0">
-                          <a:solidFill>
-                            <a:srgbClr val="1D1B43"/>
-                          </a:solidFill>
-                          <a:latin typeface="Calibri"/>
-                        </a:rPr>
-                        <a:t>CORSUL COMERCIO E RE - SAO JOSE DOS PINHAIS / PR</a:t>
-                      </a:r>
-                    </a:p>
-                  </a:txBody>
-                  <a:tcPr>
-                    <a:solidFill>
-                      <a:srgbClr val="F2F2F2"/>
-                    </a:solidFill>
-                  </a:tcPr>
-                </a:tc>
-                <a:tc>
-                  <a:txBody>
-                    <a:bodyPr/>
-                    <a:lstStyle/>
-                    <a:p>
-                      <a:pPr algn="l"/>
-                      <a:r>
-                        <a:rPr sz="1000" b="0">
-                          <a:solidFill>
-                            <a:srgbClr val="1D1B43"/>
-                          </a:solidFill>
-                          <a:latin typeface="Calibri"/>
-                        </a:rPr>
-                        <a:t>SAO JOSE DOS PINHAIS/PR</a:t>
-                      </a:r>
-                    </a:p>
-                  </a:txBody>
-                  <a:tcPr>
-                    <a:solidFill>
-                      <a:srgbClr val="F2F2F2"/>
-                    </a:solidFill>
-                  </a:tcPr>
-                </a:tc>
-                <a:tc>
-                  <a:txBody>
-                    <a:bodyPr/>
-                    <a:lstStyle/>
-                    <a:p>
-                      <a:pPr algn="l"/>
-                      <a:r>
-                        <a:rPr sz="1000" b="0">
-                          <a:solidFill>
-                            <a:srgbClr val="1D1B43"/>
-                          </a:solidFill>
-                          <a:latin typeface="Calibri"/>
-                        </a:rPr>
-                        <a:t>08/05/2026</a:t>
-                      </a:r>
-                    </a:p>
-                  </a:txBody>
-                  <a:tcPr>
-                    <a:solidFill>
-                      <a:srgbClr val="F2F2F2"/>
-                    </a:solidFill>
-                  </a:tcPr>
-                </a:tc>
-                <a:tc>
-                  <a:txBody>
-                    <a:bodyPr/>
-                    <a:lstStyle/>
-                    <a:p>
-                      <a:pPr algn="l"/>
-                      <a:r>
-                        <a:rPr sz="1000" b="0">
-                          <a:solidFill>
-                            <a:srgbClr val="1D1B43"/>
-                          </a:solidFill>
-                          <a:latin typeface="Calibri"/>
-                        </a:rPr>
-                        <a:t>ENTREGUE FORA DO PRAZO</a:t>
-                      </a:r>
-                    </a:p>
-                  </a:txBody>
-                  <a:tcPr>
-                    <a:solidFill>
-                      <a:srgbClr val="F2F2F2"/>
-                    </a:solidFill>
-                  </a:tcPr>
-                </a:tc>
-              </a:tr>
-              <a:tr h="228600">
-                <a:tc>
-                  <a:txBody>
-                    <a:bodyPr/>
-                    <a:lstStyle/>
-                    <a:p>
-                      <a:pPr algn="l"/>
-                      <a:r>
-                        <a:rPr sz="1000" b="0">
-                          <a:solidFill>
-                            <a:srgbClr val="1D1B43"/>
-                          </a:solidFill>
-                          <a:latin typeface="Calibri"/>
-                        </a:rPr>
-                        <a:t>281137</a:t>
-                      </a:r>
-                    </a:p>
-                  </a:txBody>
-                  <a:tcPr>
-                    <a:solidFill>
-                      <a:srgbClr val="FFFFFF"/>
-                    </a:solidFill>
-                  </a:tcPr>
-                </a:tc>
-                <a:tc>
-                  <a:txBody>
-                    <a:bodyPr/>
-                    <a:lstStyle/>
-                    <a:p>
-                      <a:pPr algn="l"/>
-                      <a:r>
-                        <a:rPr sz="1000" b="0">
-                          <a:solidFill>
-                            <a:srgbClr val="1D1B43"/>
-                          </a:solidFill>
-                          <a:latin typeface="Calibri"/>
-                        </a:rPr>
-                        <a:t>CORSUL COMERCIO E RE - SAO JOSE DOS PINHAIS / PR</a:t>
-                      </a:r>
-                    </a:p>
-                  </a:txBody>
-                  <a:tcPr>
-                    <a:solidFill>
-                      <a:srgbClr val="FFFFFF"/>
-                    </a:solidFill>
-                  </a:tcPr>
-                </a:tc>
-                <a:tc>
-                  <a:txBody>
-                    <a:bodyPr/>
-                    <a:lstStyle/>
-                    <a:p>
-                      <a:pPr algn="l"/>
-                      <a:r>
-                        <a:rPr sz="1000" b="0">
-                          <a:solidFill>
-                            <a:srgbClr val="1D1B43"/>
-                          </a:solidFill>
-                          <a:latin typeface="Calibri"/>
-                        </a:rPr>
-                        <a:t>SAO JOSE DOS PINHAIS/PR</a:t>
-                      </a:r>
-                    </a:p>
-                  </a:txBody>
-                  <a:tcPr>
-                    <a:solidFill>
-                      <a:srgbClr val="FFFFFF"/>
-                    </a:solidFill>
-                  </a:tcPr>
-                </a:tc>
-                <a:tc>
-                  <a:txBody>
-                    <a:bodyPr/>
-                    <a:lstStyle/>
-                    <a:p>
-                      <a:pPr algn="l"/>
-                      <a:r>
-                        <a:rPr sz="1000" b="0">
-                          <a:solidFill>
-                            <a:srgbClr val="1D1B43"/>
-                          </a:solidFill>
-                          <a:latin typeface="Calibri"/>
-                        </a:rPr>
-                        <a:t>08/05/2026</a:t>
-                      </a:r>
-                    </a:p>
-                  </a:txBody>
-                  <a:tcPr>
-                    <a:solidFill>
-                      <a:srgbClr val="FFFFFF"/>
-                    </a:solidFill>
-                  </a:tcPr>
-                </a:tc>
-                <a:tc>
-                  <a:txBody>
-                    <a:bodyPr/>
-                    <a:lstStyle/>
-                    <a:p>
-                      <a:pPr algn="l"/>
-                      <a:r>
-                        <a:rPr sz="1000" b="0">
-                          <a:solidFill>
-                            <a:srgbClr val="1D1B43"/>
-                          </a:solidFill>
-                          <a:latin typeface="Calibri"/>
-                        </a:rPr>
-                        <a:t>ENTREGUE FORA DO PRAZO</a:t>
-                      </a:r>
-                    </a:p>
-                  </a:txBody>
-                  <a:tcPr>
-                    <a:solidFill>
-                      <a:srgbClr val="FFFFFF"/>
-                    </a:solidFill>
-                  </a:tcPr>
-                </a:tc>
-              </a:tr>
-              <a:tr h="228600">
-                <a:tc>
-                  <a:txBody>
-                    <a:bodyPr/>
-                    <a:lstStyle/>
-                    <a:p>
-                      <a:pPr algn="l"/>
-                      <a:r>
-                        <a:rPr sz="1000" b="0">
-                          <a:solidFill>
-                            <a:srgbClr val="1D1B43"/>
-                          </a:solidFill>
-                          <a:latin typeface="Calibri"/>
-                        </a:rPr>
-                        <a:t>281177</a:t>
-                      </a:r>
-                    </a:p>
-                  </a:txBody>
-                  <a:tcPr>
-                    <a:solidFill>
-                      <a:srgbClr val="F2F2F2"/>
-                    </a:solidFill>
-                  </a:tcPr>
-                </a:tc>
-                <a:tc>
-                  <a:txBody>
-                    <a:bodyPr/>
-                    <a:lstStyle/>
-                    <a:p>
-                      <a:pPr algn="l"/>
-                      <a:r>
-                        <a:rPr sz="1000" b="0">
-                          <a:solidFill>
-                            <a:srgbClr val="1D1B43"/>
-                          </a:solidFill>
-                          <a:latin typeface="Calibri"/>
-                        </a:rPr>
-                        <a:t>STELLANTIS AUTOMOVEI - BETIM / MG</a:t>
-                      </a:r>
-                    </a:p>
-                  </a:txBody>
-                  <a:tcPr>
-                    <a:solidFill>
-                      <a:srgbClr val="F2F2F2"/>
-                    </a:solidFill>
-                  </a:tcPr>
-                </a:tc>
-                <a:tc>
-                  <a:txBody>
-                    <a:bodyPr/>
-                    <a:lstStyle/>
-                    <a:p>
-                      <a:pPr algn="l"/>
-                      <a:r>
-                        <a:rPr sz="1000" b="0">
-                          <a:solidFill>
-                            <a:srgbClr val="1D1B43"/>
-                          </a:solidFill>
-                          <a:latin typeface="Calibri"/>
-                        </a:rPr>
-                        <a:t>BETIM/MG</a:t>
-                      </a:r>
-                    </a:p>
-                  </a:txBody>
-                  <a:tcPr>
-                    <a:solidFill>
-                      <a:srgbClr val="F2F2F2"/>
-                    </a:solidFill>
-                  </a:tcPr>
-                </a:tc>
-                <a:tc>
-                  <a:txBody>
-                    <a:bodyPr/>
-                    <a:lstStyle/>
-                    <a:p>
-                      <a:pPr algn="l"/>
-                      <a:r>
-                        <a:rPr sz="1000" b="0">
-                          <a:solidFill>
-                            <a:srgbClr val="1D1B43"/>
-                          </a:solidFill>
-                          <a:latin typeface="Calibri"/>
-                        </a:rPr>
-                        <a:t>12/05/2026</a:t>
-                      </a:r>
-                    </a:p>
-                  </a:txBody>
-                  <a:tcPr>
-                    <a:solidFill>
-                      <a:srgbClr val="F2F2F2"/>
-                    </a:solidFill>
-                  </a:tcPr>
-                </a:tc>
-                <a:tc>
-                  <a:txBody>
-                    <a:bodyPr/>
-                    <a:lstStyle/>
-                    <a:p>
-                      <a:pPr algn="l"/>
-                      <a:r>
-                        <a:rPr sz="1000" b="0">
-                          <a:solidFill>
-                            <a:srgbClr val="1D1B43"/>
-                          </a:solidFill>
-                          <a:latin typeface="Calibri"/>
-                        </a:rPr>
-                        <a:t>ENTREGUE FORA DO PRAZO</a:t>
-                      </a:r>
-                    </a:p>
-                  </a:txBody>
-                  <a:tcPr>
-                    <a:solidFill>
-                      <a:srgbClr val="F2F2F2"/>
-                    </a:solidFill>
-                  </a:tcPr>
-                </a:tc>
-              </a:tr>
-              <a:tr h="228600">
-                <a:tc>
-                  <a:txBody>
-                    <a:bodyPr/>
-                    <a:lstStyle/>
-                    <a:p>
-                      <a:pPr algn="l"/>
-                      <a:r>
-                        <a:rPr sz="1000" b="0">
-                          <a:solidFill>
-                            <a:srgbClr val="1D1B43"/>
-                          </a:solidFill>
-                          <a:latin typeface="Calibri"/>
-                        </a:rPr>
-                        <a:t>281243</a:t>
-                      </a:r>
-                    </a:p>
-                  </a:txBody>
-                  <a:tcPr>
-                    <a:solidFill>
-                      <a:srgbClr val="FFFFFF"/>
-                    </a:solidFill>
-                  </a:tcPr>
-                </a:tc>
-                <a:tc>
-                  <a:txBody>
-                    <a:bodyPr/>
-                    <a:lstStyle/>
-                    <a:p>
-                      <a:pPr algn="l"/>
-                      <a:r>
-                        <a:rPr sz="1000" b="0">
-                          <a:solidFill>
-                            <a:srgbClr val="1D1B43"/>
-                          </a:solidFill>
-                          <a:latin typeface="Calibri"/>
-                        </a:rPr>
-                        <a:t>CORSUL COMERCIO E RE - SAO JOSE DOS PINHAIS / PR</a:t>
-                      </a:r>
-                    </a:p>
-                  </a:txBody>
-                  <a:tcPr>
-                    <a:solidFill>
-                      <a:srgbClr val="FFFFFF"/>
-                    </a:solidFill>
-                  </a:tcPr>
-                </a:tc>
-                <a:tc>
-                  <a:txBody>
-                    <a:bodyPr/>
-                    <a:lstStyle/>
-                    <a:p>
-                      <a:pPr algn="l"/>
-                      <a:r>
-                        <a:rPr sz="1000" b="0">
-                          <a:solidFill>
-                            <a:srgbClr val="1D1B43"/>
-                          </a:solidFill>
-                          <a:latin typeface="Calibri"/>
-                        </a:rPr>
-                        <a:t>SAO JOSE DOS PINHAIS/PR</a:t>
-                      </a:r>
-                    </a:p>
-                  </a:txBody>
-                  <a:tcPr>
-                    <a:solidFill>
-                      <a:srgbClr val="FFFFFF"/>
-                    </a:solidFill>
-                  </a:tcPr>
-                </a:tc>
-                <a:tc>
-                  <a:txBody>
-                    <a:bodyPr/>
-                    <a:lstStyle/>
-                    <a:p>
-                      <a:pPr algn="l"/>
-                      <a:r>
-                        <a:rPr sz="1000" b="0">
-                          <a:solidFill>
-                            <a:srgbClr val="1D1B43"/>
-                          </a:solidFill>
-                          <a:latin typeface="Calibri"/>
-                        </a:rPr>
-                        <a:t>08/05/2026</a:t>
-                      </a:r>
-                    </a:p>
-                  </a:txBody>
-                  <a:tcPr>
-                    <a:solidFill>
-                      <a:srgbClr val="FFFFFF"/>
-                    </a:solidFill>
-                  </a:tcPr>
-                </a:tc>
-                <a:tc>
-                  <a:txBody>
-                    <a:bodyPr/>
-                    <a:lstStyle/>
-                    <a:p>
-                      <a:pPr algn="l"/>
-                      <a:r>
-                        <a:rPr sz="1000" b="0">
-                          <a:solidFill>
-                            <a:srgbClr val="1D1B43"/>
-                          </a:solidFill>
-                          <a:latin typeface="Calibri"/>
-                        </a:rPr>
-                        <a:t>ENTREGUE FORA DO PRAZO</a:t>
-                      </a:r>
-                    </a:p>
-                  </a:txBody>
-                  <a:tcPr>
-                    <a:solidFill>
-                      <a:srgbClr val="FFFFFF"/>
-                    </a:solidFill>
-                  </a:tcPr>
-                </a:tc>
-              </a:tr>
-              <a:tr h="228600">
-                <a:tc>
-                  <a:txBody>
-                    <a:bodyPr/>
-                    <a:lstStyle/>
-                    <a:p>
-                      <a:pPr algn="l"/>
-                      <a:r>
-                        <a:rPr sz="1000" b="0">
-                          <a:solidFill>
-                            <a:srgbClr val="1D1B43"/>
-                          </a:solidFill>
-                          <a:latin typeface="Calibri"/>
-                        </a:rPr>
-                        <a:t>281248</a:t>
-                      </a:r>
-                    </a:p>
-                  </a:txBody>
-                  <a:tcPr>
-                    <a:solidFill>
-                      <a:srgbClr val="F2F2F2"/>
-                    </a:solidFill>
-                  </a:tcPr>
-                </a:tc>
-                <a:tc>
-                  <a:txBody>
-                    <a:bodyPr/>
-                    <a:lstStyle/>
-                    <a:p>
-                      <a:pPr algn="l"/>
-                      <a:r>
-                        <a:rPr sz="1000" b="0">
-                          <a:solidFill>
-                            <a:srgbClr val="1D1B43"/>
-                          </a:solidFill>
-                          <a:latin typeface="Calibri"/>
-                        </a:rPr>
-                        <a:t>CORSUL COMERCIO E RE - SAO JOSE DOS PINHAIS / PR</a:t>
-                      </a:r>
-                    </a:p>
-                  </a:txBody>
-                  <a:tcPr>
-                    <a:solidFill>
-                      <a:srgbClr val="F2F2F2"/>
-                    </a:solidFill>
-                  </a:tcPr>
-                </a:tc>
-                <a:tc>
-                  <a:txBody>
-                    <a:bodyPr/>
-                    <a:lstStyle/>
-                    <a:p>
-                      <a:pPr algn="l"/>
-                      <a:r>
-                        <a:rPr sz="1000" b="0">
-                          <a:solidFill>
-                            <a:srgbClr val="1D1B43"/>
-                          </a:solidFill>
-                          <a:latin typeface="Calibri"/>
-                        </a:rPr>
-                        <a:t>SAO JOSE DOS PINHAIS/PR</a:t>
-                      </a:r>
-                    </a:p>
-                  </a:txBody>
-                  <a:tcPr>
-                    <a:solidFill>
-                      <a:srgbClr val="F2F2F2"/>
-                    </a:solidFill>
-                  </a:tcPr>
-                </a:tc>
-                <a:tc>
-                  <a:txBody>
-                    <a:bodyPr/>
-                    <a:lstStyle/>
-                    <a:p>
-                      <a:pPr algn="l"/>
-                      <a:r>
-                        <a:rPr sz="1000" b="0">
-                          <a:solidFill>
-                            <a:srgbClr val="1D1B43"/>
-                          </a:solidFill>
-                          <a:latin typeface="Calibri"/>
-                        </a:rPr>
-                        <a:t>08/05/2026</a:t>
-                      </a:r>
-                    </a:p>
-                  </a:txBody>
-                  <a:tcPr>
-                    <a:solidFill>
-                      <a:srgbClr val="F2F2F2"/>
-                    </a:solidFill>
-                  </a:tcPr>
-                </a:tc>
-                <a:tc>
-                  <a:txBody>
-                    <a:bodyPr/>
-                    <a:lstStyle/>
-                    <a:p>
-                      <a:pPr algn="l"/>
-                      <a:r>
-                        <a:rPr sz="1000" b="0">
-                          <a:solidFill>
-                            <a:srgbClr val="1D1B43"/>
-                          </a:solidFill>
-                          <a:latin typeface="Calibri"/>
-                        </a:rPr>
-                        <a:t>ENTREGUE FORA DO PRAZO</a:t>
-                      </a:r>
-                    </a:p>
-                  </a:txBody>
-                  <a:tcPr>
-                    <a:solidFill>
-                      <a:srgbClr val="F2F2F2"/>
-                    </a:solidFill>
-                  </a:tcPr>
-                </a:tc>
-              </a:tr>
-              <a:tr h="228600">
-                <a:tc>
-                  <a:txBody>
-                    <a:bodyPr/>
-                    <a:lstStyle/>
-                    <a:p>
-                      <a:pPr algn="l"/>
-                      <a:r>
-                        <a:rPr sz="1000" b="0">
-                          <a:solidFill>
-                            <a:srgbClr val="1D1B43"/>
-                          </a:solidFill>
-                          <a:latin typeface="Calibri"/>
-                        </a:rPr>
-                        <a:t>281296</a:t>
-                      </a:r>
-                    </a:p>
-                  </a:txBody>
-                  <a:tcPr>
-                    <a:solidFill>
-                      <a:srgbClr val="FFFFFF"/>
-                    </a:solidFill>
-                  </a:tcPr>
-                </a:tc>
-                <a:tc>
-                  <a:txBody>
-                    <a:bodyPr/>
-                    <a:lstStyle/>
-                    <a:p>
-                      <a:pPr algn="l"/>
-                      <a:r>
-                        <a:rPr sz="1000" b="0">
-                          <a:solidFill>
-                            <a:srgbClr val="1D1B43"/>
-                          </a:solidFill>
-                          <a:latin typeface="Calibri"/>
-                        </a:rPr>
-                        <a:t>CORSUL COMERCIO E RE - SAO JOSE DOS PINHAIS / PR</a:t>
-                      </a:r>
-                    </a:p>
-                  </a:txBody>
-                  <a:tcPr>
-                    <a:solidFill>
-                      <a:srgbClr val="FFFFFF"/>
-                    </a:solidFill>
-                  </a:tcPr>
-                </a:tc>
-                <a:tc>
-                  <a:txBody>
-                    <a:bodyPr/>
-                    <a:lstStyle/>
-                    <a:p>
-                      <a:pPr algn="l"/>
-                      <a:r>
-                        <a:rPr sz="1000" b="0">
-                          <a:solidFill>
-                            <a:srgbClr val="1D1B43"/>
-                          </a:solidFill>
-                          <a:latin typeface="Calibri"/>
-                        </a:rPr>
-                        <a:t>SAO JOSE DOS PINHAIS/PR</a:t>
-                      </a:r>
-                    </a:p>
-                  </a:txBody>
-                  <a:tcPr>
-                    <a:solidFill>
-                      <a:srgbClr val="FFFFFF"/>
-                    </a:solidFill>
-                  </a:tcPr>
-                </a:tc>
-                <a:tc>
-                  <a:txBody>
-                    <a:bodyPr/>
-                    <a:lstStyle/>
-                    <a:p>
-                      <a:pPr algn="l"/>
-                      <a:r>
-                        <a:rPr sz="1000" b="0">
-                          <a:solidFill>
-                            <a:srgbClr val="1D1B43"/>
-                          </a:solidFill>
-                          <a:latin typeface="Calibri"/>
-                        </a:rPr>
-                        <a:t>08/05/2026</a:t>
-                      </a:r>
-                    </a:p>
-                  </a:txBody>
-                  <a:tcPr>
-                    <a:solidFill>
-                      <a:srgbClr val="FFFFFF"/>
-                    </a:solidFill>
-                  </a:tcPr>
-                </a:tc>
-                <a:tc>
-                  <a:txBody>
-                    <a:bodyPr/>
-                    <a:lstStyle/>
-                    <a:p>
-                      <a:pPr algn="l"/>
-                      <a:r>
-                        <a:rPr sz="1000" b="0">
-                          <a:solidFill>
-                            <a:srgbClr val="1D1B43"/>
-                          </a:solidFill>
-                          <a:latin typeface="Calibri"/>
-                        </a:rPr>
-                        <a:t>ENTREGUE FORA DO PRAZO</a:t>
-                      </a:r>
-                    </a:p>
-                  </a:txBody>
-                  <a:tcPr>
-                    <a:solidFill>
-                      <a:srgbClr val="FFFFFF"/>
-                    </a:solidFill>
-                  </a:tcPr>
-                </a:tc>
-              </a:tr>
-              <a:tr h="228600">
-                <a:tc>
-                  <a:txBody>
-                    <a:bodyPr/>
-                    <a:lstStyle/>
-                    <a:p>
-                      <a:pPr algn="l"/>
-                      <a:r>
-                        <a:rPr sz="1000" b="0">
-                          <a:solidFill>
-                            <a:srgbClr val="1D1B43"/>
-                          </a:solidFill>
-                          <a:latin typeface="Calibri"/>
-                        </a:rPr>
-                        <a:t>281297</a:t>
-                      </a:r>
-                    </a:p>
-                  </a:txBody>
-                  <a:tcPr>
-                    <a:solidFill>
-                      <a:srgbClr val="F2F2F2"/>
-                    </a:solidFill>
-                  </a:tcPr>
-                </a:tc>
-                <a:tc>
-                  <a:txBody>
-                    <a:bodyPr/>
-                    <a:lstStyle/>
-                    <a:p>
-                      <a:pPr algn="l"/>
-                      <a:r>
-                        <a:rPr sz="1000" b="0">
-                          <a:solidFill>
-                            <a:srgbClr val="1D1B43"/>
-                          </a:solidFill>
-                          <a:latin typeface="Calibri"/>
-                        </a:rPr>
-                        <a:t>CORSUL COMERCIO E RE - SAO JOSE DOS PINHAIS / PR</a:t>
-                      </a:r>
-                    </a:p>
-                  </a:txBody>
-                  <a:tcPr>
-                    <a:solidFill>
-                      <a:srgbClr val="F2F2F2"/>
-                    </a:solidFill>
-                  </a:tcPr>
-                </a:tc>
-                <a:tc>
-                  <a:txBody>
-                    <a:bodyPr/>
-                    <a:lstStyle/>
-                    <a:p>
-                      <a:pPr algn="l"/>
-                      <a:r>
-                        <a:rPr sz="1000" b="0">
-                          <a:solidFill>
-                            <a:srgbClr val="1D1B43"/>
-                          </a:solidFill>
-                          <a:latin typeface="Calibri"/>
-                        </a:rPr>
-                        <a:t>SAO JOSE DOS PINHAIS/PR</a:t>
-                      </a:r>
-                    </a:p>
-                  </a:txBody>
-                  <a:tcPr>
-                    <a:solidFill>
-                      <a:srgbClr val="F2F2F2"/>
-                    </a:solidFill>
-                  </a:tcPr>
-                </a:tc>
-                <a:tc>
-                  <a:txBody>
-                    <a:bodyPr/>
-                    <a:lstStyle/>
-                    <a:p>
-                      <a:pPr algn="l"/>
-                      <a:r>
-                        <a:rPr sz="1000" b="0">
-                          <a:solidFill>
-                            <a:srgbClr val="1D1B43"/>
-                          </a:solidFill>
-                          <a:latin typeface="Calibri"/>
-                        </a:rPr>
-                        <a:t>08/05/2026</a:t>
-                      </a:r>
-                    </a:p>
-                  </a:txBody>
-                  <a:tcPr>
-                    <a:solidFill>
-                      <a:srgbClr val="F2F2F2"/>
-                    </a:solidFill>
-                  </a:tcPr>
-                </a:tc>
-                <a:tc>
-                  <a:txBody>
-                    <a:bodyPr/>
-                    <a:lstStyle/>
-                    <a:p>
-                      <a:pPr algn="l"/>
-                      <a:r>
-                        <a:rPr sz="1000" b="0">
-                          <a:solidFill>
-                            <a:srgbClr val="1D1B43"/>
-                          </a:solidFill>
-                          <a:latin typeface="Calibri"/>
-                        </a:rPr>
-                        <a:t>ENTREGUE FORA DO PRAZO</a:t>
-                      </a:r>
-                    </a:p>
-                  </a:txBody>
-                  <a:tcPr>
-                    <a:solidFill>
-                      <a:srgbClr val="F2F2F2"/>
-                    </a:solidFill>
-                  </a:tcPr>
-                </a:tc>
-              </a:tr>
-              <a:tr h="228600">
-                <a:tc>
-                  <a:txBody>
-                    <a:bodyPr/>
-                    <a:lstStyle/>
-                    <a:p>
-                      <a:pPr algn="l"/>
-                      <a:r>
-                        <a:rPr sz="1000" b="0">
-                          <a:solidFill>
-                            <a:srgbClr val="1D1B43"/>
-                          </a:solidFill>
-                          <a:latin typeface="Calibri"/>
-                        </a:rPr>
-                        <a:t>281299</a:t>
-                      </a:r>
-                    </a:p>
-                  </a:txBody>
-                  <a:tcPr>
-                    <a:solidFill>
-                      <a:srgbClr val="FFFFFF"/>
-                    </a:solidFill>
-                  </a:tcPr>
-                </a:tc>
-                <a:tc>
-                  <a:txBody>
-                    <a:bodyPr/>
-                    <a:lstStyle/>
-                    <a:p>
-                      <a:pPr algn="l"/>
-                      <a:r>
-                        <a:rPr sz="1000" b="0">
-                          <a:solidFill>
-                            <a:srgbClr val="1D1B43"/>
-                          </a:solidFill>
-                          <a:latin typeface="Calibri"/>
-                        </a:rPr>
-                        <a:t>CORSUL COMERCIO E RE - SAO JOSE DOS PINHAIS / PR</a:t>
-                      </a:r>
-                    </a:p>
-                  </a:txBody>
-                  <a:tcPr>
-                    <a:solidFill>
-                      <a:srgbClr val="FFFFFF"/>
-                    </a:solidFill>
-                  </a:tcPr>
-                </a:tc>
-                <a:tc>
-                  <a:txBody>
-                    <a:bodyPr/>
-                    <a:lstStyle/>
-                    <a:p>
-                      <a:pPr algn="l"/>
-                      <a:r>
-                        <a:rPr sz="1000" b="0">
-                          <a:solidFill>
-                            <a:srgbClr val="1D1B43"/>
-                          </a:solidFill>
-                          <a:latin typeface="Calibri"/>
-                        </a:rPr>
-                        <a:t>SAO JOSE DOS PINHAIS/PR</a:t>
-                      </a:r>
-                    </a:p>
-                  </a:txBody>
-                  <a:tcPr>
-                    <a:solidFill>
-                      <a:srgbClr val="FFFFFF"/>
-                    </a:solidFill>
-                  </a:tcPr>
-                </a:tc>
-                <a:tc>
-                  <a:txBody>
-                    <a:bodyPr/>
-                    <a:lstStyle/>
-                    <a:p>
-                      <a:pPr algn="l"/>
-                      <a:r>
-                        <a:rPr sz="1000" b="0">
-                          <a:solidFill>
-                            <a:srgbClr val="1D1B43"/>
-                          </a:solidFill>
-                          <a:latin typeface="Calibri"/>
-                        </a:rPr>
-                        <a:t>08/05/2026</a:t>
-                      </a:r>
-                    </a:p>
-                  </a:txBody>
-                  <a:tcPr>
-                    <a:solidFill>
-                      <a:srgbClr val="FFFFFF"/>
-                    </a:solidFill>
-                  </a:tcPr>
-                </a:tc>
-                <a:tc>
-                  <a:txBody>
-                    <a:bodyPr/>
-                    <a:lstStyle/>
-                    <a:p>
-                      <a:pPr algn="l"/>
-                      <a:r>
-                        <a:rPr sz="1000" b="0">
-                          <a:solidFill>
-                            <a:srgbClr val="1D1B43"/>
-                          </a:solidFill>
-                          <a:latin typeface="Calibri"/>
-                        </a:rPr>
-                        <a:t>ENTREGUE FORA DO PRAZO</a:t>
-                      </a:r>
-                    </a:p>
-                  </a:txBody>
-                  <a:tcPr>
-                    <a:solidFill>
-                      <a:srgbClr val="FFFFFF"/>
-                    </a:solidFill>
-                  </a:tcPr>
-                </a:tc>
-              </a:tr>
-              <a:tr h="228600">
-                <a:tc>
-                  <a:txBody>
-                    <a:bodyPr/>
-                    <a:lstStyle/>
-                    <a:p>
-                      <a:pPr algn="l"/>
-                      <a:r>
-                        <a:rPr sz="1000" b="0">
-                          <a:solidFill>
-                            <a:srgbClr val="1D1B43"/>
-                          </a:solidFill>
-                          <a:latin typeface="Calibri"/>
-                        </a:rPr>
-                        <a:t>281313</a:t>
-                      </a:r>
-                    </a:p>
-                  </a:txBody>
-                  <a:tcPr>
-                    <a:solidFill>
-                      <a:srgbClr val="F2F2F2"/>
-                    </a:solidFill>
-                  </a:tcPr>
-                </a:tc>
-                <a:tc>
-                  <a:txBody>
-                    <a:bodyPr/>
-                    <a:lstStyle/>
-                    <a:p>
-                      <a:pPr algn="l"/>
-                      <a:r>
-                        <a:rPr sz="1000" b="0">
-                          <a:solidFill>
-                            <a:srgbClr val="1D1B43"/>
-                          </a:solidFill>
-                          <a:latin typeface="Calibri"/>
-                        </a:rPr>
-                        <a:t>ST JUDE MEDICAL BRAS - BELO HORIZONTE / MG</a:t>
-                      </a:r>
-                    </a:p>
-                  </a:txBody>
-                  <a:tcPr>
-                    <a:solidFill>
-                      <a:srgbClr val="F2F2F2"/>
-                    </a:solidFill>
-                  </a:tcPr>
-                </a:tc>
-                <a:tc>
-                  <a:txBody>
-                    <a:bodyPr/>
-                    <a:lstStyle/>
-                    <a:p>
-                      <a:pPr algn="l"/>
-                      <a:r>
-                        <a:rPr sz="1000" b="0">
-                          <a:solidFill>
-                            <a:srgbClr val="1D1B43"/>
-                          </a:solidFill>
-                          <a:latin typeface="Calibri"/>
-                        </a:rPr>
-                        <a:t>BELO HORIZONTE/MG</a:t>
-                      </a:r>
-                    </a:p>
-                  </a:txBody>
-                  <a:tcPr>
-                    <a:solidFill>
-                      <a:srgbClr val="F2F2F2"/>
-                    </a:solidFill>
-                  </a:tcPr>
-                </a:tc>
-                <a:tc>
-                  <a:txBody>
-                    <a:bodyPr/>
-                    <a:lstStyle/>
-                    <a:p>
-                      <a:pPr algn="l"/>
-                      <a:r>
-                        <a:rPr sz="1000" b="0">
-                          <a:solidFill>
-                            <a:srgbClr val="1D1B43"/>
-                          </a:solidFill>
-                          <a:latin typeface="Calibri"/>
-                        </a:rPr>
-                        <a:t>06/05/2026</a:t>
-                      </a:r>
-                    </a:p>
-                  </a:txBody>
-                  <a:tcPr>
-                    <a:solidFill>
-                      <a:srgbClr val="F2F2F2"/>
-                    </a:solidFill>
-                  </a:tcPr>
-                </a:tc>
-                <a:tc>
-                  <a:txBody>
-                    <a:bodyPr/>
-                    <a:lstStyle/>
-                    <a:p>
-                      <a:pPr algn="l"/>
-                      <a:r>
-                        <a:rPr sz="1000" b="0">
-                          <a:solidFill>
-                            <a:srgbClr val="1D1B43"/>
-                          </a:solidFill>
-                          <a:latin typeface="Calibri"/>
-                        </a:rPr>
-                        <a:t>ENTREGUE FORA DO PRAZO</a:t>
-                      </a:r>
-                    </a:p>
-                  </a:txBody>
-                  <a:tcPr>
-                    <a:solidFill>
-                      <a:srgbClr val="F2F2F2"/>
-                    </a:solidFill>
-                  </a:tcPr>
-                </a:tc>
-              </a:tr>
-              <a:tr h="228600">
-                <a:tc>
-                  <a:txBody>
-                    <a:bodyPr/>
-                    <a:lstStyle/>
-                    <a:p>
-                      <a:pPr algn="l"/>
-                      <a:r>
-                        <a:rPr sz="1000" b="0">
-                          <a:solidFill>
-                            <a:srgbClr val="1D1B43"/>
-                          </a:solidFill>
-                          <a:latin typeface="Calibri"/>
-                        </a:rPr>
-                        <a:t>281576</a:t>
-                      </a:r>
-                    </a:p>
-                  </a:txBody>
-                  <a:tcPr>
-                    <a:solidFill>
-                      <a:srgbClr val="FFFFFF"/>
-                    </a:solidFill>
-                  </a:tcPr>
-                </a:tc>
-                <a:tc>
-                  <a:txBody>
-                    <a:bodyPr/>
-                    <a:lstStyle/>
-                    <a:p>
-                      <a:pPr algn="l"/>
-                      <a:r>
-                        <a:rPr sz="1000" b="0">
-                          <a:solidFill>
-                            <a:srgbClr val="1D1B43"/>
-                          </a:solidFill>
-                          <a:latin typeface="Calibri"/>
-                        </a:rPr>
-                        <a:t>FRISA FRIGORIFICO RI - NANUQUE / MG</a:t>
-                      </a:r>
-                    </a:p>
-                  </a:txBody>
-                  <a:tcPr>
-                    <a:solidFill>
-                      <a:srgbClr val="FFFFFF"/>
-                    </a:solidFill>
-                  </a:tcPr>
-                </a:tc>
-                <a:tc>
-                  <a:txBody>
-                    <a:bodyPr/>
-                    <a:lstStyle/>
-                    <a:p>
-                      <a:pPr algn="l"/>
-                      <a:r>
-                        <a:rPr sz="1000" b="0">
-                          <a:solidFill>
-                            <a:srgbClr val="1D1B43"/>
-                          </a:solidFill>
-                          <a:latin typeface="Calibri"/>
-                        </a:rPr>
-                        <a:t>NANUQUE/MG</a:t>
-                      </a:r>
-                    </a:p>
-                  </a:txBody>
-                  <a:tcPr>
-                    <a:solidFill>
-                      <a:srgbClr val="FFFFFF"/>
-                    </a:solidFill>
-                  </a:tcPr>
-                </a:tc>
-                <a:tc>
-                  <a:txBody>
-                    <a:bodyPr/>
-                    <a:lstStyle/>
-                    <a:p>
-                      <a:pPr algn="l"/>
-                      <a:r>
-                        <a:rPr sz="1000" b="0">
-                          <a:solidFill>
-                            <a:srgbClr val="1D1B43"/>
-                          </a:solidFill>
-                          <a:latin typeface="Calibri"/>
-                        </a:rPr>
-                        <a:t>14/05/2026</a:t>
-                      </a:r>
-                    </a:p>
-                  </a:txBody>
-                  <a:tcPr>
-                    <a:solidFill>
-                      <a:srgbClr val="FFFFFF"/>
-                    </a:solidFill>
-                  </a:tcPr>
-                </a:tc>
-                <a:tc>
-                  <a:txBody>
-                    <a:bodyPr/>
-                    <a:lstStyle/>
-                    <a:p>
-                      <a:pPr algn="l"/>
-                      <a:r>
-                        <a:rPr sz="1000" b="0">
-                          <a:solidFill>
-                            <a:srgbClr val="1D1B43"/>
-                          </a:solidFill>
-                          <a:latin typeface="Calibri"/>
-                        </a:rPr>
-                        <a:t>ENTREGUE FORA DO PRAZO</a:t>
-                      </a:r>
-                    </a:p>
-                  </a:txBody>
-                  <a:tcPr>
-                    <a:solidFill>
-                      <a:srgbClr val="FFFFFF"/>
-                    </a:solidFill>
-                  </a:tcPr>
-                </a:tc>
-              </a:tr>
-              <a:tr h="228600">
-                <a:tc>
-                  <a:txBody>
-                    <a:bodyPr/>
-                    <a:lstStyle/>
-                    <a:p>
-                      <a:pPr algn="l"/>
-                      <a:r>
-                        <a:rPr sz="1000" b="0">
-                          <a:solidFill>
-                            <a:srgbClr val="1D1B43"/>
-                          </a:solidFill>
-                          <a:latin typeface="Calibri"/>
-                        </a:rPr>
-                        <a:t>281712</a:t>
-                      </a:r>
-                    </a:p>
-                  </a:txBody>
-                  <a:tcPr>
-                    <a:solidFill>
-                      <a:srgbClr val="F2F2F2"/>
-                    </a:solidFill>
-                  </a:tcPr>
-                </a:tc>
-                <a:tc>
-                  <a:txBody>
-                    <a:bodyPr/>
-                    <a:lstStyle/>
-                    <a:p>
-                      <a:pPr algn="l"/>
-                      <a:r>
-                        <a:rPr sz="1000" b="0">
-                          <a:solidFill>
-                            <a:srgbClr val="1D1B43"/>
-                          </a:solidFill>
-                          <a:latin typeface="Calibri"/>
-                        </a:rPr>
-                        <a:t>CORSUL COMERCIO E RE - CASCAVEL / PR</a:t>
-                      </a:r>
-                    </a:p>
-                  </a:txBody>
-                  <a:tcPr>
-                    <a:solidFill>
-                      <a:srgbClr val="F2F2F2"/>
-                    </a:solidFill>
-                  </a:tcPr>
-                </a:tc>
-                <a:tc>
-                  <a:txBody>
-                    <a:bodyPr/>
-                    <a:lstStyle/>
-                    <a:p>
-                      <a:pPr algn="l"/>
-                      <a:r>
-                        <a:rPr sz="1000" b="0">
-                          <a:solidFill>
-                            <a:srgbClr val="1D1B43"/>
-                          </a:solidFill>
-                          <a:latin typeface="Calibri"/>
-                        </a:rPr>
-                        <a:t>CASCAVEL/PR</a:t>
-                      </a:r>
-                    </a:p>
-                  </a:txBody>
-                  <a:tcPr>
-                    <a:solidFill>
-                      <a:srgbClr val="F2F2F2"/>
-                    </a:solidFill>
-                  </a:tcPr>
-                </a:tc>
-                <a:tc>
-                  <a:txBody>
-                    <a:bodyPr/>
-                    <a:lstStyle/>
-                    <a:p>
-                      <a:pPr algn="l"/>
-                      <a:r>
-                        <a:rPr sz="1000" b="0">
-                          <a:solidFill>
-                            <a:srgbClr val="1D1B43"/>
-                          </a:solidFill>
-                          <a:latin typeface="Calibri"/>
-                        </a:rPr>
-                        <a:t>12/05/2026</a:t>
-                      </a:r>
-                    </a:p>
-                  </a:txBody>
-                  <a:tcPr>
-                    <a:solidFill>
-                      <a:srgbClr val="F2F2F2"/>
-                    </a:solidFill>
-                  </a:tcPr>
-                </a:tc>
-                <a:tc>
-                  <a:txBody>
-                    <a:bodyPr/>
-                    <a:lstStyle/>
-                    <a:p>
-                      <a:pPr algn="l"/>
-                      <a:r>
-                        <a:rPr sz="1000" b="0">
-                          <a:solidFill>
-                            <a:srgbClr val="1D1B43"/>
-                          </a:solidFill>
-                          <a:latin typeface="Calibri"/>
-                        </a:rPr>
-                        <a:t>ENTREGUE FORA DO PRAZO</a:t>
-                      </a:r>
-                    </a:p>
-                  </a:txBody>
-                  <a:tcPr>
-                    <a:solidFill>
-                      <a:srgbClr val="F2F2F2"/>
-                    </a:solidFill>
-                  </a:tcPr>
-                </a:tc>
-              </a:tr>
-              <a:tr h="228600">
-                <a:tc>
-                  <a:txBody>
-                    <a:bodyPr/>
-                    <a:lstStyle/>
-                    <a:p>
-                      <a:pPr algn="l"/>
-                      <a:r>
-                        <a:rPr sz="1000" b="0">
-                          <a:solidFill>
-                            <a:srgbClr val="1D1B43"/>
-                          </a:solidFill>
-                          <a:latin typeface="Calibri"/>
-                        </a:rPr>
-                        <a:t>281713</a:t>
-                      </a:r>
-                    </a:p>
-                  </a:txBody>
-                  <a:tcPr>
-                    <a:solidFill>
-                      <a:srgbClr val="FFFFFF"/>
-                    </a:solidFill>
-                  </a:tcPr>
-                </a:tc>
-                <a:tc>
-                  <a:txBody>
-                    <a:bodyPr/>
-                    <a:lstStyle/>
-                    <a:p>
-                      <a:pPr algn="l"/>
-                      <a:r>
-                        <a:rPr sz="1000" b="0">
-                          <a:solidFill>
-                            <a:srgbClr val="1D1B43"/>
-                          </a:solidFill>
-                          <a:latin typeface="Calibri"/>
-                        </a:rPr>
-                        <a:t>CORSUL COMERCIO E RE - CASCAVEL / PR</a:t>
-                      </a:r>
-                    </a:p>
-                  </a:txBody>
-                  <a:tcPr>
-                    <a:solidFill>
-                      <a:srgbClr val="FFFFFF"/>
-                    </a:solidFill>
-                  </a:tcPr>
-                </a:tc>
-                <a:tc>
-                  <a:txBody>
-                    <a:bodyPr/>
-                    <a:lstStyle/>
-                    <a:p>
-                      <a:pPr algn="l"/>
-                      <a:r>
-                        <a:rPr sz="1000" b="0">
-                          <a:solidFill>
-                            <a:srgbClr val="1D1B43"/>
-                          </a:solidFill>
-                          <a:latin typeface="Calibri"/>
-                        </a:rPr>
-                        <a:t>CASCAVEL/PR</a:t>
-                      </a:r>
-                    </a:p>
-                  </a:txBody>
-                  <a:tcPr>
-                    <a:solidFill>
-                      <a:srgbClr val="FFFFFF"/>
-                    </a:solidFill>
-                  </a:tcPr>
-                </a:tc>
-                <a:tc>
-                  <a:txBody>
-                    <a:bodyPr/>
-                    <a:lstStyle/>
-                    <a:p>
-                      <a:pPr algn="l"/>
-                      <a:r>
-                        <a:rPr sz="1000" b="0">
-                          <a:solidFill>
-                            <a:srgbClr val="1D1B43"/>
-                          </a:solidFill>
-                          <a:latin typeface="Calibri"/>
-                        </a:rPr>
-                        <a:t>12/05/2026</a:t>
-                      </a:r>
-                    </a:p>
-                  </a:txBody>
-                  <a:tcPr>
-                    <a:solidFill>
-                      <a:srgbClr val="FFFFFF"/>
-                    </a:solidFill>
-                  </a:tcPr>
-                </a:tc>
-                <a:tc>
-                  <a:txBody>
-                    <a:bodyPr/>
-                    <a:lstStyle/>
-                    <a:p>
-                      <a:pPr algn="l"/>
-                      <a:r>
-                        <a:rPr sz="1000" b="0">
-                          <a:solidFill>
-                            <a:srgbClr val="1D1B43"/>
-                          </a:solidFill>
-                          <a:latin typeface="Calibri"/>
-                        </a:rPr>
-                        <a:t>ENTREGUE FORA DO PRAZO</a:t>
-                      </a:r>
-                    </a:p>
-                  </a:txBody>
-                  <a:tcPr>
-                    <a:solidFill>
-                      <a:srgbClr val="FFFFFF"/>
-                    </a:solidFill>
-                  </a:tcPr>
-                </a:tc>
-              </a:tr>
-              <a:tr h="228600">
-                <a:tc>
-                  <a:txBody>
-                    <a:bodyPr/>
-                    <a:lstStyle/>
-                    <a:p>
-                      <a:pPr algn="l"/>
-                      <a:r>
-                        <a:rPr sz="1000" b="0">
-                          <a:solidFill>
-                            <a:srgbClr val="1D1B43"/>
-                          </a:solidFill>
-                          <a:latin typeface="Calibri"/>
-                        </a:rPr>
-                        <a:t>281714</a:t>
-                      </a:r>
-                    </a:p>
-                  </a:txBody>
-                  <a:tcPr>
-                    <a:solidFill>
-                      <a:srgbClr val="F2F2F2"/>
-                    </a:solidFill>
-                  </a:tcPr>
-                </a:tc>
-                <a:tc>
-                  <a:txBody>
-                    <a:bodyPr/>
-                    <a:lstStyle/>
-                    <a:p>
-                      <a:pPr algn="l"/>
-                      <a:r>
-                        <a:rPr sz="1000" b="0">
-                          <a:solidFill>
-                            <a:srgbClr val="1D1B43"/>
-                          </a:solidFill>
-                          <a:latin typeface="Calibri"/>
-                        </a:rPr>
-                        <a:t>CORSUL COMERCIO E RE - CASCAVEL / PR</a:t>
-                      </a:r>
-                    </a:p>
-                  </a:txBody>
-                  <a:tcPr>
-                    <a:solidFill>
-                      <a:srgbClr val="F2F2F2"/>
-                    </a:solidFill>
-                  </a:tcPr>
-                </a:tc>
-                <a:tc>
-                  <a:txBody>
-                    <a:bodyPr/>
-                    <a:lstStyle/>
-                    <a:p>
-                      <a:pPr algn="l"/>
-                      <a:r>
-                        <a:rPr sz="1000" b="0">
-                          <a:solidFill>
-                            <a:srgbClr val="1D1B43"/>
-                          </a:solidFill>
-                          <a:latin typeface="Calibri"/>
-                        </a:rPr>
-                        <a:t>CASCAVEL/PR</a:t>
-                      </a:r>
-                    </a:p>
-                  </a:txBody>
-                  <a:tcPr>
-                    <a:solidFill>
-                      <a:srgbClr val="F2F2F2"/>
-                    </a:solidFill>
-                  </a:tcPr>
-                </a:tc>
-                <a:tc>
-                  <a:txBody>
-                    <a:bodyPr/>
-                    <a:lstStyle/>
-                    <a:p>
-                      <a:pPr algn="l"/>
-                      <a:r>
-                        <a:rPr sz="1000" b="0">
-                          <a:solidFill>
-                            <a:srgbClr val="1D1B43"/>
-                          </a:solidFill>
-                          <a:latin typeface="Calibri"/>
-                        </a:rPr>
-                        <a:t>12/05/2026</a:t>
-                      </a:r>
-                    </a:p>
-                  </a:txBody>
-                  <a:tcPr>
-                    <a:solidFill>
-                      <a:srgbClr val="F2F2F2"/>
-                    </a:solidFill>
-                  </a:tcPr>
-                </a:tc>
-                <a:tc>
-                  <a:txBody>
-                    <a:bodyPr/>
-                    <a:lstStyle/>
-                    <a:p>
-                      <a:pPr algn="l"/>
-                      <a:r>
-                        <a:rPr sz="1000" b="0">
-                          <a:solidFill>
-                            <a:srgbClr val="1D1B43"/>
-                          </a:solidFill>
-                          <a:latin typeface="Calibri"/>
-                        </a:rPr>
-                        <a:t>ENTREGUE FORA DO PRAZO</a:t>
-                      </a:r>
-                    </a:p>
-                  </a:txBody>
-                  <a:tcPr>
-                    <a:solidFill>
-                      <a:srgbClr val="F2F2F2"/>
-                    </a:solidFill>
-                  </a:tcPr>
-                </a:tc>
-              </a:tr>
-              <a:tr h="228600">
-                <a:tc>
-                  <a:txBody>
-                    <a:bodyPr/>
-                    <a:lstStyle/>
-                    <a:p>
-                      <a:pPr algn="l"/>
-                      <a:r>
-                        <a:rPr sz="1000" b="0">
-                          <a:solidFill>
-                            <a:srgbClr val="1D1B43"/>
-                          </a:solidFill>
-                          <a:latin typeface="Calibri"/>
-                        </a:rPr>
-                        <a:t>281715</a:t>
-                      </a:r>
-                    </a:p>
-                  </a:txBody>
-                  <a:tcPr>
-                    <a:solidFill>
-                      <a:srgbClr val="FFFFFF"/>
-                    </a:solidFill>
-                  </a:tcPr>
-                </a:tc>
-                <a:tc>
-                  <a:txBody>
-                    <a:bodyPr/>
-                    <a:lstStyle/>
-                    <a:p>
-                      <a:pPr algn="l"/>
-                      <a:r>
-                        <a:rPr sz="1000" b="0">
-                          <a:solidFill>
-                            <a:srgbClr val="1D1B43"/>
-                          </a:solidFill>
-                          <a:latin typeface="Calibri"/>
-                        </a:rPr>
-                        <a:t>CORSUL COMERCIO E RE - CASCAVEL / PR</a:t>
-                      </a:r>
-                    </a:p>
-                  </a:txBody>
-                  <a:tcPr>
-                    <a:solidFill>
-                      <a:srgbClr val="FFFFFF"/>
-                    </a:solidFill>
-                  </a:tcPr>
-                </a:tc>
-                <a:tc>
-                  <a:txBody>
-                    <a:bodyPr/>
-                    <a:lstStyle/>
-                    <a:p>
-                      <a:pPr algn="l"/>
-                      <a:r>
-                        <a:rPr sz="1000" b="0">
-                          <a:solidFill>
-                            <a:srgbClr val="1D1B43"/>
-                          </a:solidFill>
-                          <a:latin typeface="Calibri"/>
-                        </a:rPr>
-                        <a:t>CASCAVEL/PR</a:t>
-                      </a:r>
-                    </a:p>
-                  </a:txBody>
-                  <a:tcPr>
-                    <a:solidFill>
-                      <a:srgbClr val="FFFFFF"/>
-                    </a:solidFill>
-                  </a:tcPr>
-                </a:tc>
-                <a:tc>
-                  <a:txBody>
-                    <a:bodyPr/>
-                    <a:lstStyle/>
-                    <a:p>
-                      <a:pPr algn="l"/>
-                      <a:r>
-                        <a:rPr sz="1000" b="0">
-                          <a:solidFill>
-                            <a:srgbClr val="1D1B43"/>
-                          </a:solidFill>
-                          <a:latin typeface="Calibri"/>
-                        </a:rPr>
-                        <a:t>12/05/2026</a:t>
-                      </a:r>
-                    </a:p>
-                  </a:txBody>
-                  <a:tcPr>
-                    <a:solidFill>
-                      <a:srgbClr val="FFFFFF"/>
-                    </a:solidFill>
-                  </a:tcPr>
-                </a:tc>
-                <a:tc>
-                  <a:txBody>
-                    <a:bodyPr/>
-                    <a:lstStyle/>
-                    <a:p>
-                      <a:pPr algn="l"/>
-                      <a:r>
-                        <a:rPr sz="1000" b="0">
-                          <a:solidFill>
-                            <a:srgbClr val="1D1B43"/>
-                          </a:solidFill>
-                          <a:latin typeface="Calibri"/>
-                        </a:rPr>
-                        <a:t>ENTREGUE FORA DO PRAZO</a:t>
-                      </a:r>
-                    </a:p>
-                  </a:txBody>
-                  <a:tcPr>
-                    <a:solidFill>
-                      <a:srgbClr val="FFFFFF"/>
-                    </a:solidFill>
-                  </a:tcPr>
-                </a:tc>
-              </a:tr>
-              <a:tr h="228600">
-                <a:tc>
-                  <a:txBody>
-                    <a:bodyPr/>
-                    <a:lstStyle/>
-                    <a:p>
-                      <a:pPr algn="l"/>
-                      <a:r>
-                        <a:rPr sz="1000" b="0">
-                          <a:solidFill>
-                            <a:srgbClr val="1D1B43"/>
-                          </a:solidFill>
-                          <a:latin typeface="Calibri"/>
-                        </a:rPr>
-                        <a:t>281825</a:t>
-                      </a:r>
-                    </a:p>
-                  </a:txBody>
-                  <a:tcPr>
-                    <a:solidFill>
-                      <a:srgbClr val="F2F2F2"/>
-                    </a:solidFill>
-                  </a:tcPr>
-                </a:tc>
-                <a:tc>
-                  <a:txBody>
-                    <a:bodyPr/>
-                    <a:lstStyle/>
-                    <a:p>
-                      <a:pPr algn="l"/>
-                      <a:r>
-                        <a:rPr sz="1000" b="0">
-                          <a:solidFill>
-                            <a:srgbClr val="1D1B43"/>
-                          </a:solidFill>
-                          <a:latin typeface="Calibri"/>
-                        </a:rPr>
-                        <a:t>CORSUL COMERCIO E RE - SAO JOSE DOS PINHAIS / PR</a:t>
-                      </a:r>
-                    </a:p>
-                  </a:txBody>
-                  <a:tcPr>
-                    <a:solidFill>
-                      <a:srgbClr val="F2F2F2"/>
-                    </a:solidFill>
-                  </a:tcPr>
-                </a:tc>
-                <a:tc>
-                  <a:txBody>
-                    <a:bodyPr/>
-                    <a:lstStyle/>
-                    <a:p>
-                      <a:pPr algn="l"/>
-                      <a:r>
-                        <a:rPr sz="1000" b="0">
-                          <a:solidFill>
-                            <a:srgbClr val="1D1B43"/>
-                          </a:solidFill>
-                          <a:latin typeface="Calibri"/>
-                        </a:rPr>
-                        <a:t>SAO JOSE DOS PINHAIS/PR</a:t>
-                      </a:r>
-                    </a:p>
-                  </a:txBody>
-                  <a:tcPr>
-                    <a:solidFill>
-                      <a:srgbClr val="F2F2F2"/>
-                    </a:solidFill>
-                  </a:tcPr>
-                </a:tc>
-                <a:tc>
-                  <a:txBody>
-                    <a:bodyPr/>
-                    <a:lstStyle/>
-                    <a:p>
-                      <a:pPr algn="l"/>
-                      <a:r>
-                        <a:rPr sz="1000" b="0">
-                          <a:solidFill>
-                            <a:srgbClr val="1D1B43"/>
-                          </a:solidFill>
-                          <a:latin typeface="Calibri"/>
-                        </a:rPr>
-                        <a:t>08/05/2026</a:t>
-                      </a:r>
-                    </a:p>
-                  </a:txBody>
-                  <a:tcPr>
-                    <a:solidFill>
-                      <a:srgbClr val="F2F2F2"/>
-                    </a:solidFill>
-                  </a:tcPr>
-                </a:tc>
-                <a:tc>
-                  <a:txBody>
-                    <a:bodyPr/>
-                    <a:lstStyle/>
-                    <a:p>
-                      <a:pPr algn="l"/>
-                      <a:r>
-                        <a:rPr sz="1000" b="0">
-                          <a:solidFill>
-                            <a:srgbClr val="1D1B43"/>
-                          </a:solidFill>
-                          <a:latin typeface="Calibri"/>
-                        </a:rPr>
-                        <a:t>ENTREGUE FORA DO PRAZO</a:t>
-                      </a:r>
-                    </a:p>
-                  </a:txBody>
-                  <a:tcPr>
-                    <a:solidFill>
-                      <a:srgbClr val="F2F2F2"/>
-                    </a:solidFill>
-                  </a:tcPr>
-                </a:tc>
-              </a:tr>
-              <a:tr h="228600">
-                <a:tc>
-                  <a:txBody>
-                    <a:bodyPr/>
-                    <a:lstStyle/>
-                    <a:p>
-                      <a:pPr algn="l"/>
-                      <a:r>
-                        <a:rPr sz="1000" b="0">
-                          <a:solidFill>
-                            <a:srgbClr val="1D1B43"/>
-                          </a:solidFill>
-                          <a:latin typeface="Calibri"/>
-                        </a:rPr>
-                        <a:t>282745</a:t>
-                      </a:r>
-                    </a:p>
-                  </a:txBody>
-                  <a:tcPr>
-                    <a:solidFill>
-                      <a:srgbClr val="FFFFFF"/>
-                    </a:solidFill>
-                  </a:tcPr>
-                </a:tc>
-                <a:tc>
-                  <a:txBody>
-                    <a:bodyPr/>
-                    <a:lstStyle/>
-                    <a:p>
-                      <a:pPr algn="l"/>
-                      <a:r>
-                        <a:rPr sz="1000" b="0">
-                          <a:solidFill>
-                            <a:srgbClr val="1D1B43"/>
-                          </a:solidFill>
-                          <a:latin typeface="Calibri"/>
-                        </a:rPr>
-                        <a:t>SP EQUIPAMENTOS DE P - GUARULHOS / SP</a:t>
-                      </a:r>
-                    </a:p>
-                  </a:txBody>
-                  <a:tcPr>
-                    <a:solidFill>
-                      <a:srgbClr val="FFFFFF"/>
-                    </a:solidFill>
-                  </a:tcPr>
-                </a:tc>
-                <a:tc>
-                  <a:txBody>
-                    <a:bodyPr/>
-                    <a:lstStyle/>
-                    <a:p>
-                      <a:pPr algn="l"/>
-                      <a:r>
-                        <a:rPr sz="1000" b="0">
-                          <a:solidFill>
-                            <a:srgbClr val="1D1B43"/>
-                          </a:solidFill>
-                          <a:latin typeface="Calibri"/>
-                        </a:rPr>
-                        <a:t>GUARULHOS/SP</a:t>
-                      </a:r>
-                    </a:p>
-                  </a:txBody>
-                  <a:tcPr>
-                    <a:solidFill>
-                      <a:srgbClr val="FFFFFF"/>
-                    </a:solidFill>
-                  </a:tcPr>
-                </a:tc>
-                <a:tc>
-                  <a:txBody>
-                    <a:bodyPr/>
-                    <a:lstStyle/>
-                    <a:p>
-                      <a:pPr algn="l"/>
-                      <a:r>
-                        <a:rPr sz="1000" b="0">
-                          <a:solidFill>
-                            <a:srgbClr val="1D1B43"/>
-                          </a:solidFill>
-                          <a:latin typeface="Calibri"/>
-                        </a:rPr>
-                        <a:t>14/05/2026</a:t>
-                      </a:r>
-                    </a:p>
-                  </a:txBody>
-                  <a:tcPr>
-                    <a:solidFill>
-                      <a:srgbClr val="FFFFFF"/>
-                    </a:solidFill>
-                  </a:tcPr>
-                </a:tc>
-                <a:tc>
-                  <a:txBody>
-                    <a:bodyPr/>
-                    <a:lstStyle/>
-                    <a:p>
-                      <a:pPr algn="l"/>
-                      <a:r>
-                        <a:rPr sz="1000" b="0">
-                          <a:solidFill>
-                            <a:srgbClr val="1D1B43"/>
-                          </a:solidFill>
-                          <a:latin typeface="Calibri"/>
-                        </a:rPr>
-                        <a:t>FORA DO PRAZO</a:t>
-                      </a:r>
-                    </a:p>
-                  </a:txBody>
-                  <a:tcPr>
-                    <a:solidFill>
-                      <a:srgbClr val="FFFFFF"/>
                     </a:solidFill>
                   </a:tcPr>
                 </a:tc>
@@ -8024,7 +5905,7 @@
                           </a:solidFill>
                           <a:latin typeface="Calibri"/>
                         </a:rPr>
-                        <a:t>171</a:t>
+                        <a:t>286</a:t>
                       </a:r>
                     </a:p>
                   </a:txBody>
@@ -8047,7 +5928,7 @@
                           </a:solidFill>
                           <a:latin typeface="Calibri"/>
                         </a:rPr>
-                        <a:t>170</a:t>
+                        <a:t>285</a:t>
                       </a:r>
                     </a:p>
                   </a:txBody>
@@ -8093,7 +5974,7 @@
                           </a:solidFill>
                           <a:latin typeface="Calibri"/>
                         </a:rPr>
-                        <a:t>99.4%</a:t>
+                        <a:t>99.7%</a:t>
                       </a:r>
                     </a:p>
                   </a:txBody>
@@ -8141,7 +6022,7 @@
                           </a:solidFill>
                           <a:latin typeface="Calibri"/>
                         </a:rPr>
-                        <a:t>SC</a:t>
+                        <a:t>ES</a:t>
                       </a:r>
                     </a:p>
                   </a:txBody>
@@ -8164,7 +6045,7 @@
                           </a:solidFill>
                           <a:latin typeface="Calibri"/>
                         </a:rPr>
-                        <a:t>118</a:t>
+                        <a:t>63</a:t>
                       </a:r>
                     </a:p>
                   </a:txBody>
@@ -8187,7 +6068,7 @@
                           </a:solidFill>
                           <a:latin typeface="Calibri"/>
                         </a:rPr>
-                        <a:t>118</a:t>
+                        <a:t>63</a:t>
                       </a:r>
                     </a:p>
                   </a:txBody>
@@ -8304,7 +6185,7 @@
                           </a:solidFill>
                           <a:latin typeface="Calibri"/>
                         </a:rPr>
-                        <a:t>93</a:t>
+                        <a:t>62</a:t>
                       </a:r>
                     </a:p>
                   </a:txBody>
@@ -8327,7 +6208,7 @@
                           </a:solidFill>
                           <a:latin typeface="Calibri"/>
                         </a:rPr>
-                        <a:t>80</a:t>
+                        <a:t>62</a:t>
                       </a:r>
                     </a:p>
                   </a:txBody>
@@ -8350,7 +6231,7 @@
                           </a:solidFill>
                           <a:latin typeface="Calibri"/>
                         </a:rPr>
-                        <a:t>13</a:t>
+                        <a:t>0</a:t>
                       </a:r>
                     </a:p>
                   </a:txBody>
@@ -8373,7 +6254,7 @@
                           </a:solidFill>
                           <a:latin typeface="Calibri"/>
                         </a:rPr>
-                        <a:t>86.0%</a:t>
+                        <a:t>100.0%</a:t>
                       </a:r>
                     </a:p>
                   </a:txBody>
@@ -8396,7 +6277,7 @@
                           </a:solidFill>
                           <a:latin typeface="Calibri"/>
                         </a:rPr>
-                        <a:t>Regular</a:t>
+                        <a:t>Excelente</a:t>
                       </a:r>
                     </a:p>
                   </a:txBody>
@@ -8421,7 +6302,7 @@
                           </a:solidFill>
                           <a:latin typeface="Calibri"/>
                         </a:rPr>
-                        <a:t>ES</a:t>
+                        <a:t>SC</a:t>
                       </a:r>
                     </a:p>
                   </a:txBody>
@@ -8561,7 +6442,7 @@
                           </a:solidFill>
                           <a:latin typeface="Calibri"/>
                         </a:rPr>
-                        <a:t>RS</a:t>
+                        <a:t>MG</a:t>
                       </a:r>
                     </a:p>
                   </a:txBody>
@@ -8584,30 +6465,30 @@
                           </a:solidFill>
                           <a:latin typeface="Calibri"/>
                         </a:rPr>
+                        <a:t>44</a:t>
+                      </a:r>
+                    </a:p>
+                  </a:txBody>
+                  <a:tcPr>
+                    <a:solidFill>
+                      <a:srgbClr val="FFFFFF"/>
+                    </a:solidFill>
+                  </a:tcPr>
+                </a:tc>
+                <a:tc>
+                  <a:txBody>
+                    <a:bodyPr/>
+                    <a:lstStyle/>
+                    <a:p>
+                      <a:pPr algn="l"/>
+                      <a:r>
+                        <a:rPr sz="1000" b="0">
+                          <a:solidFill>
+                            <a:srgbClr val="1D1B43"/>
+                          </a:solidFill>
+                          <a:latin typeface="Calibri"/>
+                        </a:rPr>
                         <a:t>43</a:t>
-                      </a:r>
-                    </a:p>
-                  </a:txBody>
-                  <a:tcPr>
-                    <a:solidFill>
-                      <a:srgbClr val="FFFFFF"/>
-                    </a:solidFill>
-                  </a:tcPr>
-                </a:tc>
-                <a:tc>
-                  <a:txBody>
-                    <a:bodyPr/>
-                    <a:lstStyle/>
-                    <a:p>
-                      <a:pPr algn="l"/>
-                      <a:r>
-                        <a:rPr sz="1000" b="0">
-                          <a:solidFill>
-                            <a:srgbClr val="1D1B43"/>
-                          </a:solidFill>
-                          <a:latin typeface="Calibri"/>
-                        </a:rPr>
-                        <a:t>42</a:t>
                       </a:r>
                     </a:p>
                   </a:txBody>
@@ -8701,7 +6582,7 @@
                           </a:solidFill>
                           <a:latin typeface="Calibri"/>
                         </a:rPr>
-                        <a:t>MG</a:t>
+                        <a:t>RS</a:t>
                       </a:r>
                     </a:p>
                   </a:txBody>
@@ -8724,7 +6605,7 @@
                           </a:solidFill>
                           <a:latin typeface="Calibri"/>
                         </a:rPr>
-                        <a:t>36</a:t>
+                        <a:t>21</a:t>
                       </a:r>
                     </a:p>
                   </a:txBody>
@@ -8747,7 +6628,7 @@
                           </a:solidFill>
                           <a:latin typeface="Calibri"/>
                         </a:rPr>
-                        <a:t>33</a:t>
+                        <a:t>21</a:t>
                       </a:r>
                     </a:p>
                   </a:txBody>
@@ -8770,7 +6651,7 @@
                           </a:solidFill>
                           <a:latin typeface="Calibri"/>
                         </a:rPr>
-                        <a:t>3</a:t>
+                        <a:t>0</a:t>
                       </a:r>
                     </a:p>
                   </a:txBody>
@@ -8793,7 +6674,7 @@
                           </a:solidFill>
                           <a:latin typeface="Calibri"/>
                         </a:rPr>
-                        <a:t>91.7%</a:t>
+                        <a:t>100.0%</a:t>
                       </a:r>
                     </a:p>
                   </a:txBody>
@@ -8816,7 +6697,7 @@
                           </a:solidFill>
                           <a:latin typeface="Calibri"/>
                         </a:rPr>
-                        <a:t>Regular</a:t>
+                        <a:t>Excelente</a:t>
                       </a:r>
                     </a:p>
                   </a:txBody>
@@ -8841,7 +6722,7 @@
                           </a:solidFill>
                           <a:latin typeface="Calibri"/>
                         </a:rPr>
-                        <a:t>GO</a:t>
+                        <a:t>BA</a:t>
                       </a:r>
                     </a:p>
                   </a:txBody>
@@ -8864,7 +6745,7 @@
                           </a:solidFill>
                           <a:latin typeface="Calibri"/>
                         </a:rPr>
-                        <a:t>20</a:t>
+                        <a:t>11</a:t>
                       </a:r>
                     </a:p>
                   </a:txBody>
@@ -8887,7 +6768,7 @@
                           </a:solidFill>
                           <a:latin typeface="Calibri"/>
                         </a:rPr>
-                        <a:t>20</a:t>
+                        <a:t>11</a:t>
                       </a:r>
                     </a:p>
                   </a:txBody>
@@ -8981,7 +6862,7 @@
                           </a:solidFill>
                           <a:latin typeface="Calibri"/>
                         </a:rPr>
-                        <a:t>BA</a:t>
+                        <a:t>GO</a:t>
                       </a:r>
                     </a:p>
                   </a:txBody>
@@ -9004,7 +6885,7 @@
                           </a:solidFill>
                           <a:latin typeface="Calibri"/>
                         </a:rPr>
-                        <a:t>6</a:t>
+                        <a:t>10</a:t>
                       </a:r>
                     </a:p>
                   </a:txBody>
@@ -9027,7 +6908,7 @@
                           </a:solidFill>
                           <a:latin typeface="Calibri"/>
                         </a:rPr>
-                        <a:t>6</a:t>
+                        <a:t>10</a:t>
                       </a:r>
                     </a:p>
                   </a:txBody>
@@ -9121,7 +7002,7 @@
                           </a:solidFill>
                           <a:latin typeface="Calibri"/>
                         </a:rPr>
-                        <a:t>PE</a:t>
+                        <a:t>PA</a:t>
                       </a:r>
                     </a:p>
                   </a:txBody>
@@ -9144,7 +7025,7 @@
                           </a:solidFill>
                           <a:latin typeface="Calibri"/>
                         </a:rPr>
-                        <a:t>5</a:t>
+                        <a:t>6</a:t>
                       </a:r>
                     </a:p>
                   </a:txBody>
@@ -9167,7 +7048,7 @@
                           </a:solidFill>
                           <a:latin typeface="Calibri"/>
                         </a:rPr>
-                        <a:t>4</a:t>
+                        <a:t>6</a:t>
                       </a:r>
                     </a:p>
                   </a:txBody>
@@ -9190,7 +7071,7 @@
                           </a:solidFill>
                           <a:latin typeface="Calibri"/>
                         </a:rPr>
-                        <a:t>1</a:t>
+                        <a:t>0</a:t>
                       </a:r>
                     </a:p>
                   </a:txBody>
@@ -9213,7 +7094,7 @@
                           </a:solidFill>
                           <a:latin typeface="Calibri"/>
                         </a:rPr>
-                        <a:t>80.0%</a:t>
+                        <a:t>100.0%</a:t>
                       </a:r>
                     </a:p>
                   </a:txBody>
@@ -9236,7 +7117,7 @@
                           </a:solidFill>
                           <a:latin typeface="Calibri"/>
                         </a:rPr>
-                        <a:t>Atencao</a:t>
+                        <a:t>Excelente</a:t>
                       </a:r>
                     </a:p>
                   </a:txBody>
@@ -9261,7 +7142,7 @@
                           </a:solidFill>
                           <a:latin typeface="Calibri"/>
                         </a:rPr>
-                        <a:t>PA</a:t>
+                        <a:t>MS</a:t>
                       </a:r>
                     </a:p>
                   </a:txBody>
@@ -9471,7 +7352,7 @@
                 </a:solidFill>
                 <a:latin typeface="Calibri"/>
               </a:rPr>
-              <a:t>TOP DESTINATARIOS (75 pontos)</a:t>
+              <a:t>TOP DESTINATARIOS (80 pontos)</a:t>
             </a:r>
           </a:p>
         </p:txBody>
@@ -9746,7 +7627,7 @@
                           </a:solidFill>
                           <a:latin typeface="Calibri"/>
                         </a:rPr>
-                        <a:t>DIMENSIONAL BRASIL S - GARUVA / SC</a:t>
+                        <a:t>DIMENSIONAL BRASIL S - SERRA / ES</a:t>
                       </a:r>
                     </a:p>
                   </a:txBody>
@@ -9769,7 +7650,7 @@
                           </a:solidFill>
                           <a:latin typeface="Calibri"/>
                         </a:rPr>
-                        <a:t>63</a:t>
+                        <a:t>42</a:t>
                       </a:r>
                     </a:p>
                   </a:txBody>
@@ -9792,7 +7673,7 @@
                           </a:solidFill>
                           <a:latin typeface="Calibri"/>
                         </a:rPr>
-                        <a:t>63</a:t>
+                        <a:t>42</a:t>
                       </a:r>
                     </a:p>
                   </a:txBody>
@@ -9909,7 +7790,7 @@
                           </a:solidFill>
                           <a:latin typeface="Calibri"/>
                         </a:rPr>
-                        <a:t>CORSUL COMERCIO E RE - SAO JOSE DOS PINHAIS / PR</a:t>
+                        <a:t>BUNZL EQUIPAMENTOS P - GUARULHOS / SP</a:t>
                       </a:r>
                     </a:p>
                   </a:txBody>
@@ -9932,7 +7813,7 @@
                           </a:solidFill>
                           <a:latin typeface="Calibri"/>
                         </a:rPr>
-                        <a:t>47</a:t>
+                        <a:t>40</a:t>
                       </a:r>
                     </a:p>
                   </a:txBody>
@@ -9955,7 +7836,7 @@
                           </a:solidFill>
                           <a:latin typeface="Calibri"/>
                         </a:rPr>
-                        <a:t>38</a:t>
+                        <a:t>40</a:t>
                       </a:r>
                     </a:p>
                   </a:txBody>
@@ -9978,7 +7859,7 @@
                           </a:solidFill>
                           <a:latin typeface="Calibri"/>
                         </a:rPr>
-                        <a:t>9</a:t>
+                        <a:t>0</a:t>
                       </a:r>
                     </a:p>
                   </a:txBody>
@@ -10001,7 +7882,7 @@
                           </a:solidFill>
                           <a:latin typeface="Calibri"/>
                         </a:rPr>
-                        <a:t>80.9%</a:t>
+                        <a:t>100.0%</a:t>
                       </a:r>
                     </a:p>
                   </a:txBody>
@@ -10024,7 +7905,7 @@
                           </a:solidFill>
                           <a:latin typeface="Calibri"/>
                         </a:rPr>
-                        <a:t>Atencao</a:t>
+                        <a:t>Excelente</a:t>
                       </a:r>
                     </a:p>
                   </a:txBody>
@@ -10072,7 +7953,7 @@
                           </a:solidFill>
                           <a:latin typeface="Calibri"/>
                         </a:rPr>
-                        <a:t>BUNZL EQUIPAMENTOS P - GUARULHOS / SP</a:t>
+                        <a:t>DIMENSIONAL BRASIL S - GARUVA / SC</a:t>
                       </a:r>
                     </a:p>
                   </a:txBody>
@@ -10095,7 +7976,7 @@
                           </a:solidFill>
                           <a:latin typeface="Calibri"/>
                         </a:rPr>
-                        <a:t>41</a:t>
+                        <a:t>33</a:t>
                       </a:r>
                     </a:p>
                   </a:txBody>
@@ -10118,7 +7999,7 @@
                           </a:solidFill>
                           <a:latin typeface="Calibri"/>
                         </a:rPr>
-                        <a:t>41</a:t>
+                        <a:t>33</a:t>
                       </a:r>
                     </a:p>
                   </a:txBody>
@@ -10235,7 +8116,7 @@
                           </a:solidFill>
                           <a:latin typeface="Calibri"/>
                         </a:rPr>
-                        <a:t>DIMENSIONAL BRASIL S - SERRA / ES</a:t>
+                        <a:t>EXATA CARGO - GUARULHOS / SP</a:t>
                       </a:r>
                     </a:p>
                   </a:txBody>
@@ -10258,7 +8139,7 @@
                           </a:solidFill>
                           <a:latin typeface="Calibri"/>
                         </a:rPr>
-                        <a:t>34</a:t>
+                        <a:t>27</a:t>
                       </a:r>
                     </a:p>
                   </a:txBody>
@@ -10281,7 +8162,7 @@
                           </a:solidFill>
                           <a:latin typeface="Calibri"/>
                         </a:rPr>
-                        <a:t>34</a:t>
+                        <a:t>27</a:t>
                       </a:r>
                     </a:p>
                   </a:txBody>
@@ -10398,7 +8279,7 @@
                           </a:solidFill>
                           <a:latin typeface="Calibri"/>
                         </a:rPr>
-                        <a:t>NORTEL SUPRIMENTOS I - SERRA / ES</a:t>
+                        <a:t>FASTENAL BRASIL IMPO - SOROCABA / SP</a:t>
                       </a:r>
                     </a:p>
                   </a:txBody>
@@ -10421,7 +8302,7 @@
                           </a:solidFill>
                           <a:latin typeface="Calibri"/>
                         </a:rPr>
-                        <a:t>24</a:t>
+                        <a:t>27</a:t>
                       </a:r>
                     </a:p>
                   </a:txBody>
@@ -10444,7 +8325,7 @@
                           </a:solidFill>
                           <a:latin typeface="Calibri"/>
                         </a:rPr>
-                        <a:t>24</a:t>
+                        <a:t>27</a:t>
                       </a:r>
                     </a:p>
                   </a:txBody>
@@ -10561,7 +8442,7 @@
                           </a:solidFill>
                           <a:latin typeface="Calibri"/>
                         </a:rPr>
-                        <a:t>NORTEL SUPRIMENTOS I - CAMPINAS / SP</a:t>
+                        <a:t>SP EQUIPAMENTOS DE P - GUARULHOS / SP</a:t>
                       </a:r>
                     </a:p>
                   </a:txBody>
@@ -10584,7 +8465,7 @@
                           </a:solidFill>
                           <a:latin typeface="Calibri"/>
                         </a:rPr>
-                        <a:t>23</a:t>
+                        <a:t>25</a:t>
                       </a:r>
                     </a:p>
                   </a:txBody>
@@ -10607,7 +8488,7 @@
                           </a:solidFill>
                           <a:latin typeface="Calibri"/>
                         </a:rPr>
-                        <a:t>23</a:t>
+                        <a:t>25</a:t>
                       </a:r>
                     </a:p>
                   </a:txBody>
@@ -10724,7 +8605,7 @@
                           </a:solidFill>
                           <a:latin typeface="Calibri"/>
                         </a:rPr>
-                        <a:t>CORSUL COMERCIO E RE - CAXIAS DO SUL / RS</a:t>
+                        <a:t>NORTEL SUPRIMENTOS I - CAMPINAS / SP</a:t>
                       </a:r>
                     </a:p>
                   </a:txBody>
@@ -10747,7 +8628,7 @@
                           </a:solidFill>
                           <a:latin typeface="Calibri"/>
                         </a:rPr>
-                        <a:t>20</a:t>
+                        <a:t>24</a:t>
                       </a:r>
                     </a:p>
                   </a:txBody>
@@ -10770,7 +8651,7 @@
                           </a:solidFill>
                           <a:latin typeface="Calibri"/>
                         </a:rPr>
-                        <a:t>20</a:t>
+                        <a:t>24</a:t>
                       </a:r>
                     </a:p>
                   </a:txBody>
@@ -10887,7 +8768,7 @@
                           </a:solidFill>
                           <a:latin typeface="Calibri"/>
                         </a:rPr>
-                        <a:t>NORTEL SUPRIMENTOS I - GOIANIA / GO</a:t>
+                        <a:t>BUNZL EQUIPAMENTOS P - CONTAGEM / MG</a:t>
                       </a:r>
                     </a:p>
                   </a:txBody>
@@ -10910,7 +8791,7 @@
                           </a:solidFill>
                           <a:latin typeface="Calibri"/>
                         </a:rPr>
-                        <a:t>19</a:t>
+                        <a:t>22</a:t>
                       </a:r>
                     </a:p>
                   </a:txBody>
@@ -10933,7 +8814,7 @@
                           </a:solidFill>
                           <a:latin typeface="Calibri"/>
                         </a:rPr>
-                        <a:t>19</a:t>
+                        <a:t>22</a:t>
                       </a:r>
                     </a:p>
                   </a:txBody>
@@ -11050,7 +8931,7 @@
                           </a:solidFill>
                           <a:latin typeface="Calibri"/>
                         </a:rPr>
-                        <a:t>CORSUL COMERCIO E RE - CRICIUMA / SC</a:t>
+                        <a:t>CORSUL COMERCIO E RE - SAO JOSE DOS PINHAIS / PR</a:t>
                       </a:r>
                     </a:p>
                   </a:txBody>
@@ -11073,7 +8954,7 @@
                           </a:solidFill>
                           <a:latin typeface="Calibri"/>
                         </a:rPr>
-                        <a:t>16</a:t>
+                        <a:t>22</a:t>
                       </a:r>
                     </a:p>
                   </a:txBody>
@@ -11096,7 +8977,7 @@
                           </a:solidFill>
                           <a:latin typeface="Calibri"/>
                         </a:rPr>
-                        <a:t>16</a:t>
+                        <a:t>22</a:t>
                       </a:r>
                     </a:p>
                   </a:txBody>
@@ -11213,7 +9094,7 @@
                           </a:solidFill>
                           <a:latin typeface="Calibri"/>
                         </a:rPr>
-                        <a:t>BUNZL EQUIPAMENTOS P - CONTAGEM / MG</a:t>
+                        <a:t>NORTEL SUPRIMENTOS I - SERRA / ES</a:t>
                       </a:r>
                     </a:p>
                   </a:txBody>
@@ -11236,7 +9117,7 @@
                           </a:solidFill>
                           <a:latin typeface="Calibri"/>
                         </a:rPr>
-                        <a:t>16</a:t>
+                        <a:t>21</a:t>
                       </a:r>
                     </a:p>
                   </a:txBody>
@@ -11259,7 +9140,7 @@
                           </a:solidFill>
                           <a:latin typeface="Calibri"/>
                         </a:rPr>
-                        <a:t>16</a:t>
+                        <a:t>21</a:t>
                       </a:r>
                     </a:p>
                   </a:txBody>
@@ -11376,7 +9257,7 @@
                           </a:solidFill>
                           <a:latin typeface="Calibri"/>
                         </a:rPr>
-                        <a:t>ELETRONOR - DISTRIBU - CAXIAS DO SUL / RS</a:t>
+                        <a:t>1000 MARCAS SAFETY B - ARACARIGUAMA / SP</a:t>
                       </a:r>
                     </a:p>
                   </a:txBody>
@@ -11399,7 +9280,7 @@
                           </a:solidFill>
                           <a:latin typeface="Calibri"/>
                         </a:rPr>
-                        <a:t>16</a:t>
+                        <a:t>19</a:t>
                       </a:r>
                     </a:p>
                   </a:txBody>
@@ -11422,7 +9303,7 @@
                           </a:solidFill>
                           <a:latin typeface="Calibri"/>
                         </a:rPr>
-                        <a:t>15</a:t>
+                        <a:t>19</a:t>
                       </a:r>
                     </a:p>
                   </a:txBody>
@@ -11445,7 +9326,7 @@
                           </a:solidFill>
                           <a:latin typeface="Calibri"/>
                         </a:rPr>
-                        <a:t>1</a:t>
+                        <a:t>0</a:t>
                       </a:r>
                     </a:p>
                   </a:txBody>
@@ -11468,7 +9349,7 @@
                           </a:solidFill>
                           <a:latin typeface="Calibri"/>
                         </a:rPr>
-                        <a:t>93.8%</a:t>
+                        <a:t>100.0%</a:t>
                       </a:r>
                     </a:p>
                   </a:txBody>
@@ -11491,7 +9372,7 @@
                           </a:solidFill>
                           <a:latin typeface="Calibri"/>
                         </a:rPr>
-                        <a:t>Regular</a:t>
+                        <a:t>Excelente</a:t>
                       </a:r>
                     </a:p>
                   </a:txBody>
@@ -11539,7 +9420,7 @@
                           </a:solidFill>
                           <a:latin typeface="Calibri"/>
                         </a:rPr>
-                        <a:t>CORSUL COMERCIO E RE - CASCAVEL / PR</a:t>
+                        <a:t>WILSON SONS LOGISTIC - SANTO ANDRE / SP</a:t>
                       </a:r>
                     </a:p>
                   </a:txBody>
@@ -11562,7 +9443,7 @@
                           </a:solidFill>
                           <a:latin typeface="Calibri"/>
                         </a:rPr>
-                        <a:t>16</a:t>
+                        <a:t>19</a:t>
                       </a:r>
                     </a:p>
                   </a:txBody>
@@ -11585,7 +9466,7 @@
                           </a:solidFill>
                           <a:latin typeface="Calibri"/>
                         </a:rPr>
-                        <a:t>12</a:t>
+                        <a:t>19</a:t>
                       </a:r>
                     </a:p>
                   </a:txBody>
@@ -11608,7 +9489,7 @@
                           </a:solidFill>
                           <a:latin typeface="Calibri"/>
                         </a:rPr>
-                        <a:t>4</a:t>
+                        <a:t>0</a:t>
                       </a:r>
                     </a:p>
                   </a:txBody>
@@ -11631,7 +9512,7 @@
                           </a:solidFill>
                           <a:latin typeface="Calibri"/>
                         </a:rPr>
-                        <a:t>75.0%</a:t>
+                        <a:t>100.0%</a:t>
                       </a:r>
                     </a:p>
                   </a:txBody>
@@ -11654,7 +9535,7 @@
                           </a:solidFill>
                           <a:latin typeface="Calibri"/>
                         </a:rPr>
-                        <a:t>Atencao</a:t>
+                        <a:t>Excelente</a:t>
                       </a:r>
                     </a:p>
                   </a:txBody>
@@ -11702,7 +9583,7 @@
                           </a:solidFill>
                           <a:latin typeface="Calibri"/>
                         </a:rPr>
-                        <a:t>BALASKA EQUIPE INDUS - GUARULHOS / SP</a:t>
+                        <a:t>CORSUL COMERCIO E RE - CASCAVEL / PR</a:t>
                       </a:r>
                     </a:p>
                   </a:txBody>
@@ -11725,7 +9606,7 @@
                           </a:solidFill>
                           <a:latin typeface="Calibri"/>
                         </a:rPr>
-                        <a:t>14</a:t>
+                        <a:t>18</a:t>
                       </a:r>
                     </a:p>
                   </a:txBody>
@@ -11748,7 +9629,7 @@
                           </a:solidFill>
                           <a:latin typeface="Calibri"/>
                         </a:rPr>
-                        <a:t>14</a:t>
+                        <a:t>18</a:t>
                       </a:r>
                     </a:p>
                   </a:txBody>
@@ -11865,7 +9746,7 @@
                           </a:solidFill>
                           <a:latin typeface="Calibri"/>
                         </a:rPr>
-                        <a:t>CORSUL COMERCIO E RE - MARINGA / PR</a:t>
+                        <a:t>BALASKA EQUIPE INDUS - GUARULHOS / SP</a:t>
                       </a:r>
                     </a:p>
                   </a:txBody>
@@ -11888,7 +9769,7 @@
                           </a:solidFill>
                           <a:latin typeface="Calibri"/>
                         </a:rPr>
-                        <a:t>14</a:t>
+                        <a:t>17</a:t>
                       </a:r>
                     </a:p>
                   </a:txBody>
@@ -11911,7 +9792,7 @@
                           </a:solidFill>
                           <a:latin typeface="Calibri"/>
                         </a:rPr>
-                        <a:t>14</a:t>
+                        <a:t>17</a:t>
                       </a:r>
                     </a:p>
                   </a:txBody>

--- a/ANSELL_BRAZIL_LTDA.pptx
+++ b/ANSELL_BRAZIL_LTDA.pptx
@@ -143,10 +143,13 @@
           </c:spPr>
           <c:cat>
             <c:strRef>
-              <c:f>Sheet1!$A$2:$A$2</c:f>
+              <c:f>Sheet1!$A$2:$A$3</c:f>
               <c:strCache>
-                <c:ptCount val="1"/>
+                <c:ptCount val="2"/>
                 <c:pt idx="0">
+                  <c:v>Maio 2026</c:v>
+                </c:pt>
+                <c:pt idx="1">
                   <c:v>Abril 2026</c:v>
                 </c:pt>
               </c:strCache>
@@ -154,11 +157,14 @@
           </c:cat>
           <c:val>
             <c:numRef>
-              <c:f>Sheet1!$B$2:$B$2</c:f>
+              <c:f>Sheet1!$B$2:$B$3</c:f>
               <c:numCache>
                 <c:formatCode>General</c:formatCode>
-                <c:ptCount val="1"/>
+                <c:ptCount val="2"/>
                 <c:pt idx="0">
+                  <c:v>509</c:v>
+                </c:pt>
+                <c:pt idx="1">
                   <c:v>575</c:v>
                 </c:pt>
               </c:numCache>
@@ -186,10 +192,13 @@
           </c:spPr>
           <c:cat>
             <c:strRef>
-              <c:f>Sheet1!$A$2:$A$2</c:f>
+              <c:f>Sheet1!$A$2:$A$3</c:f>
               <c:strCache>
-                <c:ptCount val="1"/>
+                <c:ptCount val="2"/>
                 <c:pt idx="0">
+                  <c:v>Maio 2026</c:v>
+                </c:pt>
+                <c:pt idx="1">
                   <c:v>Abril 2026</c:v>
                 </c:pt>
               </c:strCache>
@@ -197,11 +206,14 @@
           </c:cat>
           <c:val>
             <c:numRef>
-              <c:f>Sheet1!$C$2:$C$2</c:f>
+              <c:f>Sheet1!$C$2:$C$3</c:f>
               <c:numCache>
                 <c:formatCode>General</c:formatCode>
-                <c:ptCount val="1"/>
+                <c:ptCount val="2"/>
                 <c:pt idx="0">
+                  <c:v>19</c:v>
+                </c:pt>
+                <c:pt idx="1">
                   <c:v>2</c:v>
                 </c:pt>
               </c:numCache>
@@ -4142,7 +4154,7 @@
                           </a:solidFill>
                           <a:latin typeface="Calibri"/>
                         </a:rPr>
-                        <a:t>Marco 2026</a:t>
+                        <a:t>Maio 2026</a:t>
                       </a:r>
                     </a:p>
                   </a:txBody>
@@ -4236,7 +4248,7 @@
                           </a:solidFill>
                           <a:latin typeface="Calibri"/>
                         </a:rPr>
-                        <a:t>-</a:t>
+                        <a:t>528</a:t>
                       </a:r>
                     </a:p>
                   </a:txBody>
@@ -4282,7 +4294,7 @@
                           </a:solidFill>
                           <a:latin typeface="Calibri"/>
                         </a:rPr>
-                        <a:t>-</a:t>
+                        <a:t>+ 49</a:t>
                       </a:r>
                     </a:p>
                   </a:txBody>
@@ -4330,7 +4342,7 @@
                           </a:solidFill>
                           <a:latin typeface="Calibri"/>
                         </a:rPr>
-                        <a:t>-</a:t>
+                        <a:t>509</a:t>
                       </a:r>
                     </a:p>
                   </a:txBody>
@@ -4376,7 +4388,7 @@
                           </a:solidFill>
                           <a:latin typeface="Calibri"/>
                         </a:rPr>
-                        <a:t>-</a:t>
+                        <a:t>+ 66</a:t>
                       </a:r>
                     </a:p>
                   </a:txBody>
@@ -4424,7 +4436,7 @@
                           </a:solidFill>
                           <a:latin typeface="Calibri"/>
                         </a:rPr>
-                        <a:t>-</a:t>
+                        <a:t>19</a:t>
                       </a:r>
                     </a:p>
                   </a:txBody>
@@ -4470,7 +4482,7 @@
                           </a:solidFill>
                           <a:latin typeface="Calibri"/>
                         </a:rPr>
-                        <a:t>-</a:t>
+                        <a:t>- 17</a:t>
                       </a:r>
                     </a:p>
                   </a:txBody>
@@ -4518,7 +4530,7 @@
                           </a:solidFill>
                           <a:latin typeface="Calibri"/>
                         </a:rPr>
-                        <a:t>-</a:t>
+                        <a:t>96.4%</a:t>
                       </a:r>
                     </a:p>
                   </a:txBody>
@@ -4564,7 +4576,7 @@
                           </a:solidFill>
                           <a:latin typeface="Calibri"/>
                         </a:rPr>
-                        <a:t>-</a:t>
+                        <a:t>+ 3.3pp</a:t>
                       </a:r>
                     </a:p>
                   </a:txBody>
@@ -4735,7 +4747,7 @@
         </p:nvGraphicFramePr>
         <p:xfrm>
           <a:off x="7955279" y="2286000"/>
-          <a:ext cx="4480560" cy="877824"/>
+          <a:ext cx="4480560" cy="1316736"/>
         </p:xfrm>
         <a:graphic>
           <a:graphicData uri="http://schemas.openxmlformats.org/drawingml/2006/table">
@@ -4881,13 +4893,130 @@
                           </a:solidFill>
                           <a:latin typeface="Calibri"/>
                         </a:rPr>
+                        <a:t>Maio 2026</a:t>
+                      </a:r>
+                    </a:p>
+                  </a:txBody>
+                  <a:tcPr>
+                    <a:solidFill>
+                      <a:srgbClr val="FFFFFF"/>
+                    </a:solidFill>
+                  </a:tcPr>
+                </a:tc>
+                <a:tc>
+                  <a:txBody>
+                    <a:bodyPr/>
+                    <a:lstStyle/>
+                    <a:p>
+                      <a:pPr algn="l"/>
+                      <a:r>
+                        <a:rPr sz="1000" b="0">
+                          <a:solidFill>
+                            <a:srgbClr val="1D1B43"/>
+                          </a:solidFill>
+                          <a:latin typeface="Calibri"/>
+                        </a:rPr>
+                        <a:t>528</a:t>
+                      </a:r>
+                    </a:p>
+                  </a:txBody>
+                  <a:tcPr>
+                    <a:solidFill>
+                      <a:srgbClr val="FFFFFF"/>
+                    </a:solidFill>
+                  </a:tcPr>
+                </a:tc>
+                <a:tc>
+                  <a:txBody>
+                    <a:bodyPr/>
+                    <a:lstStyle/>
+                    <a:p>
+                      <a:pPr algn="l"/>
+                      <a:r>
+                        <a:rPr sz="1000" b="0">
+                          <a:solidFill>
+                            <a:srgbClr val="1D1B43"/>
+                          </a:solidFill>
+                          <a:latin typeface="Calibri"/>
+                        </a:rPr>
+                        <a:t>509</a:t>
+                      </a:r>
+                    </a:p>
+                  </a:txBody>
+                  <a:tcPr>
+                    <a:solidFill>
+                      <a:srgbClr val="FFFFFF"/>
+                    </a:solidFill>
+                  </a:tcPr>
+                </a:tc>
+                <a:tc>
+                  <a:txBody>
+                    <a:bodyPr/>
+                    <a:lstStyle/>
+                    <a:p>
+                      <a:pPr algn="l"/>
+                      <a:r>
+                        <a:rPr sz="1000" b="0">
+                          <a:solidFill>
+                            <a:srgbClr val="1D1B43"/>
+                          </a:solidFill>
+                          <a:latin typeface="Calibri"/>
+                        </a:rPr>
+                        <a:t>19</a:t>
+                      </a:r>
+                    </a:p>
+                  </a:txBody>
+                  <a:tcPr>
+                    <a:solidFill>
+                      <a:srgbClr val="FFFFFF"/>
+                    </a:solidFill>
+                  </a:tcPr>
+                </a:tc>
+                <a:tc>
+                  <a:txBody>
+                    <a:bodyPr/>
+                    <a:lstStyle/>
+                    <a:p>
+                      <a:pPr algn="l"/>
+                      <a:r>
+                        <a:rPr sz="1000" b="0">
+                          <a:solidFill>
+                            <a:srgbClr val="1D1B43"/>
+                          </a:solidFill>
+                          <a:latin typeface="Calibri"/>
+                        </a:rPr>
+                        <a:t>96.4%</a:t>
+                      </a:r>
+                    </a:p>
+                  </a:txBody>
+                  <a:tcPr>
+                    <a:solidFill>
+                      <a:srgbClr val="FFFFFF"/>
+                    </a:solidFill>
+                  </a:tcPr>
+                </a:tc>
+              </a:tr>
+              <a:tr h="438912">
+                <a:tc>
+                  <a:txBody>
+                    <a:bodyPr/>
+                    <a:lstStyle/>
+                    <a:p>
+                      <a:pPr algn="l"/>
+                      <a:r>
+                        <a:rPr sz="1000" b="0">
+                          <a:solidFill>
+                            <a:srgbClr val="1D1B43"/>
+                          </a:solidFill>
+                          <a:latin typeface="Calibri"/>
+                        </a:rPr>
                         <a:t>Abril 2026</a:t>
                       </a:r>
                     </a:p>
                   </a:txBody>
                   <a:tcPr>
                     <a:solidFill>
-                      <a:srgbClr val="FFFFFF"/>
+                      <a:srgbClr val="F2F2F2"/>
                     </a:solidFill>
                   </a:tcPr>
                 </a:tc>
@@ -4910,7 +5039,7 @@
                   </a:txBody>
                   <a:tcPr>
                     <a:solidFill>
-                      <a:srgbClr val="FFFFFF"/>
+                      <a:srgbClr val="F2F2F2"/>
                     </a:solidFill>
                   </a:tcPr>
                 </a:tc>
@@ -4933,7 +5062,7 @@
                   </a:txBody>
                   <a:tcPr>
                     <a:solidFill>
-                      <a:srgbClr val="FFFFFF"/>
+                      <a:srgbClr val="F2F2F2"/>
                     </a:solidFill>
                   </a:tcPr>
                 </a:tc>
@@ -4956,7 +5085,7 @@
                   </a:txBody>
                   <a:tcPr>
                     <a:solidFill>
-                      <a:srgbClr val="FFFFFF"/>
+                      <a:srgbClr val="F2F2F2"/>
                     </a:solidFill>
                   </a:tcPr>
                 </a:tc>
@@ -4979,7 +5108,7 @@
                   </a:txBody>
                   <a:tcPr>
                     <a:solidFill>
-                      <a:srgbClr val="FFFFFF"/>
+                      <a:srgbClr val="F2F2F2"/>
                     </a:solidFill>
                   </a:tcPr>
                 </a:tc>

--- a/ANSELL_BRAZIL_LTDA.pptx
+++ b/ANSELL_BRAZIL_LTDA.pptx
@@ -162,7 +162,7 @@
                 <c:formatCode>General</c:formatCode>
                 <c:ptCount val="2"/>
                 <c:pt idx="0">
-                  <c:v>509</c:v>
+                  <c:v>596</c:v>
                 </c:pt>
                 <c:pt idx="1">
                   <c:v>575</c:v>
@@ -211,7 +211,7 @@
                 <c:formatCode>General</c:formatCode>
                 <c:ptCount val="2"/>
                 <c:pt idx="0">
-                  <c:v>19</c:v>
+                  <c:v>22</c:v>
                 </c:pt>
                 <c:pt idx="1">
                   <c:v>2</c:v>
@@ -4248,7 +4248,7 @@
                           </a:solidFill>
                           <a:latin typeface="Calibri"/>
                         </a:rPr>
-                        <a:t>528</a:t>
+                        <a:t>618</a:t>
                       </a:r>
                     </a:p>
                   </a:txBody>
@@ -4294,7 +4294,7 @@
                           </a:solidFill>
                           <a:latin typeface="Calibri"/>
                         </a:rPr>
-                        <a:t>+ 49</a:t>
+                        <a:t>- 41</a:t>
                       </a:r>
                     </a:p>
                   </a:txBody>
@@ -4342,7 +4342,7 @@
                           </a:solidFill>
                           <a:latin typeface="Calibri"/>
                         </a:rPr>
-                        <a:t>509</a:t>
+                        <a:t>596</a:t>
                       </a:r>
                     </a:p>
                   </a:txBody>
@@ -4388,7 +4388,7 @@
                           </a:solidFill>
                           <a:latin typeface="Calibri"/>
                         </a:rPr>
-                        <a:t>+ 66</a:t>
+                        <a:t>- 21</a:t>
                       </a:r>
                     </a:p>
                   </a:txBody>
@@ -4436,7 +4436,7 @@
                           </a:solidFill>
                           <a:latin typeface="Calibri"/>
                         </a:rPr>
-                        <a:t>19</a:t>
+                        <a:t>22</a:t>
                       </a:r>
                     </a:p>
                   </a:txBody>
@@ -4482,7 +4482,7 @@
                           </a:solidFill>
                           <a:latin typeface="Calibri"/>
                         </a:rPr>
-                        <a:t>- 17</a:t>
+                        <a:t>- 20</a:t>
                       </a:r>
                     </a:p>
                   </a:txBody>
@@ -4916,7 +4916,7 @@
                           </a:solidFill>
                           <a:latin typeface="Calibri"/>
                         </a:rPr>
-                        <a:t>528</a:t>
+                        <a:t>618</a:t>
                       </a:r>
                     </a:p>
                   </a:txBody>
@@ -4939,7 +4939,7 @@
                           </a:solidFill>
                           <a:latin typeface="Calibri"/>
                         </a:rPr>
-                        <a:t>509</a:t>
+                        <a:t>596</a:t>
                       </a:r>
                     </a:p>
                   </a:txBody>
@@ -4962,7 +4962,7 @@
                           </a:solidFill>
                           <a:latin typeface="Calibri"/>
                         </a:rPr>
-                        <a:t>19</a:t>
+                        <a:t>22</a:t>
                       </a:r>
                     </a:p>
                   </a:txBody>

--- a/ANSELL_BRAZIL_LTDA.pptx
+++ b/ANSELL_BRAZIL_LTDA.pptx
@@ -147,10 +147,10 @@
               <c:strCache>
                 <c:ptCount val="2"/>
                 <c:pt idx="0">
-                  <c:v>Maio 2026</c:v>
+                  <c:v>Abril 2026</c:v>
                 </c:pt>
                 <c:pt idx="1">
-                  <c:v>Abril 2026</c:v>
+                  <c:v>Maio 2026</c:v>
                 </c:pt>
               </c:strCache>
             </c:strRef>
@@ -162,10 +162,10 @@
                 <c:formatCode>General</c:formatCode>
                 <c:ptCount val="2"/>
                 <c:pt idx="0">
-                  <c:v>596</c:v>
+                  <c:v>575</c:v>
                 </c:pt>
                 <c:pt idx="1">
-                  <c:v>575</c:v>
+                  <c:v>683</c:v>
                 </c:pt>
               </c:numCache>
             </c:numRef>
@@ -196,10 +196,10 @@
               <c:strCache>
                 <c:ptCount val="2"/>
                 <c:pt idx="0">
-                  <c:v>Maio 2026</c:v>
+                  <c:v>Abril 2026</c:v>
                 </c:pt>
                 <c:pt idx="1">
-                  <c:v>Abril 2026</c:v>
+                  <c:v>Maio 2026</c:v>
                 </c:pt>
               </c:strCache>
             </c:strRef>
@@ -211,10 +211,10 @@
                 <c:formatCode>General</c:formatCode>
                 <c:ptCount val="2"/>
                 <c:pt idx="0">
-                  <c:v>22</c:v>
+                  <c:v>2</c:v>
                 </c:pt>
                 <c:pt idx="1">
-                  <c:v>2</c:v>
+                  <c:v>21</c:v>
                 </c:pt>
               </c:numCache>
             </c:numRef>
@@ -3387,7 +3387,7 @@
                 </a:solidFill>
                 <a:latin typeface="Calibri"/>
               </a:rPr>
-              <a:t>INDICADORES ABRIL 2026</a:t>
+              <a:t>INDICADORES MAIO 2026</a:t>
             </a:r>
           </a:p>
         </p:txBody>
@@ -3708,7 +3708,7 @@
                 </a:solidFill>
                 <a:latin typeface="Calibri"/>
               </a:rPr>
-              <a:t>577</a:t>
+              <a:t>704</a:t>
             </a:r>
           </a:p>
         </p:txBody>
@@ -3823,7 +3823,7 @@
                 </a:solidFill>
                 <a:latin typeface="Calibri"/>
               </a:rPr>
-              <a:t>575</a:t>
+              <a:t>683</a:t>
             </a:r>
           </a:p>
         </p:txBody>
@@ -3938,7 +3938,7 @@
                 </a:solidFill>
                 <a:latin typeface="Calibri"/>
               </a:rPr>
-              <a:t>2</a:t>
+              <a:t>21</a:t>
             </a:r>
           </a:p>
         </p:txBody>
@@ -4053,7 +4053,7 @@
                 </a:solidFill>
                 <a:latin typeface="Calibri"/>
               </a:rPr>
-              <a:t>99.7%</a:t>
+              <a:t>97.0%</a:t>
             </a:r>
           </a:p>
         </p:txBody>
@@ -4154,30 +4154,30 @@
                           </a:solidFill>
                           <a:latin typeface="Calibri"/>
                         </a:rPr>
+                        <a:t>Abril 2026</a:t>
+                      </a:r>
+                    </a:p>
+                  </a:txBody>
+                  <a:tcPr>
+                    <a:solidFill>
+                      <a:srgbClr val="1D1B43"/>
+                    </a:solidFill>
+                  </a:tcPr>
+                </a:tc>
+                <a:tc>
+                  <a:txBody>
+                    <a:bodyPr/>
+                    <a:lstStyle/>
+                    <a:p>
+                      <a:pPr algn="ctr"/>
+                      <a:r>
+                        <a:rPr sz="1100" b="1">
+                          <a:solidFill>
+                            <a:srgbClr val="FFFFFF"/>
+                          </a:solidFill>
+                          <a:latin typeface="Calibri"/>
+                        </a:rPr>
                         <a:t>Maio 2026</a:t>
-                      </a:r>
-                    </a:p>
-                  </a:txBody>
-                  <a:tcPr>
-                    <a:solidFill>
-                      <a:srgbClr val="1D1B43"/>
-                    </a:solidFill>
-                  </a:tcPr>
-                </a:tc>
-                <a:tc>
-                  <a:txBody>
-                    <a:bodyPr/>
-                    <a:lstStyle/>
-                    <a:p>
-                      <a:pPr algn="ctr"/>
-                      <a:r>
-                        <a:rPr sz="1100" b="1">
-                          <a:solidFill>
-                            <a:srgbClr val="FFFFFF"/>
-                          </a:solidFill>
-                          <a:latin typeface="Calibri"/>
-                        </a:rPr>
-                        <a:t>Abril 2026</a:t>
                       </a:r>
                     </a:p>
                   </a:txBody>
@@ -4248,29 +4248,6 @@
                           </a:solidFill>
                           <a:latin typeface="Calibri"/>
                         </a:rPr>
-                        <a:t>618</a:t>
-                      </a:r>
-                    </a:p>
-                  </a:txBody>
-                  <a:tcPr>
-                    <a:solidFill>
-                      <a:srgbClr val="FFFFFF"/>
-                    </a:solidFill>
-                  </a:tcPr>
-                </a:tc>
-                <a:tc>
-                  <a:txBody>
-                    <a:bodyPr/>
-                    <a:lstStyle/>
-                    <a:p>
-                      <a:pPr algn="l"/>
-                      <a:r>
-                        <a:rPr sz="1000" b="0">
-                          <a:solidFill>
-                            <a:srgbClr val="1D1B43"/>
-                          </a:solidFill>
-                          <a:latin typeface="Calibri"/>
-                        </a:rPr>
                         <a:t>577</a:t>
                       </a:r>
                     </a:p>
@@ -4294,7 +4271,30 @@
                           </a:solidFill>
                           <a:latin typeface="Calibri"/>
                         </a:rPr>
-                        <a:t>- 41</a:t>
+                        <a:t>704</a:t>
+                      </a:r>
+                    </a:p>
+                  </a:txBody>
+                  <a:tcPr>
+                    <a:solidFill>
+                      <a:srgbClr val="FFFFFF"/>
+                    </a:solidFill>
+                  </a:tcPr>
+                </a:tc>
+                <a:tc>
+                  <a:txBody>
+                    <a:bodyPr/>
+                    <a:lstStyle/>
+                    <a:p>
+                      <a:pPr algn="l"/>
+                      <a:r>
+                        <a:rPr sz="1000" b="0">
+                          <a:solidFill>
+                            <a:srgbClr val="1D1B43"/>
+                          </a:solidFill>
+                          <a:latin typeface="Calibri"/>
+                        </a:rPr>
+                        <a:t>+ 127</a:t>
                       </a:r>
                     </a:p>
                   </a:txBody>
@@ -4342,29 +4342,6 @@
                           </a:solidFill>
                           <a:latin typeface="Calibri"/>
                         </a:rPr>
-                        <a:t>596</a:t>
-                      </a:r>
-                    </a:p>
-                  </a:txBody>
-                  <a:tcPr>
-                    <a:solidFill>
-                      <a:srgbClr val="F2F2F2"/>
-                    </a:solidFill>
-                  </a:tcPr>
-                </a:tc>
-                <a:tc>
-                  <a:txBody>
-                    <a:bodyPr/>
-                    <a:lstStyle/>
-                    <a:p>
-                      <a:pPr algn="l"/>
-                      <a:r>
-                        <a:rPr sz="1000" b="0">
-                          <a:solidFill>
-                            <a:srgbClr val="1D1B43"/>
-                          </a:solidFill>
-                          <a:latin typeface="Calibri"/>
-                        </a:rPr>
                         <a:t>575</a:t>
                       </a:r>
                     </a:p>
@@ -4388,7 +4365,30 @@
                           </a:solidFill>
                           <a:latin typeface="Calibri"/>
                         </a:rPr>
-                        <a:t>- 21</a:t>
+                        <a:t>683</a:t>
+                      </a:r>
+                    </a:p>
+                  </a:txBody>
+                  <a:tcPr>
+                    <a:solidFill>
+                      <a:srgbClr val="F2F2F2"/>
+                    </a:solidFill>
+                  </a:tcPr>
+                </a:tc>
+                <a:tc>
+                  <a:txBody>
+                    <a:bodyPr/>
+                    <a:lstStyle/>
+                    <a:p>
+                      <a:pPr algn="l"/>
+                      <a:r>
+                        <a:rPr sz="1000" b="0">
+                          <a:solidFill>
+                            <a:srgbClr val="1D1B43"/>
+                          </a:solidFill>
+                          <a:latin typeface="Calibri"/>
+                        </a:rPr>
+                        <a:t>+ 108</a:t>
                       </a:r>
                     </a:p>
                   </a:txBody>
@@ -4436,29 +4436,6 @@
                           </a:solidFill>
                           <a:latin typeface="Calibri"/>
                         </a:rPr>
-                        <a:t>22</a:t>
-                      </a:r>
-                    </a:p>
-                  </a:txBody>
-                  <a:tcPr>
-                    <a:solidFill>
-                      <a:srgbClr val="FFFFFF"/>
-                    </a:solidFill>
-                  </a:tcPr>
-                </a:tc>
-                <a:tc>
-                  <a:txBody>
-                    <a:bodyPr/>
-                    <a:lstStyle/>
-                    <a:p>
-                      <a:pPr algn="l"/>
-                      <a:r>
-                        <a:rPr sz="1000" b="0">
-                          <a:solidFill>
-                            <a:srgbClr val="1D1B43"/>
-                          </a:solidFill>
-                          <a:latin typeface="Calibri"/>
-                        </a:rPr>
                         <a:t>2</a:t>
                       </a:r>
                     </a:p>
@@ -4482,7 +4459,30 @@
                           </a:solidFill>
                           <a:latin typeface="Calibri"/>
                         </a:rPr>
-                        <a:t>- 20</a:t>
+                        <a:t>21</a:t>
+                      </a:r>
+                    </a:p>
+                  </a:txBody>
+                  <a:tcPr>
+                    <a:solidFill>
+                      <a:srgbClr val="FFFFFF"/>
+                    </a:solidFill>
+                  </a:tcPr>
+                </a:tc>
+                <a:tc>
+                  <a:txBody>
+                    <a:bodyPr/>
+                    <a:lstStyle/>
+                    <a:p>
+                      <a:pPr algn="l"/>
+                      <a:r>
+                        <a:rPr sz="1000" b="0">
+                          <a:solidFill>
+                            <a:srgbClr val="1D1B43"/>
+                          </a:solidFill>
+                          <a:latin typeface="Calibri"/>
+                        </a:rPr>
+                        <a:t>+ 19</a:t>
                       </a:r>
                     </a:p>
                   </a:txBody>
@@ -4530,29 +4530,6 @@
                           </a:solidFill>
                           <a:latin typeface="Calibri"/>
                         </a:rPr>
-                        <a:t>96.4%</a:t>
-                      </a:r>
-                    </a:p>
-                  </a:txBody>
-                  <a:tcPr>
-                    <a:solidFill>
-                      <a:srgbClr val="F2F2F2"/>
-                    </a:solidFill>
-                  </a:tcPr>
-                </a:tc>
-                <a:tc>
-                  <a:txBody>
-                    <a:bodyPr/>
-                    <a:lstStyle/>
-                    <a:p>
-                      <a:pPr algn="l"/>
-                      <a:r>
-                        <a:rPr sz="1000" b="0">
-                          <a:solidFill>
-                            <a:srgbClr val="1D1B43"/>
-                          </a:solidFill>
-                          <a:latin typeface="Calibri"/>
-                        </a:rPr>
                         <a:t>99.7%</a:t>
                       </a:r>
                     </a:p>
@@ -4576,7 +4553,30 @@
                           </a:solidFill>
                           <a:latin typeface="Calibri"/>
                         </a:rPr>
-                        <a:t>+ 3.3pp</a:t>
+                        <a:t>97.0%</a:t>
+                      </a:r>
+                    </a:p>
+                  </a:txBody>
+                  <a:tcPr>
+                    <a:solidFill>
+                      <a:srgbClr val="F2F2F2"/>
+                    </a:solidFill>
+                  </a:tcPr>
+                </a:tc>
+                <a:tc>
+                  <a:txBody>
+                    <a:bodyPr/>
+                    <a:lstStyle/>
+                    <a:p>
+                      <a:pPr algn="l"/>
+                      <a:r>
+                        <a:rPr sz="1000" b="0">
+                          <a:solidFill>
+                            <a:srgbClr val="1D1B43"/>
+                          </a:solidFill>
+                          <a:latin typeface="Calibri"/>
+                        </a:rPr>
+                        <a:t>- 2.7pp</a:t>
                       </a:r>
                     </a:p>
                   </a:txBody>
@@ -4893,99 +4893,99 @@
                           </a:solidFill>
                           <a:latin typeface="Calibri"/>
                         </a:rPr>
-                        <a:t>Maio 2026</a:t>
-                      </a:r>
-                    </a:p>
-                  </a:txBody>
-                  <a:tcPr>
-                    <a:solidFill>
-                      <a:srgbClr val="FFFFFF"/>
-                    </a:solidFill>
-                  </a:tcPr>
-                </a:tc>
-                <a:tc>
-                  <a:txBody>
-                    <a:bodyPr/>
-                    <a:lstStyle/>
-                    <a:p>
-                      <a:pPr algn="l"/>
-                      <a:r>
-                        <a:rPr sz="1000" b="0">
-                          <a:solidFill>
-                            <a:srgbClr val="1D1B43"/>
-                          </a:solidFill>
-                          <a:latin typeface="Calibri"/>
-                        </a:rPr>
-                        <a:t>618</a:t>
-                      </a:r>
-                    </a:p>
-                  </a:txBody>
-                  <a:tcPr>
-                    <a:solidFill>
-                      <a:srgbClr val="FFFFFF"/>
-                    </a:solidFill>
-                  </a:tcPr>
-                </a:tc>
-                <a:tc>
-                  <a:txBody>
-                    <a:bodyPr/>
-                    <a:lstStyle/>
-                    <a:p>
-                      <a:pPr algn="l"/>
-                      <a:r>
-                        <a:rPr sz="1000" b="0">
-                          <a:solidFill>
-                            <a:srgbClr val="1D1B43"/>
-                          </a:solidFill>
-                          <a:latin typeface="Calibri"/>
-                        </a:rPr>
-                        <a:t>596</a:t>
-                      </a:r>
-                    </a:p>
-                  </a:txBody>
-                  <a:tcPr>
-                    <a:solidFill>
-                      <a:srgbClr val="FFFFFF"/>
-                    </a:solidFill>
-                  </a:tcPr>
-                </a:tc>
-                <a:tc>
-                  <a:txBody>
-                    <a:bodyPr/>
-                    <a:lstStyle/>
-                    <a:p>
-                      <a:pPr algn="l"/>
-                      <a:r>
-                        <a:rPr sz="1000" b="0">
-                          <a:solidFill>
-                            <a:srgbClr val="1D1B43"/>
-                          </a:solidFill>
-                          <a:latin typeface="Calibri"/>
-                        </a:rPr>
-                        <a:t>22</a:t>
-                      </a:r>
-                    </a:p>
-                  </a:txBody>
-                  <a:tcPr>
-                    <a:solidFill>
-                      <a:srgbClr val="FFFFFF"/>
-                    </a:solidFill>
-                  </a:tcPr>
-                </a:tc>
-                <a:tc>
-                  <a:txBody>
-                    <a:bodyPr/>
-                    <a:lstStyle/>
-                    <a:p>
-                      <a:pPr algn="l"/>
-                      <a:r>
-                        <a:rPr sz="1000" b="0">
-                          <a:solidFill>
-                            <a:srgbClr val="1D1B43"/>
-                          </a:solidFill>
-                          <a:latin typeface="Calibri"/>
-                        </a:rPr>
-                        <a:t>96.4%</a:t>
+                        <a:t>Abril 2026</a:t>
+                      </a:r>
+                    </a:p>
+                  </a:txBody>
+                  <a:tcPr>
+                    <a:solidFill>
+                      <a:srgbClr val="FFFFFF"/>
+                    </a:solidFill>
+                  </a:tcPr>
+                </a:tc>
+                <a:tc>
+                  <a:txBody>
+                    <a:bodyPr/>
+                    <a:lstStyle/>
+                    <a:p>
+                      <a:pPr algn="l"/>
+                      <a:r>
+                        <a:rPr sz="1000" b="0">
+                          <a:solidFill>
+                            <a:srgbClr val="1D1B43"/>
+                          </a:solidFill>
+                          <a:latin typeface="Calibri"/>
+                        </a:rPr>
+                        <a:t>577</a:t>
+                      </a:r>
+                    </a:p>
+                  </a:txBody>
+                  <a:tcPr>
+                    <a:solidFill>
+                      <a:srgbClr val="FFFFFF"/>
+                    </a:solidFill>
+                  </a:tcPr>
+                </a:tc>
+                <a:tc>
+                  <a:txBody>
+                    <a:bodyPr/>
+                    <a:lstStyle/>
+                    <a:p>
+                      <a:pPr algn="l"/>
+                      <a:r>
+                        <a:rPr sz="1000" b="0">
+                          <a:solidFill>
+                            <a:srgbClr val="1D1B43"/>
+                          </a:solidFill>
+                          <a:latin typeface="Calibri"/>
+                        </a:rPr>
+                        <a:t>575</a:t>
+                      </a:r>
+                    </a:p>
+                  </a:txBody>
+                  <a:tcPr>
+                    <a:solidFill>
+                      <a:srgbClr val="FFFFFF"/>
+                    </a:solidFill>
+                  </a:tcPr>
+                </a:tc>
+                <a:tc>
+                  <a:txBody>
+                    <a:bodyPr/>
+                    <a:lstStyle/>
+                    <a:p>
+                      <a:pPr algn="l"/>
+                      <a:r>
+                        <a:rPr sz="1000" b="0">
+                          <a:solidFill>
+                            <a:srgbClr val="1D1B43"/>
+                          </a:solidFill>
+                          <a:latin typeface="Calibri"/>
+                        </a:rPr>
+                        <a:t>2</a:t>
+                      </a:r>
+                    </a:p>
+                  </a:txBody>
+                  <a:tcPr>
+                    <a:solidFill>
+                      <a:srgbClr val="FFFFFF"/>
+                    </a:solidFill>
+                  </a:tcPr>
+                </a:tc>
+                <a:tc>
+                  <a:txBody>
+                    <a:bodyPr/>
+                    <a:lstStyle/>
+                    <a:p>
+                      <a:pPr algn="l"/>
+                      <a:r>
+                        <a:rPr sz="1000" b="0">
+                          <a:solidFill>
+                            <a:srgbClr val="1D1B43"/>
+                          </a:solidFill>
+                          <a:latin typeface="Calibri"/>
+                        </a:rPr>
+                        <a:t>99.7%</a:t>
                       </a:r>
                     </a:p>
                   </a:txBody>
@@ -5010,99 +5010,99 @@
                           </a:solidFill>
                           <a:latin typeface="Calibri"/>
                         </a:rPr>
-                        <a:t>Abril 2026</a:t>
-                      </a:r>
-                    </a:p>
-                  </a:txBody>
-                  <a:tcPr>
-                    <a:solidFill>
-                      <a:srgbClr val="F2F2F2"/>
-                    </a:solidFill>
-                  </a:tcPr>
-                </a:tc>
-                <a:tc>
-                  <a:txBody>
-                    <a:bodyPr/>
-                    <a:lstStyle/>
-                    <a:p>
-                      <a:pPr algn="l"/>
-                      <a:r>
-                        <a:rPr sz="1000" b="0">
-                          <a:solidFill>
-                            <a:srgbClr val="1D1B43"/>
-                          </a:solidFill>
-                          <a:latin typeface="Calibri"/>
-                        </a:rPr>
-                        <a:t>577</a:t>
-                      </a:r>
-                    </a:p>
-                  </a:txBody>
-                  <a:tcPr>
-                    <a:solidFill>
-                      <a:srgbClr val="F2F2F2"/>
-                    </a:solidFill>
-                  </a:tcPr>
-                </a:tc>
-                <a:tc>
-                  <a:txBody>
-                    <a:bodyPr/>
-                    <a:lstStyle/>
-                    <a:p>
-                      <a:pPr algn="l"/>
-                      <a:r>
-                        <a:rPr sz="1000" b="0">
-                          <a:solidFill>
-                            <a:srgbClr val="1D1B43"/>
-                          </a:solidFill>
-                          <a:latin typeface="Calibri"/>
-                        </a:rPr>
-                        <a:t>575</a:t>
-                      </a:r>
-                    </a:p>
-                  </a:txBody>
-                  <a:tcPr>
-                    <a:solidFill>
-                      <a:srgbClr val="F2F2F2"/>
-                    </a:solidFill>
-                  </a:tcPr>
-                </a:tc>
-                <a:tc>
-                  <a:txBody>
-                    <a:bodyPr/>
-                    <a:lstStyle/>
-                    <a:p>
-                      <a:pPr algn="l"/>
-                      <a:r>
-                        <a:rPr sz="1000" b="0">
-                          <a:solidFill>
-                            <a:srgbClr val="1D1B43"/>
-                          </a:solidFill>
-                          <a:latin typeface="Calibri"/>
-                        </a:rPr>
-                        <a:t>2</a:t>
-                      </a:r>
-                    </a:p>
-                  </a:txBody>
-                  <a:tcPr>
-                    <a:solidFill>
-                      <a:srgbClr val="F2F2F2"/>
-                    </a:solidFill>
-                  </a:tcPr>
-                </a:tc>
-                <a:tc>
-                  <a:txBody>
-                    <a:bodyPr/>
-                    <a:lstStyle/>
-                    <a:p>
-                      <a:pPr algn="l"/>
-                      <a:r>
-                        <a:rPr sz="1000" b="0">
-                          <a:solidFill>
-                            <a:srgbClr val="1D1B43"/>
-                          </a:solidFill>
-                          <a:latin typeface="Calibri"/>
-                        </a:rPr>
-                        <a:t>99.7%</a:t>
+                        <a:t>Maio 2026</a:t>
+                      </a:r>
+                    </a:p>
+                  </a:txBody>
+                  <a:tcPr>
+                    <a:solidFill>
+                      <a:srgbClr val="F2F2F2"/>
+                    </a:solidFill>
+                  </a:tcPr>
+                </a:tc>
+                <a:tc>
+                  <a:txBody>
+                    <a:bodyPr/>
+                    <a:lstStyle/>
+                    <a:p>
+                      <a:pPr algn="l"/>
+                      <a:r>
+                        <a:rPr sz="1000" b="0">
+                          <a:solidFill>
+                            <a:srgbClr val="1D1B43"/>
+                          </a:solidFill>
+                          <a:latin typeface="Calibri"/>
+                        </a:rPr>
+                        <a:t>704</a:t>
+                      </a:r>
+                    </a:p>
+                  </a:txBody>
+                  <a:tcPr>
+                    <a:solidFill>
+                      <a:srgbClr val="F2F2F2"/>
+                    </a:solidFill>
+                  </a:tcPr>
+                </a:tc>
+                <a:tc>
+                  <a:txBody>
+                    <a:bodyPr/>
+                    <a:lstStyle/>
+                    <a:p>
+                      <a:pPr algn="l"/>
+                      <a:r>
+                        <a:rPr sz="1000" b="0">
+                          <a:solidFill>
+                            <a:srgbClr val="1D1B43"/>
+                          </a:solidFill>
+                          <a:latin typeface="Calibri"/>
+                        </a:rPr>
+                        <a:t>683</a:t>
+                      </a:r>
+                    </a:p>
+                  </a:txBody>
+                  <a:tcPr>
+                    <a:solidFill>
+                      <a:srgbClr val="F2F2F2"/>
+                    </a:solidFill>
+                  </a:tcPr>
+                </a:tc>
+                <a:tc>
+                  <a:txBody>
+                    <a:bodyPr/>
+                    <a:lstStyle/>
+                    <a:p>
+                      <a:pPr algn="l"/>
+                      <a:r>
+                        <a:rPr sz="1000" b="0">
+                          <a:solidFill>
+                            <a:srgbClr val="1D1B43"/>
+                          </a:solidFill>
+                          <a:latin typeface="Calibri"/>
+                        </a:rPr>
+                        <a:t>21</a:t>
+                      </a:r>
+                    </a:p>
+                  </a:txBody>
+                  <a:tcPr>
+                    <a:solidFill>
+                      <a:srgbClr val="F2F2F2"/>
+                    </a:solidFill>
+                  </a:tcPr>
+                </a:tc>
+                <a:tc>
+                  <a:txBody>
+                    <a:bodyPr/>
+                    <a:lstStyle/>
+                    <a:p>
+                      <a:pPr algn="l"/>
+                      <a:r>
+                        <a:rPr sz="1000" b="0">
+                          <a:solidFill>
+                            <a:srgbClr val="1D1B43"/>
+                          </a:solidFill>
+                          <a:latin typeface="Calibri"/>
+                        </a:rPr>
+                        <a:t>97.0%</a:t>
                       </a:r>
                     </a:p>
                   </a:txBody>
@@ -5190,7 +5190,7 @@
                 </a:solidFill>
                 <a:latin typeface="Calibri"/>
               </a:rPr>
-              <a:t>PERFORMANCE: 99.7% - EXCELENTE</a:t>
+              <a:t>PERFORMANCE: 97.0% - EXCELENTE</a:t>
             </a:r>
           </a:p>
         </p:txBody>
@@ -5275,7 +5275,7 @@
                 </a:solidFill>
                 <a:latin typeface="Calibri"/>
               </a:rPr>
-              <a:t>OCORRENCIAS FORA DO PRAZO (2)</a:t>
+              <a:t>OCORRENCIAS FORA DO PRAZO (21)</a:t>
             </a:r>
           </a:p>
         </p:txBody>
@@ -5333,7 +5333,7 @@
         </p:nvGraphicFramePr>
         <p:xfrm>
           <a:off x="457200" y="1828800"/>
-          <a:ext cx="11429999" cy="1152144"/>
+          <a:ext cx="11429999" cy="4571996"/>
         </p:xfrm>
         <a:graphic>
           <a:graphicData uri="http://schemas.openxmlformats.org/drawingml/2006/table">
@@ -5348,7 +5348,7 @@
                 <a:gridCol w="1554480"/>
                 <a:gridCol w="2743200"/>
               </a:tblGrid>
-              <a:tr h="384048">
+              <a:tr h="207818">
                 <a:tc>
                   <a:txBody>
                     <a:bodyPr/>
@@ -5465,90 +5465,90 @@
                   </a:tcPr>
                 </a:tc>
               </a:tr>
-              <a:tr h="384048">
-                <a:tc>
-                  <a:txBody>
-                    <a:bodyPr/>
-                    <a:lstStyle/>
-                    <a:p>
-                      <a:pPr algn="l"/>
-                      <a:r>
-                        <a:rPr sz="1000" b="0">
-                          <a:solidFill>
-                            <a:srgbClr val="1D1B43"/>
-                          </a:solidFill>
-                          <a:latin typeface="Calibri"/>
-                        </a:rPr>
-                        <a:t>276428</a:t>
-                      </a:r>
-                    </a:p>
-                  </a:txBody>
-                  <a:tcPr>
-                    <a:solidFill>
-                      <a:srgbClr val="FFFFFF"/>
-                    </a:solidFill>
-                  </a:tcPr>
-                </a:tc>
-                <a:tc>
-                  <a:txBody>
-                    <a:bodyPr/>
-                    <a:lstStyle/>
-                    <a:p>
-                      <a:pPr algn="l"/>
-                      <a:r>
-                        <a:rPr sz="1000" b="0">
-                          <a:solidFill>
-                            <a:srgbClr val="1D1B43"/>
-                          </a:solidFill>
-                          <a:latin typeface="Calibri"/>
-                        </a:rPr>
-                        <a:t>ANSELL BRAZIL LTDA. - SANTO ANDRE / SP</a:t>
-                      </a:r>
-                    </a:p>
-                  </a:txBody>
-                  <a:tcPr>
-                    <a:solidFill>
-                      <a:srgbClr val="FFFFFF"/>
-                    </a:solidFill>
-                  </a:tcPr>
-                </a:tc>
-                <a:tc>
-                  <a:txBody>
-                    <a:bodyPr/>
-                    <a:lstStyle/>
-                    <a:p>
-                      <a:pPr algn="l"/>
-                      <a:r>
-                        <a:rPr sz="1000" b="0">
-                          <a:solidFill>
-                            <a:srgbClr val="1D1B43"/>
-                          </a:solidFill>
-                          <a:latin typeface="Calibri"/>
-                        </a:rPr>
-                        <a:t>SANTO ANDRE/SP</a:t>
-                      </a:r>
-                    </a:p>
-                  </a:txBody>
-                  <a:tcPr>
-                    <a:solidFill>
-                      <a:srgbClr val="FFFFFF"/>
-                    </a:solidFill>
-                  </a:tcPr>
-                </a:tc>
-                <a:tc>
-                  <a:txBody>
-                    <a:bodyPr/>
-                    <a:lstStyle/>
-                    <a:p>
-                      <a:pPr algn="l"/>
-                      <a:r>
-                        <a:rPr sz="1000" b="0">
-                          <a:solidFill>
-                            <a:srgbClr val="1D1B43"/>
-                          </a:solidFill>
-                          <a:latin typeface="Calibri"/>
-                        </a:rPr>
-                        <a:t>10/04/2026</a:t>
+              <a:tr h="207818">
+                <a:tc>
+                  <a:txBody>
+                    <a:bodyPr/>
+                    <a:lstStyle/>
+                    <a:p>
+                      <a:pPr algn="l"/>
+                      <a:r>
+                        <a:rPr sz="1000" b="0">
+                          <a:solidFill>
+                            <a:srgbClr val="1D1B43"/>
+                          </a:solidFill>
+                          <a:latin typeface="Calibri"/>
+                        </a:rPr>
+                        <a:t>281128</a:t>
+                      </a:r>
+                    </a:p>
+                  </a:txBody>
+                  <a:tcPr>
+                    <a:solidFill>
+                      <a:srgbClr val="FFFFFF"/>
+                    </a:solidFill>
+                  </a:tcPr>
+                </a:tc>
+                <a:tc>
+                  <a:txBody>
+                    <a:bodyPr/>
+                    <a:lstStyle/>
+                    <a:p>
+                      <a:pPr algn="l"/>
+                      <a:r>
+                        <a:rPr sz="1000" b="0">
+                          <a:solidFill>
+                            <a:srgbClr val="1D1B43"/>
+                          </a:solidFill>
+                          <a:latin typeface="Calibri"/>
+                        </a:rPr>
+                        <a:t>CORSUL COMERCIO E RE - SAO JOSE DOS PINHAIS / PR</a:t>
+                      </a:r>
+                    </a:p>
+                  </a:txBody>
+                  <a:tcPr>
+                    <a:solidFill>
+                      <a:srgbClr val="FFFFFF"/>
+                    </a:solidFill>
+                  </a:tcPr>
+                </a:tc>
+                <a:tc>
+                  <a:txBody>
+                    <a:bodyPr/>
+                    <a:lstStyle/>
+                    <a:p>
+                      <a:pPr algn="l"/>
+                      <a:r>
+                        <a:rPr sz="1000" b="0">
+                          <a:solidFill>
+                            <a:srgbClr val="1D1B43"/>
+                          </a:solidFill>
+                          <a:latin typeface="Calibri"/>
+                        </a:rPr>
+                        <a:t>SAO JOSE DOS PINHAIS/PR</a:t>
+                      </a:r>
+                    </a:p>
+                  </a:txBody>
+                  <a:tcPr>
+                    <a:solidFill>
+                      <a:srgbClr val="FFFFFF"/>
+                    </a:solidFill>
+                  </a:tcPr>
+                </a:tc>
+                <a:tc>
+                  <a:txBody>
+                    <a:bodyPr/>
+                    <a:lstStyle/>
+                    <a:p>
+                      <a:pPr algn="l"/>
+                      <a:r>
+                        <a:rPr sz="1000" b="0">
+                          <a:solidFill>
+                            <a:srgbClr val="1D1B43"/>
+                          </a:solidFill>
+                          <a:latin typeface="Calibri"/>
+                        </a:rPr>
+                        <a:t>08/05/2026</a:t>
                       </a:r>
                     </a:p>
                   </a:txBody>
@@ -5582,21 +5582,957 @@
                   </a:tcPr>
                 </a:tc>
               </a:tr>
-              <a:tr h="384048">
-                <a:tc>
-                  <a:txBody>
-                    <a:bodyPr/>
-                    <a:lstStyle/>
-                    <a:p>
-                      <a:pPr algn="l"/>
-                      <a:r>
-                        <a:rPr sz="1000" b="0">
-                          <a:solidFill>
-                            <a:srgbClr val="1D1B43"/>
-                          </a:solidFill>
-                          <a:latin typeface="Calibri"/>
-                        </a:rPr>
-                        <a:t>276943</a:t>
+              <a:tr h="207818">
+                <a:tc>
+                  <a:txBody>
+                    <a:bodyPr/>
+                    <a:lstStyle/>
+                    <a:p>
+                      <a:pPr algn="l"/>
+                      <a:r>
+                        <a:rPr sz="1000" b="0">
+                          <a:solidFill>
+                            <a:srgbClr val="1D1B43"/>
+                          </a:solidFill>
+                          <a:latin typeface="Calibri"/>
+                        </a:rPr>
+                        <a:t>281135</a:t>
+                      </a:r>
+                    </a:p>
+                  </a:txBody>
+                  <a:tcPr>
+                    <a:solidFill>
+                      <a:srgbClr val="F2F2F2"/>
+                    </a:solidFill>
+                  </a:tcPr>
+                </a:tc>
+                <a:tc>
+                  <a:txBody>
+                    <a:bodyPr/>
+                    <a:lstStyle/>
+                    <a:p>
+                      <a:pPr algn="l"/>
+                      <a:r>
+                        <a:rPr sz="1000" b="0">
+                          <a:solidFill>
+                            <a:srgbClr val="1D1B43"/>
+                          </a:solidFill>
+                          <a:latin typeface="Calibri"/>
+                        </a:rPr>
+                        <a:t>CORSUL COMERCIO E RE - SAO JOSE DOS PINHAIS / PR</a:t>
+                      </a:r>
+                    </a:p>
+                  </a:txBody>
+                  <a:tcPr>
+                    <a:solidFill>
+                      <a:srgbClr val="F2F2F2"/>
+                    </a:solidFill>
+                  </a:tcPr>
+                </a:tc>
+                <a:tc>
+                  <a:txBody>
+                    <a:bodyPr/>
+                    <a:lstStyle/>
+                    <a:p>
+                      <a:pPr algn="l"/>
+                      <a:r>
+                        <a:rPr sz="1000" b="0">
+                          <a:solidFill>
+                            <a:srgbClr val="1D1B43"/>
+                          </a:solidFill>
+                          <a:latin typeface="Calibri"/>
+                        </a:rPr>
+                        <a:t>SAO JOSE DOS PINHAIS/PR</a:t>
+                      </a:r>
+                    </a:p>
+                  </a:txBody>
+                  <a:tcPr>
+                    <a:solidFill>
+                      <a:srgbClr val="F2F2F2"/>
+                    </a:solidFill>
+                  </a:tcPr>
+                </a:tc>
+                <a:tc>
+                  <a:txBody>
+                    <a:bodyPr/>
+                    <a:lstStyle/>
+                    <a:p>
+                      <a:pPr algn="l"/>
+                      <a:r>
+                        <a:rPr sz="1000" b="0">
+                          <a:solidFill>
+                            <a:srgbClr val="1D1B43"/>
+                          </a:solidFill>
+                          <a:latin typeface="Calibri"/>
+                        </a:rPr>
+                        <a:t>08/05/2026</a:t>
+                      </a:r>
+                    </a:p>
+                  </a:txBody>
+                  <a:tcPr>
+                    <a:solidFill>
+                      <a:srgbClr val="F2F2F2"/>
+                    </a:solidFill>
+                  </a:tcPr>
+                </a:tc>
+                <a:tc>
+                  <a:txBody>
+                    <a:bodyPr/>
+                    <a:lstStyle/>
+                    <a:p>
+                      <a:pPr algn="l"/>
+                      <a:r>
+                        <a:rPr sz="1000" b="0">
+                          <a:solidFill>
+                            <a:srgbClr val="1D1B43"/>
+                          </a:solidFill>
+                          <a:latin typeface="Calibri"/>
+                        </a:rPr>
+                        <a:t>ENTREGUE FORA DO PRAZO</a:t>
+                      </a:r>
+                    </a:p>
+                  </a:txBody>
+                  <a:tcPr>
+                    <a:solidFill>
+                      <a:srgbClr val="F2F2F2"/>
+                    </a:solidFill>
+                  </a:tcPr>
+                </a:tc>
+              </a:tr>
+              <a:tr h="207818">
+                <a:tc>
+                  <a:txBody>
+                    <a:bodyPr/>
+                    <a:lstStyle/>
+                    <a:p>
+                      <a:pPr algn="l"/>
+                      <a:r>
+                        <a:rPr sz="1000" b="0">
+                          <a:solidFill>
+                            <a:srgbClr val="1D1B43"/>
+                          </a:solidFill>
+                          <a:latin typeface="Calibri"/>
+                        </a:rPr>
+                        <a:t>281137</a:t>
+                      </a:r>
+                    </a:p>
+                  </a:txBody>
+                  <a:tcPr>
+                    <a:solidFill>
+                      <a:srgbClr val="FFFFFF"/>
+                    </a:solidFill>
+                  </a:tcPr>
+                </a:tc>
+                <a:tc>
+                  <a:txBody>
+                    <a:bodyPr/>
+                    <a:lstStyle/>
+                    <a:p>
+                      <a:pPr algn="l"/>
+                      <a:r>
+                        <a:rPr sz="1000" b="0">
+                          <a:solidFill>
+                            <a:srgbClr val="1D1B43"/>
+                          </a:solidFill>
+                          <a:latin typeface="Calibri"/>
+                        </a:rPr>
+                        <a:t>CORSUL COMERCIO E RE - SAO JOSE DOS PINHAIS / PR</a:t>
+                      </a:r>
+                    </a:p>
+                  </a:txBody>
+                  <a:tcPr>
+                    <a:solidFill>
+                      <a:srgbClr val="FFFFFF"/>
+                    </a:solidFill>
+                  </a:tcPr>
+                </a:tc>
+                <a:tc>
+                  <a:txBody>
+                    <a:bodyPr/>
+                    <a:lstStyle/>
+                    <a:p>
+                      <a:pPr algn="l"/>
+                      <a:r>
+                        <a:rPr sz="1000" b="0">
+                          <a:solidFill>
+                            <a:srgbClr val="1D1B43"/>
+                          </a:solidFill>
+                          <a:latin typeface="Calibri"/>
+                        </a:rPr>
+                        <a:t>SAO JOSE DOS PINHAIS/PR</a:t>
+                      </a:r>
+                    </a:p>
+                  </a:txBody>
+                  <a:tcPr>
+                    <a:solidFill>
+                      <a:srgbClr val="FFFFFF"/>
+                    </a:solidFill>
+                  </a:tcPr>
+                </a:tc>
+                <a:tc>
+                  <a:txBody>
+                    <a:bodyPr/>
+                    <a:lstStyle/>
+                    <a:p>
+                      <a:pPr algn="l"/>
+                      <a:r>
+                        <a:rPr sz="1000" b="0">
+                          <a:solidFill>
+                            <a:srgbClr val="1D1B43"/>
+                          </a:solidFill>
+                          <a:latin typeface="Calibri"/>
+                        </a:rPr>
+                        <a:t>08/05/2026</a:t>
+                      </a:r>
+                    </a:p>
+                  </a:txBody>
+                  <a:tcPr>
+                    <a:solidFill>
+                      <a:srgbClr val="FFFFFF"/>
+                    </a:solidFill>
+                  </a:tcPr>
+                </a:tc>
+                <a:tc>
+                  <a:txBody>
+                    <a:bodyPr/>
+                    <a:lstStyle/>
+                    <a:p>
+                      <a:pPr algn="l"/>
+                      <a:r>
+                        <a:rPr sz="1000" b="0">
+                          <a:solidFill>
+                            <a:srgbClr val="1D1B43"/>
+                          </a:solidFill>
+                          <a:latin typeface="Calibri"/>
+                        </a:rPr>
+                        <a:t>ENTREGUE FORA DO PRAZO</a:t>
+                      </a:r>
+                    </a:p>
+                  </a:txBody>
+                  <a:tcPr>
+                    <a:solidFill>
+                      <a:srgbClr val="FFFFFF"/>
+                    </a:solidFill>
+                  </a:tcPr>
+                </a:tc>
+              </a:tr>
+              <a:tr h="207818">
+                <a:tc>
+                  <a:txBody>
+                    <a:bodyPr/>
+                    <a:lstStyle/>
+                    <a:p>
+                      <a:pPr algn="l"/>
+                      <a:r>
+                        <a:rPr sz="1000" b="0">
+                          <a:solidFill>
+                            <a:srgbClr val="1D1B43"/>
+                          </a:solidFill>
+                          <a:latin typeface="Calibri"/>
+                        </a:rPr>
+                        <a:t>281177</a:t>
+                      </a:r>
+                    </a:p>
+                  </a:txBody>
+                  <a:tcPr>
+                    <a:solidFill>
+                      <a:srgbClr val="F2F2F2"/>
+                    </a:solidFill>
+                  </a:tcPr>
+                </a:tc>
+                <a:tc>
+                  <a:txBody>
+                    <a:bodyPr/>
+                    <a:lstStyle/>
+                    <a:p>
+                      <a:pPr algn="l"/>
+                      <a:r>
+                        <a:rPr sz="1000" b="0">
+                          <a:solidFill>
+                            <a:srgbClr val="1D1B43"/>
+                          </a:solidFill>
+                          <a:latin typeface="Calibri"/>
+                        </a:rPr>
+                        <a:t>STELLANTIS AUTOMOVEI - BETIM / MG</a:t>
+                      </a:r>
+                    </a:p>
+                  </a:txBody>
+                  <a:tcPr>
+                    <a:solidFill>
+                      <a:srgbClr val="F2F2F2"/>
+                    </a:solidFill>
+                  </a:tcPr>
+                </a:tc>
+                <a:tc>
+                  <a:txBody>
+                    <a:bodyPr/>
+                    <a:lstStyle/>
+                    <a:p>
+                      <a:pPr algn="l"/>
+                      <a:r>
+                        <a:rPr sz="1000" b="0">
+                          <a:solidFill>
+                            <a:srgbClr val="1D1B43"/>
+                          </a:solidFill>
+                          <a:latin typeface="Calibri"/>
+                        </a:rPr>
+                        <a:t>BETIM/MG</a:t>
+                      </a:r>
+                    </a:p>
+                  </a:txBody>
+                  <a:tcPr>
+                    <a:solidFill>
+                      <a:srgbClr val="F2F2F2"/>
+                    </a:solidFill>
+                  </a:tcPr>
+                </a:tc>
+                <a:tc>
+                  <a:txBody>
+                    <a:bodyPr/>
+                    <a:lstStyle/>
+                    <a:p>
+                      <a:pPr algn="l"/>
+                      <a:r>
+                        <a:rPr sz="1000" b="0">
+                          <a:solidFill>
+                            <a:srgbClr val="1D1B43"/>
+                          </a:solidFill>
+                          <a:latin typeface="Calibri"/>
+                        </a:rPr>
+                        <a:t>12/05/2026</a:t>
+                      </a:r>
+                    </a:p>
+                  </a:txBody>
+                  <a:tcPr>
+                    <a:solidFill>
+                      <a:srgbClr val="F2F2F2"/>
+                    </a:solidFill>
+                  </a:tcPr>
+                </a:tc>
+                <a:tc>
+                  <a:txBody>
+                    <a:bodyPr/>
+                    <a:lstStyle/>
+                    <a:p>
+                      <a:pPr algn="l"/>
+                      <a:r>
+                        <a:rPr sz="1000" b="0">
+                          <a:solidFill>
+                            <a:srgbClr val="1D1B43"/>
+                          </a:solidFill>
+                          <a:latin typeface="Calibri"/>
+                        </a:rPr>
+                        <a:t>ENTREGUE FORA DO PRAZO</a:t>
+                      </a:r>
+                    </a:p>
+                  </a:txBody>
+                  <a:tcPr>
+                    <a:solidFill>
+                      <a:srgbClr val="F2F2F2"/>
+                    </a:solidFill>
+                  </a:tcPr>
+                </a:tc>
+              </a:tr>
+              <a:tr h="207818">
+                <a:tc>
+                  <a:txBody>
+                    <a:bodyPr/>
+                    <a:lstStyle/>
+                    <a:p>
+                      <a:pPr algn="l"/>
+                      <a:r>
+                        <a:rPr sz="1000" b="0">
+                          <a:solidFill>
+                            <a:srgbClr val="1D1B43"/>
+                          </a:solidFill>
+                          <a:latin typeface="Calibri"/>
+                        </a:rPr>
+                        <a:t>281243</a:t>
+                      </a:r>
+                    </a:p>
+                  </a:txBody>
+                  <a:tcPr>
+                    <a:solidFill>
+                      <a:srgbClr val="FFFFFF"/>
+                    </a:solidFill>
+                  </a:tcPr>
+                </a:tc>
+                <a:tc>
+                  <a:txBody>
+                    <a:bodyPr/>
+                    <a:lstStyle/>
+                    <a:p>
+                      <a:pPr algn="l"/>
+                      <a:r>
+                        <a:rPr sz="1000" b="0">
+                          <a:solidFill>
+                            <a:srgbClr val="1D1B43"/>
+                          </a:solidFill>
+                          <a:latin typeface="Calibri"/>
+                        </a:rPr>
+                        <a:t>CORSUL COMERCIO E RE - SAO JOSE DOS PINHAIS / PR</a:t>
+                      </a:r>
+                    </a:p>
+                  </a:txBody>
+                  <a:tcPr>
+                    <a:solidFill>
+                      <a:srgbClr val="FFFFFF"/>
+                    </a:solidFill>
+                  </a:tcPr>
+                </a:tc>
+                <a:tc>
+                  <a:txBody>
+                    <a:bodyPr/>
+                    <a:lstStyle/>
+                    <a:p>
+                      <a:pPr algn="l"/>
+                      <a:r>
+                        <a:rPr sz="1000" b="0">
+                          <a:solidFill>
+                            <a:srgbClr val="1D1B43"/>
+                          </a:solidFill>
+                          <a:latin typeface="Calibri"/>
+                        </a:rPr>
+                        <a:t>SAO JOSE DOS PINHAIS/PR</a:t>
+                      </a:r>
+                    </a:p>
+                  </a:txBody>
+                  <a:tcPr>
+                    <a:solidFill>
+                      <a:srgbClr val="FFFFFF"/>
+                    </a:solidFill>
+                  </a:tcPr>
+                </a:tc>
+                <a:tc>
+                  <a:txBody>
+                    <a:bodyPr/>
+                    <a:lstStyle/>
+                    <a:p>
+                      <a:pPr algn="l"/>
+                      <a:r>
+                        <a:rPr sz="1000" b="0">
+                          <a:solidFill>
+                            <a:srgbClr val="1D1B43"/>
+                          </a:solidFill>
+                          <a:latin typeface="Calibri"/>
+                        </a:rPr>
+                        <a:t>08/05/2026</a:t>
+                      </a:r>
+                    </a:p>
+                  </a:txBody>
+                  <a:tcPr>
+                    <a:solidFill>
+                      <a:srgbClr val="FFFFFF"/>
+                    </a:solidFill>
+                  </a:tcPr>
+                </a:tc>
+                <a:tc>
+                  <a:txBody>
+                    <a:bodyPr/>
+                    <a:lstStyle/>
+                    <a:p>
+                      <a:pPr algn="l"/>
+                      <a:r>
+                        <a:rPr sz="1000" b="0">
+                          <a:solidFill>
+                            <a:srgbClr val="1D1B43"/>
+                          </a:solidFill>
+                          <a:latin typeface="Calibri"/>
+                        </a:rPr>
+                        <a:t>ENTREGUE FORA DO PRAZO</a:t>
+                      </a:r>
+                    </a:p>
+                  </a:txBody>
+                  <a:tcPr>
+                    <a:solidFill>
+                      <a:srgbClr val="FFFFFF"/>
+                    </a:solidFill>
+                  </a:tcPr>
+                </a:tc>
+              </a:tr>
+              <a:tr h="207818">
+                <a:tc>
+                  <a:txBody>
+                    <a:bodyPr/>
+                    <a:lstStyle/>
+                    <a:p>
+                      <a:pPr algn="l"/>
+                      <a:r>
+                        <a:rPr sz="1000" b="0">
+                          <a:solidFill>
+                            <a:srgbClr val="1D1B43"/>
+                          </a:solidFill>
+                          <a:latin typeface="Calibri"/>
+                        </a:rPr>
+                        <a:t>281248</a:t>
+                      </a:r>
+                    </a:p>
+                  </a:txBody>
+                  <a:tcPr>
+                    <a:solidFill>
+                      <a:srgbClr val="F2F2F2"/>
+                    </a:solidFill>
+                  </a:tcPr>
+                </a:tc>
+                <a:tc>
+                  <a:txBody>
+                    <a:bodyPr/>
+                    <a:lstStyle/>
+                    <a:p>
+                      <a:pPr algn="l"/>
+                      <a:r>
+                        <a:rPr sz="1000" b="0">
+                          <a:solidFill>
+                            <a:srgbClr val="1D1B43"/>
+                          </a:solidFill>
+                          <a:latin typeface="Calibri"/>
+                        </a:rPr>
+                        <a:t>CORSUL COMERCIO E RE - SAO JOSE DOS PINHAIS / PR</a:t>
+                      </a:r>
+                    </a:p>
+                  </a:txBody>
+                  <a:tcPr>
+                    <a:solidFill>
+                      <a:srgbClr val="F2F2F2"/>
+                    </a:solidFill>
+                  </a:tcPr>
+                </a:tc>
+                <a:tc>
+                  <a:txBody>
+                    <a:bodyPr/>
+                    <a:lstStyle/>
+                    <a:p>
+                      <a:pPr algn="l"/>
+                      <a:r>
+                        <a:rPr sz="1000" b="0">
+                          <a:solidFill>
+                            <a:srgbClr val="1D1B43"/>
+                          </a:solidFill>
+                          <a:latin typeface="Calibri"/>
+                        </a:rPr>
+                        <a:t>SAO JOSE DOS PINHAIS/PR</a:t>
+                      </a:r>
+                    </a:p>
+                  </a:txBody>
+                  <a:tcPr>
+                    <a:solidFill>
+                      <a:srgbClr val="F2F2F2"/>
+                    </a:solidFill>
+                  </a:tcPr>
+                </a:tc>
+                <a:tc>
+                  <a:txBody>
+                    <a:bodyPr/>
+                    <a:lstStyle/>
+                    <a:p>
+                      <a:pPr algn="l"/>
+                      <a:r>
+                        <a:rPr sz="1000" b="0">
+                          <a:solidFill>
+                            <a:srgbClr val="1D1B43"/>
+                          </a:solidFill>
+                          <a:latin typeface="Calibri"/>
+                        </a:rPr>
+                        <a:t>08/05/2026</a:t>
+                      </a:r>
+                    </a:p>
+                  </a:txBody>
+                  <a:tcPr>
+                    <a:solidFill>
+                      <a:srgbClr val="F2F2F2"/>
+                    </a:solidFill>
+                  </a:tcPr>
+                </a:tc>
+                <a:tc>
+                  <a:txBody>
+                    <a:bodyPr/>
+                    <a:lstStyle/>
+                    <a:p>
+                      <a:pPr algn="l"/>
+                      <a:r>
+                        <a:rPr sz="1000" b="0">
+                          <a:solidFill>
+                            <a:srgbClr val="1D1B43"/>
+                          </a:solidFill>
+                          <a:latin typeface="Calibri"/>
+                        </a:rPr>
+                        <a:t>ENTREGUE FORA DO PRAZO</a:t>
+                      </a:r>
+                    </a:p>
+                  </a:txBody>
+                  <a:tcPr>
+                    <a:solidFill>
+                      <a:srgbClr val="F2F2F2"/>
+                    </a:solidFill>
+                  </a:tcPr>
+                </a:tc>
+              </a:tr>
+              <a:tr h="207818">
+                <a:tc>
+                  <a:txBody>
+                    <a:bodyPr/>
+                    <a:lstStyle/>
+                    <a:p>
+                      <a:pPr algn="l"/>
+                      <a:r>
+                        <a:rPr sz="1000" b="0">
+                          <a:solidFill>
+                            <a:srgbClr val="1D1B43"/>
+                          </a:solidFill>
+                          <a:latin typeface="Calibri"/>
+                        </a:rPr>
+                        <a:t>281296</a:t>
+                      </a:r>
+                    </a:p>
+                  </a:txBody>
+                  <a:tcPr>
+                    <a:solidFill>
+                      <a:srgbClr val="FFFFFF"/>
+                    </a:solidFill>
+                  </a:tcPr>
+                </a:tc>
+                <a:tc>
+                  <a:txBody>
+                    <a:bodyPr/>
+                    <a:lstStyle/>
+                    <a:p>
+                      <a:pPr algn="l"/>
+                      <a:r>
+                        <a:rPr sz="1000" b="0">
+                          <a:solidFill>
+                            <a:srgbClr val="1D1B43"/>
+                          </a:solidFill>
+                          <a:latin typeface="Calibri"/>
+                        </a:rPr>
+                        <a:t>CORSUL COMERCIO E RE - SAO JOSE DOS PINHAIS / PR</a:t>
+                      </a:r>
+                    </a:p>
+                  </a:txBody>
+                  <a:tcPr>
+                    <a:solidFill>
+                      <a:srgbClr val="FFFFFF"/>
+                    </a:solidFill>
+                  </a:tcPr>
+                </a:tc>
+                <a:tc>
+                  <a:txBody>
+                    <a:bodyPr/>
+                    <a:lstStyle/>
+                    <a:p>
+                      <a:pPr algn="l"/>
+                      <a:r>
+                        <a:rPr sz="1000" b="0">
+                          <a:solidFill>
+                            <a:srgbClr val="1D1B43"/>
+                          </a:solidFill>
+                          <a:latin typeface="Calibri"/>
+                        </a:rPr>
+                        <a:t>SAO JOSE DOS PINHAIS/PR</a:t>
+                      </a:r>
+                    </a:p>
+                  </a:txBody>
+                  <a:tcPr>
+                    <a:solidFill>
+                      <a:srgbClr val="FFFFFF"/>
+                    </a:solidFill>
+                  </a:tcPr>
+                </a:tc>
+                <a:tc>
+                  <a:txBody>
+                    <a:bodyPr/>
+                    <a:lstStyle/>
+                    <a:p>
+                      <a:pPr algn="l"/>
+                      <a:r>
+                        <a:rPr sz="1000" b="0">
+                          <a:solidFill>
+                            <a:srgbClr val="1D1B43"/>
+                          </a:solidFill>
+                          <a:latin typeface="Calibri"/>
+                        </a:rPr>
+                        <a:t>08/05/2026</a:t>
+                      </a:r>
+                    </a:p>
+                  </a:txBody>
+                  <a:tcPr>
+                    <a:solidFill>
+                      <a:srgbClr val="FFFFFF"/>
+                    </a:solidFill>
+                  </a:tcPr>
+                </a:tc>
+                <a:tc>
+                  <a:txBody>
+                    <a:bodyPr/>
+                    <a:lstStyle/>
+                    <a:p>
+                      <a:pPr algn="l"/>
+                      <a:r>
+                        <a:rPr sz="1000" b="0">
+                          <a:solidFill>
+                            <a:srgbClr val="1D1B43"/>
+                          </a:solidFill>
+                          <a:latin typeface="Calibri"/>
+                        </a:rPr>
+                        <a:t>ENTREGUE FORA DO PRAZO</a:t>
+                      </a:r>
+                    </a:p>
+                  </a:txBody>
+                  <a:tcPr>
+                    <a:solidFill>
+                      <a:srgbClr val="FFFFFF"/>
+                    </a:solidFill>
+                  </a:tcPr>
+                </a:tc>
+              </a:tr>
+              <a:tr h="207818">
+                <a:tc>
+                  <a:txBody>
+                    <a:bodyPr/>
+                    <a:lstStyle/>
+                    <a:p>
+                      <a:pPr algn="l"/>
+                      <a:r>
+                        <a:rPr sz="1000" b="0">
+                          <a:solidFill>
+                            <a:srgbClr val="1D1B43"/>
+                          </a:solidFill>
+                          <a:latin typeface="Calibri"/>
+                        </a:rPr>
+                        <a:t>281297</a:t>
+                      </a:r>
+                    </a:p>
+                  </a:txBody>
+                  <a:tcPr>
+                    <a:solidFill>
+                      <a:srgbClr val="F2F2F2"/>
+                    </a:solidFill>
+                  </a:tcPr>
+                </a:tc>
+                <a:tc>
+                  <a:txBody>
+                    <a:bodyPr/>
+                    <a:lstStyle/>
+                    <a:p>
+                      <a:pPr algn="l"/>
+                      <a:r>
+                        <a:rPr sz="1000" b="0">
+                          <a:solidFill>
+                            <a:srgbClr val="1D1B43"/>
+                          </a:solidFill>
+                          <a:latin typeface="Calibri"/>
+                        </a:rPr>
+                        <a:t>CORSUL COMERCIO E RE - SAO JOSE DOS PINHAIS / PR</a:t>
+                      </a:r>
+                    </a:p>
+                  </a:txBody>
+                  <a:tcPr>
+                    <a:solidFill>
+                      <a:srgbClr val="F2F2F2"/>
+                    </a:solidFill>
+                  </a:tcPr>
+                </a:tc>
+                <a:tc>
+                  <a:txBody>
+                    <a:bodyPr/>
+                    <a:lstStyle/>
+                    <a:p>
+                      <a:pPr algn="l"/>
+                      <a:r>
+                        <a:rPr sz="1000" b="0">
+                          <a:solidFill>
+                            <a:srgbClr val="1D1B43"/>
+                          </a:solidFill>
+                          <a:latin typeface="Calibri"/>
+                        </a:rPr>
+                        <a:t>SAO JOSE DOS PINHAIS/PR</a:t>
+                      </a:r>
+                    </a:p>
+                  </a:txBody>
+                  <a:tcPr>
+                    <a:solidFill>
+                      <a:srgbClr val="F2F2F2"/>
+                    </a:solidFill>
+                  </a:tcPr>
+                </a:tc>
+                <a:tc>
+                  <a:txBody>
+                    <a:bodyPr/>
+                    <a:lstStyle/>
+                    <a:p>
+                      <a:pPr algn="l"/>
+                      <a:r>
+                        <a:rPr sz="1000" b="0">
+                          <a:solidFill>
+                            <a:srgbClr val="1D1B43"/>
+                          </a:solidFill>
+                          <a:latin typeface="Calibri"/>
+                        </a:rPr>
+                        <a:t>08/05/2026</a:t>
+                      </a:r>
+                    </a:p>
+                  </a:txBody>
+                  <a:tcPr>
+                    <a:solidFill>
+                      <a:srgbClr val="F2F2F2"/>
+                    </a:solidFill>
+                  </a:tcPr>
+                </a:tc>
+                <a:tc>
+                  <a:txBody>
+                    <a:bodyPr/>
+                    <a:lstStyle/>
+                    <a:p>
+                      <a:pPr algn="l"/>
+                      <a:r>
+                        <a:rPr sz="1000" b="0">
+                          <a:solidFill>
+                            <a:srgbClr val="1D1B43"/>
+                          </a:solidFill>
+                          <a:latin typeface="Calibri"/>
+                        </a:rPr>
+                        <a:t>ENTREGUE FORA DO PRAZO</a:t>
+                      </a:r>
+                    </a:p>
+                  </a:txBody>
+                  <a:tcPr>
+                    <a:solidFill>
+                      <a:srgbClr val="F2F2F2"/>
+                    </a:solidFill>
+                  </a:tcPr>
+                </a:tc>
+              </a:tr>
+              <a:tr h="207818">
+                <a:tc>
+                  <a:txBody>
+                    <a:bodyPr/>
+                    <a:lstStyle/>
+                    <a:p>
+                      <a:pPr algn="l"/>
+                      <a:r>
+                        <a:rPr sz="1000" b="0">
+                          <a:solidFill>
+                            <a:srgbClr val="1D1B43"/>
+                          </a:solidFill>
+                          <a:latin typeface="Calibri"/>
+                        </a:rPr>
+                        <a:t>281299</a:t>
+                      </a:r>
+                    </a:p>
+                  </a:txBody>
+                  <a:tcPr>
+                    <a:solidFill>
+                      <a:srgbClr val="FFFFFF"/>
+                    </a:solidFill>
+                  </a:tcPr>
+                </a:tc>
+                <a:tc>
+                  <a:txBody>
+                    <a:bodyPr/>
+                    <a:lstStyle/>
+                    <a:p>
+                      <a:pPr algn="l"/>
+                      <a:r>
+                        <a:rPr sz="1000" b="0">
+                          <a:solidFill>
+                            <a:srgbClr val="1D1B43"/>
+                          </a:solidFill>
+                          <a:latin typeface="Calibri"/>
+                        </a:rPr>
+                        <a:t>CORSUL COMERCIO E RE - SAO JOSE DOS PINHAIS / PR</a:t>
+                      </a:r>
+                    </a:p>
+                  </a:txBody>
+                  <a:tcPr>
+                    <a:solidFill>
+                      <a:srgbClr val="FFFFFF"/>
+                    </a:solidFill>
+                  </a:tcPr>
+                </a:tc>
+                <a:tc>
+                  <a:txBody>
+                    <a:bodyPr/>
+                    <a:lstStyle/>
+                    <a:p>
+                      <a:pPr algn="l"/>
+                      <a:r>
+                        <a:rPr sz="1000" b="0">
+                          <a:solidFill>
+                            <a:srgbClr val="1D1B43"/>
+                          </a:solidFill>
+                          <a:latin typeface="Calibri"/>
+                        </a:rPr>
+                        <a:t>SAO JOSE DOS PINHAIS/PR</a:t>
+                      </a:r>
+                    </a:p>
+                  </a:txBody>
+                  <a:tcPr>
+                    <a:solidFill>
+                      <a:srgbClr val="FFFFFF"/>
+                    </a:solidFill>
+                  </a:tcPr>
+                </a:tc>
+                <a:tc>
+                  <a:txBody>
+                    <a:bodyPr/>
+                    <a:lstStyle/>
+                    <a:p>
+                      <a:pPr algn="l"/>
+                      <a:r>
+                        <a:rPr sz="1000" b="0">
+                          <a:solidFill>
+                            <a:srgbClr val="1D1B43"/>
+                          </a:solidFill>
+                          <a:latin typeface="Calibri"/>
+                        </a:rPr>
+                        <a:t>08/05/2026</a:t>
+                      </a:r>
+                    </a:p>
+                  </a:txBody>
+                  <a:tcPr>
+                    <a:solidFill>
+                      <a:srgbClr val="FFFFFF"/>
+                    </a:solidFill>
+                  </a:tcPr>
+                </a:tc>
+                <a:tc>
+                  <a:txBody>
+                    <a:bodyPr/>
+                    <a:lstStyle/>
+                    <a:p>
+                      <a:pPr algn="l"/>
+                      <a:r>
+                        <a:rPr sz="1000" b="0">
+                          <a:solidFill>
+                            <a:srgbClr val="1D1B43"/>
+                          </a:solidFill>
+                          <a:latin typeface="Calibri"/>
+                        </a:rPr>
+                        <a:t>ENTREGUE FORA DO PRAZO</a:t>
+                      </a:r>
+                    </a:p>
+                  </a:txBody>
+                  <a:tcPr>
+                    <a:solidFill>
+                      <a:srgbClr val="FFFFFF"/>
+                    </a:solidFill>
+                  </a:tcPr>
+                </a:tc>
+              </a:tr>
+              <a:tr h="207818">
+                <a:tc>
+                  <a:txBody>
+                    <a:bodyPr/>
+                    <a:lstStyle/>
+                    <a:p>
+                      <a:pPr algn="l"/>
+                      <a:r>
+                        <a:rPr sz="1000" b="0">
+                          <a:solidFill>
+                            <a:srgbClr val="1D1B43"/>
+                          </a:solidFill>
+                          <a:latin typeface="Calibri"/>
+                        </a:rPr>
+                        <a:t>281313</a:t>
                       </a:r>
                     </a:p>
                   </a:txBody>
@@ -5665,7 +6601,7 @@
                           </a:solidFill>
                           <a:latin typeface="Calibri"/>
                         </a:rPr>
-                        <a:t>01/04/2026</a:t>
+                        <a:t>06/05/2026</a:t>
                       </a:r>
                     </a:p>
                   </a:txBody>
@@ -5695,6 +6631,1293 @@
                   <a:tcPr>
                     <a:solidFill>
                       <a:srgbClr val="F2F2F2"/>
+                    </a:solidFill>
+                  </a:tcPr>
+                </a:tc>
+              </a:tr>
+              <a:tr h="207818">
+                <a:tc>
+                  <a:txBody>
+                    <a:bodyPr/>
+                    <a:lstStyle/>
+                    <a:p>
+                      <a:pPr algn="l"/>
+                      <a:r>
+                        <a:rPr sz="1000" b="0">
+                          <a:solidFill>
+                            <a:srgbClr val="1D1B43"/>
+                          </a:solidFill>
+                          <a:latin typeface="Calibri"/>
+                        </a:rPr>
+                        <a:t>281576</a:t>
+                      </a:r>
+                    </a:p>
+                  </a:txBody>
+                  <a:tcPr>
+                    <a:solidFill>
+                      <a:srgbClr val="FFFFFF"/>
+                    </a:solidFill>
+                  </a:tcPr>
+                </a:tc>
+                <a:tc>
+                  <a:txBody>
+                    <a:bodyPr/>
+                    <a:lstStyle/>
+                    <a:p>
+                      <a:pPr algn="l"/>
+                      <a:r>
+                        <a:rPr sz="1000" b="0">
+                          <a:solidFill>
+                            <a:srgbClr val="1D1B43"/>
+                          </a:solidFill>
+                          <a:latin typeface="Calibri"/>
+                        </a:rPr>
+                        <a:t>FRISA FRIGORIFICO RI - NANUQUE / MG</a:t>
+                      </a:r>
+                    </a:p>
+                  </a:txBody>
+                  <a:tcPr>
+                    <a:solidFill>
+                      <a:srgbClr val="FFFFFF"/>
+                    </a:solidFill>
+                  </a:tcPr>
+                </a:tc>
+                <a:tc>
+                  <a:txBody>
+                    <a:bodyPr/>
+                    <a:lstStyle/>
+                    <a:p>
+                      <a:pPr algn="l"/>
+                      <a:r>
+                        <a:rPr sz="1000" b="0">
+                          <a:solidFill>
+                            <a:srgbClr val="1D1B43"/>
+                          </a:solidFill>
+                          <a:latin typeface="Calibri"/>
+                        </a:rPr>
+                        <a:t>NANUQUE/MG</a:t>
+                      </a:r>
+                    </a:p>
+                  </a:txBody>
+                  <a:tcPr>
+                    <a:solidFill>
+                      <a:srgbClr val="FFFFFF"/>
+                    </a:solidFill>
+                  </a:tcPr>
+                </a:tc>
+                <a:tc>
+                  <a:txBody>
+                    <a:bodyPr/>
+                    <a:lstStyle/>
+                    <a:p>
+                      <a:pPr algn="l"/>
+                      <a:r>
+                        <a:rPr sz="1000" b="0">
+                          <a:solidFill>
+                            <a:srgbClr val="1D1B43"/>
+                          </a:solidFill>
+                          <a:latin typeface="Calibri"/>
+                        </a:rPr>
+                        <a:t>14/05/2026</a:t>
+                      </a:r>
+                    </a:p>
+                  </a:txBody>
+                  <a:tcPr>
+                    <a:solidFill>
+                      <a:srgbClr val="FFFFFF"/>
+                    </a:solidFill>
+                  </a:tcPr>
+                </a:tc>
+                <a:tc>
+                  <a:txBody>
+                    <a:bodyPr/>
+                    <a:lstStyle/>
+                    <a:p>
+                      <a:pPr algn="l"/>
+                      <a:r>
+                        <a:rPr sz="1000" b="0">
+                          <a:solidFill>
+                            <a:srgbClr val="1D1B43"/>
+                          </a:solidFill>
+                          <a:latin typeface="Calibri"/>
+                        </a:rPr>
+                        <a:t>ENTREGUE FORA DO PRAZO</a:t>
+                      </a:r>
+                    </a:p>
+                  </a:txBody>
+                  <a:tcPr>
+                    <a:solidFill>
+                      <a:srgbClr val="FFFFFF"/>
+                    </a:solidFill>
+                  </a:tcPr>
+                </a:tc>
+              </a:tr>
+              <a:tr h="207818">
+                <a:tc>
+                  <a:txBody>
+                    <a:bodyPr/>
+                    <a:lstStyle/>
+                    <a:p>
+                      <a:pPr algn="l"/>
+                      <a:r>
+                        <a:rPr sz="1000" b="0">
+                          <a:solidFill>
+                            <a:srgbClr val="1D1B43"/>
+                          </a:solidFill>
+                          <a:latin typeface="Calibri"/>
+                        </a:rPr>
+                        <a:t>281712</a:t>
+                      </a:r>
+                    </a:p>
+                  </a:txBody>
+                  <a:tcPr>
+                    <a:solidFill>
+                      <a:srgbClr val="F2F2F2"/>
+                    </a:solidFill>
+                  </a:tcPr>
+                </a:tc>
+                <a:tc>
+                  <a:txBody>
+                    <a:bodyPr/>
+                    <a:lstStyle/>
+                    <a:p>
+                      <a:pPr algn="l"/>
+                      <a:r>
+                        <a:rPr sz="1000" b="0">
+                          <a:solidFill>
+                            <a:srgbClr val="1D1B43"/>
+                          </a:solidFill>
+                          <a:latin typeface="Calibri"/>
+                        </a:rPr>
+                        <a:t>CORSUL COMERCIO E RE - CASCAVEL / PR</a:t>
+                      </a:r>
+                    </a:p>
+                  </a:txBody>
+                  <a:tcPr>
+                    <a:solidFill>
+                      <a:srgbClr val="F2F2F2"/>
+                    </a:solidFill>
+                  </a:tcPr>
+                </a:tc>
+                <a:tc>
+                  <a:txBody>
+                    <a:bodyPr/>
+                    <a:lstStyle/>
+                    <a:p>
+                      <a:pPr algn="l"/>
+                      <a:r>
+                        <a:rPr sz="1000" b="0">
+                          <a:solidFill>
+                            <a:srgbClr val="1D1B43"/>
+                          </a:solidFill>
+                          <a:latin typeface="Calibri"/>
+                        </a:rPr>
+                        <a:t>CASCAVEL/PR</a:t>
+                      </a:r>
+                    </a:p>
+                  </a:txBody>
+                  <a:tcPr>
+                    <a:solidFill>
+                      <a:srgbClr val="F2F2F2"/>
+                    </a:solidFill>
+                  </a:tcPr>
+                </a:tc>
+                <a:tc>
+                  <a:txBody>
+                    <a:bodyPr/>
+                    <a:lstStyle/>
+                    <a:p>
+                      <a:pPr algn="l"/>
+                      <a:r>
+                        <a:rPr sz="1000" b="0">
+                          <a:solidFill>
+                            <a:srgbClr val="1D1B43"/>
+                          </a:solidFill>
+                          <a:latin typeface="Calibri"/>
+                        </a:rPr>
+                        <a:t>12/05/2026</a:t>
+                      </a:r>
+                    </a:p>
+                  </a:txBody>
+                  <a:tcPr>
+                    <a:solidFill>
+                      <a:srgbClr val="F2F2F2"/>
+                    </a:solidFill>
+                  </a:tcPr>
+                </a:tc>
+                <a:tc>
+                  <a:txBody>
+                    <a:bodyPr/>
+                    <a:lstStyle/>
+                    <a:p>
+                      <a:pPr algn="l"/>
+                      <a:r>
+                        <a:rPr sz="1000" b="0">
+                          <a:solidFill>
+                            <a:srgbClr val="1D1B43"/>
+                          </a:solidFill>
+                          <a:latin typeface="Calibri"/>
+                        </a:rPr>
+                        <a:t>ENTREGUE FORA DO PRAZO</a:t>
+                      </a:r>
+                    </a:p>
+                  </a:txBody>
+                  <a:tcPr>
+                    <a:solidFill>
+                      <a:srgbClr val="F2F2F2"/>
+                    </a:solidFill>
+                  </a:tcPr>
+                </a:tc>
+              </a:tr>
+              <a:tr h="207818">
+                <a:tc>
+                  <a:txBody>
+                    <a:bodyPr/>
+                    <a:lstStyle/>
+                    <a:p>
+                      <a:pPr algn="l"/>
+                      <a:r>
+                        <a:rPr sz="1000" b="0">
+                          <a:solidFill>
+                            <a:srgbClr val="1D1B43"/>
+                          </a:solidFill>
+                          <a:latin typeface="Calibri"/>
+                        </a:rPr>
+                        <a:t>281713</a:t>
+                      </a:r>
+                    </a:p>
+                  </a:txBody>
+                  <a:tcPr>
+                    <a:solidFill>
+                      <a:srgbClr val="FFFFFF"/>
+                    </a:solidFill>
+                  </a:tcPr>
+                </a:tc>
+                <a:tc>
+                  <a:txBody>
+                    <a:bodyPr/>
+                    <a:lstStyle/>
+                    <a:p>
+                      <a:pPr algn="l"/>
+                      <a:r>
+                        <a:rPr sz="1000" b="0">
+                          <a:solidFill>
+                            <a:srgbClr val="1D1B43"/>
+                          </a:solidFill>
+                          <a:latin typeface="Calibri"/>
+                        </a:rPr>
+                        <a:t>CORSUL COMERCIO E RE - CASCAVEL / PR</a:t>
+                      </a:r>
+                    </a:p>
+                  </a:txBody>
+                  <a:tcPr>
+                    <a:solidFill>
+                      <a:srgbClr val="FFFFFF"/>
+                    </a:solidFill>
+                  </a:tcPr>
+                </a:tc>
+                <a:tc>
+                  <a:txBody>
+                    <a:bodyPr/>
+                    <a:lstStyle/>
+                    <a:p>
+                      <a:pPr algn="l"/>
+                      <a:r>
+                        <a:rPr sz="1000" b="0">
+                          <a:solidFill>
+                            <a:srgbClr val="1D1B43"/>
+                          </a:solidFill>
+                          <a:latin typeface="Calibri"/>
+                        </a:rPr>
+                        <a:t>CASCAVEL/PR</a:t>
+                      </a:r>
+                    </a:p>
+                  </a:txBody>
+                  <a:tcPr>
+                    <a:solidFill>
+                      <a:srgbClr val="FFFFFF"/>
+                    </a:solidFill>
+                  </a:tcPr>
+                </a:tc>
+                <a:tc>
+                  <a:txBody>
+                    <a:bodyPr/>
+                    <a:lstStyle/>
+                    <a:p>
+                      <a:pPr algn="l"/>
+                      <a:r>
+                        <a:rPr sz="1000" b="0">
+                          <a:solidFill>
+                            <a:srgbClr val="1D1B43"/>
+                          </a:solidFill>
+                          <a:latin typeface="Calibri"/>
+                        </a:rPr>
+                        <a:t>12/05/2026</a:t>
+                      </a:r>
+                    </a:p>
+                  </a:txBody>
+                  <a:tcPr>
+                    <a:solidFill>
+                      <a:srgbClr val="FFFFFF"/>
+                    </a:solidFill>
+                  </a:tcPr>
+                </a:tc>
+                <a:tc>
+                  <a:txBody>
+                    <a:bodyPr/>
+                    <a:lstStyle/>
+                    <a:p>
+                      <a:pPr algn="l"/>
+                      <a:r>
+                        <a:rPr sz="1000" b="0">
+                          <a:solidFill>
+                            <a:srgbClr val="1D1B43"/>
+                          </a:solidFill>
+                          <a:latin typeface="Calibri"/>
+                        </a:rPr>
+                        <a:t>ENTREGUE FORA DO PRAZO</a:t>
+                      </a:r>
+                    </a:p>
+                  </a:txBody>
+                  <a:tcPr>
+                    <a:solidFill>
+                      <a:srgbClr val="FFFFFF"/>
+                    </a:solidFill>
+                  </a:tcPr>
+                </a:tc>
+              </a:tr>
+              <a:tr h="207818">
+                <a:tc>
+                  <a:txBody>
+                    <a:bodyPr/>
+                    <a:lstStyle/>
+                    <a:p>
+                      <a:pPr algn="l"/>
+                      <a:r>
+                        <a:rPr sz="1000" b="0">
+                          <a:solidFill>
+                            <a:srgbClr val="1D1B43"/>
+                          </a:solidFill>
+                          <a:latin typeface="Calibri"/>
+                        </a:rPr>
+                        <a:t>281714</a:t>
+                      </a:r>
+                    </a:p>
+                  </a:txBody>
+                  <a:tcPr>
+                    <a:solidFill>
+                      <a:srgbClr val="F2F2F2"/>
+                    </a:solidFill>
+                  </a:tcPr>
+                </a:tc>
+                <a:tc>
+                  <a:txBody>
+                    <a:bodyPr/>
+                    <a:lstStyle/>
+                    <a:p>
+                      <a:pPr algn="l"/>
+                      <a:r>
+                        <a:rPr sz="1000" b="0">
+                          <a:solidFill>
+                            <a:srgbClr val="1D1B43"/>
+                          </a:solidFill>
+                          <a:latin typeface="Calibri"/>
+                        </a:rPr>
+                        <a:t>CORSUL COMERCIO E RE - CASCAVEL / PR</a:t>
+                      </a:r>
+                    </a:p>
+                  </a:txBody>
+                  <a:tcPr>
+                    <a:solidFill>
+                      <a:srgbClr val="F2F2F2"/>
+                    </a:solidFill>
+                  </a:tcPr>
+                </a:tc>
+                <a:tc>
+                  <a:txBody>
+                    <a:bodyPr/>
+                    <a:lstStyle/>
+                    <a:p>
+                      <a:pPr algn="l"/>
+                      <a:r>
+                        <a:rPr sz="1000" b="0">
+                          <a:solidFill>
+                            <a:srgbClr val="1D1B43"/>
+                          </a:solidFill>
+                          <a:latin typeface="Calibri"/>
+                        </a:rPr>
+                        <a:t>CASCAVEL/PR</a:t>
+                      </a:r>
+                    </a:p>
+                  </a:txBody>
+                  <a:tcPr>
+                    <a:solidFill>
+                      <a:srgbClr val="F2F2F2"/>
+                    </a:solidFill>
+                  </a:tcPr>
+                </a:tc>
+                <a:tc>
+                  <a:txBody>
+                    <a:bodyPr/>
+                    <a:lstStyle/>
+                    <a:p>
+                      <a:pPr algn="l"/>
+                      <a:r>
+                        <a:rPr sz="1000" b="0">
+                          <a:solidFill>
+                            <a:srgbClr val="1D1B43"/>
+                          </a:solidFill>
+                          <a:latin typeface="Calibri"/>
+                        </a:rPr>
+                        <a:t>12/05/2026</a:t>
+                      </a:r>
+                    </a:p>
+                  </a:txBody>
+                  <a:tcPr>
+                    <a:solidFill>
+                      <a:srgbClr val="F2F2F2"/>
+                    </a:solidFill>
+                  </a:tcPr>
+                </a:tc>
+                <a:tc>
+                  <a:txBody>
+                    <a:bodyPr/>
+                    <a:lstStyle/>
+                    <a:p>
+                      <a:pPr algn="l"/>
+                      <a:r>
+                        <a:rPr sz="1000" b="0">
+                          <a:solidFill>
+                            <a:srgbClr val="1D1B43"/>
+                          </a:solidFill>
+                          <a:latin typeface="Calibri"/>
+                        </a:rPr>
+                        <a:t>ENTREGUE FORA DO PRAZO</a:t>
+                      </a:r>
+                    </a:p>
+                  </a:txBody>
+                  <a:tcPr>
+                    <a:solidFill>
+                      <a:srgbClr val="F2F2F2"/>
+                    </a:solidFill>
+                  </a:tcPr>
+                </a:tc>
+              </a:tr>
+              <a:tr h="207818">
+                <a:tc>
+                  <a:txBody>
+                    <a:bodyPr/>
+                    <a:lstStyle/>
+                    <a:p>
+                      <a:pPr algn="l"/>
+                      <a:r>
+                        <a:rPr sz="1000" b="0">
+                          <a:solidFill>
+                            <a:srgbClr val="1D1B43"/>
+                          </a:solidFill>
+                          <a:latin typeface="Calibri"/>
+                        </a:rPr>
+                        <a:t>281715</a:t>
+                      </a:r>
+                    </a:p>
+                  </a:txBody>
+                  <a:tcPr>
+                    <a:solidFill>
+                      <a:srgbClr val="FFFFFF"/>
+                    </a:solidFill>
+                  </a:tcPr>
+                </a:tc>
+                <a:tc>
+                  <a:txBody>
+                    <a:bodyPr/>
+                    <a:lstStyle/>
+                    <a:p>
+                      <a:pPr algn="l"/>
+                      <a:r>
+                        <a:rPr sz="1000" b="0">
+                          <a:solidFill>
+                            <a:srgbClr val="1D1B43"/>
+                          </a:solidFill>
+                          <a:latin typeface="Calibri"/>
+                        </a:rPr>
+                        <a:t>CORSUL COMERCIO E RE - CASCAVEL / PR</a:t>
+                      </a:r>
+                    </a:p>
+                  </a:txBody>
+                  <a:tcPr>
+                    <a:solidFill>
+                      <a:srgbClr val="FFFFFF"/>
+                    </a:solidFill>
+                  </a:tcPr>
+                </a:tc>
+                <a:tc>
+                  <a:txBody>
+                    <a:bodyPr/>
+                    <a:lstStyle/>
+                    <a:p>
+                      <a:pPr algn="l"/>
+                      <a:r>
+                        <a:rPr sz="1000" b="0">
+                          <a:solidFill>
+                            <a:srgbClr val="1D1B43"/>
+                          </a:solidFill>
+                          <a:latin typeface="Calibri"/>
+                        </a:rPr>
+                        <a:t>CASCAVEL/PR</a:t>
+                      </a:r>
+                    </a:p>
+                  </a:txBody>
+                  <a:tcPr>
+                    <a:solidFill>
+                      <a:srgbClr val="FFFFFF"/>
+                    </a:solidFill>
+                  </a:tcPr>
+                </a:tc>
+                <a:tc>
+                  <a:txBody>
+                    <a:bodyPr/>
+                    <a:lstStyle/>
+                    <a:p>
+                      <a:pPr algn="l"/>
+                      <a:r>
+                        <a:rPr sz="1000" b="0">
+                          <a:solidFill>
+                            <a:srgbClr val="1D1B43"/>
+                          </a:solidFill>
+                          <a:latin typeface="Calibri"/>
+                        </a:rPr>
+                        <a:t>12/05/2026</a:t>
+                      </a:r>
+                    </a:p>
+                  </a:txBody>
+                  <a:tcPr>
+                    <a:solidFill>
+                      <a:srgbClr val="FFFFFF"/>
+                    </a:solidFill>
+                  </a:tcPr>
+                </a:tc>
+                <a:tc>
+                  <a:txBody>
+                    <a:bodyPr/>
+                    <a:lstStyle/>
+                    <a:p>
+                      <a:pPr algn="l"/>
+                      <a:r>
+                        <a:rPr sz="1000" b="0">
+                          <a:solidFill>
+                            <a:srgbClr val="1D1B43"/>
+                          </a:solidFill>
+                          <a:latin typeface="Calibri"/>
+                        </a:rPr>
+                        <a:t>ENTREGUE FORA DO PRAZO</a:t>
+                      </a:r>
+                    </a:p>
+                  </a:txBody>
+                  <a:tcPr>
+                    <a:solidFill>
+                      <a:srgbClr val="FFFFFF"/>
+                    </a:solidFill>
+                  </a:tcPr>
+                </a:tc>
+              </a:tr>
+              <a:tr h="207818">
+                <a:tc>
+                  <a:txBody>
+                    <a:bodyPr/>
+                    <a:lstStyle/>
+                    <a:p>
+                      <a:pPr algn="l"/>
+                      <a:r>
+                        <a:rPr sz="1000" b="0">
+                          <a:solidFill>
+                            <a:srgbClr val="1D1B43"/>
+                          </a:solidFill>
+                          <a:latin typeface="Calibri"/>
+                        </a:rPr>
+                        <a:t>281825</a:t>
+                      </a:r>
+                    </a:p>
+                  </a:txBody>
+                  <a:tcPr>
+                    <a:solidFill>
+                      <a:srgbClr val="F2F2F2"/>
+                    </a:solidFill>
+                  </a:tcPr>
+                </a:tc>
+                <a:tc>
+                  <a:txBody>
+                    <a:bodyPr/>
+                    <a:lstStyle/>
+                    <a:p>
+                      <a:pPr algn="l"/>
+                      <a:r>
+                        <a:rPr sz="1000" b="0">
+                          <a:solidFill>
+                            <a:srgbClr val="1D1B43"/>
+                          </a:solidFill>
+                          <a:latin typeface="Calibri"/>
+                        </a:rPr>
+                        <a:t>CORSUL COMERCIO E RE - SAO JOSE DOS PINHAIS / PR</a:t>
+                      </a:r>
+                    </a:p>
+                  </a:txBody>
+                  <a:tcPr>
+                    <a:solidFill>
+                      <a:srgbClr val="F2F2F2"/>
+                    </a:solidFill>
+                  </a:tcPr>
+                </a:tc>
+                <a:tc>
+                  <a:txBody>
+                    <a:bodyPr/>
+                    <a:lstStyle/>
+                    <a:p>
+                      <a:pPr algn="l"/>
+                      <a:r>
+                        <a:rPr sz="1000" b="0">
+                          <a:solidFill>
+                            <a:srgbClr val="1D1B43"/>
+                          </a:solidFill>
+                          <a:latin typeface="Calibri"/>
+                        </a:rPr>
+                        <a:t>SAO JOSE DOS PINHAIS/PR</a:t>
+                      </a:r>
+                    </a:p>
+                  </a:txBody>
+                  <a:tcPr>
+                    <a:solidFill>
+                      <a:srgbClr val="F2F2F2"/>
+                    </a:solidFill>
+                  </a:tcPr>
+                </a:tc>
+                <a:tc>
+                  <a:txBody>
+                    <a:bodyPr/>
+                    <a:lstStyle/>
+                    <a:p>
+                      <a:pPr algn="l"/>
+                      <a:r>
+                        <a:rPr sz="1000" b="0">
+                          <a:solidFill>
+                            <a:srgbClr val="1D1B43"/>
+                          </a:solidFill>
+                          <a:latin typeface="Calibri"/>
+                        </a:rPr>
+                        <a:t>08/05/2026</a:t>
+                      </a:r>
+                    </a:p>
+                  </a:txBody>
+                  <a:tcPr>
+                    <a:solidFill>
+                      <a:srgbClr val="F2F2F2"/>
+                    </a:solidFill>
+                  </a:tcPr>
+                </a:tc>
+                <a:tc>
+                  <a:txBody>
+                    <a:bodyPr/>
+                    <a:lstStyle/>
+                    <a:p>
+                      <a:pPr algn="l"/>
+                      <a:r>
+                        <a:rPr sz="1000" b="0">
+                          <a:solidFill>
+                            <a:srgbClr val="1D1B43"/>
+                          </a:solidFill>
+                          <a:latin typeface="Calibri"/>
+                        </a:rPr>
+                        <a:t>ENTREGUE FORA DO PRAZO</a:t>
+                      </a:r>
+                    </a:p>
+                  </a:txBody>
+                  <a:tcPr>
+                    <a:solidFill>
+                      <a:srgbClr val="F2F2F2"/>
+                    </a:solidFill>
+                  </a:tcPr>
+                </a:tc>
+              </a:tr>
+              <a:tr h="207818">
+                <a:tc>
+                  <a:txBody>
+                    <a:bodyPr/>
+                    <a:lstStyle/>
+                    <a:p>
+                      <a:pPr algn="l"/>
+                      <a:r>
+                        <a:rPr sz="1000" b="0">
+                          <a:solidFill>
+                            <a:srgbClr val="1D1B43"/>
+                          </a:solidFill>
+                          <a:latin typeface="Calibri"/>
+                        </a:rPr>
+                        <a:t>283127</a:t>
+                      </a:r>
+                    </a:p>
+                  </a:txBody>
+                  <a:tcPr>
+                    <a:solidFill>
+                      <a:srgbClr val="FFFFFF"/>
+                    </a:solidFill>
+                  </a:tcPr>
+                </a:tc>
+                <a:tc>
+                  <a:txBody>
+                    <a:bodyPr/>
+                    <a:lstStyle/>
+                    <a:p>
+                      <a:pPr algn="l"/>
+                      <a:r>
+                        <a:rPr sz="1000" b="0">
+                          <a:solidFill>
+                            <a:srgbClr val="1D1B43"/>
+                          </a:solidFill>
+                          <a:latin typeface="Calibri"/>
+                        </a:rPr>
+                        <a:t>CORSUL COMERCIO E RE - CAXIAS DO SUL / RS</a:t>
+                      </a:r>
+                    </a:p>
+                  </a:txBody>
+                  <a:tcPr>
+                    <a:solidFill>
+                      <a:srgbClr val="FFFFFF"/>
+                    </a:solidFill>
+                  </a:tcPr>
+                </a:tc>
+                <a:tc>
+                  <a:txBody>
+                    <a:bodyPr/>
+                    <a:lstStyle/>
+                    <a:p>
+                      <a:pPr algn="l"/>
+                      <a:r>
+                        <a:rPr sz="1000" b="0">
+                          <a:solidFill>
+                            <a:srgbClr val="1D1B43"/>
+                          </a:solidFill>
+                          <a:latin typeface="Calibri"/>
+                        </a:rPr>
+                        <a:t>CAXIAS DO SUL/RS</a:t>
+                      </a:r>
+                    </a:p>
+                  </a:txBody>
+                  <a:tcPr>
+                    <a:solidFill>
+                      <a:srgbClr val="FFFFFF"/>
+                    </a:solidFill>
+                  </a:tcPr>
+                </a:tc>
+                <a:tc>
+                  <a:txBody>
+                    <a:bodyPr/>
+                    <a:lstStyle/>
+                    <a:p>
+                      <a:pPr algn="l"/>
+                      <a:r>
+                        <a:rPr sz="1000" b="0">
+                          <a:solidFill>
+                            <a:srgbClr val="1D1B43"/>
+                          </a:solidFill>
+                          <a:latin typeface="Calibri"/>
+                        </a:rPr>
+                        <a:t>27/05/2026</a:t>
+                      </a:r>
+                    </a:p>
+                  </a:txBody>
+                  <a:tcPr>
+                    <a:solidFill>
+                      <a:srgbClr val="FFFFFF"/>
+                    </a:solidFill>
+                  </a:tcPr>
+                </a:tc>
+                <a:tc>
+                  <a:txBody>
+                    <a:bodyPr/>
+                    <a:lstStyle/>
+                    <a:p>
+                      <a:pPr algn="l"/>
+                      <a:r>
+                        <a:rPr sz="1000" b="0">
+                          <a:solidFill>
+                            <a:srgbClr val="1D1B43"/>
+                          </a:solidFill>
+                          <a:latin typeface="Calibri"/>
+                        </a:rPr>
+                        <a:t>ENTREGUE FORA DO PRAZO</a:t>
+                      </a:r>
+                    </a:p>
+                  </a:txBody>
+                  <a:tcPr>
+                    <a:solidFill>
+                      <a:srgbClr val="FFFFFF"/>
+                    </a:solidFill>
+                  </a:tcPr>
+                </a:tc>
+              </a:tr>
+              <a:tr h="207818">
+                <a:tc>
+                  <a:txBody>
+                    <a:bodyPr/>
+                    <a:lstStyle/>
+                    <a:p>
+                      <a:pPr algn="l"/>
+                      <a:r>
+                        <a:rPr sz="1000" b="0">
+                          <a:solidFill>
+                            <a:srgbClr val="1D1B43"/>
+                          </a:solidFill>
+                          <a:latin typeface="Calibri"/>
+                        </a:rPr>
+                        <a:t>283132</a:t>
+                      </a:r>
+                    </a:p>
+                  </a:txBody>
+                  <a:tcPr>
+                    <a:solidFill>
+                      <a:srgbClr val="F2F2F2"/>
+                    </a:solidFill>
+                  </a:tcPr>
+                </a:tc>
+                <a:tc>
+                  <a:txBody>
+                    <a:bodyPr/>
+                    <a:lstStyle/>
+                    <a:p>
+                      <a:pPr algn="l"/>
+                      <a:r>
+                        <a:rPr sz="1000" b="0">
+                          <a:solidFill>
+                            <a:srgbClr val="1D1B43"/>
+                          </a:solidFill>
+                          <a:latin typeface="Calibri"/>
+                        </a:rPr>
+                        <a:t>CORSUL COMERCIO E RE - CAXIAS DO SUL / RS</a:t>
+                      </a:r>
+                    </a:p>
+                  </a:txBody>
+                  <a:tcPr>
+                    <a:solidFill>
+                      <a:srgbClr val="F2F2F2"/>
+                    </a:solidFill>
+                  </a:tcPr>
+                </a:tc>
+                <a:tc>
+                  <a:txBody>
+                    <a:bodyPr/>
+                    <a:lstStyle/>
+                    <a:p>
+                      <a:pPr algn="l"/>
+                      <a:r>
+                        <a:rPr sz="1000" b="0">
+                          <a:solidFill>
+                            <a:srgbClr val="1D1B43"/>
+                          </a:solidFill>
+                          <a:latin typeface="Calibri"/>
+                        </a:rPr>
+                        <a:t>CAXIAS DO SUL/RS</a:t>
+                      </a:r>
+                    </a:p>
+                  </a:txBody>
+                  <a:tcPr>
+                    <a:solidFill>
+                      <a:srgbClr val="F2F2F2"/>
+                    </a:solidFill>
+                  </a:tcPr>
+                </a:tc>
+                <a:tc>
+                  <a:txBody>
+                    <a:bodyPr/>
+                    <a:lstStyle/>
+                    <a:p>
+                      <a:pPr algn="l"/>
+                      <a:r>
+                        <a:rPr sz="1000" b="0">
+                          <a:solidFill>
+                            <a:srgbClr val="1D1B43"/>
+                          </a:solidFill>
+                          <a:latin typeface="Calibri"/>
+                        </a:rPr>
+                        <a:t>27/05/2026</a:t>
+                      </a:r>
+                    </a:p>
+                  </a:txBody>
+                  <a:tcPr>
+                    <a:solidFill>
+                      <a:srgbClr val="F2F2F2"/>
+                    </a:solidFill>
+                  </a:tcPr>
+                </a:tc>
+                <a:tc>
+                  <a:txBody>
+                    <a:bodyPr/>
+                    <a:lstStyle/>
+                    <a:p>
+                      <a:pPr algn="l"/>
+                      <a:r>
+                        <a:rPr sz="1000" b="0">
+                          <a:solidFill>
+                            <a:srgbClr val="1D1B43"/>
+                          </a:solidFill>
+                          <a:latin typeface="Calibri"/>
+                        </a:rPr>
+                        <a:t>ENTREGUE FORA DO PRAZO</a:t>
+                      </a:r>
+                    </a:p>
+                  </a:txBody>
+                  <a:tcPr>
+                    <a:solidFill>
+                      <a:srgbClr val="F2F2F2"/>
+                    </a:solidFill>
+                  </a:tcPr>
+                </a:tc>
+              </a:tr>
+              <a:tr h="207818">
+                <a:tc>
+                  <a:txBody>
+                    <a:bodyPr/>
+                    <a:lstStyle/>
+                    <a:p>
+                      <a:pPr algn="l"/>
+                      <a:r>
+                        <a:rPr sz="1000" b="0">
+                          <a:solidFill>
+                            <a:srgbClr val="1D1B43"/>
+                          </a:solidFill>
+                          <a:latin typeface="Calibri"/>
+                        </a:rPr>
+                        <a:t>283137</a:t>
+                      </a:r>
+                    </a:p>
+                  </a:txBody>
+                  <a:tcPr>
+                    <a:solidFill>
+                      <a:srgbClr val="FFFFFF"/>
+                    </a:solidFill>
+                  </a:tcPr>
+                </a:tc>
+                <a:tc>
+                  <a:txBody>
+                    <a:bodyPr/>
+                    <a:lstStyle/>
+                    <a:p>
+                      <a:pPr algn="l"/>
+                      <a:r>
+                        <a:rPr sz="1000" b="0">
+                          <a:solidFill>
+                            <a:srgbClr val="1D1B43"/>
+                          </a:solidFill>
+                          <a:latin typeface="Calibri"/>
+                        </a:rPr>
+                        <a:t>CORSUL COMERCIO E RE - CAXIAS DO SUL / RS</a:t>
+                      </a:r>
+                    </a:p>
+                  </a:txBody>
+                  <a:tcPr>
+                    <a:solidFill>
+                      <a:srgbClr val="FFFFFF"/>
+                    </a:solidFill>
+                  </a:tcPr>
+                </a:tc>
+                <a:tc>
+                  <a:txBody>
+                    <a:bodyPr/>
+                    <a:lstStyle/>
+                    <a:p>
+                      <a:pPr algn="l"/>
+                      <a:r>
+                        <a:rPr sz="1000" b="0">
+                          <a:solidFill>
+                            <a:srgbClr val="1D1B43"/>
+                          </a:solidFill>
+                          <a:latin typeface="Calibri"/>
+                        </a:rPr>
+                        <a:t>CAXIAS DO SUL/RS</a:t>
+                      </a:r>
+                    </a:p>
+                  </a:txBody>
+                  <a:tcPr>
+                    <a:solidFill>
+                      <a:srgbClr val="FFFFFF"/>
+                    </a:solidFill>
+                  </a:tcPr>
+                </a:tc>
+                <a:tc>
+                  <a:txBody>
+                    <a:bodyPr/>
+                    <a:lstStyle/>
+                    <a:p>
+                      <a:pPr algn="l"/>
+                      <a:r>
+                        <a:rPr sz="1000" b="0">
+                          <a:solidFill>
+                            <a:srgbClr val="1D1B43"/>
+                          </a:solidFill>
+                          <a:latin typeface="Calibri"/>
+                        </a:rPr>
+                        <a:t>27/05/2026</a:t>
+                      </a:r>
+                    </a:p>
+                  </a:txBody>
+                  <a:tcPr>
+                    <a:solidFill>
+                      <a:srgbClr val="FFFFFF"/>
+                    </a:solidFill>
+                  </a:tcPr>
+                </a:tc>
+                <a:tc>
+                  <a:txBody>
+                    <a:bodyPr/>
+                    <a:lstStyle/>
+                    <a:p>
+                      <a:pPr algn="l"/>
+                      <a:r>
+                        <a:rPr sz="1000" b="0">
+                          <a:solidFill>
+                            <a:srgbClr val="1D1B43"/>
+                          </a:solidFill>
+                          <a:latin typeface="Calibri"/>
+                        </a:rPr>
+                        <a:t>ENTREGUE FORA DO PRAZO</a:t>
+                      </a:r>
+                    </a:p>
+                  </a:txBody>
+                  <a:tcPr>
+                    <a:solidFill>
+                      <a:srgbClr val="FFFFFF"/>
+                    </a:solidFill>
+                  </a:tcPr>
+                </a:tc>
+              </a:tr>
+              <a:tr h="207818">
+                <a:tc>
+                  <a:txBody>
+                    <a:bodyPr/>
+                    <a:lstStyle/>
+                    <a:p>
+                      <a:pPr algn="l"/>
+                      <a:r>
+                        <a:rPr sz="1000" b="0">
+                          <a:solidFill>
+                            <a:srgbClr val="1D1B43"/>
+                          </a:solidFill>
+                          <a:latin typeface="Calibri"/>
+                        </a:rPr>
+                        <a:t>284000</a:t>
+                      </a:r>
+                    </a:p>
+                  </a:txBody>
+                  <a:tcPr>
+                    <a:solidFill>
+                      <a:srgbClr val="F2F2F2"/>
+                    </a:solidFill>
+                  </a:tcPr>
+                </a:tc>
+                <a:tc>
+                  <a:txBody>
+                    <a:bodyPr/>
+                    <a:lstStyle/>
+                    <a:p>
+                      <a:pPr algn="l"/>
+                      <a:r>
+                        <a:rPr sz="1000" b="0">
+                          <a:solidFill>
+                            <a:srgbClr val="1D1B43"/>
+                          </a:solidFill>
+                          <a:latin typeface="Calibri"/>
+                        </a:rPr>
+                        <a:t>MARFRIG GLOBAL FOODS - VARZEA GRANDE / MT</a:t>
+                      </a:r>
+                    </a:p>
+                  </a:txBody>
+                  <a:tcPr>
+                    <a:solidFill>
+                      <a:srgbClr val="F2F2F2"/>
+                    </a:solidFill>
+                  </a:tcPr>
+                </a:tc>
+                <a:tc>
+                  <a:txBody>
+                    <a:bodyPr/>
+                    <a:lstStyle/>
+                    <a:p>
+                      <a:pPr algn="l"/>
+                      <a:r>
+                        <a:rPr sz="1000" b="0">
+                          <a:solidFill>
+                            <a:srgbClr val="1D1B43"/>
+                          </a:solidFill>
+                          <a:latin typeface="Calibri"/>
+                        </a:rPr>
+                        <a:t>VARZEA GRANDE/MT</a:t>
+                      </a:r>
+                    </a:p>
+                  </a:txBody>
+                  <a:tcPr>
+                    <a:solidFill>
+                      <a:srgbClr val="F2F2F2"/>
+                    </a:solidFill>
+                  </a:tcPr>
+                </a:tc>
+                <a:tc>
+                  <a:txBody>
+                    <a:bodyPr/>
+                    <a:lstStyle/>
+                    <a:p>
+                      <a:pPr algn="l"/>
+                      <a:r>
+                        <a:rPr sz="1000" b="0">
+                          <a:solidFill>
+                            <a:srgbClr val="1D1B43"/>
+                          </a:solidFill>
+                          <a:latin typeface="Calibri"/>
+                        </a:rPr>
+                        <a:t>28/05/2026</a:t>
+                      </a:r>
+                    </a:p>
+                  </a:txBody>
+                  <a:tcPr>
+                    <a:solidFill>
+                      <a:srgbClr val="F2F2F2"/>
+                    </a:solidFill>
+                  </a:tcPr>
+                </a:tc>
+                <a:tc>
+                  <a:txBody>
+                    <a:bodyPr/>
+                    <a:lstStyle/>
+                    <a:p>
+                      <a:pPr algn="l"/>
+                      <a:r>
+                        <a:rPr sz="1000" b="0">
+                          <a:solidFill>
+                            <a:srgbClr val="1D1B43"/>
+                          </a:solidFill>
+                          <a:latin typeface="Calibri"/>
+                        </a:rPr>
+                        <a:t>FORA DO PRAZO</a:t>
+                      </a:r>
+                    </a:p>
+                  </a:txBody>
+                  <a:tcPr>
+                    <a:solidFill>
+                      <a:srgbClr val="F2F2F2"/>
+                    </a:solidFill>
+                  </a:tcPr>
+                </a:tc>
+              </a:tr>
+              <a:tr h="207818">
+                <a:tc>
+                  <a:txBody>
+                    <a:bodyPr/>
+                    <a:lstStyle/>
+                    <a:p>
+                      <a:pPr algn="l"/>
+                      <a:r>
+                        <a:rPr sz="1000" b="0">
+                          <a:solidFill>
+                            <a:srgbClr val="1D1B43"/>
+                          </a:solidFill>
+                          <a:latin typeface="Calibri"/>
+                        </a:rPr>
+                        <a:t>284609</a:t>
+                      </a:r>
+                    </a:p>
+                  </a:txBody>
+                  <a:tcPr>
+                    <a:solidFill>
+                      <a:srgbClr val="FFFFFF"/>
+                    </a:solidFill>
+                  </a:tcPr>
+                </a:tc>
+                <a:tc>
+                  <a:txBody>
+                    <a:bodyPr/>
+                    <a:lstStyle/>
+                    <a:p>
+                      <a:pPr algn="l"/>
+                      <a:r>
+                        <a:rPr sz="1000" b="0">
+                          <a:solidFill>
+                            <a:srgbClr val="1D1B43"/>
+                          </a:solidFill>
+                          <a:latin typeface="Calibri"/>
+                        </a:rPr>
+                        <a:t>GRUPO PE DISTRIBUIDO - GUARULHOS / SP</a:t>
+                      </a:r>
+                    </a:p>
+                  </a:txBody>
+                  <a:tcPr>
+                    <a:solidFill>
+                      <a:srgbClr val="FFFFFF"/>
+                    </a:solidFill>
+                  </a:tcPr>
+                </a:tc>
+                <a:tc>
+                  <a:txBody>
+                    <a:bodyPr/>
+                    <a:lstStyle/>
+                    <a:p>
+                      <a:pPr algn="l"/>
+                      <a:r>
+                        <a:rPr sz="1000" b="0">
+                          <a:solidFill>
+                            <a:srgbClr val="1D1B43"/>
+                          </a:solidFill>
+                          <a:latin typeface="Calibri"/>
+                        </a:rPr>
+                        <a:t>GUARULHOS/SP</a:t>
+                      </a:r>
+                    </a:p>
+                  </a:txBody>
+                  <a:tcPr>
+                    <a:solidFill>
+                      <a:srgbClr val="FFFFFF"/>
+                    </a:solidFill>
+                  </a:tcPr>
+                </a:tc>
+                <a:tc>
+                  <a:txBody>
+                    <a:bodyPr/>
+                    <a:lstStyle/>
+                    <a:p>
+                      <a:pPr algn="l"/>
+                      <a:r>
+                        <a:rPr sz="1000" b="0">
+                          <a:solidFill>
+                            <a:srgbClr val="1D1B43"/>
+                          </a:solidFill>
+                          <a:latin typeface="Calibri"/>
+                        </a:rPr>
+                        <a:t>26/05/2026</a:t>
+                      </a:r>
+                    </a:p>
+                  </a:txBody>
+                  <a:tcPr>
+                    <a:solidFill>
+                      <a:srgbClr val="FFFFFF"/>
+                    </a:solidFill>
+                  </a:tcPr>
+                </a:tc>
+                <a:tc>
+                  <a:txBody>
+                    <a:bodyPr/>
+                    <a:lstStyle/>
+                    <a:p>
+                      <a:pPr algn="l"/>
+                      <a:r>
+                        <a:rPr sz="1000" b="0">
+                          <a:solidFill>
+                            <a:srgbClr val="1D1B43"/>
+                          </a:solidFill>
+                          <a:latin typeface="Calibri"/>
+                        </a:rPr>
+                        <a:t>FORA DO PRAZO</a:t>
+                      </a:r>
+                    </a:p>
+                  </a:txBody>
+                  <a:tcPr>
+                    <a:solidFill>
+                      <a:srgbClr val="FFFFFF"/>
                     </a:solidFill>
                   </a:tcPr>
                 </a:tc>
@@ -6034,30 +8257,30 @@
                           </a:solidFill>
                           <a:latin typeface="Calibri"/>
                         </a:rPr>
-                        <a:t>286</a:t>
-                      </a:r>
-                    </a:p>
-                  </a:txBody>
-                  <a:tcPr>
-                    <a:solidFill>
-                      <a:srgbClr val="FFFFFF"/>
-                    </a:solidFill>
-                  </a:tcPr>
-                </a:tc>
-                <a:tc>
-                  <a:txBody>
-                    <a:bodyPr/>
-                    <a:lstStyle/>
-                    <a:p>
-                      <a:pPr algn="l"/>
-                      <a:r>
-                        <a:rPr sz="1000" b="0">
-                          <a:solidFill>
-                            <a:srgbClr val="1D1B43"/>
-                          </a:solidFill>
-                          <a:latin typeface="Calibri"/>
-                        </a:rPr>
-                        <a:t>285</a:t>
+                        <a:t>255</a:t>
+                      </a:r>
+                    </a:p>
+                  </a:txBody>
+                  <a:tcPr>
+                    <a:solidFill>
+                      <a:srgbClr val="FFFFFF"/>
+                    </a:solidFill>
+                  </a:tcPr>
+                </a:tc>
+                <a:tc>
+                  <a:txBody>
+                    <a:bodyPr/>
+                    <a:lstStyle/>
+                    <a:p>
+                      <a:pPr algn="l"/>
+                      <a:r>
+                        <a:rPr sz="1000" b="0">
+                          <a:solidFill>
+                            <a:srgbClr val="1D1B43"/>
+                          </a:solidFill>
+                          <a:latin typeface="Calibri"/>
+                        </a:rPr>
+                        <a:t>254</a:t>
                       </a:r>
                     </a:p>
                   </a:txBody>
@@ -6103,7 +8326,7 @@
                           </a:solidFill>
                           <a:latin typeface="Calibri"/>
                         </a:rPr>
-                        <a:t>99.7%</a:t>
+                        <a:t>99.6%</a:t>
                       </a:r>
                     </a:p>
                   </a:txBody>
@@ -6151,53 +8374,53 @@
                           </a:solidFill>
                           <a:latin typeface="Calibri"/>
                         </a:rPr>
-                        <a:t>ES</a:t>
-                      </a:r>
-                    </a:p>
-                  </a:txBody>
-                  <a:tcPr>
-                    <a:solidFill>
-                      <a:srgbClr val="F2F2F2"/>
-                    </a:solidFill>
-                  </a:tcPr>
-                </a:tc>
-                <a:tc>
-                  <a:txBody>
-                    <a:bodyPr/>
-                    <a:lstStyle/>
-                    <a:p>
-                      <a:pPr algn="l"/>
-                      <a:r>
-                        <a:rPr sz="1000" b="0">
-                          <a:solidFill>
-                            <a:srgbClr val="1D1B43"/>
-                          </a:solidFill>
-                          <a:latin typeface="Calibri"/>
-                        </a:rPr>
-                        <a:t>63</a:t>
-                      </a:r>
-                    </a:p>
-                  </a:txBody>
-                  <a:tcPr>
-                    <a:solidFill>
-                      <a:srgbClr val="F2F2F2"/>
-                    </a:solidFill>
-                  </a:tcPr>
-                </a:tc>
-                <a:tc>
-                  <a:txBody>
-                    <a:bodyPr/>
-                    <a:lstStyle/>
-                    <a:p>
-                      <a:pPr algn="l"/>
-                      <a:r>
-                        <a:rPr sz="1000" b="0">
-                          <a:solidFill>
-                            <a:srgbClr val="1D1B43"/>
-                          </a:solidFill>
-                          <a:latin typeface="Calibri"/>
-                        </a:rPr>
-                        <a:t>63</a:t>
+                        <a:t>SC</a:t>
+                      </a:r>
+                    </a:p>
+                  </a:txBody>
+                  <a:tcPr>
+                    <a:solidFill>
+                      <a:srgbClr val="F2F2F2"/>
+                    </a:solidFill>
+                  </a:tcPr>
+                </a:tc>
+                <a:tc>
+                  <a:txBody>
+                    <a:bodyPr/>
+                    <a:lstStyle/>
+                    <a:p>
+                      <a:pPr algn="l"/>
+                      <a:r>
+                        <a:rPr sz="1000" b="0">
+                          <a:solidFill>
+                            <a:srgbClr val="1D1B43"/>
+                          </a:solidFill>
+                          <a:latin typeface="Calibri"/>
+                        </a:rPr>
+                        <a:t>141</a:t>
+                      </a:r>
+                    </a:p>
+                  </a:txBody>
+                  <a:tcPr>
+                    <a:solidFill>
+                      <a:srgbClr val="F2F2F2"/>
+                    </a:solidFill>
+                  </a:tcPr>
+                </a:tc>
+                <a:tc>
+                  <a:txBody>
+                    <a:bodyPr/>
+                    <a:lstStyle/>
+                    <a:p>
+                      <a:pPr algn="l"/>
+                      <a:r>
+                        <a:rPr sz="1000" b="0">
+                          <a:solidFill>
+                            <a:srgbClr val="1D1B43"/>
+                          </a:solidFill>
+                          <a:latin typeface="Calibri"/>
+                        </a:rPr>
+                        <a:t>141</a:t>
                       </a:r>
                     </a:p>
                   </a:txBody>
@@ -6314,99 +8537,99 @@
                           </a:solidFill>
                           <a:latin typeface="Calibri"/>
                         </a:rPr>
-                        <a:t>62</a:t>
-                      </a:r>
-                    </a:p>
-                  </a:txBody>
-                  <a:tcPr>
-                    <a:solidFill>
-                      <a:srgbClr val="FFFFFF"/>
-                    </a:solidFill>
-                  </a:tcPr>
-                </a:tc>
-                <a:tc>
-                  <a:txBody>
-                    <a:bodyPr/>
-                    <a:lstStyle/>
-                    <a:p>
-                      <a:pPr algn="l"/>
-                      <a:r>
-                        <a:rPr sz="1000" b="0">
-                          <a:solidFill>
-                            <a:srgbClr val="1D1B43"/>
-                          </a:solidFill>
-                          <a:latin typeface="Calibri"/>
-                        </a:rPr>
-                        <a:t>62</a:t>
-                      </a:r>
-                    </a:p>
-                  </a:txBody>
-                  <a:tcPr>
-                    <a:solidFill>
-                      <a:srgbClr val="FFFFFF"/>
-                    </a:solidFill>
-                  </a:tcPr>
-                </a:tc>
-                <a:tc>
-                  <a:txBody>
-                    <a:bodyPr/>
-                    <a:lstStyle/>
-                    <a:p>
-                      <a:pPr algn="l"/>
-                      <a:r>
-                        <a:rPr sz="1000" b="0">
-                          <a:solidFill>
-                            <a:srgbClr val="1D1B43"/>
-                          </a:solidFill>
-                          <a:latin typeface="Calibri"/>
-                        </a:rPr>
-                        <a:t>0</a:t>
-                      </a:r>
-                    </a:p>
-                  </a:txBody>
-                  <a:tcPr>
-                    <a:solidFill>
-                      <a:srgbClr val="FFFFFF"/>
-                    </a:solidFill>
-                  </a:tcPr>
-                </a:tc>
-                <a:tc>
-                  <a:txBody>
-                    <a:bodyPr/>
-                    <a:lstStyle/>
-                    <a:p>
-                      <a:pPr algn="l"/>
-                      <a:r>
-                        <a:rPr sz="1000" b="0">
-                          <a:solidFill>
-                            <a:srgbClr val="1D1B43"/>
-                          </a:solidFill>
-                          <a:latin typeface="Calibri"/>
-                        </a:rPr>
-                        <a:t>100.0%</a:t>
-                      </a:r>
-                    </a:p>
-                  </a:txBody>
-                  <a:tcPr>
-                    <a:solidFill>
-                      <a:srgbClr val="FFFFFF"/>
-                    </a:solidFill>
-                  </a:tcPr>
-                </a:tc>
-                <a:tc>
-                  <a:txBody>
-                    <a:bodyPr/>
-                    <a:lstStyle/>
-                    <a:p>
-                      <a:pPr algn="l"/>
-                      <a:r>
-                        <a:rPr sz="1000" b="0">
-                          <a:solidFill>
-                            <a:srgbClr val="1D1B43"/>
-                          </a:solidFill>
-                          <a:latin typeface="Calibri"/>
-                        </a:rPr>
-                        <a:t>Excelente</a:t>
+                        <a:t>100</a:t>
+                      </a:r>
+                    </a:p>
+                  </a:txBody>
+                  <a:tcPr>
+                    <a:solidFill>
+                      <a:srgbClr val="FFFFFF"/>
+                    </a:solidFill>
+                  </a:tcPr>
+                </a:tc>
+                <a:tc>
+                  <a:txBody>
+                    <a:bodyPr/>
+                    <a:lstStyle/>
+                    <a:p>
+                      <a:pPr algn="l"/>
+                      <a:r>
+                        <a:rPr sz="1000" b="0">
+                          <a:solidFill>
+                            <a:srgbClr val="1D1B43"/>
+                          </a:solidFill>
+                          <a:latin typeface="Calibri"/>
+                        </a:rPr>
+                        <a:t>87</a:t>
+                      </a:r>
+                    </a:p>
+                  </a:txBody>
+                  <a:tcPr>
+                    <a:solidFill>
+                      <a:srgbClr val="FFFFFF"/>
+                    </a:solidFill>
+                  </a:tcPr>
+                </a:tc>
+                <a:tc>
+                  <a:txBody>
+                    <a:bodyPr/>
+                    <a:lstStyle/>
+                    <a:p>
+                      <a:pPr algn="l"/>
+                      <a:r>
+                        <a:rPr sz="1000" b="0">
+                          <a:solidFill>
+                            <a:srgbClr val="1D1B43"/>
+                          </a:solidFill>
+                          <a:latin typeface="Calibri"/>
+                        </a:rPr>
+                        <a:t>13</a:t>
+                      </a:r>
+                    </a:p>
+                  </a:txBody>
+                  <a:tcPr>
+                    <a:solidFill>
+                      <a:srgbClr val="FFFFFF"/>
+                    </a:solidFill>
+                  </a:tcPr>
+                </a:tc>
+                <a:tc>
+                  <a:txBody>
+                    <a:bodyPr/>
+                    <a:lstStyle/>
+                    <a:p>
+                      <a:pPr algn="l"/>
+                      <a:r>
+                        <a:rPr sz="1000" b="0">
+                          <a:solidFill>
+                            <a:srgbClr val="1D1B43"/>
+                          </a:solidFill>
+                          <a:latin typeface="Calibri"/>
+                        </a:rPr>
+                        <a:t>87.0%</a:t>
+                      </a:r>
+                    </a:p>
+                  </a:txBody>
+                  <a:tcPr>
+                    <a:solidFill>
+                      <a:srgbClr val="FFFFFF"/>
+                    </a:solidFill>
+                  </a:tcPr>
+                </a:tc>
+                <a:tc>
+                  <a:txBody>
+                    <a:bodyPr/>
+                    <a:lstStyle/>
+                    <a:p>
+                      <a:pPr algn="l"/>
+                      <a:r>
+                        <a:rPr sz="1000" b="0">
+                          <a:solidFill>
+                            <a:srgbClr val="1D1B43"/>
+                          </a:solidFill>
+                          <a:latin typeface="Calibri"/>
+                        </a:rPr>
+                        <a:t>Regular</a:t>
                       </a:r>
                     </a:p>
                   </a:txBody>
@@ -6431,53 +8654,53 @@
                           </a:solidFill>
                           <a:latin typeface="Calibri"/>
                         </a:rPr>
-                        <a:t>SC</a:t>
-                      </a:r>
-                    </a:p>
-                  </a:txBody>
-                  <a:tcPr>
-                    <a:solidFill>
-                      <a:srgbClr val="F2F2F2"/>
-                    </a:solidFill>
-                  </a:tcPr>
-                </a:tc>
-                <a:tc>
-                  <a:txBody>
-                    <a:bodyPr/>
-                    <a:lstStyle/>
-                    <a:p>
-                      <a:pPr algn="l"/>
-                      <a:r>
-                        <a:rPr sz="1000" b="0">
-                          <a:solidFill>
-                            <a:srgbClr val="1D1B43"/>
-                          </a:solidFill>
-                          <a:latin typeface="Calibri"/>
-                        </a:rPr>
-                        <a:t>59</a:t>
-                      </a:r>
-                    </a:p>
-                  </a:txBody>
-                  <a:tcPr>
-                    <a:solidFill>
-                      <a:srgbClr val="F2F2F2"/>
-                    </a:solidFill>
-                  </a:tcPr>
-                </a:tc>
-                <a:tc>
-                  <a:txBody>
-                    <a:bodyPr/>
-                    <a:lstStyle/>
-                    <a:p>
-                      <a:pPr algn="l"/>
-                      <a:r>
-                        <a:rPr sz="1000" b="0">
-                          <a:solidFill>
-                            <a:srgbClr val="1D1B43"/>
-                          </a:solidFill>
-                          <a:latin typeface="Calibri"/>
-                        </a:rPr>
-                        <a:t>59</a:t>
+                        <a:t>ES</a:t>
+                      </a:r>
+                    </a:p>
+                  </a:txBody>
+                  <a:tcPr>
+                    <a:solidFill>
+                      <a:srgbClr val="F2F2F2"/>
+                    </a:solidFill>
+                  </a:tcPr>
+                </a:tc>
+                <a:tc>
+                  <a:txBody>
+                    <a:bodyPr/>
+                    <a:lstStyle/>
+                    <a:p>
+                      <a:pPr algn="l"/>
+                      <a:r>
+                        <a:rPr sz="1000" b="0">
+                          <a:solidFill>
+                            <a:srgbClr val="1D1B43"/>
+                          </a:solidFill>
+                          <a:latin typeface="Calibri"/>
+                        </a:rPr>
+                        <a:t>62</a:t>
+                      </a:r>
+                    </a:p>
+                  </a:txBody>
+                  <a:tcPr>
+                    <a:solidFill>
+                      <a:srgbClr val="F2F2F2"/>
+                    </a:solidFill>
+                  </a:tcPr>
+                </a:tc>
+                <a:tc>
+                  <a:txBody>
+                    <a:bodyPr/>
+                    <a:lstStyle/>
+                    <a:p>
+                      <a:pPr algn="l"/>
+                      <a:r>
+                        <a:rPr sz="1000" b="0">
+                          <a:solidFill>
+                            <a:srgbClr val="1D1B43"/>
+                          </a:solidFill>
+                          <a:latin typeface="Calibri"/>
+                        </a:rPr>
+                        <a:t>62</a:t>
                       </a:r>
                     </a:p>
                   </a:txBody>
@@ -6571,122 +8794,122 @@
                           </a:solidFill>
                           <a:latin typeface="Calibri"/>
                         </a:rPr>
-                        <a:t>MG</a:t>
-                      </a:r>
-                    </a:p>
-                  </a:txBody>
-                  <a:tcPr>
-                    <a:solidFill>
-                      <a:srgbClr val="FFFFFF"/>
-                    </a:solidFill>
-                  </a:tcPr>
-                </a:tc>
-                <a:tc>
-                  <a:txBody>
-                    <a:bodyPr/>
-                    <a:lstStyle/>
-                    <a:p>
-                      <a:pPr algn="l"/>
-                      <a:r>
-                        <a:rPr sz="1000" b="0">
-                          <a:solidFill>
-                            <a:srgbClr val="1D1B43"/>
-                          </a:solidFill>
-                          <a:latin typeface="Calibri"/>
-                        </a:rPr>
-                        <a:t>44</a:t>
-                      </a:r>
-                    </a:p>
-                  </a:txBody>
-                  <a:tcPr>
-                    <a:solidFill>
-                      <a:srgbClr val="FFFFFF"/>
-                    </a:solidFill>
-                  </a:tcPr>
-                </a:tc>
-                <a:tc>
-                  <a:txBody>
-                    <a:bodyPr/>
-                    <a:lstStyle/>
-                    <a:p>
-                      <a:pPr algn="l"/>
-                      <a:r>
-                        <a:rPr sz="1000" b="0">
-                          <a:solidFill>
-                            <a:srgbClr val="1D1B43"/>
-                          </a:solidFill>
-                          <a:latin typeface="Calibri"/>
-                        </a:rPr>
-                        <a:t>43</a:t>
-                      </a:r>
-                    </a:p>
-                  </a:txBody>
-                  <a:tcPr>
-                    <a:solidFill>
-                      <a:srgbClr val="FFFFFF"/>
-                    </a:solidFill>
-                  </a:tcPr>
-                </a:tc>
-                <a:tc>
-                  <a:txBody>
-                    <a:bodyPr/>
-                    <a:lstStyle/>
-                    <a:p>
-                      <a:pPr algn="l"/>
-                      <a:r>
-                        <a:rPr sz="1000" b="0">
-                          <a:solidFill>
-                            <a:srgbClr val="1D1B43"/>
-                          </a:solidFill>
-                          <a:latin typeface="Calibri"/>
-                        </a:rPr>
-                        <a:t>1</a:t>
-                      </a:r>
-                    </a:p>
-                  </a:txBody>
-                  <a:tcPr>
-                    <a:solidFill>
-                      <a:srgbClr val="FFFFFF"/>
-                    </a:solidFill>
-                  </a:tcPr>
-                </a:tc>
-                <a:tc>
-                  <a:txBody>
-                    <a:bodyPr/>
-                    <a:lstStyle/>
-                    <a:p>
-                      <a:pPr algn="l"/>
-                      <a:r>
-                        <a:rPr sz="1000" b="0">
-                          <a:solidFill>
-                            <a:srgbClr val="1D1B43"/>
-                          </a:solidFill>
-                          <a:latin typeface="Calibri"/>
-                        </a:rPr>
-                        <a:t>97.7%</a:t>
-                      </a:r>
-                    </a:p>
-                  </a:txBody>
-                  <a:tcPr>
-                    <a:solidFill>
-                      <a:srgbClr val="FFFFFF"/>
-                    </a:solidFill>
-                  </a:tcPr>
-                </a:tc>
-                <a:tc>
-                  <a:txBody>
-                    <a:bodyPr/>
-                    <a:lstStyle/>
-                    <a:p>
-                      <a:pPr algn="l"/>
-                      <a:r>
-                        <a:rPr sz="1000" b="0">
-                          <a:solidFill>
-                            <a:srgbClr val="1D1B43"/>
-                          </a:solidFill>
-                          <a:latin typeface="Calibri"/>
-                        </a:rPr>
-                        <a:t>Excelente</a:t>
+                        <a:t>RS</a:t>
+                      </a:r>
+                    </a:p>
+                  </a:txBody>
+                  <a:tcPr>
+                    <a:solidFill>
+                      <a:srgbClr val="FFFFFF"/>
+                    </a:solidFill>
+                  </a:tcPr>
+                </a:tc>
+                <a:tc>
+                  <a:txBody>
+                    <a:bodyPr/>
+                    <a:lstStyle/>
+                    <a:p>
+                      <a:pPr algn="l"/>
+                      <a:r>
+                        <a:rPr sz="1000" b="0">
+                          <a:solidFill>
+                            <a:srgbClr val="1D1B43"/>
+                          </a:solidFill>
+                          <a:latin typeface="Calibri"/>
+                        </a:rPr>
+                        <a:t>51</a:t>
+                      </a:r>
+                    </a:p>
+                  </a:txBody>
+                  <a:tcPr>
+                    <a:solidFill>
+                      <a:srgbClr val="FFFFFF"/>
+                    </a:solidFill>
+                  </a:tcPr>
+                </a:tc>
+                <a:tc>
+                  <a:txBody>
+                    <a:bodyPr/>
+                    <a:lstStyle/>
+                    <a:p>
+                      <a:pPr algn="l"/>
+                      <a:r>
+                        <a:rPr sz="1000" b="0">
+                          <a:solidFill>
+                            <a:srgbClr val="1D1B43"/>
+                          </a:solidFill>
+                          <a:latin typeface="Calibri"/>
+                        </a:rPr>
+                        <a:t>48</a:t>
+                      </a:r>
+                    </a:p>
+                  </a:txBody>
+                  <a:tcPr>
+                    <a:solidFill>
+                      <a:srgbClr val="FFFFFF"/>
+                    </a:solidFill>
+                  </a:tcPr>
+                </a:tc>
+                <a:tc>
+                  <a:txBody>
+                    <a:bodyPr/>
+                    <a:lstStyle/>
+                    <a:p>
+                      <a:pPr algn="l"/>
+                      <a:r>
+                        <a:rPr sz="1000" b="0">
+                          <a:solidFill>
+                            <a:srgbClr val="1D1B43"/>
+                          </a:solidFill>
+                          <a:latin typeface="Calibri"/>
+                        </a:rPr>
+                        <a:t>3</a:t>
+                      </a:r>
+                    </a:p>
+                  </a:txBody>
+                  <a:tcPr>
+                    <a:solidFill>
+                      <a:srgbClr val="FFFFFF"/>
+                    </a:solidFill>
+                  </a:tcPr>
+                </a:tc>
+                <a:tc>
+                  <a:txBody>
+                    <a:bodyPr/>
+                    <a:lstStyle/>
+                    <a:p>
+                      <a:pPr algn="l"/>
+                      <a:r>
+                        <a:rPr sz="1000" b="0">
+                          <a:solidFill>
+                            <a:srgbClr val="1D1B43"/>
+                          </a:solidFill>
+                          <a:latin typeface="Calibri"/>
+                        </a:rPr>
+                        <a:t>94.1%</a:t>
+                      </a:r>
+                    </a:p>
+                  </a:txBody>
+                  <a:tcPr>
+                    <a:solidFill>
+                      <a:srgbClr val="FFFFFF"/>
+                    </a:solidFill>
+                  </a:tcPr>
+                </a:tc>
+                <a:tc>
+                  <a:txBody>
+                    <a:bodyPr/>
+                    <a:lstStyle/>
+                    <a:p>
+                      <a:pPr algn="l"/>
+                      <a:r>
+                        <a:rPr sz="1000" b="0">
+                          <a:solidFill>
+                            <a:srgbClr val="1D1B43"/>
+                          </a:solidFill>
+                          <a:latin typeface="Calibri"/>
+                        </a:rPr>
+                        <a:t>Regular</a:t>
                       </a:r>
                     </a:p>
                   </a:txBody>
@@ -6711,122 +8934,122 @@
                           </a:solidFill>
                           <a:latin typeface="Calibri"/>
                         </a:rPr>
-                        <a:t>RS</a:t>
-                      </a:r>
-                    </a:p>
-                  </a:txBody>
-                  <a:tcPr>
-                    <a:solidFill>
-                      <a:srgbClr val="F2F2F2"/>
-                    </a:solidFill>
-                  </a:tcPr>
-                </a:tc>
-                <a:tc>
-                  <a:txBody>
-                    <a:bodyPr/>
-                    <a:lstStyle/>
-                    <a:p>
-                      <a:pPr algn="l"/>
-                      <a:r>
-                        <a:rPr sz="1000" b="0">
-                          <a:solidFill>
-                            <a:srgbClr val="1D1B43"/>
-                          </a:solidFill>
-                          <a:latin typeface="Calibri"/>
-                        </a:rPr>
-                        <a:t>21</a:t>
-                      </a:r>
-                    </a:p>
-                  </a:txBody>
-                  <a:tcPr>
-                    <a:solidFill>
-                      <a:srgbClr val="F2F2F2"/>
-                    </a:solidFill>
-                  </a:tcPr>
-                </a:tc>
-                <a:tc>
-                  <a:txBody>
-                    <a:bodyPr/>
-                    <a:lstStyle/>
-                    <a:p>
-                      <a:pPr algn="l"/>
-                      <a:r>
-                        <a:rPr sz="1000" b="0">
-                          <a:solidFill>
-                            <a:srgbClr val="1D1B43"/>
-                          </a:solidFill>
-                          <a:latin typeface="Calibri"/>
-                        </a:rPr>
-                        <a:t>21</a:t>
-                      </a:r>
-                    </a:p>
-                  </a:txBody>
-                  <a:tcPr>
-                    <a:solidFill>
-                      <a:srgbClr val="F2F2F2"/>
-                    </a:solidFill>
-                  </a:tcPr>
-                </a:tc>
-                <a:tc>
-                  <a:txBody>
-                    <a:bodyPr/>
-                    <a:lstStyle/>
-                    <a:p>
-                      <a:pPr algn="l"/>
-                      <a:r>
-                        <a:rPr sz="1000" b="0">
-                          <a:solidFill>
-                            <a:srgbClr val="1D1B43"/>
-                          </a:solidFill>
-                          <a:latin typeface="Calibri"/>
-                        </a:rPr>
-                        <a:t>0</a:t>
-                      </a:r>
-                    </a:p>
-                  </a:txBody>
-                  <a:tcPr>
-                    <a:solidFill>
-                      <a:srgbClr val="F2F2F2"/>
-                    </a:solidFill>
-                  </a:tcPr>
-                </a:tc>
-                <a:tc>
-                  <a:txBody>
-                    <a:bodyPr/>
-                    <a:lstStyle/>
-                    <a:p>
-                      <a:pPr algn="l"/>
-                      <a:r>
-                        <a:rPr sz="1000" b="0">
-                          <a:solidFill>
-                            <a:srgbClr val="1D1B43"/>
-                          </a:solidFill>
-                          <a:latin typeface="Calibri"/>
-                        </a:rPr>
-                        <a:t>100.0%</a:t>
-                      </a:r>
-                    </a:p>
-                  </a:txBody>
-                  <a:tcPr>
-                    <a:solidFill>
-                      <a:srgbClr val="F2F2F2"/>
-                    </a:solidFill>
-                  </a:tcPr>
-                </a:tc>
-                <a:tc>
-                  <a:txBody>
-                    <a:bodyPr/>
-                    <a:lstStyle/>
-                    <a:p>
-                      <a:pPr algn="l"/>
-                      <a:r>
-                        <a:rPr sz="1000" b="0">
-                          <a:solidFill>
-                            <a:srgbClr val="1D1B43"/>
-                          </a:solidFill>
-                          <a:latin typeface="Calibri"/>
-                        </a:rPr>
-                        <a:t>Excelente</a:t>
+                        <a:t>MG</a:t>
+                      </a:r>
+                    </a:p>
+                  </a:txBody>
+                  <a:tcPr>
+                    <a:solidFill>
+                      <a:srgbClr val="F2F2F2"/>
+                    </a:solidFill>
+                  </a:tcPr>
+                </a:tc>
+                <a:tc>
+                  <a:txBody>
+                    <a:bodyPr/>
+                    <a:lstStyle/>
+                    <a:p>
+                      <a:pPr algn="l"/>
+                      <a:r>
+                        <a:rPr sz="1000" b="0">
+                          <a:solidFill>
+                            <a:srgbClr val="1D1B43"/>
+                          </a:solidFill>
+                          <a:latin typeface="Calibri"/>
+                        </a:rPr>
+                        <a:t>39</a:t>
+                      </a:r>
+                    </a:p>
+                  </a:txBody>
+                  <a:tcPr>
+                    <a:solidFill>
+                      <a:srgbClr val="F2F2F2"/>
+                    </a:solidFill>
+                  </a:tcPr>
+                </a:tc>
+                <a:tc>
+                  <a:txBody>
+                    <a:bodyPr/>
+                    <a:lstStyle/>
+                    <a:p>
+                      <a:pPr algn="l"/>
+                      <a:r>
+                        <a:rPr sz="1000" b="0">
+                          <a:solidFill>
+                            <a:srgbClr val="1D1B43"/>
+                          </a:solidFill>
+                          <a:latin typeface="Calibri"/>
+                        </a:rPr>
+                        <a:t>36</a:t>
+                      </a:r>
+                    </a:p>
+                  </a:txBody>
+                  <a:tcPr>
+                    <a:solidFill>
+                      <a:srgbClr val="F2F2F2"/>
+                    </a:solidFill>
+                  </a:tcPr>
+                </a:tc>
+                <a:tc>
+                  <a:txBody>
+                    <a:bodyPr/>
+                    <a:lstStyle/>
+                    <a:p>
+                      <a:pPr algn="l"/>
+                      <a:r>
+                        <a:rPr sz="1000" b="0">
+                          <a:solidFill>
+                            <a:srgbClr val="1D1B43"/>
+                          </a:solidFill>
+                          <a:latin typeface="Calibri"/>
+                        </a:rPr>
+                        <a:t>3</a:t>
+                      </a:r>
+                    </a:p>
+                  </a:txBody>
+                  <a:tcPr>
+                    <a:solidFill>
+                      <a:srgbClr val="F2F2F2"/>
+                    </a:solidFill>
+                  </a:tcPr>
+                </a:tc>
+                <a:tc>
+                  <a:txBody>
+                    <a:bodyPr/>
+                    <a:lstStyle/>
+                    <a:p>
+                      <a:pPr algn="l"/>
+                      <a:r>
+                        <a:rPr sz="1000" b="0">
+                          <a:solidFill>
+                            <a:srgbClr val="1D1B43"/>
+                          </a:solidFill>
+                          <a:latin typeface="Calibri"/>
+                        </a:rPr>
+                        <a:t>92.3%</a:t>
+                      </a:r>
+                    </a:p>
+                  </a:txBody>
+                  <a:tcPr>
+                    <a:solidFill>
+                      <a:srgbClr val="F2F2F2"/>
+                    </a:solidFill>
+                  </a:tcPr>
+                </a:tc>
+                <a:tc>
+                  <a:txBody>
+                    <a:bodyPr/>
+                    <a:lstStyle/>
+                    <a:p>
+                      <a:pPr algn="l"/>
+                      <a:r>
+                        <a:rPr sz="1000" b="0">
+                          <a:solidFill>
+                            <a:srgbClr val="1D1B43"/>
+                          </a:solidFill>
+                          <a:latin typeface="Calibri"/>
+                        </a:rPr>
+                        <a:t>Regular</a:t>
                       </a:r>
                     </a:p>
                   </a:txBody>
@@ -6851,53 +9074,53 @@
                           </a:solidFill>
                           <a:latin typeface="Calibri"/>
                         </a:rPr>
-                        <a:t>BA</a:t>
-                      </a:r>
-                    </a:p>
-                  </a:txBody>
-                  <a:tcPr>
-                    <a:solidFill>
-                      <a:srgbClr val="FFFFFF"/>
-                    </a:solidFill>
-                  </a:tcPr>
-                </a:tc>
-                <a:tc>
-                  <a:txBody>
-                    <a:bodyPr/>
-                    <a:lstStyle/>
-                    <a:p>
-                      <a:pPr algn="l"/>
-                      <a:r>
-                        <a:rPr sz="1000" b="0">
-                          <a:solidFill>
-                            <a:srgbClr val="1D1B43"/>
-                          </a:solidFill>
-                          <a:latin typeface="Calibri"/>
-                        </a:rPr>
-                        <a:t>11</a:t>
-                      </a:r>
-                    </a:p>
-                  </a:txBody>
-                  <a:tcPr>
-                    <a:solidFill>
-                      <a:srgbClr val="FFFFFF"/>
-                    </a:solidFill>
-                  </a:tcPr>
-                </a:tc>
-                <a:tc>
-                  <a:txBody>
-                    <a:bodyPr/>
-                    <a:lstStyle/>
-                    <a:p>
-                      <a:pPr algn="l"/>
-                      <a:r>
-                        <a:rPr sz="1000" b="0">
-                          <a:solidFill>
-                            <a:srgbClr val="1D1B43"/>
-                          </a:solidFill>
-                          <a:latin typeface="Calibri"/>
-                        </a:rPr>
-                        <a:t>11</a:t>
+                        <a:t>GO</a:t>
+                      </a:r>
+                    </a:p>
+                  </a:txBody>
+                  <a:tcPr>
+                    <a:solidFill>
+                      <a:srgbClr val="FFFFFF"/>
+                    </a:solidFill>
+                  </a:tcPr>
+                </a:tc>
+                <a:tc>
+                  <a:txBody>
+                    <a:bodyPr/>
+                    <a:lstStyle/>
+                    <a:p>
+                      <a:pPr algn="l"/>
+                      <a:r>
+                        <a:rPr sz="1000" b="0">
+                          <a:solidFill>
+                            <a:srgbClr val="1D1B43"/>
+                          </a:solidFill>
+                          <a:latin typeface="Calibri"/>
+                        </a:rPr>
+                        <a:t>22</a:t>
+                      </a:r>
+                    </a:p>
+                  </a:txBody>
+                  <a:tcPr>
+                    <a:solidFill>
+                      <a:srgbClr val="FFFFFF"/>
+                    </a:solidFill>
+                  </a:tcPr>
+                </a:tc>
+                <a:tc>
+                  <a:txBody>
+                    <a:bodyPr/>
+                    <a:lstStyle/>
+                    <a:p>
+                      <a:pPr algn="l"/>
+                      <a:r>
+                        <a:rPr sz="1000" b="0">
+                          <a:solidFill>
+                            <a:srgbClr val="1D1B43"/>
+                          </a:solidFill>
+                          <a:latin typeface="Calibri"/>
+                        </a:rPr>
+                        <a:t>22</a:t>
                       </a:r>
                     </a:p>
                   </a:txBody>
@@ -6991,7 +9214,7 @@
                           </a:solidFill>
                           <a:latin typeface="Calibri"/>
                         </a:rPr>
-                        <a:t>GO</a:t>
+                        <a:t>BA</a:t>
                       </a:r>
                     </a:p>
                   </a:txBody>
@@ -7154,30 +9377,30 @@
                           </a:solidFill>
                           <a:latin typeface="Calibri"/>
                         </a:rPr>
-                        <a:t>6</a:t>
-                      </a:r>
-                    </a:p>
-                  </a:txBody>
-                  <a:tcPr>
-                    <a:solidFill>
-                      <a:srgbClr val="FFFFFF"/>
-                    </a:solidFill>
-                  </a:tcPr>
-                </a:tc>
-                <a:tc>
-                  <a:txBody>
-                    <a:bodyPr/>
-                    <a:lstStyle/>
-                    <a:p>
-                      <a:pPr algn="l"/>
-                      <a:r>
-                        <a:rPr sz="1000" b="0">
-                          <a:solidFill>
-                            <a:srgbClr val="1D1B43"/>
-                          </a:solidFill>
-                          <a:latin typeface="Calibri"/>
-                        </a:rPr>
-                        <a:t>6</a:t>
+                        <a:t>8</a:t>
+                      </a:r>
+                    </a:p>
+                  </a:txBody>
+                  <a:tcPr>
+                    <a:solidFill>
+                      <a:srgbClr val="FFFFFF"/>
+                    </a:solidFill>
+                  </a:tcPr>
+                </a:tc>
+                <a:tc>
+                  <a:txBody>
+                    <a:bodyPr/>
+                    <a:lstStyle/>
+                    <a:p>
+                      <a:pPr algn="l"/>
+                      <a:r>
+                        <a:rPr sz="1000" b="0">
+                          <a:solidFill>
+                            <a:srgbClr val="1D1B43"/>
+                          </a:solidFill>
+                          <a:latin typeface="Calibri"/>
+                        </a:rPr>
+                        <a:t>8</a:t>
                       </a:r>
                     </a:p>
                   </a:txBody>
@@ -7271,53 +9494,53 @@
                           </a:solidFill>
                           <a:latin typeface="Calibri"/>
                         </a:rPr>
-                        <a:t>MS</a:t>
-                      </a:r>
-                    </a:p>
-                  </a:txBody>
-                  <a:tcPr>
-                    <a:solidFill>
-                      <a:srgbClr val="F2F2F2"/>
-                    </a:solidFill>
-                  </a:tcPr>
-                </a:tc>
-                <a:tc>
-                  <a:txBody>
-                    <a:bodyPr/>
-                    <a:lstStyle/>
-                    <a:p>
-                      <a:pPr algn="l"/>
-                      <a:r>
-                        <a:rPr sz="1000" b="0">
-                          <a:solidFill>
-                            <a:srgbClr val="1D1B43"/>
-                          </a:solidFill>
-                          <a:latin typeface="Calibri"/>
-                        </a:rPr>
-                        <a:t>4</a:t>
-                      </a:r>
-                    </a:p>
-                  </a:txBody>
-                  <a:tcPr>
-                    <a:solidFill>
-                      <a:srgbClr val="F2F2F2"/>
-                    </a:solidFill>
-                  </a:tcPr>
-                </a:tc>
-                <a:tc>
-                  <a:txBody>
-                    <a:bodyPr/>
-                    <a:lstStyle/>
-                    <a:p>
-                      <a:pPr algn="l"/>
-                      <a:r>
-                        <a:rPr sz="1000" b="0">
-                          <a:solidFill>
-                            <a:srgbClr val="1D1B43"/>
-                          </a:solidFill>
-                          <a:latin typeface="Calibri"/>
-                        </a:rPr>
-                        <a:t>4</a:t>
+                        <a:t>PE</a:t>
+                      </a:r>
+                    </a:p>
+                  </a:txBody>
+                  <a:tcPr>
+                    <a:solidFill>
+                      <a:srgbClr val="F2F2F2"/>
+                    </a:solidFill>
+                  </a:tcPr>
+                </a:tc>
+                <a:tc>
+                  <a:txBody>
+                    <a:bodyPr/>
+                    <a:lstStyle/>
+                    <a:p>
+                      <a:pPr algn="l"/>
+                      <a:r>
+                        <a:rPr sz="1000" b="0">
+                          <a:solidFill>
+                            <a:srgbClr val="1D1B43"/>
+                          </a:solidFill>
+                          <a:latin typeface="Calibri"/>
+                        </a:rPr>
+                        <a:t>5</a:t>
+                      </a:r>
+                    </a:p>
+                  </a:txBody>
+                  <a:tcPr>
+                    <a:solidFill>
+                      <a:srgbClr val="F2F2F2"/>
+                    </a:solidFill>
+                  </a:tcPr>
+                </a:tc>
+                <a:tc>
+                  <a:txBody>
+                    <a:bodyPr/>
+                    <a:lstStyle/>
+                    <a:p>
+                      <a:pPr algn="l"/>
+                      <a:r>
+                        <a:rPr sz="1000" b="0">
+                          <a:solidFill>
+                            <a:srgbClr val="1D1B43"/>
+                          </a:solidFill>
+                          <a:latin typeface="Calibri"/>
+                        </a:rPr>
+                        <a:t>5</a:t>
                       </a:r>
                     </a:p>
                   </a:txBody>
@@ -7481,7 +9704,7 @@
                 </a:solidFill>
                 <a:latin typeface="Calibri"/>
               </a:rPr>
-              <a:t>TOP DESTINATARIOS (80 pontos)</a:t>
+              <a:t>TOP DESTINATARIOS (86 pontos)</a:t>
             </a:r>
           </a:p>
         </p:txBody>
@@ -7756,53 +9979,53 @@
                           </a:solidFill>
                           <a:latin typeface="Calibri"/>
                         </a:rPr>
-                        <a:t>DIMENSIONAL BRASIL S - SERRA / ES</a:t>
-                      </a:r>
-                    </a:p>
-                  </a:txBody>
-                  <a:tcPr>
-                    <a:solidFill>
-                      <a:srgbClr val="FFFFFF"/>
-                    </a:solidFill>
-                  </a:tcPr>
-                </a:tc>
-                <a:tc>
-                  <a:txBody>
-                    <a:bodyPr/>
-                    <a:lstStyle/>
-                    <a:p>
-                      <a:pPr algn="l"/>
-                      <a:r>
-                        <a:rPr sz="1000" b="0">
-                          <a:solidFill>
-                            <a:srgbClr val="1D1B43"/>
-                          </a:solidFill>
-                          <a:latin typeface="Calibri"/>
-                        </a:rPr>
-                        <a:t>42</a:t>
-                      </a:r>
-                    </a:p>
-                  </a:txBody>
-                  <a:tcPr>
-                    <a:solidFill>
-                      <a:srgbClr val="FFFFFF"/>
-                    </a:solidFill>
-                  </a:tcPr>
-                </a:tc>
-                <a:tc>
-                  <a:txBody>
-                    <a:bodyPr/>
-                    <a:lstStyle/>
-                    <a:p>
-                      <a:pPr algn="l"/>
-                      <a:r>
-                        <a:rPr sz="1000" b="0">
-                          <a:solidFill>
-                            <a:srgbClr val="1D1B43"/>
-                          </a:solidFill>
-                          <a:latin typeface="Calibri"/>
-                        </a:rPr>
-                        <a:t>42</a:t>
+                        <a:t>DIMENSIONAL BRASIL S - GARUVA / SC</a:t>
+                      </a:r>
+                    </a:p>
+                  </a:txBody>
+                  <a:tcPr>
+                    <a:solidFill>
+                      <a:srgbClr val="FFFFFF"/>
+                    </a:solidFill>
+                  </a:tcPr>
+                </a:tc>
+                <a:tc>
+                  <a:txBody>
+                    <a:bodyPr/>
+                    <a:lstStyle/>
+                    <a:p>
+                      <a:pPr algn="l"/>
+                      <a:r>
+                        <a:rPr sz="1000" b="0">
+                          <a:solidFill>
+                            <a:srgbClr val="1D1B43"/>
+                          </a:solidFill>
+                          <a:latin typeface="Calibri"/>
+                        </a:rPr>
+                        <a:t>68</a:t>
+                      </a:r>
+                    </a:p>
+                  </a:txBody>
+                  <a:tcPr>
+                    <a:solidFill>
+                      <a:srgbClr val="FFFFFF"/>
+                    </a:solidFill>
+                  </a:tcPr>
+                </a:tc>
+                <a:tc>
+                  <a:txBody>
+                    <a:bodyPr/>
+                    <a:lstStyle/>
+                    <a:p>
+                      <a:pPr algn="l"/>
+                      <a:r>
+                        <a:rPr sz="1000" b="0">
+                          <a:solidFill>
+                            <a:srgbClr val="1D1B43"/>
+                          </a:solidFill>
+                          <a:latin typeface="Calibri"/>
+                        </a:rPr>
+                        <a:t>68</a:t>
                       </a:r>
                     </a:p>
                   </a:txBody>
@@ -7919,122 +10142,122 @@
                           </a:solidFill>
                           <a:latin typeface="Calibri"/>
                         </a:rPr>
-                        <a:t>BUNZL EQUIPAMENTOS P - GUARULHOS / SP</a:t>
-                      </a:r>
-                    </a:p>
-                  </a:txBody>
-                  <a:tcPr>
-                    <a:solidFill>
-                      <a:srgbClr val="F2F2F2"/>
-                    </a:solidFill>
-                  </a:tcPr>
-                </a:tc>
-                <a:tc>
-                  <a:txBody>
-                    <a:bodyPr/>
-                    <a:lstStyle/>
-                    <a:p>
-                      <a:pPr algn="l"/>
-                      <a:r>
-                        <a:rPr sz="1000" b="0">
-                          <a:solidFill>
-                            <a:srgbClr val="1D1B43"/>
-                          </a:solidFill>
-                          <a:latin typeface="Calibri"/>
-                        </a:rPr>
-                        <a:t>40</a:t>
-                      </a:r>
-                    </a:p>
-                  </a:txBody>
-                  <a:tcPr>
-                    <a:solidFill>
-                      <a:srgbClr val="F2F2F2"/>
-                    </a:solidFill>
-                  </a:tcPr>
-                </a:tc>
-                <a:tc>
-                  <a:txBody>
-                    <a:bodyPr/>
-                    <a:lstStyle/>
-                    <a:p>
-                      <a:pPr algn="l"/>
-                      <a:r>
-                        <a:rPr sz="1000" b="0">
-                          <a:solidFill>
-                            <a:srgbClr val="1D1B43"/>
-                          </a:solidFill>
-                          <a:latin typeface="Calibri"/>
-                        </a:rPr>
-                        <a:t>40</a:t>
-                      </a:r>
-                    </a:p>
-                  </a:txBody>
-                  <a:tcPr>
-                    <a:solidFill>
-                      <a:srgbClr val="F2F2F2"/>
-                    </a:solidFill>
-                  </a:tcPr>
-                </a:tc>
-                <a:tc>
-                  <a:txBody>
-                    <a:bodyPr/>
-                    <a:lstStyle/>
-                    <a:p>
-                      <a:pPr algn="l"/>
-                      <a:r>
-                        <a:rPr sz="1000" b="0">
-                          <a:solidFill>
-                            <a:srgbClr val="1D1B43"/>
-                          </a:solidFill>
-                          <a:latin typeface="Calibri"/>
-                        </a:rPr>
-                        <a:t>0</a:t>
-                      </a:r>
-                    </a:p>
-                  </a:txBody>
-                  <a:tcPr>
-                    <a:solidFill>
-                      <a:srgbClr val="F2F2F2"/>
-                    </a:solidFill>
-                  </a:tcPr>
-                </a:tc>
-                <a:tc>
-                  <a:txBody>
-                    <a:bodyPr/>
-                    <a:lstStyle/>
-                    <a:p>
-                      <a:pPr algn="l"/>
-                      <a:r>
-                        <a:rPr sz="1000" b="0">
-                          <a:solidFill>
-                            <a:srgbClr val="1D1B43"/>
-                          </a:solidFill>
-                          <a:latin typeface="Calibri"/>
-                        </a:rPr>
-                        <a:t>100.0%</a:t>
-                      </a:r>
-                    </a:p>
-                  </a:txBody>
-                  <a:tcPr>
-                    <a:solidFill>
-                      <a:srgbClr val="F2F2F2"/>
-                    </a:solidFill>
-                  </a:tcPr>
-                </a:tc>
-                <a:tc>
-                  <a:txBody>
-                    <a:bodyPr/>
-                    <a:lstStyle/>
-                    <a:p>
-                      <a:pPr algn="l"/>
-                      <a:r>
-                        <a:rPr sz="1000" b="0">
-                          <a:solidFill>
-                            <a:srgbClr val="1D1B43"/>
-                          </a:solidFill>
-                          <a:latin typeface="Calibri"/>
-                        </a:rPr>
-                        <a:t>Excelente</a:t>
+                        <a:t>CORSUL COMERCIO E RE - SAO JOSE DOS PINHAIS / PR</a:t>
+                      </a:r>
+                    </a:p>
+                  </a:txBody>
+                  <a:tcPr>
+                    <a:solidFill>
+                      <a:srgbClr val="F2F2F2"/>
+                    </a:solidFill>
+                  </a:tcPr>
+                </a:tc>
+                <a:tc>
+                  <a:txBody>
+                    <a:bodyPr/>
+                    <a:lstStyle/>
+                    <a:p>
+                      <a:pPr algn="l"/>
+                      <a:r>
+                        <a:rPr sz="1000" b="0">
+                          <a:solidFill>
+                            <a:srgbClr val="1D1B43"/>
+                          </a:solidFill>
+                          <a:latin typeface="Calibri"/>
+                        </a:rPr>
+                        <a:t>50</a:t>
+                      </a:r>
+                    </a:p>
+                  </a:txBody>
+                  <a:tcPr>
+                    <a:solidFill>
+                      <a:srgbClr val="F2F2F2"/>
+                    </a:solidFill>
+                  </a:tcPr>
+                </a:tc>
+                <a:tc>
+                  <a:txBody>
+                    <a:bodyPr/>
+                    <a:lstStyle/>
+                    <a:p>
+                      <a:pPr algn="l"/>
+                      <a:r>
+                        <a:rPr sz="1000" b="0">
+                          <a:solidFill>
+                            <a:srgbClr val="1D1B43"/>
+                          </a:solidFill>
+                          <a:latin typeface="Calibri"/>
+                        </a:rPr>
+                        <a:t>41</a:t>
+                      </a:r>
+                    </a:p>
+                  </a:txBody>
+                  <a:tcPr>
+                    <a:solidFill>
+                      <a:srgbClr val="F2F2F2"/>
+                    </a:solidFill>
+                  </a:tcPr>
+                </a:tc>
+                <a:tc>
+                  <a:txBody>
+                    <a:bodyPr/>
+                    <a:lstStyle/>
+                    <a:p>
+                      <a:pPr algn="l"/>
+                      <a:r>
+                        <a:rPr sz="1000" b="0">
+                          <a:solidFill>
+                            <a:srgbClr val="1D1B43"/>
+                          </a:solidFill>
+                          <a:latin typeface="Calibri"/>
+                        </a:rPr>
+                        <a:t>9</a:t>
+                      </a:r>
+                    </a:p>
+                  </a:txBody>
+                  <a:tcPr>
+                    <a:solidFill>
+                      <a:srgbClr val="F2F2F2"/>
+                    </a:solidFill>
+                  </a:tcPr>
+                </a:tc>
+                <a:tc>
+                  <a:txBody>
+                    <a:bodyPr/>
+                    <a:lstStyle/>
+                    <a:p>
+                      <a:pPr algn="l"/>
+                      <a:r>
+                        <a:rPr sz="1000" b="0">
+                          <a:solidFill>
+                            <a:srgbClr val="1D1B43"/>
+                          </a:solidFill>
+                          <a:latin typeface="Calibri"/>
+                        </a:rPr>
+                        <a:t>82.0%</a:t>
+                      </a:r>
+                    </a:p>
+                  </a:txBody>
+                  <a:tcPr>
+                    <a:solidFill>
+                      <a:srgbClr val="F2F2F2"/>
+                    </a:solidFill>
+                  </a:tcPr>
+                </a:tc>
+                <a:tc>
+                  <a:txBody>
+                    <a:bodyPr/>
+                    <a:lstStyle/>
+                    <a:p>
+                      <a:pPr algn="l"/>
+                      <a:r>
+                        <a:rPr sz="1000" b="0">
+                          <a:solidFill>
+                            <a:srgbClr val="1D1B43"/>
+                          </a:solidFill>
+                          <a:latin typeface="Calibri"/>
+                        </a:rPr>
+                        <a:t>Atencao</a:t>
                       </a:r>
                     </a:p>
                   </a:txBody>
@@ -8082,53 +10305,53 @@
                           </a:solidFill>
                           <a:latin typeface="Calibri"/>
                         </a:rPr>
-                        <a:t>DIMENSIONAL BRASIL S - GARUVA / SC</a:t>
-                      </a:r>
-                    </a:p>
-                  </a:txBody>
-                  <a:tcPr>
-                    <a:solidFill>
-                      <a:srgbClr val="FFFFFF"/>
-                    </a:solidFill>
-                  </a:tcPr>
-                </a:tc>
-                <a:tc>
-                  <a:txBody>
-                    <a:bodyPr/>
-                    <a:lstStyle/>
-                    <a:p>
-                      <a:pPr algn="l"/>
-                      <a:r>
-                        <a:rPr sz="1000" b="0">
-                          <a:solidFill>
-                            <a:srgbClr val="1D1B43"/>
-                          </a:solidFill>
-                          <a:latin typeface="Calibri"/>
-                        </a:rPr>
-                        <a:t>33</a:t>
-                      </a:r>
-                    </a:p>
-                  </a:txBody>
-                  <a:tcPr>
-                    <a:solidFill>
-                      <a:srgbClr val="FFFFFF"/>
-                    </a:solidFill>
-                  </a:tcPr>
-                </a:tc>
-                <a:tc>
-                  <a:txBody>
-                    <a:bodyPr/>
-                    <a:lstStyle/>
-                    <a:p>
-                      <a:pPr algn="l"/>
-                      <a:r>
-                        <a:rPr sz="1000" b="0">
-                          <a:solidFill>
-                            <a:srgbClr val="1D1B43"/>
-                          </a:solidFill>
-                          <a:latin typeface="Calibri"/>
-                        </a:rPr>
-                        <a:t>33</a:t>
+                        <a:t>BUNZL EQUIPAMENTOS P - GUARULHOS / SP</a:t>
+                      </a:r>
+                    </a:p>
+                  </a:txBody>
+                  <a:tcPr>
+                    <a:solidFill>
+                      <a:srgbClr val="FFFFFF"/>
+                    </a:solidFill>
+                  </a:tcPr>
+                </a:tc>
+                <a:tc>
+                  <a:txBody>
+                    <a:bodyPr/>
+                    <a:lstStyle/>
+                    <a:p>
+                      <a:pPr algn="l"/>
+                      <a:r>
+                        <a:rPr sz="1000" b="0">
+                          <a:solidFill>
+                            <a:srgbClr val="1D1B43"/>
+                          </a:solidFill>
+                          <a:latin typeface="Calibri"/>
+                        </a:rPr>
+                        <a:t>45</a:t>
+                      </a:r>
+                    </a:p>
+                  </a:txBody>
+                  <a:tcPr>
+                    <a:solidFill>
+                      <a:srgbClr val="FFFFFF"/>
+                    </a:solidFill>
+                  </a:tcPr>
+                </a:tc>
+                <a:tc>
+                  <a:txBody>
+                    <a:bodyPr/>
+                    <a:lstStyle/>
+                    <a:p>
+                      <a:pPr algn="l"/>
+                      <a:r>
+                        <a:rPr sz="1000" b="0">
+                          <a:solidFill>
+                            <a:srgbClr val="1D1B43"/>
+                          </a:solidFill>
+                          <a:latin typeface="Calibri"/>
+                        </a:rPr>
+                        <a:t>45</a:t>
                       </a:r>
                     </a:p>
                   </a:txBody>
@@ -8245,53 +10468,53 @@
                           </a:solidFill>
                           <a:latin typeface="Calibri"/>
                         </a:rPr>
-                        <a:t>EXATA CARGO - GUARULHOS / SP</a:t>
-                      </a:r>
-                    </a:p>
-                  </a:txBody>
-                  <a:tcPr>
-                    <a:solidFill>
-                      <a:srgbClr val="F2F2F2"/>
-                    </a:solidFill>
-                  </a:tcPr>
-                </a:tc>
-                <a:tc>
-                  <a:txBody>
-                    <a:bodyPr/>
-                    <a:lstStyle/>
-                    <a:p>
-                      <a:pPr algn="l"/>
-                      <a:r>
-                        <a:rPr sz="1000" b="0">
-                          <a:solidFill>
-                            <a:srgbClr val="1D1B43"/>
-                          </a:solidFill>
-                          <a:latin typeface="Calibri"/>
-                        </a:rPr>
-                        <a:t>27</a:t>
-                      </a:r>
-                    </a:p>
-                  </a:txBody>
-                  <a:tcPr>
-                    <a:solidFill>
-                      <a:srgbClr val="F2F2F2"/>
-                    </a:solidFill>
-                  </a:tcPr>
-                </a:tc>
-                <a:tc>
-                  <a:txBody>
-                    <a:bodyPr/>
-                    <a:lstStyle/>
-                    <a:p>
-                      <a:pPr algn="l"/>
-                      <a:r>
-                        <a:rPr sz="1000" b="0">
-                          <a:solidFill>
-                            <a:srgbClr val="1D1B43"/>
-                          </a:solidFill>
-                          <a:latin typeface="Calibri"/>
-                        </a:rPr>
-                        <a:t>27</a:t>
+                        <a:t>DIMENSIONAL BRASIL S - SERRA / ES</a:t>
+                      </a:r>
+                    </a:p>
+                  </a:txBody>
+                  <a:tcPr>
+                    <a:solidFill>
+                      <a:srgbClr val="F2F2F2"/>
+                    </a:solidFill>
+                  </a:tcPr>
+                </a:tc>
+                <a:tc>
+                  <a:txBody>
+                    <a:bodyPr/>
+                    <a:lstStyle/>
+                    <a:p>
+                      <a:pPr algn="l"/>
+                      <a:r>
+                        <a:rPr sz="1000" b="0">
+                          <a:solidFill>
+                            <a:srgbClr val="1D1B43"/>
+                          </a:solidFill>
+                          <a:latin typeface="Calibri"/>
+                        </a:rPr>
+                        <a:t>34</a:t>
+                      </a:r>
+                    </a:p>
+                  </a:txBody>
+                  <a:tcPr>
+                    <a:solidFill>
+                      <a:srgbClr val="F2F2F2"/>
+                    </a:solidFill>
+                  </a:tcPr>
+                </a:tc>
+                <a:tc>
+                  <a:txBody>
+                    <a:bodyPr/>
+                    <a:lstStyle/>
+                    <a:p>
+                      <a:pPr algn="l"/>
+                      <a:r>
+                        <a:rPr sz="1000" b="0">
+                          <a:solidFill>
+                            <a:srgbClr val="1D1B43"/>
+                          </a:solidFill>
+                          <a:latin typeface="Calibri"/>
+                        </a:rPr>
+                        <a:t>34</a:t>
                       </a:r>
                     </a:p>
                   </a:txBody>
@@ -8408,53 +10631,53 @@
                           </a:solidFill>
                           <a:latin typeface="Calibri"/>
                         </a:rPr>
-                        <a:t>FASTENAL BRASIL IMPO - SOROCABA / SP</a:t>
-                      </a:r>
-                    </a:p>
-                  </a:txBody>
-                  <a:tcPr>
-                    <a:solidFill>
-                      <a:srgbClr val="FFFFFF"/>
-                    </a:solidFill>
-                  </a:tcPr>
-                </a:tc>
-                <a:tc>
-                  <a:txBody>
-                    <a:bodyPr/>
-                    <a:lstStyle/>
-                    <a:p>
-                      <a:pPr algn="l"/>
-                      <a:r>
-                        <a:rPr sz="1000" b="0">
-                          <a:solidFill>
-                            <a:srgbClr val="1D1B43"/>
-                          </a:solidFill>
-                          <a:latin typeface="Calibri"/>
-                        </a:rPr>
-                        <a:t>27</a:t>
-                      </a:r>
-                    </a:p>
-                  </a:txBody>
-                  <a:tcPr>
-                    <a:solidFill>
-                      <a:srgbClr val="FFFFFF"/>
-                    </a:solidFill>
-                  </a:tcPr>
-                </a:tc>
-                <a:tc>
-                  <a:txBody>
-                    <a:bodyPr/>
-                    <a:lstStyle/>
-                    <a:p>
-                      <a:pPr algn="l"/>
-                      <a:r>
-                        <a:rPr sz="1000" b="0">
-                          <a:solidFill>
-                            <a:srgbClr val="1D1B43"/>
-                          </a:solidFill>
-                          <a:latin typeface="Calibri"/>
-                        </a:rPr>
-                        <a:t>27</a:t>
+                        <a:t>NORTEL SUPRIMENTOS I - CAMPINAS / SP</a:t>
+                      </a:r>
+                    </a:p>
+                  </a:txBody>
+                  <a:tcPr>
+                    <a:solidFill>
+                      <a:srgbClr val="FFFFFF"/>
+                    </a:solidFill>
+                  </a:tcPr>
+                </a:tc>
+                <a:tc>
+                  <a:txBody>
+                    <a:bodyPr/>
+                    <a:lstStyle/>
+                    <a:p>
+                      <a:pPr algn="l"/>
+                      <a:r>
+                        <a:rPr sz="1000" b="0">
+                          <a:solidFill>
+                            <a:srgbClr val="1D1B43"/>
+                          </a:solidFill>
+                          <a:latin typeface="Calibri"/>
+                        </a:rPr>
+                        <a:t>29</a:t>
+                      </a:r>
+                    </a:p>
+                  </a:txBody>
+                  <a:tcPr>
+                    <a:solidFill>
+                      <a:srgbClr val="FFFFFF"/>
+                    </a:solidFill>
+                  </a:tcPr>
+                </a:tc>
+                <a:tc>
+                  <a:txBody>
+                    <a:bodyPr/>
+                    <a:lstStyle/>
+                    <a:p>
+                      <a:pPr algn="l"/>
+                      <a:r>
+                        <a:rPr sz="1000" b="0">
+                          <a:solidFill>
+                            <a:srgbClr val="1D1B43"/>
+                          </a:solidFill>
+                          <a:latin typeface="Calibri"/>
+                        </a:rPr>
+                        <a:t>29</a:t>
                       </a:r>
                     </a:p>
                   </a:txBody>
@@ -8571,53 +10794,53 @@
                           </a:solidFill>
                           <a:latin typeface="Calibri"/>
                         </a:rPr>
-                        <a:t>SP EQUIPAMENTOS DE P - GUARULHOS / SP</a:t>
-                      </a:r>
-                    </a:p>
-                  </a:txBody>
-                  <a:tcPr>
-                    <a:solidFill>
-                      <a:srgbClr val="F2F2F2"/>
-                    </a:solidFill>
-                  </a:tcPr>
-                </a:tc>
-                <a:tc>
-                  <a:txBody>
-                    <a:bodyPr/>
-                    <a:lstStyle/>
-                    <a:p>
-                      <a:pPr algn="l"/>
-                      <a:r>
-                        <a:rPr sz="1000" b="0">
-                          <a:solidFill>
-                            <a:srgbClr val="1D1B43"/>
-                          </a:solidFill>
-                          <a:latin typeface="Calibri"/>
-                        </a:rPr>
-                        <a:t>25</a:t>
-                      </a:r>
-                    </a:p>
-                  </a:txBody>
-                  <a:tcPr>
-                    <a:solidFill>
-                      <a:srgbClr val="F2F2F2"/>
-                    </a:solidFill>
-                  </a:tcPr>
-                </a:tc>
-                <a:tc>
-                  <a:txBody>
-                    <a:bodyPr/>
-                    <a:lstStyle/>
-                    <a:p>
-                      <a:pPr algn="l"/>
-                      <a:r>
-                        <a:rPr sz="1000" b="0">
-                          <a:solidFill>
-                            <a:srgbClr val="1D1B43"/>
-                          </a:solidFill>
-                          <a:latin typeface="Calibri"/>
-                        </a:rPr>
-                        <a:t>25</a:t>
+                        <a:t>EXATA CARGO - GUARULHOS / SP</a:t>
+                      </a:r>
+                    </a:p>
+                  </a:txBody>
+                  <a:tcPr>
+                    <a:solidFill>
+                      <a:srgbClr val="F2F2F2"/>
+                    </a:solidFill>
+                  </a:tcPr>
+                </a:tc>
+                <a:tc>
+                  <a:txBody>
+                    <a:bodyPr/>
+                    <a:lstStyle/>
+                    <a:p>
+                      <a:pPr algn="l"/>
+                      <a:r>
+                        <a:rPr sz="1000" b="0">
+                          <a:solidFill>
+                            <a:srgbClr val="1D1B43"/>
+                          </a:solidFill>
+                          <a:latin typeface="Calibri"/>
+                        </a:rPr>
+                        <a:t>28</a:t>
+                      </a:r>
+                    </a:p>
+                  </a:txBody>
+                  <a:tcPr>
+                    <a:solidFill>
+                      <a:srgbClr val="F2F2F2"/>
+                    </a:solidFill>
+                  </a:tcPr>
+                </a:tc>
+                <a:tc>
+                  <a:txBody>
+                    <a:bodyPr/>
+                    <a:lstStyle/>
+                    <a:p>
+                      <a:pPr algn="l"/>
+                      <a:r>
+                        <a:rPr sz="1000" b="0">
+                          <a:solidFill>
+                            <a:srgbClr val="1D1B43"/>
+                          </a:solidFill>
+                          <a:latin typeface="Calibri"/>
+                        </a:rPr>
+                        <a:t>28</a:t>
                       </a:r>
                     </a:p>
                   </a:txBody>
@@ -8734,7 +10957,7 @@
                           </a:solidFill>
                           <a:latin typeface="Calibri"/>
                         </a:rPr>
-                        <a:t>NORTEL SUPRIMENTOS I - CAMPINAS / SP</a:t>
+                        <a:t>NORTEL SUPRIMENTOS I - SERRA / ES</a:t>
                       </a:r>
                     </a:p>
                   </a:txBody>
@@ -8897,122 +11120,122 @@
                           </a:solidFill>
                           <a:latin typeface="Calibri"/>
                         </a:rPr>
-                        <a:t>BUNZL EQUIPAMENTOS P - CONTAGEM / MG</a:t>
-                      </a:r>
-                    </a:p>
-                  </a:txBody>
-                  <a:tcPr>
-                    <a:solidFill>
-                      <a:srgbClr val="F2F2F2"/>
-                    </a:solidFill>
-                  </a:tcPr>
-                </a:tc>
-                <a:tc>
-                  <a:txBody>
-                    <a:bodyPr/>
-                    <a:lstStyle/>
-                    <a:p>
-                      <a:pPr algn="l"/>
-                      <a:r>
-                        <a:rPr sz="1000" b="0">
-                          <a:solidFill>
-                            <a:srgbClr val="1D1B43"/>
-                          </a:solidFill>
-                          <a:latin typeface="Calibri"/>
-                        </a:rPr>
-                        <a:t>22</a:t>
-                      </a:r>
-                    </a:p>
-                  </a:txBody>
-                  <a:tcPr>
-                    <a:solidFill>
-                      <a:srgbClr val="F2F2F2"/>
-                    </a:solidFill>
-                  </a:tcPr>
-                </a:tc>
-                <a:tc>
-                  <a:txBody>
-                    <a:bodyPr/>
-                    <a:lstStyle/>
-                    <a:p>
-                      <a:pPr algn="l"/>
-                      <a:r>
-                        <a:rPr sz="1000" b="0">
-                          <a:solidFill>
-                            <a:srgbClr val="1D1B43"/>
-                          </a:solidFill>
-                          <a:latin typeface="Calibri"/>
-                        </a:rPr>
-                        <a:t>22</a:t>
-                      </a:r>
-                    </a:p>
-                  </a:txBody>
-                  <a:tcPr>
-                    <a:solidFill>
-                      <a:srgbClr val="F2F2F2"/>
-                    </a:solidFill>
-                  </a:tcPr>
-                </a:tc>
-                <a:tc>
-                  <a:txBody>
-                    <a:bodyPr/>
-                    <a:lstStyle/>
-                    <a:p>
-                      <a:pPr algn="l"/>
-                      <a:r>
-                        <a:rPr sz="1000" b="0">
-                          <a:solidFill>
-                            <a:srgbClr val="1D1B43"/>
-                          </a:solidFill>
-                          <a:latin typeface="Calibri"/>
-                        </a:rPr>
-                        <a:t>0</a:t>
-                      </a:r>
-                    </a:p>
-                  </a:txBody>
-                  <a:tcPr>
-                    <a:solidFill>
-                      <a:srgbClr val="F2F2F2"/>
-                    </a:solidFill>
-                  </a:tcPr>
-                </a:tc>
-                <a:tc>
-                  <a:txBody>
-                    <a:bodyPr/>
-                    <a:lstStyle/>
-                    <a:p>
-                      <a:pPr algn="l"/>
-                      <a:r>
-                        <a:rPr sz="1000" b="0">
-                          <a:solidFill>
-                            <a:srgbClr val="1D1B43"/>
-                          </a:solidFill>
-                          <a:latin typeface="Calibri"/>
-                        </a:rPr>
-                        <a:t>100.0%</a:t>
-                      </a:r>
-                    </a:p>
-                  </a:txBody>
-                  <a:tcPr>
-                    <a:solidFill>
-                      <a:srgbClr val="F2F2F2"/>
-                    </a:solidFill>
-                  </a:tcPr>
-                </a:tc>
-                <a:tc>
-                  <a:txBody>
-                    <a:bodyPr/>
-                    <a:lstStyle/>
-                    <a:p>
-                      <a:pPr algn="l"/>
-                      <a:r>
-                        <a:rPr sz="1000" b="0">
-                          <a:solidFill>
-                            <a:srgbClr val="1D1B43"/>
-                          </a:solidFill>
-                          <a:latin typeface="Calibri"/>
-                        </a:rPr>
-                        <a:t>Excelente</a:t>
+                        <a:t>CORSUL COMERCIO E RE - CAXIAS DO SUL / RS</a:t>
+                      </a:r>
+                    </a:p>
+                  </a:txBody>
+                  <a:tcPr>
+                    <a:solidFill>
+                      <a:srgbClr val="F2F2F2"/>
+                    </a:solidFill>
+                  </a:tcPr>
+                </a:tc>
+                <a:tc>
+                  <a:txBody>
+                    <a:bodyPr/>
+                    <a:lstStyle/>
+                    <a:p>
+                      <a:pPr algn="l"/>
+                      <a:r>
+                        <a:rPr sz="1000" b="0">
+                          <a:solidFill>
+                            <a:srgbClr val="1D1B43"/>
+                          </a:solidFill>
+                          <a:latin typeface="Calibri"/>
+                        </a:rPr>
+                        <a:t>23</a:t>
+                      </a:r>
+                    </a:p>
+                  </a:txBody>
+                  <a:tcPr>
+                    <a:solidFill>
+                      <a:srgbClr val="F2F2F2"/>
+                    </a:solidFill>
+                  </a:tcPr>
+                </a:tc>
+                <a:tc>
+                  <a:txBody>
+                    <a:bodyPr/>
+                    <a:lstStyle/>
+                    <a:p>
+                      <a:pPr algn="l"/>
+                      <a:r>
+                        <a:rPr sz="1000" b="0">
+                          <a:solidFill>
+                            <a:srgbClr val="1D1B43"/>
+                          </a:solidFill>
+                          <a:latin typeface="Calibri"/>
+                        </a:rPr>
+                        <a:t>20</a:t>
+                      </a:r>
+                    </a:p>
+                  </a:txBody>
+                  <a:tcPr>
+                    <a:solidFill>
+                      <a:srgbClr val="F2F2F2"/>
+                    </a:solidFill>
+                  </a:tcPr>
+                </a:tc>
+                <a:tc>
+                  <a:txBody>
+                    <a:bodyPr/>
+                    <a:lstStyle/>
+                    <a:p>
+                      <a:pPr algn="l"/>
+                      <a:r>
+                        <a:rPr sz="1000" b="0">
+                          <a:solidFill>
+                            <a:srgbClr val="1D1B43"/>
+                          </a:solidFill>
+                          <a:latin typeface="Calibri"/>
+                        </a:rPr>
+                        <a:t>3</a:t>
+                      </a:r>
+                    </a:p>
+                  </a:txBody>
+                  <a:tcPr>
+                    <a:solidFill>
+                      <a:srgbClr val="F2F2F2"/>
+                    </a:solidFill>
+                  </a:tcPr>
+                </a:tc>
+                <a:tc>
+                  <a:txBody>
+                    <a:bodyPr/>
+                    <a:lstStyle/>
+                    <a:p>
+                      <a:pPr algn="l"/>
+                      <a:r>
+                        <a:rPr sz="1000" b="0">
+                          <a:solidFill>
+                            <a:srgbClr val="1D1B43"/>
+                          </a:solidFill>
+                          <a:latin typeface="Calibri"/>
+                        </a:rPr>
+                        <a:t>87.0%</a:t>
+                      </a:r>
+                    </a:p>
+                  </a:txBody>
+                  <a:tcPr>
+                    <a:solidFill>
+                      <a:srgbClr val="F2F2F2"/>
+                    </a:solidFill>
+                  </a:tcPr>
+                </a:tc>
+                <a:tc>
+                  <a:txBody>
+                    <a:bodyPr/>
+                    <a:lstStyle/>
+                    <a:p>
+                      <a:pPr algn="l"/>
+                      <a:r>
+                        <a:rPr sz="1000" b="0">
+                          <a:solidFill>
+                            <a:srgbClr val="1D1B43"/>
+                          </a:solidFill>
+                          <a:latin typeface="Calibri"/>
+                        </a:rPr>
+                        <a:t>Regular</a:t>
                       </a:r>
                     </a:p>
                   </a:txBody>
@@ -9060,53 +11283,53 @@
                           </a:solidFill>
                           <a:latin typeface="Calibri"/>
                         </a:rPr>
-                        <a:t>CORSUL COMERCIO E RE - SAO JOSE DOS PINHAIS / PR</a:t>
-                      </a:r>
-                    </a:p>
-                  </a:txBody>
-                  <a:tcPr>
-                    <a:solidFill>
-                      <a:srgbClr val="FFFFFF"/>
-                    </a:solidFill>
-                  </a:tcPr>
-                </a:tc>
-                <a:tc>
-                  <a:txBody>
-                    <a:bodyPr/>
-                    <a:lstStyle/>
-                    <a:p>
-                      <a:pPr algn="l"/>
-                      <a:r>
-                        <a:rPr sz="1000" b="0">
-                          <a:solidFill>
-                            <a:srgbClr val="1D1B43"/>
-                          </a:solidFill>
-                          <a:latin typeface="Calibri"/>
-                        </a:rPr>
-                        <a:t>22</a:t>
-                      </a:r>
-                    </a:p>
-                  </a:txBody>
-                  <a:tcPr>
-                    <a:solidFill>
-                      <a:srgbClr val="FFFFFF"/>
-                    </a:solidFill>
-                  </a:tcPr>
-                </a:tc>
-                <a:tc>
-                  <a:txBody>
-                    <a:bodyPr/>
-                    <a:lstStyle/>
-                    <a:p>
-                      <a:pPr algn="l"/>
-                      <a:r>
-                        <a:rPr sz="1000" b="0">
-                          <a:solidFill>
-                            <a:srgbClr val="1D1B43"/>
-                          </a:solidFill>
-                          <a:latin typeface="Calibri"/>
-                        </a:rPr>
-                        <a:t>22</a:t>
+                        <a:t>NORTEL SUPRIMENTOS I - GOIANIA / GO</a:t>
+                      </a:r>
+                    </a:p>
+                  </a:txBody>
+                  <a:tcPr>
+                    <a:solidFill>
+                      <a:srgbClr val="FFFFFF"/>
+                    </a:solidFill>
+                  </a:tcPr>
+                </a:tc>
+                <a:tc>
+                  <a:txBody>
+                    <a:bodyPr/>
+                    <a:lstStyle/>
+                    <a:p>
+                      <a:pPr algn="l"/>
+                      <a:r>
+                        <a:rPr sz="1000" b="0">
+                          <a:solidFill>
+                            <a:srgbClr val="1D1B43"/>
+                          </a:solidFill>
+                          <a:latin typeface="Calibri"/>
+                        </a:rPr>
+                        <a:t>21</a:t>
+                      </a:r>
+                    </a:p>
+                  </a:txBody>
+                  <a:tcPr>
+                    <a:solidFill>
+                      <a:srgbClr val="FFFFFF"/>
+                    </a:solidFill>
+                  </a:tcPr>
+                </a:tc>
+                <a:tc>
+                  <a:txBody>
+                    <a:bodyPr/>
+                    <a:lstStyle/>
+                    <a:p>
+                      <a:pPr algn="l"/>
+                      <a:r>
+                        <a:rPr sz="1000" b="0">
+                          <a:solidFill>
+                            <a:srgbClr val="1D1B43"/>
+                          </a:solidFill>
+                          <a:latin typeface="Calibri"/>
+                        </a:rPr>
+                        <a:t>21</a:t>
                       </a:r>
                     </a:p>
                   </a:txBody>
@@ -9223,53 +11446,53 @@
                           </a:solidFill>
                           <a:latin typeface="Calibri"/>
                         </a:rPr>
-                        <a:t>NORTEL SUPRIMENTOS I - SERRA / ES</a:t>
-                      </a:r>
-                    </a:p>
-                  </a:txBody>
-                  <a:tcPr>
-                    <a:solidFill>
-                      <a:srgbClr val="F2F2F2"/>
-                    </a:solidFill>
-                  </a:tcPr>
-                </a:tc>
-                <a:tc>
-                  <a:txBody>
-                    <a:bodyPr/>
-                    <a:lstStyle/>
-                    <a:p>
-                      <a:pPr algn="l"/>
-                      <a:r>
-                        <a:rPr sz="1000" b="0">
-                          <a:solidFill>
-                            <a:srgbClr val="1D1B43"/>
-                          </a:solidFill>
-                          <a:latin typeface="Calibri"/>
-                        </a:rPr>
-                        <a:t>21</a:t>
-                      </a:r>
-                    </a:p>
-                  </a:txBody>
-                  <a:tcPr>
-                    <a:solidFill>
-                      <a:srgbClr val="F2F2F2"/>
-                    </a:solidFill>
-                  </a:tcPr>
-                </a:tc>
-                <a:tc>
-                  <a:txBody>
-                    <a:bodyPr/>
-                    <a:lstStyle/>
-                    <a:p>
-                      <a:pPr algn="l"/>
-                      <a:r>
-                        <a:rPr sz="1000" b="0">
-                          <a:solidFill>
-                            <a:srgbClr val="1D1B43"/>
-                          </a:solidFill>
-                          <a:latin typeface="Calibri"/>
-                        </a:rPr>
-                        <a:t>21</a:t>
+                        <a:t>SP EQUIPAMENTOS DE P - GUARULHOS / SP</a:t>
+                      </a:r>
+                    </a:p>
+                  </a:txBody>
+                  <a:tcPr>
+                    <a:solidFill>
+                      <a:srgbClr val="F2F2F2"/>
+                    </a:solidFill>
+                  </a:tcPr>
+                </a:tc>
+                <a:tc>
+                  <a:txBody>
+                    <a:bodyPr/>
+                    <a:lstStyle/>
+                    <a:p>
+                      <a:pPr algn="l"/>
+                      <a:r>
+                        <a:rPr sz="1000" b="0">
+                          <a:solidFill>
+                            <a:srgbClr val="1D1B43"/>
+                          </a:solidFill>
+                          <a:latin typeface="Calibri"/>
+                        </a:rPr>
+                        <a:t>19</a:t>
+                      </a:r>
+                    </a:p>
+                  </a:txBody>
+                  <a:tcPr>
+                    <a:solidFill>
+                      <a:srgbClr val="F2F2F2"/>
+                    </a:solidFill>
+                  </a:tcPr>
+                </a:tc>
+                <a:tc>
+                  <a:txBody>
+                    <a:bodyPr/>
+                    <a:lstStyle/>
+                    <a:p>
+                      <a:pPr algn="l"/>
+                      <a:r>
+                        <a:rPr sz="1000" b="0">
+                          <a:solidFill>
+                            <a:srgbClr val="1D1B43"/>
+                          </a:solidFill>
+                          <a:latin typeface="Calibri"/>
+                        </a:rPr>
+                        <a:t>19</a:t>
                       </a:r>
                     </a:p>
                   </a:txBody>
@@ -9386,7 +11609,7 @@
                           </a:solidFill>
                           <a:latin typeface="Calibri"/>
                         </a:rPr>
-                        <a:t>1000 MARCAS SAFETY B - ARACARIGUAMA / SP</a:t>
+                        <a:t>ELETRONOR - DISTRIBU - CAXIAS DO SUL / RS</a:t>
                       </a:r>
                     </a:p>
                   </a:txBody>
@@ -9549,53 +11772,53 @@
                           </a:solidFill>
                           <a:latin typeface="Calibri"/>
                         </a:rPr>
-                        <a:t>WILSON SONS LOGISTIC - SANTO ANDRE / SP</a:t>
-                      </a:r>
-                    </a:p>
-                  </a:txBody>
-                  <a:tcPr>
-                    <a:solidFill>
-                      <a:srgbClr val="F2F2F2"/>
-                    </a:solidFill>
-                  </a:tcPr>
-                </a:tc>
-                <a:tc>
-                  <a:txBody>
-                    <a:bodyPr/>
-                    <a:lstStyle/>
-                    <a:p>
-                      <a:pPr algn="l"/>
-                      <a:r>
-                        <a:rPr sz="1000" b="0">
-                          <a:solidFill>
-                            <a:srgbClr val="1D1B43"/>
-                          </a:solidFill>
-                          <a:latin typeface="Calibri"/>
-                        </a:rPr>
-                        <a:t>19</a:t>
-                      </a:r>
-                    </a:p>
-                  </a:txBody>
-                  <a:tcPr>
-                    <a:solidFill>
-                      <a:srgbClr val="F2F2F2"/>
-                    </a:solidFill>
-                  </a:tcPr>
-                </a:tc>
-                <a:tc>
-                  <a:txBody>
-                    <a:bodyPr/>
-                    <a:lstStyle/>
-                    <a:p>
-                      <a:pPr algn="l"/>
-                      <a:r>
-                        <a:rPr sz="1000" b="0">
-                          <a:solidFill>
-                            <a:srgbClr val="1D1B43"/>
-                          </a:solidFill>
-                          <a:latin typeface="Calibri"/>
-                        </a:rPr>
-                        <a:t>19</a:t>
+                        <a:t>BALASKA EQUIPE INDUS - GUARULHOS / SP</a:t>
+                      </a:r>
+                    </a:p>
+                  </a:txBody>
+                  <a:tcPr>
+                    <a:solidFill>
+                      <a:srgbClr val="F2F2F2"/>
+                    </a:solidFill>
+                  </a:tcPr>
+                </a:tc>
+                <a:tc>
+                  <a:txBody>
+                    <a:bodyPr/>
+                    <a:lstStyle/>
+                    <a:p>
+                      <a:pPr algn="l"/>
+                      <a:r>
+                        <a:rPr sz="1000" b="0">
+                          <a:solidFill>
+                            <a:srgbClr val="1D1B43"/>
+                          </a:solidFill>
+                          <a:latin typeface="Calibri"/>
+                        </a:rPr>
+                        <a:t>18</a:t>
+                      </a:r>
+                    </a:p>
+                  </a:txBody>
+                  <a:tcPr>
+                    <a:solidFill>
+                      <a:srgbClr val="F2F2F2"/>
+                    </a:solidFill>
+                  </a:tcPr>
+                </a:tc>
+                <a:tc>
+                  <a:txBody>
+                    <a:bodyPr/>
+                    <a:lstStyle/>
+                    <a:p>
+                      <a:pPr algn="l"/>
+                      <a:r>
+                        <a:rPr sz="1000" b="0">
+                          <a:solidFill>
+                            <a:srgbClr val="1D1B43"/>
+                          </a:solidFill>
+                          <a:latin typeface="Calibri"/>
+                        </a:rPr>
+                        <a:t>18</a:t>
                       </a:r>
                     </a:p>
                   </a:txBody>
@@ -9712,53 +11935,53 @@
                           </a:solidFill>
                           <a:latin typeface="Calibri"/>
                         </a:rPr>
-                        <a:t>CORSUL COMERCIO E RE - CASCAVEL / PR</a:t>
-                      </a:r>
-                    </a:p>
-                  </a:txBody>
-                  <a:tcPr>
-                    <a:solidFill>
-                      <a:srgbClr val="FFFFFF"/>
-                    </a:solidFill>
-                  </a:tcPr>
-                </a:tc>
-                <a:tc>
-                  <a:txBody>
-                    <a:bodyPr/>
-                    <a:lstStyle/>
-                    <a:p>
-                      <a:pPr algn="l"/>
-                      <a:r>
-                        <a:rPr sz="1000" b="0">
-                          <a:solidFill>
-                            <a:srgbClr val="1D1B43"/>
-                          </a:solidFill>
-                          <a:latin typeface="Calibri"/>
-                        </a:rPr>
-                        <a:t>18</a:t>
-                      </a:r>
-                    </a:p>
-                  </a:txBody>
-                  <a:tcPr>
-                    <a:solidFill>
-                      <a:srgbClr val="FFFFFF"/>
-                    </a:solidFill>
-                  </a:tcPr>
-                </a:tc>
-                <a:tc>
-                  <a:txBody>
-                    <a:bodyPr/>
-                    <a:lstStyle/>
-                    <a:p>
-                      <a:pPr algn="l"/>
-                      <a:r>
-                        <a:rPr sz="1000" b="0">
-                          <a:solidFill>
-                            <a:srgbClr val="1D1B43"/>
-                          </a:solidFill>
-                          <a:latin typeface="Calibri"/>
-                        </a:rPr>
-                        <a:t>18</a:t>
+                        <a:t>BUNZL EQUIPAMENTOS P - CONTAGEM / MG</a:t>
+                      </a:r>
+                    </a:p>
+                  </a:txBody>
+                  <a:tcPr>
+                    <a:solidFill>
+                      <a:srgbClr val="FFFFFF"/>
+                    </a:solidFill>
+                  </a:tcPr>
+                </a:tc>
+                <a:tc>
+                  <a:txBody>
+                    <a:bodyPr/>
+                    <a:lstStyle/>
+                    <a:p>
+                      <a:pPr algn="l"/>
+                      <a:r>
+                        <a:rPr sz="1000" b="0">
+                          <a:solidFill>
+                            <a:srgbClr val="1D1B43"/>
+                          </a:solidFill>
+                          <a:latin typeface="Calibri"/>
+                        </a:rPr>
+                        <a:t>17</a:t>
+                      </a:r>
+                    </a:p>
+                  </a:txBody>
+                  <a:tcPr>
+                    <a:solidFill>
+                      <a:srgbClr val="FFFFFF"/>
+                    </a:solidFill>
+                  </a:tcPr>
+                </a:tc>
+                <a:tc>
+                  <a:txBody>
+                    <a:bodyPr/>
+                    <a:lstStyle/>
+                    <a:p>
+                      <a:pPr algn="l"/>
+                      <a:r>
+                        <a:rPr sz="1000" b="0">
+                          <a:solidFill>
+                            <a:srgbClr val="1D1B43"/>
+                          </a:solidFill>
+                          <a:latin typeface="Calibri"/>
+                        </a:rPr>
+                        <a:t>17</a:t>
                       </a:r>
                     </a:p>
                   </a:txBody>
@@ -9875,7 +12098,7 @@
                           </a:solidFill>
                           <a:latin typeface="Calibri"/>
                         </a:rPr>
-                        <a:t>BALASKA EQUIPE INDUS - GUARULHOS / SP</a:t>
+                        <a:t>CORSUL COMERCIO E RE - CASCAVEL / PR</a:t>
                       </a:r>
                     </a:p>
                   </a:txBody>
@@ -9921,76 +12144,76 @@
                           </a:solidFill>
                           <a:latin typeface="Calibri"/>
                         </a:rPr>
-                        <a:t>17</a:t>
-                      </a:r>
-                    </a:p>
-                  </a:txBody>
-                  <a:tcPr>
-                    <a:solidFill>
-                      <a:srgbClr val="F2F2F2"/>
-                    </a:solidFill>
-                  </a:tcPr>
-                </a:tc>
-                <a:tc>
-                  <a:txBody>
-                    <a:bodyPr/>
-                    <a:lstStyle/>
-                    <a:p>
-                      <a:pPr algn="l"/>
-                      <a:r>
-                        <a:rPr sz="1000" b="0">
-                          <a:solidFill>
-                            <a:srgbClr val="1D1B43"/>
-                          </a:solidFill>
-                          <a:latin typeface="Calibri"/>
-                        </a:rPr>
-                        <a:t>0</a:t>
-                      </a:r>
-                    </a:p>
-                  </a:txBody>
-                  <a:tcPr>
-                    <a:solidFill>
-                      <a:srgbClr val="F2F2F2"/>
-                    </a:solidFill>
-                  </a:tcPr>
-                </a:tc>
-                <a:tc>
-                  <a:txBody>
-                    <a:bodyPr/>
-                    <a:lstStyle/>
-                    <a:p>
-                      <a:pPr algn="l"/>
-                      <a:r>
-                        <a:rPr sz="1000" b="0">
-                          <a:solidFill>
-                            <a:srgbClr val="1D1B43"/>
-                          </a:solidFill>
-                          <a:latin typeface="Calibri"/>
-                        </a:rPr>
-                        <a:t>100.0%</a:t>
-                      </a:r>
-                    </a:p>
-                  </a:txBody>
-                  <a:tcPr>
-                    <a:solidFill>
-                      <a:srgbClr val="F2F2F2"/>
-                    </a:solidFill>
-                  </a:tcPr>
-                </a:tc>
-                <a:tc>
-                  <a:txBody>
-                    <a:bodyPr/>
-                    <a:lstStyle/>
-                    <a:p>
-                      <a:pPr algn="l"/>
-                      <a:r>
-                        <a:rPr sz="1000" b="0">
-                          <a:solidFill>
-                            <a:srgbClr val="1D1B43"/>
-                          </a:solidFill>
-                          <a:latin typeface="Calibri"/>
-                        </a:rPr>
-                        <a:t>Excelente</a:t>
+                        <a:t>13</a:t>
+                      </a:r>
+                    </a:p>
+                  </a:txBody>
+                  <a:tcPr>
+                    <a:solidFill>
+                      <a:srgbClr val="F2F2F2"/>
+                    </a:solidFill>
+                  </a:tcPr>
+                </a:tc>
+                <a:tc>
+                  <a:txBody>
+                    <a:bodyPr/>
+                    <a:lstStyle/>
+                    <a:p>
+                      <a:pPr algn="l"/>
+                      <a:r>
+                        <a:rPr sz="1000" b="0">
+                          <a:solidFill>
+                            <a:srgbClr val="1D1B43"/>
+                          </a:solidFill>
+                          <a:latin typeface="Calibri"/>
+                        </a:rPr>
+                        <a:t>4</a:t>
+                      </a:r>
+                    </a:p>
+                  </a:txBody>
+                  <a:tcPr>
+                    <a:solidFill>
+                      <a:srgbClr val="F2F2F2"/>
+                    </a:solidFill>
+                  </a:tcPr>
+                </a:tc>
+                <a:tc>
+                  <a:txBody>
+                    <a:bodyPr/>
+                    <a:lstStyle/>
+                    <a:p>
+                      <a:pPr algn="l"/>
+                      <a:r>
+                        <a:rPr sz="1000" b="0">
+                          <a:solidFill>
+                            <a:srgbClr val="1D1B43"/>
+                          </a:solidFill>
+                          <a:latin typeface="Calibri"/>
+                        </a:rPr>
+                        <a:t>76.5%</a:t>
+                      </a:r>
+                    </a:p>
+                  </a:txBody>
+                  <a:tcPr>
+                    <a:solidFill>
+                      <a:srgbClr val="F2F2F2"/>
+                    </a:solidFill>
+                  </a:tcPr>
+                </a:tc>
+                <a:tc>
+                  <a:txBody>
+                    <a:bodyPr/>
+                    <a:lstStyle/>
+                    <a:p>
+                      <a:pPr algn="l"/>
+                      <a:r>
+                        <a:rPr sz="1000" b="0">
+                          <a:solidFill>
+                            <a:srgbClr val="1D1B43"/>
+                          </a:solidFill>
+                          <a:latin typeface="Calibri"/>
+                        </a:rPr>
+                        <a:t>Atencao</a:t>
                       </a:r>
                     </a:p>
                   </a:txBody>
